--- a/slides/SoSE-Employment-DaaS-EaaS.pptx
+++ b/slides/SoSE-Employment-DaaS-EaaS.pptx
@@ -2978,7 +2978,7 @@
                 <a:ea typeface="Calibri" pitchFamily="34" charset="-122"/>
                 <a:cs typeface="Calibri" pitchFamily="34" charset="-120"/>
               </a:rPr>
-              <a:t>Gruppo di 3 studenti</a:t>
+              <a:t>Group of 3 students</a:t>
             </a:r>
             <a:endParaRPr lang="en-US" sz="1300" dirty="0"/>
           </a:p>
@@ -3074,7 +3074,7 @@
                 <a:ea typeface="Calibri" pitchFamily="34" charset="-122"/>
                 <a:cs typeface="Calibri" pitchFamily="34" charset="-120"/>
               </a:rPr>
-              <a:t>Sezione 2</a:t>
+              <a:t>Section 2</a:t>
             </a:r>
             <a:endParaRPr lang="en-US" sz="1300" dirty="0"/>
           </a:p>
@@ -3169,7 +3169,7 @@
                 <a:ea typeface="Calibri" pitchFamily="34" charset="-122"/>
                 <a:cs typeface="Calibri" pitchFamily="34" charset="-120"/>
               </a:rPr>
-              <a:t>Membro 2  ·  ~10-12 minuti</a:t>
+              <a:t>Member 2  ·  ~10-12 minutes</a:t>
             </a:r>
             <a:endParaRPr lang="en-US" sz="1200" dirty="0"/>
           </a:p>
@@ -3306,7 +3306,7 @@
                 <a:ea typeface="Trebuchet MS" pitchFamily="34" charset="-122"/>
                 <a:cs typeface="Trebuchet MS" pitchFamily="34" charset="-120"/>
               </a:rPr>
-              <a:t>EaaS — Workflow della valutazione</a:t>
+              <a:t>EaaS — Evaluation Workflow</a:t>
             </a:r>
             <a:endParaRPr lang="en-US" sz="2600" dirty="0"/>
           </a:p>
@@ -3528,7 +3528,7 @@
                 <a:ea typeface="Trebuchet MS" pitchFamily="34" charset="-122"/>
                 <a:cs typeface="Trebuchet MS" pitchFamily="34" charset="-120"/>
               </a:rPr>
-              <a:t>Richiesta strutturata</a:t>
+              <a:t>Structured Request</a:t>
             </a:r>
             <a:endParaRPr lang="en-US" sz="1200" dirty="0"/>
           </a:p>
@@ -3567,7 +3567,7 @@
                 <a:ea typeface="Calibri" pitchFamily="34" charset="-122"/>
                 <a:cs typeface="Calibri" pitchFamily="34" charset="-120"/>
               </a:rPr>
-              <a:t>Il client invia: action, candidateId, jobId,</a:t>
+              <a:t>The client sends: action, candidateId, jobId,</a:t>
             </a:r>
             <a:endParaRPr lang="en-US" sz="1000" dirty="0"/>
           </a:p>
@@ -3584,7 +3584,7 @@
                 <a:ea typeface="Calibri" pitchFamily="34" charset="-122"/>
                 <a:cs typeface="Calibri" pitchFamily="34" charset="-120"/>
               </a:rPr>
-              <a:t>requester, purpose, declaredRisk (ignorato)</a:t>
+              <a:t>requester, purpose, declaredRisk (ignored)</a:t>
             </a:r>
             <a:endParaRPr lang="en-US" sz="1000" dirty="0"/>
           </a:p>
@@ -3742,7 +3742,7 @@
                 <a:ea typeface="Trebuchet MS" pitchFamily="34" charset="-122"/>
                 <a:cs typeface="Trebuchet MS" pitchFamily="34" charset="-120"/>
               </a:rPr>
-              <a:t>Fetch dati canonici dal DaaS</a:t>
+              <a:t>Fetch Canonical Data from DaaS</a:t>
             </a:r>
             <a:endParaRPr lang="en-US" sz="1200" dirty="0"/>
           </a:p>
@@ -3781,7 +3781,7 @@
                 <a:ea typeface="Calibri" pitchFamily="34" charset="-122"/>
                 <a:cs typeface="Calibri" pitchFamily="34" charset="-120"/>
               </a:rPr>
-              <a:t>EaaS scarica candidato e offerta direttamente</a:t>
+              <a:t>EaaS fetches candidate and offer directly</a:t>
             </a:r>
             <a:endParaRPr lang="en-US" sz="1000" dirty="0"/>
           </a:p>
@@ -3798,7 +3798,7 @@
                 <a:ea typeface="Calibri" pitchFamily="34" charset="-122"/>
                 <a:cs typeface="Calibri" pitchFamily="34" charset="-120"/>
               </a:rPr>
-              <a:t>dal DaaS — mai fidarsi del chiamante</a:t>
+              <a:t>from DaaS — never trust the caller</a:t>
             </a:r>
             <a:endParaRPr lang="en-US" sz="1000" dirty="0"/>
           </a:p>
@@ -3995,7 +3995,7 @@
                 <a:ea typeface="Calibri" pitchFamily="34" charset="-122"/>
                 <a:cs typeface="Calibri" pitchFamily="34" charset="-120"/>
               </a:rPr>
-              <a:t>Ogni policy viene applicata ai dati reali.</a:t>
+              <a:t>Each policy is applied to the real data.</a:t>
             </a:r>
             <a:endParaRPr lang="en-US" sz="1000" dirty="0"/>
           </a:p>
@@ -4012,7 +4012,7 @@
                 <a:ea typeface="Calibri" pitchFamily="34" charset="-122"/>
                 <a:cs typeface="Calibri" pitchFamily="34" charset="-120"/>
               </a:rPr>
-              <a:t>Produce findings con severity e evidence</a:t>
+              <a:t>Produces findings with severity and evidence</a:t>
             </a:r>
             <a:endParaRPr lang="en-US" sz="1000" dirty="0"/>
           </a:p>
@@ -4209,7 +4209,7 @@
                 <a:ea typeface="Calibri" pitchFamily="34" charset="-122"/>
                 <a:cs typeface="Calibri" pitchFamily="34" charset="-120"/>
               </a:rPr>
-              <a:t>DecisionMaker aggrega i findings:</a:t>
+              <a:t>DecisionMaker aggregates findings:</a:t>
             </a:r>
             <a:endParaRPr lang="en-US" sz="1000" dirty="0"/>
           </a:p>
@@ -4226,7 +4226,7 @@
                 <a:ea typeface="Calibri" pitchFamily="34" charset="-122"/>
                 <a:cs typeface="Calibri" pitchFamily="34" charset="-120"/>
               </a:rPr>
-              <a:t>CRITICAL→REJECT, HIGH→ESCALATE, MEDIUM→REVISE, niente→PROCEED</a:t>
+              <a:t>CRITICAL→REJECT, HIGH→ESCALATE, MEDIUM→REVISE, none→PROCEED</a:t>
             </a:r>
             <a:endParaRPr lang="en-US" sz="1000" dirty="0"/>
           </a:p>
@@ -4361,7 +4361,7 @@
                 <a:ea typeface="Trebuchet MS" pitchFamily="34" charset="-122"/>
                 <a:cs typeface="Trebuchet MS" pitchFamily="34" charset="-120"/>
               </a:rPr>
-              <a:t>Audit e risposta</a:t>
+              <a:t>Audit and Response</a:t>
             </a:r>
             <a:endParaRPr lang="en-US" sz="1200" dirty="0"/>
           </a:p>
@@ -4400,7 +4400,7 @@
                 <a:ea typeface="Calibri" pitchFamily="34" charset="-122"/>
                 <a:cs typeface="Calibri" pitchFamily="34" charset="-120"/>
               </a:rPr>
-              <a:t>AuditRecord salvato su memoria e JSONL.</a:t>
+              <a:t>AuditRecord saved to memory and JSONL.</a:t>
             </a:r>
             <a:endParaRPr lang="en-US" sz="1000" dirty="0"/>
           </a:p>
@@ -4417,7 +4417,7 @@
                 <a:ea typeface="Calibri" pitchFamily="34" charset="-122"/>
                 <a:cs typeface="Calibri" pitchFamily="34" charset="-120"/>
               </a:rPr>
-              <a:t>Risposta completa con provenance e required actions</a:t>
+              <a:t>Full response with provenance and required actions</a:t>
             </a:r>
             <a:endParaRPr lang="en-US" sz="1000" dirty="0"/>
           </a:p>
@@ -4554,7 +4554,7 @@
                 <a:ea typeface="Trebuchet MS" pitchFamily="34" charset="-122"/>
                 <a:cs typeface="Trebuchet MS" pitchFamily="34" charset="-120"/>
               </a:rPr>
-              <a:t>EvaluationRequest — struttura</a:t>
+              <a:t>EvaluationRequest — Structure</a:t>
             </a:r>
             <a:endParaRPr lang="en-US" sz="2600" dirty="0"/>
           </a:p>
@@ -4797,7 +4797,7 @@
                 <a:ea typeface="Consolas" pitchFamily="34" charset="-122"/>
                 <a:cs typeface="Consolas" pitchFamily="34" charset="-120"/>
               </a:rPr>
-              <a:t>  // EaaS ignora questo campo!</a:t>
+              <a:t>  // EaaS ignores this field!</a:t>
             </a:r>
             <a:endParaRPr lang="en-US" sz="1100" dirty="0"/>
           </a:p>
@@ -4893,7 +4893,7 @@
                 <a:ea typeface="Calibri" pitchFamily="34" charset="-122"/>
                 <a:cs typeface="Calibri" pitchFamily="34" charset="-120"/>
               </a:rPr>
-              <a:t>Tipo di azione richiesta</a:t>
+              <a:t>Type of requested action</a:t>
             </a:r>
             <a:endParaRPr lang="en-US" sz="1000" dirty="0"/>
           </a:p>
@@ -4955,7 +4955,7 @@
                 <a:ea typeface="Calibri" pitchFamily="34" charset="-122"/>
                 <a:cs typeface="Calibri" pitchFamily="34" charset="-120"/>
               </a:rPr>
-              <a:t>IDs — EaaS li usa per scaricare</a:t>
+              <a:t>IDs — EaaS uses them to fetch</a:t>
             </a:r>
             <a:endParaRPr lang="en-US" sz="1000" dirty="0"/>
           </a:p>
@@ -4972,7 +4972,7 @@
                 <a:ea typeface="Calibri" pitchFamily="34" charset="-122"/>
                 <a:cs typeface="Calibri" pitchFamily="34" charset="-120"/>
               </a:rPr>
-              <a:t>i dati veri dal DaaS</a:t>
+              <a:t>the real data from DaaS</a:t>
             </a:r>
             <a:endParaRPr lang="en-US" sz="1000" dirty="0"/>
           </a:p>
@@ -5034,7 +5034,7 @@
                 <a:ea typeface="Calibri" pitchFamily="34" charset="-122"/>
                 <a:cs typeface="Calibri" pitchFamily="34" charset="-120"/>
               </a:rPr>
-              <a:t>Trasparenza: chi chiede e perché</a:t>
+              <a:t>Transparency: who requests and why</a:t>
             </a:r>
             <a:endParaRPr lang="en-US" sz="1000" dirty="0"/>
           </a:p>
@@ -5096,7 +5096,7 @@
                 <a:ea typeface="Calibri" pitchFamily="34" charset="-122"/>
                 <a:cs typeface="Calibri" pitchFamily="34" charset="-120"/>
               </a:rPr>
-              <a:t>⚠ Non trusted — l'EaaS</a:t>
+              <a:t>⚠ Not trusted — EaaS</a:t>
             </a:r>
             <a:endParaRPr lang="en-US" sz="1000" dirty="0"/>
           </a:p>
@@ -5113,7 +5113,7 @@
                 <a:ea typeface="Calibri" pitchFamily="34" charset="-122"/>
                 <a:cs typeface="Calibri" pitchFamily="34" charset="-120"/>
               </a:rPr>
-              <a:t>ricalcola il rischio autonomamente</a:t>
+              <a:t>recalculates risk autonomously</a:t>
             </a:r>
             <a:endParaRPr lang="en-US" sz="1000" dirty="0"/>
           </a:p>
@@ -5250,7 +5250,7 @@
                 <a:ea typeface="Trebuchet MS" pitchFamily="34" charset="-122"/>
                 <a:cs typeface="Trebuchet MS" pitchFamily="34" charset="-120"/>
               </a:rPr>
-              <a:t>Le 4 politiche etiche — file JSON esterni</a:t>
+              <a:t>The 4 Ethical Policies — External JSON Files</a:t>
             </a:r>
             <a:endParaRPr lang="en-US" sz="2600" dirty="0"/>
           </a:p>
@@ -5353,7 +5353,7 @@
                 <a:ea typeface="Calibri" pitchFamily="34" charset="-122"/>
                 <a:cs typeface="Calibri" pitchFamily="34" charset="-120"/>
               </a:rPr>
-              <a:t>Modificabili senza ricompilare · caricate all'avvio da policies/*.json</a:t>
+              <a:t>Editable without recompiling · loaded at startup from policies/*.json</a:t>
             </a:r>
             <a:endParaRPr lang="en-US" sz="1000" dirty="0"/>
           </a:p>
@@ -5527,7 +5527,7 @@
                 <a:ea typeface="Trebuchet MS" pitchFamily="34" charset="-122"/>
                 <a:cs typeface="Trebuchet MS" pitchFamily="34" charset="-120"/>
               </a:rPr>
-              <a:t>Proxy discriminatori</a:t>
+              <a:t>Discriminatory Proxies</a:t>
             </a:r>
             <a:endParaRPr lang="en-US" sz="1300" dirty="0"/>
           </a:p>
@@ -5566,7 +5566,7 @@
                 <a:ea typeface="Calibri" pitchFamily="34" charset="-122"/>
                 <a:cs typeface="Calibri" pitchFamily="34" charset="-120"/>
               </a:rPr>
-              <a:t>Vietati: ageRangeMin/Max, genderPreference, nationalityReq</a:t>
+              <a:t>Forbidden: ageRangeMin/Max, genderPreference, nationalityReq</a:t>
             </a:r>
             <a:endParaRPr lang="en-US" sz="1000" dirty="0"/>
           </a:p>
@@ -5583,7 +5583,7 @@
                 <a:ea typeface="Calibri" pitchFamily="34" charset="-122"/>
                 <a:cs typeface="Calibri" pitchFamily="34" charset="-120"/>
               </a:rPr>
-              <a:t>nelle offerte. Norma: D.Lgs. 198/2006, EU Dir. 2000/78/EC.</a:t>
+              <a:t>in offers. Regulation: D.Lgs. 198/2006, EU Dir. 2000/78/EC.</a:t>
             </a:r>
             <a:endParaRPr lang="en-US" sz="1000" dirty="0"/>
           </a:p>
@@ -5757,7 +5757,7 @@
                 <a:ea typeface="Trebuchet MS" pitchFamily="34" charset="-122"/>
                 <a:cs typeface="Trebuchet MS" pitchFamily="34" charset="-120"/>
               </a:rPr>
-              <a:t>Provenienza &amp; qualità dati</a:t>
+              <a:t>Provenance &amp; Data Quality</a:t>
             </a:r>
             <a:endParaRPr lang="en-US" sz="1300" dirty="0"/>
           </a:p>
@@ -5796,7 +5796,7 @@
                 <a:ea typeface="Calibri" pitchFamily="34" charset="-122"/>
                 <a:cs typeface="Calibri" pitchFamily="34" charset="-120"/>
               </a:rPr>
-              <a:t>Solo fonti fidate (company-portal, synthetic).</a:t>
+              <a:t>Only trusted sources (company-portal, synthetic).</a:t>
             </a:r>
             <a:endParaRPr lang="en-US" sz="1000" dirty="0"/>
           </a:p>
@@ -5813,7 +5813,7 @@
                 <a:ea typeface="Calibri" pitchFamily="34" charset="-122"/>
                 <a:cs typeface="Calibri" pitchFamily="34" charset="-120"/>
               </a:rPr>
-              <a:t>Se source = third-party-scraper / unknown → ESCALATE.</a:t>
+              <a:t>If source = third-party-scraper / unknown → ESCALATE.</a:t>
             </a:r>
             <a:endParaRPr lang="en-US" sz="1000" dirty="0"/>
           </a:p>
@@ -5987,7 +5987,7 @@
                 <a:ea typeface="Trebuchet MS" pitchFamily="34" charset="-122"/>
                 <a:cs typeface="Trebuchet MS" pitchFamily="34" charset="-120"/>
               </a:rPr>
-              <a:t>Accessibilità &amp; disabilità</a:t>
+              <a:t>Accessibility &amp; Disability</a:t>
             </a:r>
             <a:endParaRPr lang="en-US" sz="1300" dirty="0"/>
           </a:p>
@@ -6026,7 +6026,7 @@
                 <a:ea typeface="Calibri" pitchFamily="34" charset="-122"/>
                 <a:cs typeface="Calibri" pitchFamily="34" charset="-120"/>
               </a:rPr>
-              <a:t>Se il candidato ha disabilità, l'offerta deve essere</a:t>
+              <a:t>If the candidate has a disability, the offer must be</a:t>
             </a:r>
             <a:endParaRPr lang="en-US" sz="1000" dirty="0"/>
           </a:p>
@@ -6043,7 +6043,7 @@
                 <a:ea typeface="Calibri" pitchFamily="34" charset="-122"/>
                 <a:cs typeface="Calibri" pitchFamily="34" charset="-120"/>
               </a:rPr>
-              <a:t>flaggate disabilityFriendly. Altrimenti → REVISE.</a:t>
+              <a:t>flagged disabilityFriendly. Otherwise → REVISE.</a:t>
             </a:r>
             <a:endParaRPr lang="en-US" sz="1000" dirty="0"/>
           </a:p>
@@ -6060,7 +6060,7 @@
                 <a:ea typeface="Calibri" pitchFamily="34" charset="-122"/>
                 <a:cs typeface="Calibri" pitchFamily="34" charset="-120"/>
               </a:rPr>
-              <a:t>Norma: UN CRPD Art.27, L. 68/1999.</a:t>
+              <a:t>Regulation: UN CRPD Art.27, L. 68/1999.</a:t>
             </a:r>
             <a:endParaRPr lang="en-US" sz="1000" dirty="0"/>
           </a:p>
@@ -6234,7 +6234,7 @@
                 <a:ea typeface="Trebuchet MS" pitchFamily="34" charset="-122"/>
                 <a:cs typeface="Trebuchet MS" pitchFamily="34" charset="-120"/>
               </a:rPr>
-              <a:t>Trasparenza &amp; scopo</a:t>
+              <a:t>Transparency &amp; Purpose</a:t>
             </a:r>
             <a:endParaRPr lang="en-US" sz="1300" dirty="0"/>
           </a:p>
@@ -6273,7 +6273,7 @@
                 <a:ea typeface="Calibri" pitchFamily="34" charset="-122"/>
                 <a:cs typeface="Calibri" pitchFamily="34" charset="-120"/>
               </a:rPr>
-              <a:t>requester e purpose devono essere dichiarati.</a:t>
+              <a:t>requester and purpose must be declared.</a:t>
             </a:r>
             <a:endParaRPr lang="en-US" sz="1000" dirty="0"/>
           </a:p>
@@ -6290,7 +6290,7 @@
                 <a:ea typeface="Calibri" pitchFamily="34" charset="-122"/>
                 <a:cs typeface="Calibri" pitchFamily="34" charset="-120"/>
               </a:rPr>
-              <a:t>Senza di essi la raccomandazione non è trasparente.</a:t>
+              <a:t>Without them the recommendation is not transparent.</a:t>
             </a:r>
             <a:endParaRPr lang="en-US" sz="1000" dirty="0"/>
           </a:p>
@@ -6307,7 +6307,7 @@
                 <a:ea typeface="Calibri" pitchFamily="34" charset="-122"/>
                 <a:cs typeface="Calibri" pitchFamily="34" charset="-120"/>
               </a:rPr>
-              <a:t>Norma: GDPR Art.13/22.</a:t>
+              <a:t>Regulation: GDPR Art.13/22.</a:t>
             </a:r>
             <a:endParaRPr lang="en-US" sz="1000" dirty="0"/>
           </a:p>
@@ -6579,7 +6579,7 @@
                 <a:ea typeface="Trebuchet MS" pitchFamily="34" charset="-122"/>
                 <a:cs typeface="Trebuchet MS" pitchFamily="34" charset="-120"/>
               </a:rPr>
-              <a:t>Richiesta</a:t>
+              <a:t>Request</a:t>
             </a:r>
             <a:endParaRPr lang="en-US" sz="1100" dirty="0"/>
           </a:p>
@@ -6793,7 +6793,7 @@
                 <a:ea typeface="Trebuchet MS" pitchFamily="34" charset="-122"/>
                 <a:cs typeface="Trebuchet MS" pitchFamily="34" charset="-120"/>
               </a:rPr>
-              <a:t>Valutazione EaaS</a:t>
+              <a:t>EaaS Evaluation</a:t>
             </a:r>
             <a:endParaRPr lang="en-US" sz="1100" dirty="0"/>
           </a:p>
@@ -6832,7 +6832,7 @@
                 <a:ea typeface="Calibri" pitchFamily="34" charset="-122"/>
                 <a:cs typeface="Calibri" pitchFamily="34" charset="-120"/>
               </a:rPr>
-              <a:t>Nessuna policy violata — 4 policy valutate</a:t>
+              <a:t>No policy violated — 4 policies evaluated</a:t>
             </a:r>
             <a:endParaRPr lang="en-US" sz="1100" dirty="0"/>
           </a:p>
@@ -6967,7 +6967,7 @@
                 <a:ea typeface="Calibri" pitchFamily="34" charset="-122"/>
                 <a:cs typeface="Calibri" pitchFamily="34" charset="-120"/>
               </a:rPr>
-              <a:t>DECISIONE</a:t>
+              <a:t>DECISION</a:t>
             </a:r>
             <a:endParaRPr lang="en-US" sz="1100" dirty="0"/>
           </a:p>
@@ -7179,7 +7179,7 @@
                 <a:ea typeface="Calibri" pitchFamily="34" charset="-122"/>
                 <a:cs typeface="Calibri" pitchFamily="34" charset="-120"/>
               </a:rPr>
-              <a:t>Required actions: nessuna  ·  L'offerta può essere mostrata al candidato</a:t>
+              <a:t>Required actions: none  ·  The offer can be shown to the candidate</a:t>
             </a:r>
             <a:endParaRPr lang="en-US" sz="1100" dirty="0"/>
           </a:p>
@@ -7451,7 +7451,7 @@
                 <a:ea typeface="Trebuchet MS" pitchFamily="34" charset="-122"/>
                 <a:cs typeface="Trebuchet MS" pitchFamily="34" charset="-120"/>
               </a:rPr>
-              <a:t>Richiesta</a:t>
+              <a:t>Request</a:t>
             </a:r>
             <a:endParaRPr lang="en-US" sz="1100" dirty="0"/>
           </a:p>
@@ -7518,7 +7518,7 @@
                 <a:ea typeface="Calibri" pitchFamily="34" charset="-122"/>
                 <a:cs typeface="Calibri" pitchFamily="34" charset="-120"/>
               </a:rPr>
-              <a:t>  (Alice Bianchi, 28 anni)</a:t>
+              <a:t>  (Alice Bianchi, 28 years old)</a:t>
             </a:r>
             <a:endParaRPr lang="en-US" sz="1100" dirty="0"/>
           </a:p>
@@ -7942,7 +7942,7 @@
                 <a:ea typeface="Calibri" pitchFamily="34" charset="-122"/>
                 <a:cs typeface="Calibri" pitchFamily="34" charset="-120"/>
               </a:rPr>
-              <a:t>Source "third-party-scraper" non trusted</a:t>
+              <a:t>Source "third-party-scraper" not trusted</a:t>
             </a:r>
             <a:endParaRPr lang="en-US" sz="1000" dirty="0"/>
           </a:p>
@@ -8038,7 +8038,7 @@
                 <a:ea typeface="Calibri" pitchFamily="34" charset="-122"/>
                 <a:cs typeface="Calibri" pitchFamily="34" charset="-120"/>
               </a:rPr>
-              <a:t>DECISIONE</a:t>
+              <a:t>DECISION</a:t>
             </a:r>
             <a:endParaRPr lang="en-US" sz="1100" dirty="0"/>
           </a:p>
@@ -8195,7 +8195,7 @@
                 <a:ea typeface="Calibri" pitchFamily="34" charset="-122"/>
                 <a:cs typeface="Calibri" pitchFamily="34" charset="-120"/>
               </a:rPr>
-              <a:t>Nascondere l'offerta dalle raccomandazioni</a:t>
+              <a:t>Hide the offer from recommendations</a:t>
             </a:r>
             <a:endParaRPr lang="en-US" sz="1000" dirty="0"/>
           </a:p>
@@ -8213,7 +8213,7 @@
                 <a:ea typeface="Calibri" pitchFamily="34" charset="-122"/>
                 <a:cs typeface="Calibri" pitchFamily="34" charset="-120"/>
               </a:rPr>
-              <a:t>Notificare il responsabile del campo discriminatorio</a:t>
+              <a:t>Notify the responsible for the discriminatory field</a:t>
             </a:r>
             <a:endParaRPr lang="en-US" sz="1000" dirty="0"/>
           </a:p>
@@ -8231,7 +8231,7 @@
                 <a:ea typeface="Calibri" pitchFamily="34" charset="-122"/>
                 <a:cs typeface="Calibri" pitchFamily="34" charset="-120"/>
               </a:rPr>
-              <a:t>Escalate al compliance officer</a:t>
+              <a:t>Escalate to compliance officer</a:t>
             </a:r>
             <a:endParaRPr lang="en-US" sz="1000" dirty="0"/>
           </a:p>
@@ -8327,7 +8327,7 @@
                 <a:ea typeface="Calibri" pitchFamily="34" charset="-122"/>
                 <a:cs typeface="Calibri" pitchFamily="34" charset="-120"/>
               </a:rPr>
-              <a:t>Sezione 3</a:t>
+              <a:t>Section 3</a:t>
             </a:r>
             <a:endParaRPr lang="en-US" sz="1300" dirty="0"/>
           </a:p>
@@ -8366,7 +8366,7 @@
                 <a:ea typeface="Trebuchet MS" pitchFamily="34" charset="-122"/>
                 <a:cs typeface="Trebuchet MS" pitchFamily="34" charset="-120"/>
               </a:rPr>
-              <a:t>Audit, Integrazione</a:t>
+              <a:t>Audit, Integration</a:t>
             </a:r>
             <a:endParaRPr lang="en-US" sz="4000" dirty="0"/>
           </a:p>
@@ -8383,7 +8383,7 @@
                 <a:ea typeface="Trebuchet MS" pitchFamily="34" charset="-122"/>
                 <a:cs typeface="Trebuchet MS" pitchFamily="34" charset="-120"/>
               </a:rPr>
-              <a:t>e Riflessione</a:t>
+              <a:t>and Reflection</a:t>
             </a:r>
             <a:endParaRPr lang="en-US" sz="4000" dirty="0"/>
           </a:p>
@@ -8422,7 +8422,7 @@
                 <a:ea typeface="Calibri" pitchFamily="34" charset="-122"/>
                 <a:cs typeface="Calibri" pitchFamily="34" charset="-120"/>
               </a:rPr>
-              <a:t>Membro 3  ·  ~10-12 minuti</a:t>
+              <a:t>Member 3  ·  ~10-12 minutes</a:t>
             </a:r>
             <a:endParaRPr lang="en-US" sz="1200" dirty="0"/>
           </a:p>
@@ -8559,7 +8559,7 @@
                 <a:ea typeface="Trebuchet MS" pitchFamily="34" charset="-122"/>
                 <a:cs typeface="Trebuchet MS" pitchFamily="34" charset="-120"/>
               </a:rPr>
-              <a:t>Audit Trail &amp; Provenienza</a:t>
+              <a:t>Audit Trail &amp; Provenance</a:t>
             </a:r>
             <a:endParaRPr lang="en-US" sz="2600" dirty="0"/>
           </a:p>
@@ -8994,7 +8994,7 @@
                 <a:ea typeface="Calibri" pitchFamily="34" charset="-122"/>
                 <a:cs typeface="Calibri" pitchFamily="34" charset="-120"/>
               </a:rPr>
-              <a:t>UUID univoco per ogni valutazione</a:t>
+              <a:t>Unique UUID per evaluation</a:t>
             </a:r>
             <a:endParaRPr lang="en-US" sz="1000" dirty="0"/>
           </a:p>
@@ -9118,7 +9118,7 @@
                 <a:ea typeface="Calibri" pitchFamily="34" charset="-122"/>
                 <a:cs typeface="Calibri" pitchFamily="34" charset="-120"/>
               </a:rPr>
-              <a:t>Richiesta originale (snapshot)</a:t>
+              <a:t>Original request (snapshot)</a:t>
             </a:r>
             <a:endParaRPr lang="en-US" sz="1000" dirty="0"/>
           </a:p>
@@ -9180,7 +9180,7 @@
                 <a:ea typeface="Calibri" pitchFamily="34" charset="-122"/>
                 <a:cs typeface="Calibri" pitchFamily="34" charset="-120"/>
               </a:rPr>
-              <a:t>Dati reali scaricati dal DaaS</a:t>
+              <a:t>Real data fetched from DaaS</a:t>
             </a:r>
             <a:endParaRPr lang="en-US" sz="1000" dirty="0"/>
           </a:p>
@@ -9197,7 +9197,7 @@
                 <a:ea typeface="Calibri" pitchFamily="34" charset="-122"/>
                 <a:cs typeface="Calibri" pitchFamily="34" charset="-120"/>
               </a:rPr>
-              <a:t>→ provenienza tracciata</a:t>
+              <a:t>→ provenance tracked</a:t>
             </a:r>
             <a:endParaRPr lang="en-US" sz="1000" dirty="0"/>
           </a:p>
@@ -9259,7 +9259,7 @@
                 <a:ea typeface="Calibri" pitchFamily="34" charset="-122"/>
                 <a:cs typeface="Calibri" pitchFamily="34" charset="-120"/>
               </a:rPr>
-              <a:t>Decisione finale</a:t>
+              <a:t>Final decision</a:t>
             </a:r>
             <a:endParaRPr lang="en-US" sz="1000" dirty="0"/>
           </a:p>
@@ -9321,7 +9321,7 @@
                 <a:ea typeface="Calibri" pitchFamily="34" charset="-122"/>
                 <a:cs typeface="Calibri" pitchFamily="34" charset="-120"/>
               </a:rPr>
-              <a:t>Tutte le policy valutate</a:t>
+              <a:t>All policies evaluated</a:t>
             </a:r>
             <a:endParaRPr lang="en-US" sz="1000" dirty="0"/>
           </a:p>
@@ -9338,7 +9338,7 @@
                 <a:ea typeface="Calibri" pitchFamily="34" charset="-122"/>
                 <a:cs typeface="Calibri" pitchFamily="34" charset="-120"/>
               </a:rPr>
-              <a:t>(anche quelle non violate)</a:t>
+              <a:t>(including those not violated)</a:t>
             </a:r>
             <a:endParaRPr lang="en-US" sz="1000" dirty="0"/>
           </a:p>
@@ -9377,7 +9377,7 @@
                 <a:ea typeface="Calibri" pitchFamily="34" charset="-122"/>
                 <a:cs typeface="Calibri" pitchFamily="34" charset="-120"/>
               </a:rPr>
-              <a:t>Persistenza: in-memory (sessione) + JSONL append-only su disco</a:t>
+              <a:t>Persistence: in-memory (session) + append-only JSONL on disk</a:t>
             </a:r>
             <a:endParaRPr lang="en-US" sz="1000" dirty="0"/>
           </a:p>
@@ -9475,7 +9475,7 @@
                 <a:ea typeface="Calibri" pitchFamily="34" charset="-122"/>
                 <a:cs typeface="Calibri" pitchFamily="34" charset="-120"/>
               </a:rPr>
-              <a:t>INTEGRAZIONE</a:t>
+              <a:t>INTEGRATION</a:t>
             </a:r>
             <a:endParaRPr lang="en-US" sz="800" dirty="0"/>
           </a:p>
@@ -9514,7 +9514,7 @@
                 <a:ea typeface="Trebuchet MS" pitchFamily="34" charset="-122"/>
                 <a:cs typeface="Trebuchet MS" pitchFamily="34" charset="-120"/>
               </a:rPr>
-              <a:t>Flusso completo DaaS ↔ EaaS</a:t>
+              <a:t>Full DaaS ↔ EaaS Flow</a:t>
             </a:r>
             <a:endParaRPr lang="en-US" sz="2600" dirty="0"/>
           </a:p>
@@ -9642,7 +9642,7 @@
                 <a:ea typeface="Calibri" pitchFamily="34" charset="-122"/>
                 <a:cs typeface="Calibri" pitchFamily="34" charset="-120"/>
               </a:rPr>
-              <a:t>UTENTE</a:t>
+              <a:t>USER</a:t>
             </a:r>
             <a:endParaRPr lang="en-US" sz="900" dirty="0"/>
           </a:p>
@@ -9706,7 +9706,7 @@
                 <a:ea typeface="Calibri" pitchFamily="34" charset="-122"/>
                 <a:cs typeface="Calibri" pitchFamily="34" charset="-120"/>
               </a:rPr>
-              <a:t>Seleziona candidato nel browser</a:t>
+              <a:t>Selects candidate in browser</a:t>
             </a:r>
             <a:endParaRPr lang="en-US" sz="1100" dirty="0"/>
           </a:p>
@@ -10008,7 +10008,7 @@
                 <a:ea typeface="Calibri" pitchFamily="34" charset="-122"/>
                 <a:cs typeface="Calibri" pitchFamily="34" charset="-120"/>
               </a:rPr>
-              <a:t>SPARQL multi-condizione → lista di MatchDTO</a:t>
+              <a:t>Multi-condition SPARQL → list of MatchDTOs</a:t>
             </a:r>
             <a:endParaRPr lang="en-US" sz="1100" dirty="0"/>
           </a:p>
@@ -10159,7 +10159,7 @@
                 <a:ea typeface="Calibri" pitchFamily="34" charset="-122"/>
                 <a:cs typeface="Calibri" pitchFamily="34" charset="-120"/>
               </a:rPr>
-              <a:t>Mostra lista · Utente clicca 'Evalua'</a:t>
+              <a:t>Shows list · User clicks 'Evaluate'</a:t>
             </a:r>
             <a:endParaRPr lang="en-US" sz="1100" dirty="0"/>
           </a:p>
@@ -10914,7 +10914,7 @@
                 <a:ea typeface="Calibri" pitchFamily="34" charset="-122"/>
                 <a:cs typeface="Calibri" pitchFamily="34" charset="-120"/>
               </a:rPr>
-              <a:t>Visualizza: decisione, findings, audit link</a:t>
+              <a:t>Displays: decision, findings, audit link</a:t>
             </a:r>
             <a:endParaRPr lang="en-US" sz="1100" dirty="0"/>
           </a:p>
@@ -11052,7 +11052,7 @@
                 <a:ea typeface="Calibri" pitchFamily="34" charset="-122"/>
                 <a:cs typeface="Calibri" pitchFamily="34" charset="-120"/>
               </a:rPr>
-              <a:t>1  Avvia DaaS (:8081) · EaaS (:8082) · Client (:8080)</a:t>
+              <a:t>1  Start DaaS (:8081) · EaaS (:8082) · Client (:8080)</a:t>
             </a:r>
             <a:endParaRPr lang="en-US" sz="1300" dirty="0"/>
           </a:p>
@@ -11072,7 +11072,7 @@
                 <a:ea typeface="Calibri" pitchFamily="34" charset="-122"/>
                 <a:cs typeface="Calibri" pitchFamily="34" charset="-120"/>
               </a:rPr>
-              <a:t>2  Seleziona cand-001 (Alice Bianchi) → vedi match</a:t>
+              <a:t>2  Select cand-001 (Alice Bianchi) → view matches</a:t>
             </a:r>
             <a:endParaRPr lang="en-US" sz="1300" dirty="0"/>
           </a:p>
@@ -11092,7 +11092,7 @@
                 <a:ea typeface="Calibri" pitchFamily="34" charset="-122"/>
                 <a:cs typeface="Calibri" pitchFamily="34" charset="-120"/>
               </a:rPr>
-              <a:t>3  Evalua job-001 → PROCEED</a:t>
+              <a:t>3  Evaluate job-001 → PROCEED</a:t>
             </a:r>
             <a:endParaRPr lang="en-US" sz="1300" dirty="0"/>
           </a:p>
@@ -11112,7 +11112,7 @@
                 <a:ea typeface="Calibri" pitchFamily="34" charset="-122"/>
                 <a:cs typeface="Calibri" pitchFamily="34" charset="-120"/>
               </a:rPr>
-              <a:t>4  Evalua job-003 → REJECT  (ageRangeMax + scraper)</a:t>
+              <a:t>4  Evaluate job-003 → REJECT  (ageRangeMax + scraper)</a:t>
             </a:r>
             <a:endParaRPr lang="en-US" sz="1300" dirty="0"/>
           </a:p>
@@ -11132,7 +11132,7 @@
                 <a:ea typeface="Calibri" pitchFamily="34" charset="-122"/>
                 <a:cs typeface="Calibri" pitchFamily="34" charset="-120"/>
               </a:rPr>
-              <a:t>5  Apri /audit → verifica JSONL on disk</a:t>
+              <a:t>5  Open /audit → verify JSONL on disk</a:t>
             </a:r>
             <a:endParaRPr lang="en-US" sz="1300" dirty="0"/>
           </a:p>
@@ -11152,7 +11152,7 @@
                 <a:ea typeface="Calibri" pitchFamily="34" charset="-122"/>
                 <a:cs typeface="Calibri" pitchFamily="34" charset="-120"/>
               </a:rPr>
-              <a:t>6  Modifica una policy JSON → riavvia EaaS → rivedi</a:t>
+              <a:t>6  Edit a JSON policy → restart EaaS → review</a:t>
             </a:r>
             <a:endParaRPr lang="en-US" sz="1300" dirty="0"/>
           </a:p>
@@ -11344,7 +11344,7 @@
                 <a:ea typeface="Calibri" pitchFamily="34" charset="-122"/>
                 <a:cs typeface="Calibri" pitchFamily="34" charset="-120"/>
               </a:rPr>
-              <a:t>Membro 1</a:t>
+              <a:t>Member 1</a:t>
             </a:r>
             <a:endParaRPr lang="en-US" sz="1200" dirty="0"/>
           </a:p>
@@ -11384,7 +11384,7 @@
                 <a:ea typeface="Calibri" pitchFamily="34" charset="-122"/>
                 <a:cs typeface="Calibri" pitchFamily="34" charset="-120"/>
               </a:rPr>
-              <a:t>Dominio &amp; Motivazione</a:t>
+              <a:t>Domain &amp; Motivation</a:t>
             </a:r>
             <a:endParaRPr lang="en-US" sz="1100" dirty="0"/>
           </a:p>
@@ -11402,7 +11402,7 @@
                 <a:ea typeface="Calibri" pitchFamily="34" charset="-122"/>
                 <a:cs typeface="Calibri" pitchFamily="34" charset="-120"/>
               </a:rPr>
-              <a:t>Architettura Applicazione</a:t>
+              <a:t>Application Architecture</a:t>
             </a:r>
             <a:endParaRPr lang="en-US" sz="1100" dirty="0"/>
           </a:p>
@@ -11420,7 +11420,7 @@
                 <a:ea typeface="Calibri" pitchFamily="34" charset="-122"/>
                 <a:cs typeface="Calibri" pitchFamily="34" charset="-120"/>
               </a:rPr>
-              <a:t>Dataset RDF &amp; Ontologia</a:t>
+              <a:t>RDF Dataset &amp; Ontology</a:t>
             </a:r>
             <a:endParaRPr lang="en-US" sz="1100" dirty="0"/>
           </a:p>
@@ -11438,7 +11438,7 @@
                 <a:ea typeface="Calibri" pitchFamily="34" charset="-122"/>
                 <a:cs typeface="Calibri" pitchFamily="34" charset="-120"/>
               </a:rPr>
-              <a:t>Query SPARQL</a:t>
+              <a:t>SPARQL Queries</a:t>
             </a:r>
             <a:endParaRPr lang="en-US" sz="1100" dirty="0"/>
           </a:p>
@@ -11456,7 +11456,7 @@
                 <a:ea typeface="Calibri" pitchFamily="34" charset="-122"/>
                 <a:cs typeface="Calibri" pitchFamily="34" charset="-120"/>
               </a:rPr>
-              <a:t>API REST DaaS</a:t>
+              <a:t>DaaS REST APIs</a:t>
             </a:r>
             <a:endParaRPr lang="en-US" sz="1100" dirty="0"/>
           </a:p>
@@ -11552,7 +11552,7 @@
                 <a:ea typeface="Calibri" pitchFamily="34" charset="-122"/>
                 <a:cs typeface="Calibri" pitchFamily="34" charset="-120"/>
               </a:rPr>
-              <a:t>Membro 2</a:t>
+              <a:t>Member 2</a:t>
             </a:r>
             <a:endParaRPr lang="en-US" sz="1200" dirty="0"/>
           </a:p>
@@ -11592,7 +11592,7 @@
                 <a:ea typeface="Calibri" pitchFamily="34" charset="-122"/>
                 <a:cs typeface="Calibri" pitchFamily="34" charset="-120"/>
               </a:rPr>
-              <a:t>EaaS – Workflow &amp; Architettura</a:t>
+              <a:t>EaaS – Workflow &amp; Architecture</a:t>
             </a:r>
             <a:endParaRPr lang="en-US" sz="1100" dirty="0"/>
           </a:p>
@@ -11610,7 +11610,7 @@
                 <a:ea typeface="Calibri" pitchFamily="34" charset="-122"/>
                 <a:cs typeface="Calibri" pitchFamily="34" charset="-120"/>
               </a:rPr>
-              <a:t>Politiche Etiche (4 policies)</a:t>
+              <a:t>Ethical Policies (4 policies)</a:t>
             </a:r>
             <a:endParaRPr lang="en-US" sz="1100" dirty="0"/>
           </a:p>
@@ -11742,7 +11742,7 @@
                 <a:ea typeface="Calibri" pitchFamily="34" charset="-122"/>
                 <a:cs typeface="Calibri" pitchFamily="34" charset="-120"/>
               </a:rPr>
-              <a:t>Membro 3</a:t>
+              <a:t>Member 3</a:t>
             </a:r>
             <a:endParaRPr lang="en-US" sz="1200" dirty="0"/>
           </a:p>
@@ -11782,7 +11782,7 @@
                 <a:ea typeface="Calibri" pitchFamily="34" charset="-122"/>
                 <a:cs typeface="Calibri" pitchFamily="34" charset="-120"/>
               </a:rPr>
-              <a:t>Audit Trail &amp; Provenienza</a:t>
+              <a:t>Audit Trail &amp; Provenance</a:t>
             </a:r>
             <a:endParaRPr lang="en-US" sz="1100" dirty="0"/>
           </a:p>
@@ -11800,7 +11800,7 @@
                 <a:ea typeface="Calibri" pitchFamily="34" charset="-122"/>
                 <a:cs typeface="Calibri" pitchFamily="34" charset="-120"/>
               </a:rPr>
-              <a:t>Integrazione DaaS ↔ EaaS</a:t>
+              <a:t>DaaS ↔ EaaS Integration</a:t>
             </a:r>
             <a:endParaRPr lang="en-US" sz="1100" dirty="0"/>
           </a:p>
@@ -11836,7 +11836,7 @@
                 <a:ea typeface="Calibri" pitchFamily="34" charset="-122"/>
                 <a:cs typeface="Calibri" pitchFamily="34" charset="-120"/>
               </a:rPr>
-              <a:t>Riflessione Critica</a:t>
+              <a:t>Critical Reflection</a:t>
             </a:r>
             <a:endParaRPr lang="en-US" sz="1100" dirty="0"/>
           </a:p>
@@ -11875,7 +11875,7 @@
                 <a:ea typeface="Calibri" pitchFamily="34" charset="-122"/>
                 <a:cs typeface="Calibri" pitchFamily="34" charset="-120"/>
               </a:rPr>
-              <a:t>~10-12 min a testa  ·  30-36 min totali</a:t>
+              <a:t>~10-12 min each  ·  30-36 min total</a:t>
             </a:r>
             <a:endParaRPr lang="en-US" sz="1000" dirty="0"/>
           </a:p>
@@ -11973,7 +11973,7 @@
                 <a:ea typeface="Calibri" pitchFamily="34" charset="-122"/>
                 <a:cs typeface="Calibri" pitchFamily="34" charset="-120"/>
               </a:rPr>
-              <a:t>RIFLESSIONE CRITICA</a:t>
+              <a:t>CRITICAL REFLECTION</a:t>
             </a:r>
             <a:endParaRPr lang="en-US" sz="800" dirty="0"/>
           </a:p>
@@ -12012,7 +12012,7 @@
                 <a:ea typeface="Trebuchet MS" pitchFamily="34" charset="-122"/>
                 <a:cs typeface="Trebuchet MS" pitchFamily="34" charset="-120"/>
               </a:rPr>
-              <a:t>Limiti del sistema</a:t>
+              <a:t>System Limitations</a:t>
             </a:r>
             <a:endParaRPr lang="en-US" sz="2600" dirty="0"/>
           </a:p>
@@ -12172,7 +12172,7 @@
                 <a:ea typeface="Trebuchet MS" pitchFamily="34" charset="-122"/>
                 <a:cs typeface="Trebuchet MS" pitchFamily="34" charset="-120"/>
               </a:rPr>
-              <a:t>Proxy indiretti non rilevati</a:t>
+              <a:t>Indirect proxies not detected</a:t>
             </a:r>
             <a:endParaRPr lang="en-US" sz="1200" dirty="0"/>
           </a:p>
@@ -12211,7 +12211,7 @@
                 <a:ea typeface="Calibri" pitchFamily="34" charset="-122"/>
                 <a:cs typeface="Calibri" pitchFamily="34" charset="-120"/>
               </a:rPr>
-              <a:t>Il sistema controlla campi espliciti (età, genere, nazionalità). Proxy sottili come CAP, università di laurea o nome non vengono intercettati.</a:t>
+              <a:t>The system checks explicit fields (age, gender, nationality). Subtle proxies like postcode, university, or name are not intercepted.</a:t>
             </a:r>
             <a:endParaRPr lang="en-US" sz="1100" dirty="0"/>
           </a:p>
@@ -12307,7 +12307,7 @@
                 <a:ea typeface="Trebuchet MS" pitchFamily="34" charset="-122"/>
                 <a:cs typeface="Trebuchet MS" pitchFamily="34" charset="-120"/>
               </a:rPr>
-              <a:t>Dataset sintetico</a:t>
+              <a:t>Synthetic dataset</a:t>
             </a:r>
             <a:endParaRPr lang="en-US" sz="1200" dirty="0"/>
           </a:p>
@@ -12346,7 +12346,7 @@
                 <a:ea typeface="Calibri" pitchFamily="34" charset="-122"/>
                 <a:cs typeface="Calibri" pitchFamily="34" charset="-120"/>
               </a:rPr>
-              <a:t>I dati sono generati artificialmente. In produzione servirebbe gestione del consenso GDPR, cifratura, e diritto alla spiegazione.</a:t>
+              <a:t>Data is artificially generated. In production, GDPR consent management, encryption, and right-to-explanation flows would be required.</a:t>
             </a:r>
             <a:endParaRPr lang="en-US" sz="1100" dirty="0"/>
           </a:p>
@@ -12442,7 +12442,7 @@
                 <a:ea typeface="Trebuchet MS" pitchFamily="34" charset="-122"/>
                 <a:cs typeface="Trebuchet MS" pitchFamily="34" charset="-120"/>
               </a:rPr>
-              <a:t>Policy scritte in Java</a:t>
+              <a:t>Policies written in Java</a:t>
             </a:r>
             <a:endParaRPr lang="en-US" sz="1200" dirty="0"/>
           </a:p>
@@ -12481,7 +12481,7 @@
                 <a:ea typeface="Calibri" pitchFamily="34" charset="-122"/>
                 <a:cs typeface="Calibri" pitchFamily="34" charset="-120"/>
               </a:rPr>
-              <a:t>Le regole in JSON dichiarano severity e parametri, ma la logica è codice Java. Modificare il comportamento richiede un developer.</a:t>
+              <a:t>JSON rules declare severity and parameters, but the logic is Java code. Changing behavior requires a developer.</a:t>
             </a:r>
             <a:endParaRPr lang="en-US" sz="1100" dirty="0"/>
           </a:p>
@@ -12577,7 +12577,7 @@
                 <a:ea typeface="Trebuchet MS" pitchFamily="34" charset="-122"/>
                 <a:cs typeface="Trebuchet MS" pitchFamily="34" charset="-120"/>
               </a:rPr>
-              <a:t>Nessuna metrica di fairness aggregata</a:t>
+              <a:t>No aggregate fairness metrics</a:t>
             </a:r>
             <a:endParaRPr lang="en-US" sz="1200" dirty="0"/>
           </a:p>
@@ -12616,7 +12616,7 @@
                 <a:ea typeface="Calibri" pitchFamily="34" charset="-122"/>
                 <a:cs typeface="Calibri" pitchFamily="34" charset="-120"/>
               </a:rPr>
-              <a:t>Si controlla ogni singola offerta, ma non si misurano disparità sistematiche tra gruppi di candidati nel tempo.</a:t>
+              <a:t>Each offer is checked individually, but no systematic disparities across candidate groups are measured over time.</a:t>
             </a:r>
             <a:endParaRPr lang="en-US" sz="1100" dirty="0"/>
           </a:p>
@@ -12714,7 +12714,7 @@
                 <a:ea typeface="Calibri" pitchFamily="34" charset="-122"/>
                 <a:cs typeface="Calibri" pitchFamily="34" charset="-120"/>
               </a:rPr>
-              <a:t>RIFLESSIONE CRITICA</a:t>
+              <a:t>CRITICAL REFLECTION</a:t>
             </a:r>
             <a:endParaRPr lang="en-US" sz="800" dirty="0"/>
           </a:p>
@@ -12753,7 +12753,7 @@
                 <a:ea typeface="Trebuchet MS" pitchFamily="34" charset="-122"/>
                 <a:cs typeface="Trebuchet MS" pitchFamily="34" charset="-120"/>
               </a:rPr>
-              <a:t>Cosa NON dovrebbe essere deciso automaticamente</a:t>
+              <a:t>What Should NOT Be Decided Automatically</a:t>
             </a:r>
             <a:endParaRPr lang="en-US" sz="2600" dirty="0"/>
           </a:p>
@@ -12920,7 +12920,7 @@
                 <a:ea typeface="Trebuchet MS" pitchFamily="34" charset="-122"/>
                 <a:cs typeface="Trebuchet MS" pitchFamily="34" charset="-120"/>
               </a:rPr>
-              <a:t>La selezione finale del candidato</a:t>
+              <a:t>Final candidate selection</a:t>
             </a:r>
             <a:endParaRPr lang="en-US" sz="1300" dirty="0"/>
           </a:p>
@@ -12959,7 +12959,7 @@
                 <a:ea typeface="Calibri" pitchFamily="34" charset="-122"/>
                 <a:cs typeface="Calibri" pitchFamily="34" charset="-120"/>
               </a:rPr>
-              <a:t>Il sistema raccomanda e valuta eticamente, ma la decisione di assunzione deve sempre essere umana.</a:t>
+              <a:t>The system recommends and evaluates ethically, but the hiring decision must always be made by a human.</a:t>
             </a:r>
             <a:endParaRPr lang="en-US" sz="1100" dirty="0"/>
           </a:p>
@@ -13085,7 +13085,7 @@
                 <a:ea typeface="Trebuchet MS" pitchFamily="34" charset="-122"/>
                 <a:cs typeface="Trebuchet MS" pitchFamily="34" charset="-120"/>
               </a:rPr>
-              <a:t>L'esclusione permanente di un'offerta</a:t>
+              <a:t>Permanent exclusion of an offer</a:t>
             </a:r>
             <a:endParaRPr lang="en-US" sz="1300" dirty="0"/>
           </a:p>
@@ -13124,7 +13124,7 @@
                 <a:ea typeface="Calibri" pitchFamily="34" charset="-122"/>
                 <a:cs typeface="Calibri" pitchFamily="34" charset="-120"/>
               </a:rPr>
-              <a:t>REJECT blocca la raccomandazione, non l'offerta dal sistema. Serve revisione umana prima di rimuoverla definitivamente.</a:t>
+              <a:t>REJECT blocks the recommendation, not the offer from the system. Human review is required before permanently removing it.</a:t>
             </a:r>
             <a:endParaRPr lang="en-US" sz="1100" dirty="0"/>
           </a:p>
@@ -13250,7 +13250,7 @@
                 <a:ea typeface="Trebuchet MS" pitchFamily="34" charset="-122"/>
                 <a:cs typeface="Trebuchet MS" pitchFamily="34" charset="-120"/>
               </a:rPr>
-              <a:t>Interpretare contesti giuridici complessi</a:t>
+              <a:t>Interpreting complex legal contexts</a:t>
             </a:r>
             <a:endParaRPr lang="en-US" sz="1300" dirty="0"/>
           </a:p>
@@ -13289,7 +13289,7 @@
                 <a:ea typeface="Calibri" pitchFamily="34" charset="-122"/>
                 <a:cs typeface="Calibri" pitchFamily="34" charset="-120"/>
               </a:rPr>
-              <a:t>Una nationalityReq può essere legale (es. requisiti di sicurezza nazionale). L'EaaS non ha contesto: ESCALATE → umano.</a:t>
+              <a:t>A nationalityReq may be legal (e.g. national security requirements). EaaS lacks context: ESCALATE → human.</a:t>
             </a:r>
             <a:endParaRPr lang="en-US" sz="1100" dirty="0"/>
           </a:p>
@@ -13415,7 +13415,7 @@
                 <a:ea typeface="Trebuchet MS" pitchFamily="34" charset="-122"/>
                 <a:cs typeface="Trebuchet MS" pitchFamily="34" charset="-120"/>
               </a:rPr>
-              <a:t>Valutare capacità e soft skills</a:t>
+              <a:t>Evaluating capabilities and soft skills</a:t>
             </a:r>
             <a:endParaRPr lang="en-US" sz="1300" dirty="0"/>
           </a:p>
@@ -13454,7 +13454,7 @@
                 <a:ea typeface="Calibri" pitchFamily="34" charset="-122"/>
                 <a:cs typeface="Calibri" pitchFamily="34" charset="-120"/>
               </a:rPr>
-              <a:t>Il dataset ha anni di esperienza e skill tecniche. La motivazione, la comunicazione, la cultura aziendale restano fuori.</a:t>
+              <a:t>The dataset captures years of experience and technical skills. Motivation, communication, and company culture remain outside the model.</a:t>
             </a:r>
             <a:endParaRPr lang="en-US" sz="1100" dirty="0"/>
           </a:p>
@@ -13550,7 +13550,7 @@
                 <a:ea typeface="Calibri" pitchFamily="34" charset="-122"/>
                 <a:cs typeface="Calibri" pitchFamily="34" charset="-120"/>
               </a:rPr>
-              <a:t>Conclusioni</a:t>
+              <a:t>Conclusions</a:t>
             </a:r>
             <a:endParaRPr lang="en-US" sz="1400" dirty="0"/>
           </a:p>
@@ -13589,7 +13589,7 @@
                 <a:ea typeface="Trebuchet MS" pitchFamily="34" charset="-122"/>
                 <a:cs typeface="Trebuchet MS" pitchFamily="34" charset="-120"/>
               </a:rPr>
-              <a:t>Dati + Etica + Architettura</a:t>
+              <a:t>Data + Ethics + Architecture</a:t>
             </a:r>
             <a:endParaRPr lang="en-US" sz="3600" dirty="0"/>
           </a:p>
@@ -13606,7 +13606,7 @@
                 <a:ea typeface="Trebuchet MS" pitchFamily="34" charset="-122"/>
                 <a:cs typeface="Trebuchet MS" pitchFamily="34" charset="-120"/>
               </a:rPr>
-              <a:t>come sistema unico</a:t>
+              <a:t>as a unified system</a:t>
             </a:r>
             <a:endParaRPr lang="en-US" sz="3600" dirty="0"/>
           </a:p>
@@ -13709,7 +13709,7 @@
                 <a:ea typeface="Calibri" pitchFamily="34" charset="-122"/>
                 <a:cs typeface="Calibri" pitchFamily="34" charset="-120"/>
               </a:rPr>
-              <a:t>635 triple RDF/XML · 8 endpoint REST · SPARQL multi-condizione</a:t>
+              <a:t>635 RDF/XML triples · 8 REST endpoints · multi-condition SPARQL</a:t>
             </a:r>
             <a:endParaRPr lang="en-US" sz="1200" dirty="0"/>
           </a:p>
@@ -13812,7 +13812,7 @@
                 <a:ea typeface="Calibri" pitchFamily="34" charset="-122"/>
                 <a:cs typeface="Calibri" pitchFamily="34" charset="-120"/>
               </a:rPr>
-              <a:t>4 policy esterne JSON · PROCEED / REVISE / ESCALATE / REJECT</a:t>
+              <a:t>4 external JSON policies · PROCEED / REVISE / ESCALATE / REJECT</a:t>
             </a:r>
             <a:endParaRPr lang="en-US" sz="1200" dirty="0"/>
           </a:p>
@@ -13915,7 +13915,7 @@
                 <a:ea typeface="Calibri" pitchFamily="34" charset="-122"/>
                 <a:cs typeface="Calibri" pitchFamily="34" charset="-120"/>
               </a:rPr>
-              <a:t>Ogni decisione è tracciata, giustificata e persistita su disco</a:t>
+              <a:t>Every decision is tracked, justified, and persisted to disk</a:t>
             </a:r>
             <a:endParaRPr lang="en-US" sz="1200" dirty="0"/>
           </a:p>
@@ -13979,7 +13979,7 @@
                 <a:ea typeface="Calibri" pitchFamily="34" charset="-122"/>
                 <a:cs typeface="Calibri" pitchFamily="34" charset="-120"/>
               </a:rPr>
-              <a:t>Etica</a:t>
+              <a:t>Ethics</a:t>
             </a:r>
             <a:endParaRPr lang="en-US" sz="1000" dirty="0"/>
           </a:p>
@@ -14018,7 +14018,7 @@
                 <a:ea typeface="Calibri" pitchFamily="34" charset="-122"/>
                 <a:cs typeface="Calibri" pitchFamily="34" charset="-120"/>
               </a:rPr>
-              <a:t>Non un checkbox finale: è parte integrante dell'architettura</a:t>
+              <a:t>Not a final checkbox: ethics is an integral part of the architecture</a:t>
             </a:r>
             <a:endParaRPr lang="en-US" sz="1200" dirty="0"/>
           </a:p>
@@ -14080,7 +14080,7 @@
                 <a:ea typeface="Calibri" pitchFamily="34" charset="-122"/>
                 <a:cs typeface="Calibri" pitchFamily="34" charset="-120"/>
               </a:rPr>
-              <a:t>Domande?</a:t>
+              <a:t>Questions?</a:t>
             </a:r>
             <a:endParaRPr lang="en-US" sz="1200" dirty="0"/>
           </a:p>
@@ -14176,7 +14176,7 @@
                 <a:ea typeface="Calibri" pitchFamily="34" charset="-122"/>
                 <a:cs typeface="Calibri" pitchFamily="34" charset="-120"/>
               </a:rPr>
-              <a:t>Sezione 1</a:t>
+              <a:t>Section 1</a:t>
             </a:r>
             <a:endParaRPr lang="en-US" sz="1300" dirty="0"/>
           </a:p>
@@ -14215,7 +14215,7 @@
                 <a:ea typeface="Trebuchet MS" pitchFamily="34" charset="-122"/>
                 <a:cs typeface="Trebuchet MS" pitchFamily="34" charset="-120"/>
               </a:rPr>
-              <a:t>Dominio, Dataset</a:t>
+              <a:t>Domain, Dataset</a:t>
             </a:r>
             <a:endParaRPr lang="en-US" sz="4000" dirty="0"/>
           </a:p>
@@ -14232,7 +14232,7 @@
                 <a:ea typeface="Trebuchet MS" pitchFamily="34" charset="-122"/>
                 <a:cs typeface="Trebuchet MS" pitchFamily="34" charset="-120"/>
               </a:rPr>
-              <a:t>e DaaS</a:t>
+              <a:t>and DaaS</a:t>
             </a:r>
             <a:endParaRPr lang="en-US" sz="4000" dirty="0"/>
           </a:p>
@@ -14271,7 +14271,7 @@
                 <a:ea typeface="Calibri" pitchFamily="34" charset="-122"/>
                 <a:cs typeface="Calibri" pitchFamily="34" charset="-120"/>
               </a:rPr>
-              <a:t>Membro 1  ·  ~10-12 minuti</a:t>
+              <a:t>Member 1  ·  ~10-12 minutes</a:t>
             </a:r>
             <a:endParaRPr lang="en-US" sz="1200" dirty="0"/>
           </a:p>
@@ -14369,7 +14369,7 @@
                 <a:ea typeface="Calibri" pitchFamily="34" charset="-122"/>
                 <a:cs typeface="Calibri" pitchFamily="34" charset="-120"/>
               </a:rPr>
-              <a:t>DOMINIO</a:t>
+              <a:t>DOMAIN</a:t>
             </a:r>
             <a:endParaRPr lang="en-US" sz="800" dirty="0"/>
           </a:p>
@@ -14408,7 +14408,7 @@
                 <a:ea typeface="Trebuchet MS" pitchFamily="34" charset="-122"/>
                 <a:cs typeface="Trebuchet MS" pitchFamily="34" charset="-120"/>
               </a:rPr>
-              <a:t>Dominio scelto: Employment</a:t>
+              <a:t>Chosen Domain: Employment</a:t>
             </a:r>
             <a:endParaRPr lang="en-US" sz="2600" dirty="0"/>
           </a:p>
@@ -14543,7 +14543,7 @@
                 <a:ea typeface="Trebuchet MS" pitchFamily="34" charset="-122"/>
                 <a:cs typeface="Trebuchet MS" pitchFamily="34" charset="-120"/>
               </a:rPr>
-              <a:t>Perché employment?</a:t>
+              <a:t>Why Employment?</a:t>
             </a:r>
             <a:endParaRPr lang="en-US" sz="1400" dirty="0"/>
           </a:p>
@@ -14583,7 +14583,7 @@
                 <a:ea typeface="Calibri" pitchFamily="34" charset="-122"/>
                 <a:cs typeface="Calibri" pitchFamily="34" charset="-120"/>
               </a:rPr>
-              <a:t>Dominio ricco di dati strutturati</a:t>
+              <a:t>Rich structured data domain</a:t>
             </a:r>
             <a:endParaRPr lang="en-US" sz="1200" dirty="0"/>
           </a:p>
@@ -14601,7 +14601,7 @@
                 <a:ea typeface="Calibri" pitchFamily="34" charset="-122"/>
                 <a:cs typeface="Calibri" pitchFamily="34" charset="-120"/>
               </a:rPr>
-              <a:t>Decisioni ad alto impatto sulla vita delle persone</a:t>
+              <a:t>High-impact decisions affecting people's lives</a:t>
             </a:r>
             <a:endParaRPr lang="en-US" sz="1200" dirty="0"/>
           </a:p>
@@ -14619,7 +14619,7 @@
                 <a:ea typeface="Calibri" pitchFamily="34" charset="-122"/>
                 <a:cs typeface="Calibri" pitchFamily="34" charset="-120"/>
               </a:rPr>
-              <a:t>Forte rischio di bias e discriminazione algoritmica</a:t>
+              <a:t>High risk of algorithmic bias and discrimination</a:t>
             </a:r>
             <a:endParaRPr lang="en-US" sz="1200" dirty="0"/>
           </a:p>
@@ -14637,7 +14637,7 @@
                 <a:ea typeface="Calibri" pitchFamily="34" charset="-122"/>
                 <a:cs typeface="Calibri" pitchFamily="34" charset="-120"/>
               </a:rPr>
-              <a:t>Esplicitamente citato nel testo del compito</a:t>
+              <a:t>Explicitly mentioned in the assignment specification</a:t>
             </a:r>
             <a:endParaRPr lang="en-US" sz="1200" dirty="0"/>
           </a:p>
@@ -14655,7 +14655,7 @@
                 <a:ea typeface="Calibri" pitchFamily="34" charset="-122"/>
                 <a:cs typeface="Calibri" pitchFamily="34" charset="-120"/>
               </a:rPr>
-              <a:t>Rilevanza con norme esistenti (D.Lgs. 198/2006, GDPR, UN CRPD)</a:t>
+              <a:t>Relevant to existing regulations (D.Lgs. 198/2006, GDPR, UN CRPD)</a:t>
             </a:r>
             <a:endParaRPr lang="en-US" sz="1200" dirty="0"/>
           </a:p>
@@ -14726,7 +14726,7 @@
                 <a:ea typeface="Trebuchet MS" pitchFamily="34" charset="-122"/>
                 <a:cs typeface="Trebuchet MS" pitchFamily="34" charset="-120"/>
               </a:rPr>
-              <a:t>Use case del progetto</a:t>
+              <a:t>Project Use Case</a:t>
             </a:r>
             <a:endParaRPr lang="en-US" sz="1400" dirty="0"/>
           </a:p>
@@ -14829,7 +14829,7 @@
                 <a:ea typeface="Calibri" pitchFamily="34" charset="-122"/>
                 <a:cs typeface="Calibri" pitchFamily="34" charset="-120"/>
               </a:rPr>
-              <a:t>CANDIDATO  </a:t>
+              <a:t>CANDIDATE  </a:t>
             </a:r>
             <a:pPr indent="0" marL="0">
               <a:buNone/>
@@ -14843,7 +14843,7 @@
                 <a:ea typeface="Calibri" pitchFamily="34" charset="-122"/>
                 <a:cs typeface="Calibri" pitchFamily="34" charset="-120"/>
               </a:rPr>
-              <a:t>Cerca lavoro nel sistema</a:t>
+              <a:t>Searches for jobs in the system</a:t>
             </a:r>
             <a:endParaRPr lang="en-US" sz="1200" dirty="0"/>
           </a:p>
@@ -14983,7 +14983,7 @@
                 <a:ea typeface="Calibri" pitchFamily="34" charset="-122"/>
                 <a:cs typeface="Calibri" pitchFamily="34" charset="-120"/>
               </a:rPr>
-              <a:t>Raccomanda offerte via SPARQL</a:t>
+              <a:t>Recommends offers via SPARQL</a:t>
             </a:r>
             <a:endParaRPr lang="en-US" sz="1200" dirty="0"/>
           </a:p>
@@ -15123,7 +15123,7 @@
                 <a:ea typeface="Calibri" pitchFamily="34" charset="-122"/>
                 <a:cs typeface="Calibri" pitchFamily="34" charset="-120"/>
               </a:rPr>
-              <a:t>Valuta la raccomandazione</a:t>
+              <a:t>Evaluates the recommendation</a:t>
             </a:r>
             <a:endParaRPr lang="en-US" sz="1200" dirty="0"/>
           </a:p>
@@ -15263,7 +15263,7 @@
                 <a:ea typeface="Calibri" pitchFamily="34" charset="-122"/>
                 <a:cs typeface="Calibri" pitchFamily="34" charset="-120"/>
               </a:rPr>
-              <a:t>Ogni decisione è tracciata</a:t>
+              <a:t>Every decision is tracked</a:t>
             </a:r>
             <a:endParaRPr lang="en-US" sz="1200" dirty="0"/>
           </a:p>
@@ -15361,7 +15361,7 @@
                 <a:ea typeface="Calibri" pitchFamily="34" charset="-122"/>
                 <a:cs typeface="Calibri" pitchFamily="34" charset="-120"/>
               </a:rPr>
-              <a:t>ARCHITETTURA</a:t>
+              <a:t>ARCHITECTURE</a:t>
             </a:r>
             <a:endParaRPr lang="en-US" sz="800" dirty="0"/>
           </a:p>
@@ -15400,7 +15400,7 @@
                 <a:ea typeface="Trebuchet MS" pitchFamily="34" charset="-122"/>
                 <a:cs typeface="Trebuchet MS" pitchFamily="34" charset="-120"/>
               </a:rPr>
-              <a:t>Architettura dell'applicazione</a:t>
+              <a:t>Application Architecture</a:t>
             </a:r>
             <a:endParaRPr lang="en-US" sz="2600" dirty="0"/>
           </a:p>
@@ -15678,7 +15678,7 @@
                 <a:ea typeface="Calibri" pitchFamily="34" charset="-122"/>
                 <a:cs typeface="Calibri" pitchFamily="34" charset="-120"/>
               </a:rPr>
-              <a:t>Web UI: browsing candidati, raccomandazioni, valutazione</a:t>
+              <a:t>Web UI: candidate browsing, recommendations, evaluation</a:t>
             </a:r>
             <a:endParaRPr lang="en-US" sz="1100" dirty="0"/>
           </a:p>
@@ -15909,7 +15909,7 @@
                 <a:ea typeface="Calibri" pitchFamily="34" charset="-122"/>
                 <a:cs typeface="Calibri" pitchFamily="34" charset="-120"/>
               </a:rPr>
-              <a:t>Dataset RDF, query SPARQL, 8 endpoint REST JSON</a:t>
+              <a:t>RDF dataset, SPARQL queries, 8 REST JSON endpoints</a:t>
             </a:r>
             <a:endParaRPr lang="en-US" sz="1100" dirty="0"/>
           </a:p>
@@ -16140,7 +16140,7 @@
                 <a:ea typeface="Calibri" pitchFamily="34" charset="-122"/>
                 <a:cs typeface="Calibri" pitchFamily="34" charset="-120"/>
               </a:rPr>
-              <a:t>Carica policy JSON, valuta richieste, produce decisioni e audit</a:t>
+              <a:t>Loads JSON policies, evaluates requests, produces decisions and audit</a:t>
             </a:r>
             <a:endParaRPr lang="en-US" sz="1100" dirty="0"/>
           </a:p>
@@ -16337,7 +16337,7 @@
                 <a:ea typeface="Calibri" pitchFamily="34" charset="-122"/>
                 <a:cs typeface="Calibri" pitchFamily="34" charset="-120"/>
               </a:rPr>
-              <a:t>⚠  L'EaaS ri-scarica sempre i dati dal DaaS: non si fida del chiamante</a:t>
+              <a:t>⚠  EaaS always re-fetches data from DaaS: it never trusts the caller</a:t>
             </a:r>
             <a:endParaRPr lang="en-US" sz="1000" dirty="0"/>
           </a:p>
@@ -16435,7 +16435,7 @@
                 <a:ea typeface="Calibri" pitchFamily="34" charset="-122"/>
                 <a:cs typeface="Calibri" pitchFamily="34" charset="-120"/>
               </a:rPr>
-              <a:t>DATASET RDF</a:t>
+              <a:t>RDF DATASET</a:t>
             </a:r>
             <a:endParaRPr lang="en-US" sz="800" dirty="0"/>
           </a:p>
@@ -16474,7 +16474,7 @@
                 <a:ea typeface="Trebuchet MS" pitchFamily="34" charset="-122"/>
                 <a:cs typeface="Trebuchet MS" pitchFamily="34" charset="-120"/>
               </a:rPr>
-              <a:t>Dataset RDF/XML — Ontologia</a:t>
+              <a:t>RDF/XML Dataset — Ontology</a:t>
             </a:r>
             <a:endParaRPr lang="en-US" sz="2600" dirty="0"/>
           </a:p>
@@ -16648,7 +16648,7 @@
                 <a:ea typeface="Calibri" pitchFamily="34" charset="-122"/>
                 <a:cs typeface="Calibri" pitchFamily="34" charset="-120"/>
               </a:rPr>
-              <a:t>Triple RDF</a:t>
+              <a:t>RDF Triples</a:t>
             </a:r>
             <a:endParaRPr lang="en-US" sz="800" dirty="0"/>
           </a:p>
@@ -16758,7 +16758,7 @@
                 <a:ea typeface="Calibri" pitchFamily="34" charset="-122"/>
                 <a:cs typeface="Calibri" pitchFamily="34" charset="-120"/>
               </a:rPr>
-              <a:t>Candidati</a:t>
+              <a:t>Candidates</a:t>
             </a:r>
             <a:endParaRPr lang="en-US" sz="800" dirty="0"/>
           </a:p>
@@ -16868,7 +16868,7 @@
                 <a:ea typeface="Calibri" pitchFamily="34" charset="-122"/>
                 <a:cs typeface="Calibri" pitchFamily="34" charset="-120"/>
               </a:rPr>
-              <a:t>Offerte</a:t>
+              <a:t>Offers</a:t>
             </a:r>
             <a:endParaRPr lang="en-US" sz="800" dirty="0"/>
           </a:p>
@@ -16978,7 +16978,7 @@
                 <a:ea typeface="Calibri" pitchFamily="34" charset="-122"/>
                 <a:cs typeface="Calibri" pitchFamily="34" charset="-120"/>
               </a:rPr>
-              <a:t>Skill</a:t>
+              <a:t>Skills</a:t>
             </a:r>
             <a:endParaRPr lang="en-US" sz="800" dirty="0"/>
           </a:p>
@@ -17088,7 +17088,7 @@
                 <a:ea typeface="Calibri" pitchFamily="34" charset="-122"/>
                 <a:cs typeface="Calibri" pitchFamily="34" charset="-120"/>
               </a:rPr>
-              <a:t>Settori</a:t>
+              <a:t>Sectors</a:t>
             </a:r>
             <a:endParaRPr lang="en-US" sz="800" dirty="0"/>
           </a:p>
@@ -17198,7 +17198,7 @@
                 <a:ea typeface="Calibri" pitchFamily="34" charset="-122"/>
                 <a:cs typeface="Calibri" pitchFamily="34" charset="-120"/>
               </a:rPr>
-              <a:t>Aziende</a:t>
+              <a:t>Companies</a:t>
             </a:r>
             <a:endParaRPr lang="en-US" sz="800" dirty="0"/>
           </a:p>
@@ -17347,7 +17347,7 @@
                 <a:ea typeface="Calibri" pitchFamily="34" charset="-122"/>
                 <a:cs typeface="Calibri" pitchFamily="34" charset="-120"/>
               </a:rPr>
-              <a:t>Riuso: foaf: · schema: · dct: · xsd:</a:t>
+              <a:t>Reused: foaf: · schema: · dct: · xsd:</a:t>
             </a:r>
             <a:endParaRPr lang="en-US" sz="900" dirty="0"/>
           </a:p>
@@ -17553,7 +17553,7 @@
                 <a:ea typeface="Calibri" pitchFamily="34" charset="-122"/>
                 <a:cs typeface="Calibri" pitchFamily="34" charset="-120"/>
               </a:rPr>
-              <a:t>offerta di lavoro</a:t>
+              <a:t>job offer</a:t>
             </a:r>
             <a:endParaRPr lang="en-US" sz="1000" dirty="0"/>
           </a:p>
@@ -17759,7 +17759,7 @@
                 <a:ea typeface="Calibri" pitchFamily="34" charset="-122"/>
                 <a:cs typeface="Calibri" pitchFamily="34" charset="-120"/>
               </a:rPr>
-              <a:t>competenza</a:t>
+              <a:t>skill / competence</a:t>
             </a:r>
             <a:endParaRPr lang="en-US" sz="1000" dirty="0"/>
           </a:p>
@@ -17862,7 +17862,7 @@
                 <a:ea typeface="Calibri" pitchFamily="34" charset="-122"/>
                 <a:cs typeface="Calibri" pitchFamily="34" charset="-120"/>
               </a:rPr>
-              <a:t>settore lavorativo</a:t>
+              <a:t>work sector</a:t>
             </a:r>
             <a:endParaRPr lang="en-US" sz="1000" dirty="0"/>
           </a:p>
@@ -17965,7 +17965,7 @@
                 <a:ea typeface="Calibri" pitchFamily="34" charset="-122"/>
                 <a:cs typeface="Calibri" pitchFamily="34" charset="-120"/>
               </a:rPr>
-              <a:t>luogo geografico</a:t>
+              <a:t>geographic location</a:t>
             </a:r>
             <a:endParaRPr lang="en-US" sz="1000" dirty="0"/>
           </a:p>
@@ -18063,7 +18063,7 @@
                 <a:ea typeface="Calibri" pitchFamily="34" charset="-122"/>
                 <a:cs typeface="Calibri" pitchFamily="34" charset="-120"/>
               </a:rPr>
-              <a:t>DATASET RDF</a:t>
+              <a:t>RDF DATASET</a:t>
             </a:r>
             <a:endParaRPr lang="en-US" sz="800" dirty="0"/>
           </a:p>
@@ -18102,7 +18102,7 @@
                 <a:ea typeface="Trebuchet MS" pitchFamily="34" charset="-122"/>
                 <a:cs typeface="Trebuchet MS" pitchFamily="34" charset="-120"/>
               </a:rPr>
-              <a:t>Proxy discriminatori nel dataset</a:t>
+              <a:t>Discriminatory Proxies in the Dataset</a:t>
             </a:r>
             <a:endParaRPr lang="en-US" sz="2600" dirty="0"/>
           </a:p>
@@ -18205,7 +18205,7 @@
                 <a:ea typeface="Calibri" pitchFamily="34" charset="-122"/>
                 <a:cs typeface="Calibri" pitchFamily="34" charset="-120"/>
               </a:rPr>
-              <a:t>Alcune offerte contengono campi intenzionalmente problematici — progettati per esercitare le policy EaaS</a:t>
+              <a:t>Some offers intentionally contain problematic fields — designed to exercise EaaS policies</a:t>
             </a:r>
             <a:endParaRPr lang="en-US" sz="1100" dirty="0"/>
           </a:p>
@@ -18269,7 +18269,7 @@
                 <a:ea typeface="Calibri" pitchFamily="34" charset="-122"/>
                 <a:cs typeface="Calibri" pitchFamily="34" charset="-120"/>
               </a:rPr>
-              <a:t>ID Offerta</a:t>
+              <a:t>Offer ID</a:t>
             </a:r>
             <a:endParaRPr lang="en-US" sz="1000" dirty="0"/>
           </a:p>
@@ -18333,7 +18333,7 @@
                 <a:ea typeface="Calibri" pitchFamily="34" charset="-122"/>
                 <a:cs typeface="Calibri" pitchFamily="34" charset="-120"/>
               </a:rPr>
-              <a:t>Titolo</a:t>
+              <a:t>Title</a:t>
             </a:r>
             <a:endParaRPr lang="en-US" sz="1000" dirty="0"/>
           </a:p>
@@ -18397,7 +18397,7 @@
                 <a:ea typeface="Calibri" pitchFamily="34" charset="-122"/>
                 <a:cs typeface="Calibri" pitchFamily="34" charset="-120"/>
               </a:rPr>
-              <a:t>Campo problematico</a:t>
+              <a:t>Problematic field</a:t>
             </a:r>
             <a:endParaRPr lang="en-US" sz="1000" dirty="0"/>
           </a:p>
@@ -18461,7 +18461,7 @@
                 <a:ea typeface="Calibri" pitchFamily="34" charset="-122"/>
                 <a:cs typeface="Calibri" pitchFamily="34" charset="-120"/>
               </a:rPr>
-              <a:t>Tipo violazione</a:t>
+              <a:t>Violation type</a:t>
             </a:r>
             <a:endParaRPr lang="en-US" sz="1000" dirty="0"/>
           </a:p>
@@ -18973,7 +18973,7 @@
                 <a:ea typeface="Calibri" pitchFamily="34" charset="-122"/>
                 <a:cs typeface="Calibri" pitchFamily="34" charset="-120"/>
               </a:rPr>
-              <a:t>Discriminazione di genere</a:t>
+              <a:t>Gender discrimination</a:t>
             </a:r>
             <a:endParaRPr lang="en-US" sz="1000" dirty="0"/>
           </a:p>
@@ -19229,7 +19229,7 @@
                 <a:ea typeface="Calibri" pitchFamily="34" charset="-122"/>
                 <a:cs typeface="Calibri" pitchFamily="34" charset="-120"/>
               </a:rPr>
-              <a:t>Discriminazione nazionale</a:t>
+              <a:t>Nationality discrimination</a:t>
             </a:r>
             <a:endParaRPr lang="en-US" sz="1000" dirty="0"/>
           </a:p>
@@ -19485,7 +19485,7 @@
                 <a:ea typeface="Calibri" pitchFamily="34" charset="-122"/>
                 <a:cs typeface="Calibri" pitchFamily="34" charset="-120"/>
               </a:rPr>
-              <a:t>Ageism (fascia stretta)</a:t>
+              <a:t>Ageism (narrow age band)</a:t>
             </a:r>
             <a:endParaRPr lang="en-US" sz="1000" dirty="0"/>
           </a:p>
@@ -19677,7 +19677,7 @@
                 <a:ea typeface="Consolas" pitchFamily="34" charset="-122"/>
                 <a:cs typeface="Consolas" pitchFamily="34" charset="-120"/>
               </a:rPr>
-              <a:t>salary mancante, source=unknown</a:t>
+              <a:t>salary missing, source=unknown</a:t>
             </a:r>
             <a:endParaRPr lang="en-US" sz="1000" dirty="0"/>
           </a:p>
@@ -19741,7 +19741,7 @@
                 <a:ea typeface="Calibri" pitchFamily="34" charset="-122"/>
                 <a:cs typeface="Calibri" pitchFamily="34" charset="-120"/>
               </a:rPr>
-              <a:t>Qualità dati scadente</a:t>
+              <a:t>Poor data quality</a:t>
             </a:r>
             <a:endParaRPr lang="en-US" sz="1000" dirty="0"/>
           </a:p>
@@ -19807,7 +19807,7 @@
                 <a:ea typeface="Calibri" pitchFamily="34" charset="-122"/>
                 <a:cs typeface="Calibri" pitchFamily="34" charset="-120"/>
               </a:rPr>
-              <a:t>5 offerte flaggate da /api/jobs/risky</a:t>
+              <a:t>5 offers flagged by /api/jobs/risky</a:t>
             </a:r>
             <a:endParaRPr lang="en-US" sz="1000" dirty="0"/>
           </a:p>
@@ -19944,7 +19944,7 @@
                 <a:ea typeface="Trebuchet MS" pitchFamily="34" charset="-122"/>
                 <a:cs typeface="Trebuchet MS" pitchFamily="34" charset="-120"/>
               </a:rPr>
-              <a:t>Query SPARQL — esempi</a:t>
+              <a:t>SPARQL Queries — Examples</a:t>
             </a:r>
             <a:endParaRPr lang="en-US" sz="2600" dirty="0"/>
           </a:p>
@@ -20047,7 +20047,7 @@
                 <a:ea typeface="Trebuchet MS" pitchFamily="34" charset="-122"/>
                 <a:cs typeface="Trebuchet MS" pitchFamily="34" charset="-120"/>
               </a:rPr>
-              <a:t>Query 1 · Offerte per settore</a:t>
+              <a:t>Query 1 · Offers by sector</a:t>
             </a:r>
             <a:endParaRPr lang="en-US" sz="1200" dirty="0"/>
           </a:p>
@@ -20242,7 +20242,7 @@
                 <a:ea typeface="Trebuchet MS" pitchFamily="34" charset="-122"/>
                 <a:cs typeface="Trebuchet MS" pitchFamily="34" charset="-120"/>
               </a:rPr>
-              <a:t>Query 2 · Match multi-condizione (skill overlap + location + esperienza)</a:t>
+              <a:t>Query 2 · Multi-condition match (skill overlap + location + experience)</a:t>
             </a:r>
             <a:endParaRPr lang="en-US" sz="1200" dirty="0"/>
           </a:p>
@@ -20819,7 +20819,7 @@
                 <a:ea typeface="Calibri" pitchFamily="34" charset="-122"/>
                 <a:cs typeface="Calibri" pitchFamily="34" charset="-120"/>
               </a:rPr>
-              <a:t>Lista tutti i candidati</a:t>
+              <a:t>List all candidates</a:t>
             </a:r>
             <a:endParaRPr lang="en-US" sz="1000" dirty="0"/>
           </a:p>
@@ -20988,7 +20988,7 @@
                 <a:ea typeface="Calibri" pitchFamily="34" charset="-122"/>
                 <a:cs typeface="Calibri" pitchFamily="34" charset="-120"/>
               </a:rPr>
-              <a:t>Singolo candidato per ID</a:t>
+              <a:t>Single candidate by ID</a:t>
             </a:r>
             <a:endParaRPr lang="en-US" sz="1000" dirty="0"/>
           </a:p>
@@ -21157,7 +21157,7 @@
                 <a:ea typeface="Calibri" pitchFamily="34" charset="-122"/>
                 <a:cs typeface="Calibri" pitchFamily="34" charset="-120"/>
               </a:rPr>
-              <a:t>Ricerca offerte (sector, location, minSalary, remote) — SPARQL multi-condizione</a:t>
+              <a:t>Search offers (sector, location, minSalary, remote) — multi-condition SPARQL</a:t>
             </a:r>
             <a:endParaRPr lang="en-US" sz="1000" dirty="0"/>
           </a:p>
@@ -21326,7 +21326,7 @@
                 <a:ea typeface="Calibri" pitchFamily="34" charset="-122"/>
                 <a:cs typeface="Calibri" pitchFamily="34" charset="-120"/>
               </a:rPr>
-              <a:t>Singola offerta per ID</a:t>
+              <a:t>Single offer by ID</a:t>
             </a:r>
             <a:endParaRPr lang="en-US" sz="1000" dirty="0"/>
           </a:p>
@@ -21495,7 +21495,7 @@
                 <a:ea typeface="Calibri" pitchFamily="34" charset="-122"/>
                 <a:cs typeface="Calibri" pitchFamily="34" charset="-120"/>
               </a:rPr>
-              <a:t>Offerte per settore</a:t>
+              <a:t>Offers by sector</a:t>
             </a:r>
             <a:endParaRPr lang="en-US" sz="1000" dirty="0"/>
           </a:p>
@@ -21664,7 +21664,7 @@
                 <a:ea typeface="Calibri" pitchFamily="34" charset="-122"/>
                 <a:cs typeface="Calibri" pitchFamily="34" charset="-120"/>
               </a:rPr>
-              <a:t>Offerte per città</a:t>
+              <a:t>Offers by city</a:t>
             </a:r>
             <a:endParaRPr lang="en-US" sz="1000" dirty="0"/>
           </a:p>
@@ -21833,7 +21833,7 @@
                 <a:ea typeface="Calibri" pitchFamily="34" charset="-122"/>
                 <a:cs typeface="Calibri" pitchFamily="34" charset="-120"/>
               </a:rPr>
-              <a:t>Offerte con proxy discriminatori o provenienza non verificata</a:t>
+              <a:t>Offers with discriminatory proxies or unverified provenance</a:t>
             </a:r>
             <a:endParaRPr lang="en-US" sz="1000" dirty="0"/>
           </a:p>
@@ -22068,7 +22068,7 @@
                 <a:ea typeface="Calibri" pitchFamily="34" charset="-122"/>
                 <a:cs typeface="Calibri" pitchFamily="34" charset="-120"/>
               </a:rPr>
-              <a:t>Raccomandazioni per candidato (skill + location + esperienza)</a:t>
+              <a:t>Recommendations for candidate (skill + location + experience)</a:t>
             </a:r>
             <a:endParaRPr lang="en-US" sz="1000" dirty="0"/>
           </a:p>

--- a/slides/SoSE-Employment-DaaS-EaaS.pptx
+++ b/slides/SoSE-Employment-DaaS-EaaS.pptx
@@ -4,6 +4,9 @@
   <p:sldMasterIdLst>
     <p:sldMasterId id="2147483648" r:id="rId1"/>
   </p:sldMasterIdLst>
+  <p:notesMasterIdLst>
+    <p:notesMasterId r:id="rId24"/>
+  </p:notesMasterIdLst>
   <p:sldIdLst>
     <p:sldId id="256" r:id="rId2"/>
     <p:sldId id="257" r:id="rId3"/>
@@ -28,10 +31,7 @@
     <p:sldId id="276" r:id="rId22"/>
     <p:sldId id="277" r:id="rId23"/>
   </p:sldIdLst>
-  <p:notesMasterIdLst>
-    <p:notesMasterId r:id="rId24"/>
-  </p:notesMasterIdLst>
-  <p:sldSz cx="9144000" cy="5143500"/>
+  <p:sldSz cx="9144000" cy="5143500" type="screen16x9"/>
   <p:notesSz cx="5143500" cy="9144000"/>
   <p:defaultTextStyle>
     <a:lvl1pPr marL="0" algn="l" defTabSz="914400" rtl="0" eaLnBrk="1" latinLnBrk="0" hangingPunct="1">
@@ -125,6 +125,11 @@
       </a:defRPr>
     </a:lvl9pPr>
   </p:defaultTextStyle>
+  <p:extLst>
+    <p:ext uri="{EFAFB233-063F-42B5-8137-9DF3F51BA10A}">
+      <p15:sldGuideLst xmlns:p15="http://schemas.microsoft.com/office/powerpoint/2012/main"/>
+    </p:ext>
+  </p:extLst>
 </p:presentation>
 </file>
 
@@ -150,234 +155,10 @@
           <a:chExt cx="0" cy="0"/>
         </a:xfrm>
       </p:grpSpPr>
-      <p:sp>
-        <p:nvSpPr>
-          <p:cNvPr id="2" name="Header Placeholder 1"/>
-          <p:cNvSpPr>
-            <a:spLocks noGrp="1"/>
-          </p:cNvSpPr>
-          <p:nvPr>
-            <p:ph type="hdr" sz="quarter"/>
-          </p:nvPr>
-        </p:nvSpPr>
-        <p:spPr>
-          <a:xfrm>
-            <a:off x="0" y="0"/>
-            <a:ext cx="2971800" cy="458788"/>
-          </a:xfrm>
-          <a:prstGeom prst="rect">
-            <a:avLst/>
-          </a:prstGeom>
-        </p:spPr>
-        <p:txBody>
-          <a:bodyPr vert="horz" lIns="91440" tIns="45720" rIns="91440" bIns="45720" rtlCol="0"/>
-          <a:lstStyle>
-            <a:lvl1pPr algn="l">
-              <a:defRPr sz="1200"/>
-            </a:lvl1pPr>
-          </a:lstStyle>
-          <a:p>
-            <a:endParaRPr lang="en-US"/>
-          </a:p>
-        </p:txBody>
-      </p:sp>
-      <p:sp>
-        <p:nvSpPr>
-          <p:cNvPr id="3" name="Date Placeholder 2"/>
-          <p:cNvSpPr>
-            <a:spLocks noGrp="1"/>
-          </p:cNvSpPr>
-          <p:nvPr>
-            <p:ph type="dt" idx="1"/>
-          </p:nvPr>
-        </p:nvSpPr>
-        <p:spPr>
-          <a:xfrm>
-            <a:off x="3884613" y="0"/>
-            <a:ext cx="2971800" cy="458788"/>
-          </a:xfrm>
-          <a:prstGeom prst="rect">
-            <a:avLst/>
-          </a:prstGeom>
-        </p:spPr>
-        <p:txBody>
-          <a:bodyPr vert="horz" lIns="91440" tIns="45720" rIns="91440" bIns="45720" rtlCol="0"/>
-          <a:lstStyle>
-            <a:lvl1pPr algn="r">
-              <a:defRPr sz="1200"/>
-            </a:lvl1pPr>
-          </a:lstStyle>
-          <a:p>
-            <a:fld id="{5282F153-3F37-0F45-9E97-73ACFA13230C}" type="datetimeFigureOut">
-              <a:rPr lang="en-US"/>
-              <a:t>7/23/19</a:t>
-            </a:fld>
-            <a:endParaRPr lang="en-US"/>
-          </a:p>
-        </p:txBody>
-      </p:sp>
-      <p:sp>
-        <p:nvSpPr>
-          <p:cNvPr id="4" name="Slide Image Placeholder 3"/>
-          <p:cNvSpPr>
-            <a:spLocks noGrp="1" noRot="1" noChangeAspect="1"/>
-          </p:cNvSpPr>
-          <p:nvPr>
-            <p:ph type="sldImg" idx="2"/>
-          </p:nvPr>
-        </p:nvSpPr>
-        <p:spPr>
-          <a:xfrm>
-            <a:off x="685800" y="1143000"/>
-            <a:ext cx="5486400" cy="3086100"/>
-          </a:xfrm>
-          <a:prstGeom prst="rect">
-            <a:avLst/>
-          </a:prstGeom>
-          <a:noFill/>
-          <a:ln w="12700">
-            <a:solidFill>
-              <a:prstClr val="black"/>
-            </a:solidFill>
-          </a:ln>
-        </p:spPr>
-        <p:txBody>
-          <a:bodyPr vert="horz" lIns="91440" tIns="45720" rIns="91440" bIns="45720" rtlCol="0" anchor="ctr"/>
-          <a:lstStyle/>
-          <a:p>
-            <a:endParaRPr lang="en-US"/>
-          </a:p>
-        </p:txBody>
-      </p:sp>
-      <p:sp>
-        <p:nvSpPr>
-          <p:cNvPr id="5" name="Notes Placeholder 4"/>
-          <p:cNvSpPr>
-            <a:spLocks noGrp="1"/>
-          </p:cNvSpPr>
-          <p:nvPr>
-            <p:ph type="body" sz="quarter" idx="3"/>
-          </p:nvPr>
-        </p:nvSpPr>
-        <p:spPr>
-          <a:xfrm>
-            <a:off x="685800" y="4400550"/>
-            <a:ext cx="5486400" cy="3600450"/>
-          </a:xfrm>
-          <a:prstGeom prst="rect">
-            <a:avLst/>
-          </a:prstGeom>
-        </p:spPr>
-        <p:txBody>
-          <a:bodyPr vert="horz" lIns="91440" tIns="45720" rIns="91440" bIns="45720" rtlCol="0"/>
-          <a:lstStyle/>
-          <a:p>
-            <a:pPr lvl="0"/>
-            <a:r>
-              <a:rPr lang="en-US"/>
-              <a:t>Click to edit Master text styles</a:t>
-            </a:r>
-          </a:p>
-          <a:p>
-            <a:pPr lvl="1"/>
-            <a:r>
-              <a:rPr lang="en-US"/>
-              <a:t>Second level</a:t>
-            </a:r>
-          </a:p>
-          <a:p>
-            <a:pPr lvl="2"/>
-            <a:r>
-              <a:rPr lang="en-US"/>
-              <a:t>Third level</a:t>
-            </a:r>
-          </a:p>
-          <a:p>
-            <a:pPr lvl="3"/>
-            <a:r>
-              <a:rPr lang="en-US"/>
-              <a:t>Fourth level</a:t>
-            </a:r>
-          </a:p>
-          <a:p>
-            <a:pPr lvl="4"/>
-            <a:r>
-              <a:rPr lang="en-US"/>
-              <a:t>Fifth level</a:t>
-            </a:r>
-          </a:p>
-        </p:txBody>
-      </p:sp>
-      <p:sp>
-        <p:nvSpPr>
-          <p:cNvPr id="6" name="Footer Placeholder 5"/>
-          <p:cNvSpPr>
-            <a:spLocks noGrp="1"/>
-          </p:cNvSpPr>
-          <p:nvPr>
-            <p:ph type="ftr" sz="quarter" idx="4"/>
-          </p:nvPr>
-        </p:nvSpPr>
-        <p:spPr>
-          <a:xfrm>
-            <a:off x="0" y="8685213"/>
-            <a:ext cx="2971800" cy="458787"/>
-          </a:xfrm>
-          <a:prstGeom prst="rect">
-            <a:avLst/>
-          </a:prstGeom>
-        </p:spPr>
-        <p:txBody>
-          <a:bodyPr vert="horz" lIns="91440" tIns="45720" rIns="91440" bIns="45720" rtlCol="0" anchor="b"/>
-          <a:lstStyle>
-            <a:lvl1pPr algn="l">
-              <a:defRPr sz="1200"/>
-            </a:lvl1pPr>
-          </a:lstStyle>
-          <a:p>
-            <a:endParaRPr lang="en-US"/>
-          </a:p>
-        </p:txBody>
-      </p:sp>
-      <p:sp>
-        <p:nvSpPr>
-          <p:cNvPr id="7" name="Slide Number Placeholder 6"/>
-          <p:cNvSpPr>
-            <a:spLocks noGrp="1"/>
-          </p:cNvSpPr>
-          <p:nvPr>
-            <p:ph type="sldNum" sz="quarter" idx="5"/>
-          </p:nvPr>
-        </p:nvSpPr>
-        <p:spPr>
-          <a:xfrm>
-            <a:off x="3884613" y="8685213"/>
-            <a:ext cx="2971800" cy="458787"/>
-          </a:xfrm>
-          <a:prstGeom prst="rect">
-            <a:avLst/>
-          </a:prstGeom>
-        </p:spPr>
-        <p:txBody>
-          <a:bodyPr vert="horz" lIns="91440" tIns="45720" rIns="91440" bIns="45720" rtlCol="0" anchor="b"/>
-          <a:lstStyle>
-            <a:lvl1pPr algn="r">
-              <a:defRPr sz="1200"/>
-            </a:lvl1pPr>
-          </a:lstStyle>
-          <a:p>
-            <a:fld id="{CE5E9CC1-C706-0F49-92D6-E571CC5EEA8F}" type="slidenum">
-              <a:rPr lang="en-US"/>
-              <a:t>‹#›</a:t>
-            </a:fld>
-            <a:endParaRPr lang="en-US"/>
-          </a:p>
-        </p:txBody>
-      </p:sp>
     </p:spTree>
     <p:extLst>
       <p:ext uri="{BB962C8B-B14F-4D97-AF65-F5344CB8AC3E}">
-        <p14:creationId xmlns:p14="http://schemas.microsoft.com/office/powerpoint/2010/main" val="1024086991"/>
+        <p14:creationId xmlns:p14="http://schemas.microsoft.com/office/powerpoint/2010/main" val="3059643564"/>
       </p:ext>
     </p:extLst>
   </p:cSld>
@@ -521,10 +302,6 @@
           <a:bodyPr/>
           <a:lstStyle/>
           <a:p>
-            <a:r>
-              <a:rPr lang="en-US" dirty="0"/>
-              <a:t/>
-            </a:r>
             <a:endParaRPr lang="en-US" dirty="0"/>
           </a:p>
         </p:txBody>
@@ -609,10 +386,6 @@
           <a:bodyPr/>
           <a:lstStyle/>
           <a:p>
-            <a:r>
-              <a:rPr lang="en-US" dirty="0"/>
-              <a:t/>
-            </a:r>
             <a:endParaRPr lang="en-US" dirty="0"/>
           </a:p>
         </p:txBody>
@@ -697,10 +470,6 @@
           <a:bodyPr/>
           <a:lstStyle/>
           <a:p>
-            <a:r>
-              <a:rPr lang="en-US" dirty="0"/>
-              <a:t/>
-            </a:r>
             <a:endParaRPr lang="en-US" dirty="0"/>
           </a:p>
         </p:txBody>
@@ -785,10 +554,6 @@
           <a:bodyPr/>
           <a:lstStyle/>
           <a:p>
-            <a:r>
-              <a:rPr lang="en-US" dirty="0"/>
-              <a:t/>
-            </a:r>
             <a:endParaRPr lang="en-US" dirty="0"/>
           </a:p>
         </p:txBody>
@@ -873,10 +638,6 @@
           <a:bodyPr/>
           <a:lstStyle/>
           <a:p>
-            <a:r>
-              <a:rPr lang="en-US" dirty="0"/>
-              <a:t/>
-            </a:r>
             <a:endParaRPr lang="en-US" dirty="0"/>
           </a:p>
         </p:txBody>
@@ -961,10 +722,6 @@
           <a:bodyPr/>
           <a:lstStyle/>
           <a:p>
-            <a:r>
-              <a:rPr lang="en-US" dirty="0"/>
-              <a:t/>
-            </a:r>
             <a:endParaRPr lang="en-US" dirty="0"/>
           </a:p>
         </p:txBody>
@@ -1049,10 +806,6 @@
           <a:bodyPr/>
           <a:lstStyle/>
           <a:p>
-            <a:r>
-              <a:rPr lang="en-US" dirty="0"/>
-              <a:t/>
-            </a:r>
             <a:endParaRPr lang="en-US" dirty="0"/>
           </a:p>
         </p:txBody>
@@ -1137,10 +890,6 @@
           <a:bodyPr/>
           <a:lstStyle/>
           <a:p>
-            <a:r>
-              <a:rPr lang="en-US" dirty="0"/>
-              <a:t/>
-            </a:r>
             <a:endParaRPr lang="en-US" dirty="0"/>
           </a:p>
         </p:txBody>
@@ -1225,10 +974,6 @@
           <a:bodyPr/>
           <a:lstStyle/>
           <a:p>
-            <a:r>
-              <a:rPr lang="en-US" dirty="0"/>
-              <a:t/>
-            </a:r>
             <a:endParaRPr lang="en-US" dirty="0"/>
           </a:p>
         </p:txBody>
@@ -1313,10 +1058,6 @@
           <a:bodyPr/>
           <a:lstStyle/>
           <a:p>
-            <a:r>
-              <a:rPr lang="en-US" dirty="0"/>
-              <a:t/>
-            </a:r>
             <a:endParaRPr lang="en-US" dirty="0"/>
           </a:p>
         </p:txBody>
@@ -1401,10 +1142,6 @@
           <a:bodyPr/>
           <a:lstStyle/>
           <a:p>
-            <a:r>
-              <a:rPr lang="en-US" dirty="0"/>
-              <a:t/>
-            </a:r>
             <a:endParaRPr lang="en-US" dirty="0"/>
           </a:p>
         </p:txBody>
@@ -1489,10 +1226,6 @@
           <a:bodyPr/>
           <a:lstStyle/>
           <a:p>
-            <a:r>
-              <a:rPr lang="en-US" dirty="0"/>
-              <a:t/>
-            </a:r>
             <a:endParaRPr lang="en-US" dirty="0"/>
           </a:p>
         </p:txBody>
@@ -1577,10 +1310,6 @@
           <a:bodyPr/>
           <a:lstStyle/>
           <a:p>
-            <a:r>
-              <a:rPr lang="en-US" dirty="0"/>
-              <a:t/>
-            </a:r>
             <a:endParaRPr lang="en-US" dirty="0"/>
           </a:p>
         </p:txBody>
@@ -1665,10 +1394,6 @@
           <a:bodyPr/>
           <a:lstStyle/>
           <a:p>
-            <a:r>
-              <a:rPr lang="en-US" dirty="0"/>
-              <a:t/>
-            </a:r>
             <a:endParaRPr lang="en-US" dirty="0"/>
           </a:p>
         </p:txBody>
@@ -1753,10 +1478,6 @@
           <a:bodyPr/>
           <a:lstStyle/>
           <a:p>
-            <a:r>
-              <a:rPr lang="en-US" dirty="0"/>
-              <a:t/>
-            </a:r>
             <a:endParaRPr lang="en-US" dirty="0"/>
           </a:p>
         </p:txBody>
@@ -1841,10 +1562,6 @@
           <a:bodyPr/>
           <a:lstStyle/>
           <a:p>
-            <a:r>
-              <a:rPr lang="en-US" dirty="0"/>
-              <a:t/>
-            </a:r>
             <a:endParaRPr lang="en-US" dirty="0"/>
           </a:p>
         </p:txBody>
@@ -1929,10 +1646,6 @@
           <a:bodyPr/>
           <a:lstStyle/>
           <a:p>
-            <a:r>
-              <a:rPr lang="en-US" dirty="0"/>
-              <a:t/>
-            </a:r>
             <a:endParaRPr lang="en-US" dirty="0"/>
           </a:p>
         </p:txBody>
@@ -2017,10 +1730,6 @@
           <a:bodyPr/>
           <a:lstStyle/>
           <a:p>
-            <a:r>
-              <a:rPr lang="en-US" dirty="0"/>
-              <a:t/>
-            </a:r>
             <a:endParaRPr lang="en-US" dirty="0"/>
           </a:p>
         </p:txBody>
@@ -2105,10 +1814,6 @@
           <a:bodyPr/>
           <a:lstStyle/>
           <a:p>
-            <a:r>
-              <a:rPr lang="en-US" dirty="0"/>
-              <a:t/>
-            </a:r>
             <a:endParaRPr lang="en-US" dirty="0"/>
           </a:p>
         </p:txBody>
@@ -2193,10 +1898,6 @@
           <a:bodyPr/>
           <a:lstStyle/>
           <a:p>
-            <a:r>
-              <a:rPr lang="en-US" dirty="0"/>
-              <a:t/>
-            </a:r>
             <a:endParaRPr lang="en-US" dirty="0"/>
           </a:p>
         </p:txBody>
@@ -2281,10 +1982,6 @@
           <a:bodyPr/>
           <a:lstStyle/>
           <a:p>
-            <a:r>
-              <a:rPr lang="en-US" dirty="0"/>
-              <a:t/>
-            </a:r>
             <a:endParaRPr lang="en-US" dirty="0"/>
           </a:p>
         </p:txBody>
@@ -2369,10 +2066,6 @@
           <a:bodyPr/>
           <a:lstStyle/>
           <a:p>
-            <a:r>
-              <a:rPr lang="en-US" dirty="0"/>
-              <a:t/>
-            </a:r>
             <a:endParaRPr lang="en-US" dirty="0"/>
           </a:p>
         </p:txBody>
@@ -2446,6 +2139,11 @@
 <file path=ppt/slideMasters/slideMaster1.xml><?xml version="1.0" encoding="utf-8"?>
 <p:sldMaster xmlns:a="http://schemas.openxmlformats.org/drawingml/2006/main" xmlns:r="http://schemas.openxmlformats.org/officeDocument/2006/relationships" xmlns:p="http://schemas.openxmlformats.org/presentationml/2006/main">
   <p:cSld>
+    <p:bg>
+      <p:bgRef idx="1001">
+        <a:schemeClr val="bg1"/>
+      </p:bgRef>
+    </p:bg>
     <p:spTree>
       <p:nvGrpSpPr>
         <p:cNvPr id="1" name=""/>
@@ -2728,6 +2426,7 @@
         <a:solidFill>
           <a:srgbClr val="1D2D44"/>
         </a:solidFill>
+        <a:effectLst/>
       </p:bgPr>
     </p:bg>
     <p:spTree>
@@ -2768,6 +2467,13 @@
             <a:prstDash val="solid"/>
           </a:ln>
         </p:spPr>
+        <p:txBody>
+          <a:bodyPr/>
+          <a:lstStyle/>
+          <a:p>
+            <a:endParaRPr lang="it-IT"/>
+          </a:p>
+        </p:txBody>
       </p:sp>
       <p:sp>
         <p:nvSpPr>
@@ -2790,7 +2496,7 @@
           <a:bodyPr wrap="square" lIns="0" tIns="0" rIns="0" bIns="0" rtlCol="0" anchor="ctr"/>
           <a:lstStyle/>
           <a:p>
-            <a:pPr indent="0" marL="0">
+            <a:pPr marL="0" indent="0">
               <a:buNone/>
             </a:pPr>
             <a:r>
@@ -2829,7 +2535,7 @@
           <a:bodyPr wrap="square" lIns="0" tIns="0" rIns="0" bIns="0" rtlCol="0" anchor="ctr"/>
           <a:lstStyle/>
           <a:p>
-            <a:pPr indent="0" marL="0">
+            <a:pPr marL="0" indent="0">
               <a:buNone/>
             </a:pPr>
             <a:r>
@@ -2868,7 +2574,7 @@
           <a:bodyPr wrap="square" lIns="0" tIns="0" rIns="0" bIns="0" rtlCol="0" anchor="ctr"/>
           <a:lstStyle/>
           <a:p>
-            <a:pPr indent="0" marL="0">
+            <a:pPr marL="0" indent="0">
               <a:buNone/>
             </a:pPr>
             <a:r>
@@ -2910,6 +2616,13 @@
             <a:prstDash val="solid"/>
           </a:ln>
         </p:spPr>
+        <p:txBody>
+          <a:bodyPr/>
+          <a:lstStyle/>
+          <a:p>
+            <a:endParaRPr lang="it-IT"/>
+          </a:p>
+        </p:txBody>
       </p:sp>
       <p:sp>
         <p:nvSpPr>
@@ -2932,7 +2645,7 @@
           <a:bodyPr wrap="square" lIns="0" tIns="0" rIns="0" bIns="0" rtlCol="0" anchor="ctr"/>
           <a:lstStyle/>
           <a:p>
-            <a:pPr indent="0" marL="0">
+            <a:pPr marL="0" indent="0">
               <a:buNone/>
             </a:pPr>
             <a:r>
@@ -2949,7 +2662,7 @@
             <a:endParaRPr lang="en-US" sz="1300" dirty="0"/>
           </a:p>
           <a:p>
-            <a:pPr indent="0" marL="0">
+            <a:pPr marL="0" indent="0">
               <a:buNone/>
             </a:pPr>
             <a:r>
@@ -2966,7 +2679,7 @@
             <a:endParaRPr lang="en-US" sz="1300" dirty="0"/>
           </a:p>
           <a:p>
-            <a:pPr indent="0" marL="0">
+            <a:pPr marL="0" indent="0">
               <a:buNone/>
             </a:pPr>
             <a:r>
@@ -3000,6 +2713,7 @@
         <a:solidFill>
           <a:srgbClr val="1D2D44"/>
         </a:solidFill>
+        <a:effectLst/>
       </p:bgPr>
     </p:bg>
     <p:spTree>
@@ -3040,6 +2754,13 @@
             <a:prstDash val="solid"/>
           </a:ln>
         </p:spPr>
+        <p:txBody>
+          <a:bodyPr/>
+          <a:lstStyle/>
+          <a:p>
+            <a:endParaRPr lang="it-IT"/>
+          </a:p>
+        </p:txBody>
       </p:sp>
       <p:sp>
         <p:nvSpPr>
@@ -3062,7 +2783,7 @@
           <a:bodyPr wrap="square" lIns="0" tIns="0" rIns="0" bIns="0" rtlCol="0" anchor="ctr"/>
           <a:lstStyle/>
           <a:p>
-            <a:pPr indent="0" marL="0">
+            <a:pPr marL="0" indent="0">
               <a:buNone/>
             </a:pPr>
             <a:r>
@@ -3101,7 +2822,7 @@
           <a:bodyPr wrap="square" lIns="0" tIns="0" rIns="0" bIns="0" rtlCol="0" anchor="ctr"/>
           <a:lstStyle/>
           <a:p>
-            <a:pPr indent="0" marL="0">
+            <a:pPr marL="0" indent="0">
               <a:buNone/>
             </a:pPr>
             <a:r>
@@ -3118,7 +2839,7 @@
             <a:endParaRPr lang="en-US" sz="4000" dirty="0"/>
           </a:p>
           <a:p>
-            <a:pPr indent="0" marL="0">
+            <a:pPr marL="0" indent="0">
               <a:buNone/>
             </a:pPr>
             <a:r>
@@ -3157,7 +2878,7 @@
           <a:bodyPr wrap="square" lIns="0" tIns="0" rIns="0" bIns="0" rtlCol="0" anchor="ctr"/>
           <a:lstStyle/>
           <a:p>
-            <a:pPr indent="0" marL="0">
+            <a:pPr marL="0" indent="0">
               <a:buNone/>
             </a:pPr>
             <a:r>
@@ -3191,6 +2912,7 @@
         <a:solidFill>
           <a:srgbClr val="FFFFFF"/>
         </a:solidFill>
+        <a:effectLst/>
       </p:bgPr>
     </p:bg>
     <p:spTree>
@@ -3233,6 +2955,13 @@
             <a:prstDash val="solid"/>
           </a:ln>
         </p:spPr>
+        <p:txBody>
+          <a:bodyPr/>
+          <a:lstStyle/>
+          <a:p>
+            <a:endParaRPr lang="it-IT"/>
+          </a:p>
+        </p:txBody>
       </p:sp>
       <p:sp>
         <p:nvSpPr>
@@ -3255,7 +2984,7 @@
           <a:bodyPr wrap="square" lIns="0" tIns="0" rIns="0" bIns="0" rtlCol="0" anchor="ctr"/>
           <a:lstStyle/>
           <a:p>
-            <a:pPr algn="ctr" indent="0" marL="0">
+            <a:pPr marL="0" indent="0" algn="ctr">
               <a:buNone/>
             </a:pPr>
             <a:r>
@@ -3294,7 +3023,7 @@
           <a:bodyPr wrap="square" lIns="0" tIns="0" rIns="0" bIns="0" rtlCol="0" anchor="ctr"/>
           <a:lstStyle/>
           <a:p>
-            <a:pPr indent="0" marL="0">
+            <a:pPr marL="0" indent="0">
               <a:buNone/>
             </a:pPr>
             <a:r>
@@ -3336,6 +3065,13 @@
             <a:prstDash val="solid"/>
           </a:ln>
         </p:spPr>
+        <p:txBody>
+          <a:bodyPr/>
+          <a:lstStyle/>
+          <a:p>
+            <a:endParaRPr lang="it-IT"/>
+          </a:p>
+        </p:txBody>
       </p:sp>
       <p:sp>
         <p:nvSpPr>
@@ -3358,7 +3094,7 @@
           <a:bodyPr wrap="square" rtlCol="0" anchor="ctr"/>
           <a:lstStyle/>
           <a:p>
-            <a:pPr algn="r" indent="0" marL="0">
+            <a:pPr marL="0" indent="0" algn="r">
               <a:buNone/>
             </a:pPr>
             <a:r>
@@ -3400,6 +3136,13 @@
             <a:prstDash val="solid"/>
           </a:ln>
         </p:spPr>
+        <p:txBody>
+          <a:bodyPr/>
+          <a:lstStyle/>
+          <a:p>
+            <a:endParaRPr lang="it-IT"/>
+          </a:p>
+        </p:txBody>
       </p:sp>
       <p:sp>
         <p:nvSpPr>
@@ -3422,7 +3165,7 @@
           <a:bodyPr wrap="square" lIns="0" tIns="0" rIns="0" bIns="0" rtlCol="0" anchor="ctr"/>
           <a:lstStyle/>
           <a:p>
-            <a:pPr algn="ctr" indent="0" marL="0">
+            <a:pPr marL="0" indent="0" algn="ctr">
               <a:buNone/>
             </a:pPr>
             <a:r>
@@ -3462,6 +3205,13 @@
             <a:prstDash val="solid"/>
           </a:ln>
         </p:spPr>
+        <p:txBody>
+          <a:bodyPr/>
+          <a:lstStyle/>
+          <a:p>
+            <a:endParaRPr lang="it-IT"/>
+          </a:p>
+        </p:txBody>
       </p:sp>
       <p:sp>
         <p:nvSpPr>
@@ -3487,13 +3237,20 @@
             <a:prstDash val="solid"/>
           </a:ln>
           <a:effectLst>
-            <a:outerShdw sx="100000" sy="100000" kx="0" ky="0" algn="bl" rotWithShape="0" blurRad="101600" dist="38100" dir="8100000">
+            <a:outerShdw blurRad="101600" dist="38100" dir="8100000" algn="bl" rotWithShape="0">
               <a:srgbClr val="000000">
                 <a:alpha val="12000"/>
               </a:srgbClr>
             </a:outerShdw>
           </a:effectLst>
         </p:spPr>
+        <p:txBody>
+          <a:bodyPr/>
+          <a:lstStyle/>
+          <a:p>
+            <a:endParaRPr lang="it-IT"/>
+          </a:p>
+        </p:txBody>
       </p:sp>
       <p:sp>
         <p:nvSpPr>
@@ -3516,7 +3273,7 @@
           <a:bodyPr wrap="square" lIns="0" tIns="0" rIns="0" bIns="0" rtlCol="0" anchor="ctr"/>
           <a:lstStyle/>
           <a:p>
-            <a:pPr indent="0" marL="0">
+            <a:pPr marL="0" indent="0">
               <a:buNone/>
             </a:pPr>
             <a:r>
@@ -3555,7 +3312,7 @@
           <a:bodyPr wrap="square" lIns="0" tIns="0" rIns="0" bIns="0" rtlCol="0" anchor="ctr"/>
           <a:lstStyle/>
           <a:p>
-            <a:pPr indent="0" marL="0">
+            <a:pPr marL="0" indent="0">
               <a:buNone/>
             </a:pPr>
             <a:r>
@@ -3572,7 +3329,7 @@
             <a:endParaRPr lang="en-US" sz="1000" dirty="0"/>
           </a:p>
           <a:p>
-            <a:pPr indent="0" marL="0">
+            <a:pPr marL="0" indent="0">
               <a:buNone/>
             </a:pPr>
             <a:r>
@@ -3614,6 +3371,13 @@
             <a:prstDash val="solid"/>
           </a:ln>
         </p:spPr>
+        <p:txBody>
+          <a:bodyPr/>
+          <a:lstStyle/>
+          <a:p>
+            <a:endParaRPr lang="it-IT"/>
+          </a:p>
+        </p:txBody>
       </p:sp>
       <p:sp>
         <p:nvSpPr>
@@ -3636,7 +3400,7 @@
           <a:bodyPr wrap="square" lIns="0" tIns="0" rIns="0" bIns="0" rtlCol="0" anchor="ctr"/>
           <a:lstStyle/>
           <a:p>
-            <a:pPr algn="ctr" indent="0" marL="0">
+            <a:pPr marL="0" indent="0" algn="ctr">
               <a:buNone/>
             </a:pPr>
             <a:r>
@@ -3676,6 +3440,13 @@
             <a:prstDash val="solid"/>
           </a:ln>
         </p:spPr>
+        <p:txBody>
+          <a:bodyPr/>
+          <a:lstStyle/>
+          <a:p>
+            <a:endParaRPr lang="it-IT"/>
+          </a:p>
+        </p:txBody>
       </p:sp>
       <p:sp>
         <p:nvSpPr>
@@ -3701,13 +3472,20 @@
             <a:prstDash val="solid"/>
           </a:ln>
           <a:effectLst>
-            <a:outerShdw sx="100000" sy="100000" kx="0" ky="0" algn="bl" rotWithShape="0" blurRad="101600" dist="38100" dir="8100000">
+            <a:outerShdw blurRad="101600" dist="38100" dir="8100000" algn="bl" rotWithShape="0">
               <a:srgbClr val="000000">
                 <a:alpha val="12000"/>
               </a:srgbClr>
             </a:outerShdw>
           </a:effectLst>
         </p:spPr>
+        <p:txBody>
+          <a:bodyPr/>
+          <a:lstStyle/>
+          <a:p>
+            <a:endParaRPr lang="it-IT"/>
+          </a:p>
+        </p:txBody>
       </p:sp>
       <p:sp>
         <p:nvSpPr>
@@ -3730,7 +3508,7 @@
           <a:bodyPr wrap="square" lIns="0" tIns="0" rIns="0" bIns="0" rtlCol="0" anchor="ctr"/>
           <a:lstStyle/>
           <a:p>
-            <a:pPr indent="0" marL="0">
+            <a:pPr marL="0" indent="0">
               <a:buNone/>
             </a:pPr>
             <a:r>
@@ -3769,7 +3547,7 @@
           <a:bodyPr wrap="square" lIns="0" tIns="0" rIns="0" bIns="0" rtlCol="0" anchor="ctr"/>
           <a:lstStyle/>
           <a:p>
-            <a:pPr indent="0" marL="0">
+            <a:pPr marL="0" indent="0">
               <a:buNone/>
             </a:pPr>
             <a:r>
@@ -3786,7 +3564,7 @@
             <a:endParaRPr lang="en-US" sz="1000" dirty="0"/>
           </a:p>
           <a:p>
-            <a:pPr indent="0" marL="0">
+            <a:pPr marL="0" indent="0">
               <a:buNone/>
             </a:pPr>
             <a:r>
@@ -3828,6 +3606,13 @@
             <a:prstDash val="solid"/>
           </a:ln>
         </p:spPr>
+        <p:txBody>
+          <a:bodyPr/>
+          <a:lstStyle/>
+          <a:p>
+            <a:endParaRPr lang="it-IT"/>
+          </a:p>
+        </p:txBody>
       </p:sp>
       <p:sp>
         <p:nvSpPr>
@@ -3850,7 +3635,7 @@
           <a:bodyPr wrap="square" lIns="0" tIns="0" rIns="0" bIns="0" rtlCol="0" anchor="ctr"/>
           <a:lstStyle/>
           <a:p>
-            <a:pPr algn="ctr" indent="0" marL="0">
+            <a:pPr marL="0" indent="0" algn="ctr">
               <a:buNone/>
             </a:pPr>
             <a:r>
@@ -3890,6 +3675,13 @@
             <a:prstDash val="solid"/>
           </a:ln>
         </p:spPr>
+        <p:txBody>
+          <a:bodyPr/>
+          <a:lstStyle/>
+          <a:p>
+            <a:endParaRPr lang="it-IT"/>
+          </a:p>
+        </p:txBody>
       </p:sp>
       <p:sp>
         <p:nvSpPr>
@@ -3915,13 +3707,20 @@
             <a:prstDash val="solid"/>
           </a:ln>
           <a:effectLst>
-            <a:outerShdw sx="100000" sy="100000" kx="0" ky="0" algn="bl" rotWithShape="0" blurRad="101600" dist="38100" dir="8100000">
+            <a:outerShdw blurRad="101600" dist="38100" dir="8100000" algn="bl" rotWithShape="0">
               <a:srgbClr val="000000">
                 <a:alpha val="12000"/>
               </a:srgbClr>
             </a:outerShdw>
           </a:effectLst>
         </p:spPr>
+        <p:txBody>
+          <a:bodyPr/>
+          <a:lstStyle/>
+          <a:p>
+            <a:endParaRPr lang="it-IT"/>
+          </a:p>
+        </p:txBody>
       </p:sp>
       <p:sp>
         <p:nvSpPr>
@@ -3944,7 +3743,7 @@
           <a:bodyPr wrap="square" lIns="0" tIns="0" rIns="0" bIns="0" rtlCol="0" anchor="ctr"/>
           <a:lstStyle/>
           <a:p>
-            <a:pPr indent="0" marL="0">
+            <a:pPr marL="0" indent="0">
               <a:buNone/>
             </a:pPr>
             <a:r>
@@ -3983,7 +3782,7 @@
           <a:bodyPr wrap="square" lIns="0" tIns="0" rIns="0" bIns="0" rtlCol="0" anchor="ctr"/>
           <a:lstStyle/>
           <a:p>
-            <a:pPr indent="0" marL="0">
+            <a:pPr marL="0" indent="0">
               <a:buNone/>
             </a:pPr>
             <a:r>
@@ -4000,7 +3799,7 @@
             <a:endParaRPr lang="en-US" sz="1000" dirty="0"/>
           </a:p>
           <a:p>
-            <a:pPr indent="0" marL="0">
+            <a:pPr marL="0" indent="0">
               <a:buNone/>
             </a:pPr>
             <a:r>
@@ -4042,6 +3841,13 @@
             <a:prstDash val="solid"/>
           </a:ln>
         </p:spPr>
+        <p:txBody>
+          <a:bodyPr/>
+          <a:lstStyle/>
+          <a:p>
+            <a:endParaRPr lang="it-IT"/>
+          </a:p>
+        </p:txBody>
       </p:sp>
       <p:sp>
         <p:nvSpPr>
@@ -4064,7 +3870,7 @@
           <a:bodyPr wrap="square" lIns="0" tIns="0" rIns="0" bIns="0" rtlCol="0" anchor="ctr"/>
           <a:lstStyle/>
           <a:p>
-            <a:pPr algn="ctr" indent="0" marL="0">
+            <a:pPr marL="0" indent="0" algn="ctr">
               <a:buNone/>
             </a:pPr>
             <a:r>
@@ -4104,6 +3910,13 @@
             <a:prstDash val="solid"/>
           </a:ln>
         </p:spPr>
+        <p:txBody>
+          <a:bodyPr/>
+          <a:lstStyle/>
+          <a:p>
+            <a:endParaRPr lang="it-IT"/>
+          </a:p>
+        </p:txBody>
       </p:sp>
       <p:sp>
         <p:nvSpPr>
@@ -4129,13 +3942,20 @@
             <a:prstDash val="solid"/>
           </a:ln>
           <a:effectLst>
-            <a:outerShdw sx="100000" sy="100000" kx="0" ky="0" algn="bl" rotWithShape="0" blurRad="101600" dist="38100" dir="8100000">
+            <a:outerShdw blurRad="101600" dist="38100" dir="8100000" algn="bl" rotWithShape="0">
               <a:srgbClr val="000000">
                 <a:alpha val="12000"/>
               </a:srgbClr>
             </a:outerShdw>
           </a:effectLst>
         </p:spPr>
+        <p:txBody>
+          <a:bodyPr/>
+          <a:lstStyle/>
+          <a:p>
+            <a:endParaRPr lang="it-IT"/>
+          </a:p>
+        </p:txBody>
       </p:sp>
       <p:sp>
         <p:nvSpPr>
@@ -4158,7 +3978,7 @@
           <a:bodyPr wrap="square" lIns="0" tIns="0" rIns="0" bIns="0" rtlCol="0" anchor="ctr"/>
           <a:lstStyle/>
           <a:p>
-            <a:pPr indent="0" marL="0">
+            <a:pPr marL="0" indent="0">
               <a:buNone/>
             </a:pPr>
             <a:r>
@@ -4197,7 +4017,7 @@
           <a:bodyPr wrap="square" lIns="0" tIns="0" rIns="0" bIns="0" rtlCol="0" anchor="ctr"/>
           <a:lstStyle/>
           <a:p>
-            <a:pPr indent="0" marL="0">
+            <a:pPr marL="0" indent="0">
               <a:buNone/>
             </a:pPr>
             <a:r>
@@ -4214,7 +4034,7 @@
             <a:endParaRPr lang="en-US" sz="1000" dirty="0"/>
           </a:p>
           <a:p>
-            <a:pPr indent="0" marL="0">
+            <a:pPr marL="0" indent="0">
               <a:buNone/>
             </a:pPr>
             <a:r>
@@ -4256,6 +4076,13 @@
             <a:prstDash val="solid"/>
           </a:ln>
         </p:spPr>
+        <p:txBody>
+          <a:bodyPr/>
+          <a:lstStyle/>
+          <a:p>
+            <a:endParaRPr lang="it-IT"/>
+          </a:p>
+        </p:txBody>
       </p:sp>
       <p:sp>
         <p:nvSpPr>
@@ -4278,7 +4105,7 @@
           <a:bodyPr wrap="square" lIns="0" tIns="0" rIns="0" bIns="0" rtlCol="0" anchor="ctr"/>
           <a:lstStyle/>
           <a:p>
-            <a:pPr algn="ctr" indent="0" marL="0">
+            <a:pPr marL="0" indent="0" algn="ctr">
               <a:buNone/>
             </a:pPr>
             <a:r>
@@ -4320,13 +4147,20 @@
             <a:prstDash val="solid"/>
           </a:ln>
           <a:effectLst>
-            <a:outerShdw sx="100000" sy="100000" kx="0" ky="0" algn="bl" rotWithShape="0" blurRad="101600" dist="38100" dir="8100000">
+            <a:outerShdw blurRad="101600" dist="38100" dir="8100000" algn="bl" rotWithShape="0">
               <a:srgbClr val="000000">
                 <a:alpha val="12000"/>
               </a:srgbClr>
             </a:outerShdw>
           </a:effectLst>
         </p:spPr>
+        <p:txBody>
+          <a:bodyPr/>
+          <a:lstStyle/>
+          <a:p>
+            <a:endParaRPr lang="it-IT"/>
+          </a:p>
+        </p:txBody>
       </p:sp>
       <p:sp>
         <p:nvSpPr>
@@ -4349,7 +4183,7 @@
           <a:bodyPr wrap="square" lIns="0" tIns="0" rIns="0" bIns="0" rtlCol="0" anchor="ctr"/>
           <a:lstStyle/>
           <a:p>
-            <a:pPr indent="0" marL="0">
+            <a:pPr marL="0" indent="0">
               <a:buNone/>
             </a:pPr>
             <a:r>
@@ -4388,7 +4222,7 @@
           <a:bodyPr wrap="square" lIns="0" tIns="0" rIns="0" bIns="0" rtlCol="0" anchor="ctr"/>
           <a:lstStyle/>
           <a:p>
-            <a:pPr indent="0" marL="0">
+            <a:pPr marL="0" indent="0">
               <a:buNone/>
             </a:pPr>
             <a:r>
@@ -4405,7 +4239,7 @@
             <a:endParaRPr lang="en-US" sz="1000" dirty="0"/>
           </a:p>
           <a:p>
-            <a:pPr indent="0" marL="0">
+            <a:pPr marL="0" indent="0">
               <a:buNone/>
             </a:pPr>
             <a:r>
@@ -4439,6 +4273,7 @@
         <a:solidFill>
           <a:srgbClr val="FFFFFF"/>
         </a:solidFill>
+        <a:effectLst/>
       </p:bgPr>
     </p:bg>
     <p:spTree>
@@ -4481,6 +4316,13 @@
             <a:prstDash val="solid"/>
           </a:ln>
         </p:spPr>
+        <p:txBody>
+          <a:bodyPr/>
+          <a:lstStyle/>
+          <a:p>
+            <a:endParaRPr lang="it-IT"/>
+          </a:p>
+        </p:txBody>
       </p:sp>
       <p:sp>
         <p:nvSpPr>
@@ -4503,7 +4345,7 @@
           <a:bodyPr wrap="square" lIns="0" tIns="0" rIns="0" bIns="0" rtlCol="0" anchor="ctr"/>
           <a:lstStyle/>
           <a:p>
-            <a:pPr algn="ctr" indent="0" marL="0">
+            <a:pPr marL="0" indent="0" algn="ctr">
               <a:buNone/>
             </a:pPr>
             <a:r>
@@ -4542,7 +4384,7 @@
           <a:bodyPr wrap="square" lIns="0" tIns="0" rIns="0" bIns="0" rtlCol="0" anchor="ctr"/>
           <a:lstStyle/>
           <a:p>
-            <a:pPr indent="0" marL="0">
+            <a:pPr marL="0" indent="0">
               <a:buNone/>
             </a:pPr>
             <a:r>
@@ -4584,6 +4426,13 @@
             <a:prstDash val="solid"/>
           </a:ln>
         </p:spPr>
+        <p:txBody>
+          <a:bodyPr/>
+          <a:lstStyle/>
+          <a:p>
+            <a:endParaRPr lang="it-IT"/>
+          </a:p>
+        </p:txBody>
       </p:sp>
       <p:sp>
         <p:nvSpPr>
@@ -4606,7 +4455,7 @@
           <a:bodyPr wrap="square" rtlCol="0" anchor="ctr"/>
           <a:lstStyle/>
           <a:p>
-            <a:pPr algn="r" indent="0" marL="0">
+            <a:pPr marL="0" indent="0" algn="r">
               <a:buNone/>
             </a:pPr>
             <a:r>
@@ -4648,13 +4497,20 @@
             <a:prstDash val="solid"/>
           </a:ln>
           <a:effectLst>
-            <a:outerShdw sx="100000" sy="100000" kx="0" ky="0" algn="bl" rotWithShape="0" blurRad="101600" dist="38100" dir="8100000">
+            <a:outerShdw blurRad="101600" dist="38100" dir="8100000" algn="bl" rotWithShape="0">
               <a:srgbClr val="000000">
                 <a:alpha val="12000"/>
               </a:srgbClr>
             </a:outerShdw>
           </a:effectLst>
         </p:spPr>
+        <p:txBody>
+          <a:bodyPr/>
+          <a:lstStyle/>
+          <a:p>
+            <a:endParaRPr lang="it-IT"/>
+          </a:p>
+        </p:txBody>
       </p:sp>
       <p:sp>
         <p:nvSpPr>
@@ -4677,7 +4533,7 @@
           <a:bodyPr wrap="square" lIns="0" tIns="0" rIns="0" bIns="0" rtlCol="0" anchor="t"/>
           <a:lstStyle/>
           <a:p>
-            <a:pPr indent="0" marL="0">
+            <a:pPr marL="0" indent="0">
               <a:buNone/>
             </a:pPr>
             <a:r>
@@ -4694,7 +4550,7 @@
             <a:endParaRPr lang="en-US" sz="1100" dirty="0"/>
           </a:p>
           <a:p>
-            <a:pPr indent="0" marL="0">
+            <a:pPr marL="0" indent="0">
               <a:buNone/>
             </a:pPr>
             <a:r>
@@ -4711,7 +4567,7 @@
             <a:endParaRPr lang="en-US" sz="1100" dirty="0"/>
           </a:p>
           <a:p>
-            <a:pPr indent="0" marL="0">
+            <a:pPr marL="0" indent="0">
               <a:buNone/>
             </a:pPr>
             <a:r>
@@ -4728,7 +4584,7 @@
             <a:endParaRPr lang="en-US" sz="1100" dirty="0"/>
           </a:p>
           <a:p>
-            <a:pPr indent="0" marL="0">
+            <a:pPr marL="0" indent="0">
               <a:buNone/>
             </a:pPr>
             <a:r>
@@ -4745,7 +4601,7 @@
             <a:endParaRPr lang="en-US" sz="1100" dirty="0"/>
           </a:p>
           <a:p>
-            <a:pPr indent="0" marL="0">
+            <a:pPr marL="0" indent="0">
               <a:buNone/>
             </a:pPr>
             <a:r>
@@ -4762,7 +4618,7 @@
             <a:endParaRPr lang="en-US" sz="1100" dirty="0"/>
           </a:p>
           <a:p>
-            <a:pPr indent="0" marL="0">
+            <a:pPr marL="0" indent="0">
               <a:buNone/>
             </a:pPr>
             <a:r>
@@ -4779,13 +4635,13 @@
             <a:endParaRPr lang="en-US" sz="1100" dirty="0"/>
           </a:p>
           <a:p>
-            <a:pPr indent="0" marL="0">
+            <a:pPr marL="0" indent="0">
               <a:buNone/>
             </a:pPr>
             <a:endParaRPr lang="en-US" sz="1100" dirty="0"/>
           </a:p>
           <a:p>
-            <a:pPr indent="0" marL="0">
+            <a:pPr marL="0" indent="0">
               <a:buNone/>
             </a:pPr>
             <a:r>
@@ -4802,7 +4658,7 @@
             <a:endParaRPr lang="en-US" sz="1100" dirty="0"/>
           </a:p>
           <a:p>
-            <a:pPr indent="0" marL="0">
+            <a:pPr marL="0" indent="0">
               <a:buNone/>
             </a:pPr>
             <a:r>
@@ -4819,7 +4675,7 @@
             <a:endParaRPr lang="en-US" sz="1100" dirty="0"/>
           </a:p>
           <a:p>
-            <a:pPr indent="0" marL="0">
+            <a:pPr marL="0" indent="0">
               <a:buNone/>
             </a:pPr>
             <a:r>
@@ -4859,6 +4715,13 @@
             <a:prstDash val="dash"/>
           </a:ln>
         </p:spPr>
+        <p:txBody>
+          <a:bodyPr/>
+          <a:lstStyle/>
+          <a:p>
+            <a:endParaRPr lang="it-IT"/>
+          </a:p>
+        </p:txBody>
       </p:sp>
       <p:sp>
         <p:nvSpPr>
@@ -4881,7 +4744,7 @@
           <a:bodyPr wrap="square" lIns="0" tIns="0" rIns="0" bIns="0" rtlCol="0" anchor="ctr"/>
           <a:lstStyle/>
           <a:p>
-            <a:pPr indent="0" marL="0">
+            <a:pPr marL="0" indent="0">
               <a:buNone/>
             </a:pPr>
             <a:r>
@@ -4921,6 +4784,13 @@
             <a:prstDash val="dash"/>
           </a:ln>
         </p:spPr>
+        <p:txBody>
+          <a:bodyPr/>
+          <a:lstStyle/>
+          <a:p>
+            <a:endParaRPr lang="it-IT"/>
+          </a:p>
+        </p:txBody>
       </p:sp>
       <p:sp>
         <p:nvSpPr>
@@ -4943,7 +4813,7 @@
           <a:bodyPr wrap="square" lIns="0" tIns="0" rIns="0" bIns="0" rtlCol="0" anchor="ctr"/>
           <a:lstStyle/>
           <a:p>
-            <a:pPr indent="0" marL="0">
+            <a:pPr marL="0" indent="0">
               <a:buNone/>
             </a:pPr>
             <a:r>
@@ -4960,7 +4830,7 @@
             <a:endParaRPr lang="en-US" sz="1000" dirty="0"/>
           </a:p>
           <a:p>
-            <a:pPr indent="0" marL="0">
+            <a:pPr marL="0" indent="0">
               <a:buNone/>
             </a:pPr>
             <a:r>
@@ -5000,6 +4870,13 @@
             <a:prstDash val="dash"/>
           </a:ln>
         </p:spPr>
+        <p:txBody>
+          <a:bodyPr/>
+          <a:lstStyle/>
+          <a:p>
+            <a:endParaRPr lang="it-IT"/>
+          </a:p>
+        </p:txBody>
       </p:sp>
       <p:sp>
         <p:nvSpPr>
@@ -5022,7 +4899,7 @@
           <a:bodyPr wrap="square" lIns="0" tIns="0" rIns="0" bIns="0" rtlCol="0" anchor="ctr"/>
           <a:lstStyle/>
           <a:p>
-            <a:pPr indent="0" marL="0">
+            <a:pPr marL="0" indent="0">
               <a:buNone/>
             </a:pPr>
             <a:r>
@@ -5062,6 +4939,13 @@
             <a:prstDash val="dash"/>
           </a:ln>
         </p:spPr>
+        <p:txBody>
+          <a:bodyPr/>
+          <a:lstStyle/>
+          <a:p>
+            <a:endParaRPr lang="it-IT"/>
+          </a:p>
+        </p:txBody>
       </p:sp>
       <p:sp>
         <p:nvSpPr>
@@ -5084,7 +4968,7 @@
           <a:bodyPr wrap="square" lIns="0" tIns="0" rIns="0" bIns="0" rtlCol="0" anchor="ctr"/>
           <a:lstStyle/>
           <a:p>
-            <a:pPr indent="0" marL="0">
+            <a:pPr marL="0" indent="0">
               <a:buNone/>
             </a:pPr>
             <a:r>
@@ -5101,7 +4985,7 @@
             <a:endParaRPr lang="en-US" sz="1000" dirty="0"/>
           </a:p>
           <a:p>
-            <a:pPr indent="0" marL="0">
+            <a:pPr marL="0" indent="0">
               <a:buNone/>
             </a:pPr>
             <a:r>
@@ -5135,6 +5019,7 @@
         <a:solidFill>
           <a:srgbClr val="FFFFFF"/>
         </a:solidFill>
+        <a:effectLst/>
       </p:bgPr>
     </p:bg>
     <p:spTree>
@@ -5177,6 +5062,13 @@
             <a:prstDash val="solid"/>
           </a:ln>
         </p:spPr>
+        <p:txBody>
+          <a:bodyPr/>
+          <a:lstStyle/>
+          <a:p>
+            <a:endParaRPr lang="it-IT"/>
+          </a:p>
+        </p:txBody>
       </p:sp>
       <p:sp>
         <p:nvSpPr>
@@ -5199,7 +5091,7 @@
           <a:bodyPr wrap="square" lIns="0" tIns="0" rIns="0" bIns="0" rtlCol="0" anchor="ctr"/>
           <a:lstStyle/>
           <a:p>
-            <a:pPr algn="ctr" indent="0" marL="0">
+            <a:pPr marL="0" indent="0" algn="ctr">
               <a:buNone/>
             </a:pPr>
             <a:r>
@@ -5238,7 +5130,7 @@
           <a:bodyPr wrap="square" lIns="0" tIns="0" rIns="0" bIns="0" rtlCol="0" anchor="ctr"/>
           <a:lstStyle/>
           <a:p>
-            <a:pPr indent="0" marL="0">
+            <a:pPr marL="0" indent="0">
               <a:buNone/>
             </a:pPr>
             <a:r>
@@ -5280,6 +5172,13 @@
             <a:prstDash val="solid"/>
           </a:ln>
         </p:spPr>
+        <p:txBody>
+          <a:bodyPr/>
+          <a:lstStyle/>
+          <a:p>
+            <a:endParaRPr lang="it-IT"/>
+          </a:p>
+        </p:txBody>
       </p:sp>
       <p:sp>
         <p:nvSpPr>
@@ -5302,7 +5201,7 @@
           <a:bodyPr wrap="square" rtlCol="0" anchor="ctr"/>
           <a:lstStyle/>
           <a:p>
-            <a:pPr algn="r" indent="0" marL="0">
+            <a:pPr marL="0" indent="0" algn="r">
               <a:buNone/>
             </a:pPr>
             <a:r>
@@ -5341,7 +5240,7 @@
           <a:bodyPr wrap="square" lIns="0" tIns="0" rIns="0" bIns="0" rtlCol="0" anchor="ctr"/>
           <a:lstStyle/>
           <a:p>
-            <a:pPr indent="0" marL="0">
+            <a:pPr marL="0" indent="0">
               <a:buNone/>
             </a:pPr>
             <a:r>
@@ -5383,13 +5282,20 @@
             <a:prstDash val="solid"/>
           </a:ln>
           <a:effectLst>
-            <a:outerShdw sx="100000" sy="100000" kx="0" ky="0" algn="bl" rotWithShape="0" blurRad="101600" dist="38100" dir="8100000">
+            <a:outerShdw blurRad="101600" dist="38100" dir="8100000" algn="bl" rotWithShape="0">
               <a:srgbClr val="000000">
                 <a:alpha val="12000"/>
               </a:srgbClr>
             </a:outerShdw>
           </a:effectLst>
         </p:spPr>
+        <p:txBody>
+          <a:bodyPr/>
+          <a:lstStyle/>
+          <a:p>
+            <a:endParaRPr lang="it-IT"/>
+          </a:p>
+        </p:txBody>
       </p:sp>
       <p:sp>
         <p:nvSpPr>
@@ -5415,6 +5321,13 @@
             <a:prstDash val="solid"/>
           </a:ln>
         </p:spPr>
+        <p:txBody>
+          <a:bodyPr/>
+          <a:lstStyle/>
+          <a:p>
+            <a:endParaRPr lang="it-IT"/>
+          </a:p>
+        </p:txBody>
       </p:sp>
       <p:sp>
         <p:nvSpPr>
@@ -5437,7 +5350,7 @@
           <a:bodyPr wrap="square" lIns="0" tIns="0" rIns="0" bIns="0" rtlCol="0" anchor="ctr"/>
           <a:lstStyle/>
           <a:p>
-            <a:pPr algn="ctr" indent="0" marL="0">
+            <a:pPr marL="0" indent="0" algn="ctr">
               <a:buNone/>
             </a:pPr>
             <a:r>
@@ -5476,7 +5389,7 @@
           <a:bodyPr wrap="square" lIns="0" tIns="0" rIns="0" bIns="0" rtlCol="0" anchor="ctr"/>
           <a:lstStyle/>
           <a:p>
-            <a:pPr indent="0" marL="0">
+            <a:pPr marL="0" indent="0">
               <a:buNone/>
             </a:pPr>
             <a:r>
@@ -5515,7 +5428,7 @@
           <a:bodyPr wrap="square" lIns="0" tIns="0" rIns="0" bIns="0" rtlCol="0" anchor="ctr"/>
           <a:lstStyle/>
           <a:p>
-            <a:pPr indent="0" marL="0">
+            <a:pPr marL="0" indent="0">
               <a:buNone/>
             </a:pPr>
             <a:r>
@@ -5554,7 +5467,7 @@
           <a:bodyPr wrap="square" lIns="0" tIns="0" rIns="0" bIns="0" rtlCol="0" anchor="ctr"/>
           <a:lstStyle/>
           <a:p>
-            <a:pPr indent="0" marL="0">
+            <a:pPr marL="0" indent="0">
               <a:buNone/>
             </a:pPr>
             <a:r>
@@ -5571,7 +5484,7 @@
             <a:endParaRPr lang="en-US" sz="1000" dirty="0"/>
           </a:p>
           <a:p>
-            <a:pPr indent="0" marL="0">
+            <a:pPr marL="0" indent="0">
               <a:buNone/>
             </a:pPr>
             <a:r>
@@ -5613,13 +5526,20 @@
             <a:prstDash val="solid"/>
           </a:ln>
           <a:effectLst>
-            <a:outerShdw sx="100000" sy="100000" kx="0" ky="0" algn="bl" rotWithShape="0" blurRad="101600" dist="38100" dir="8100000">
+            <a:outerShdw blurRad="101600" dist="38100" dir="8100000" algn="bl" rotWithShape="0">
               <a:srgbClr val="000000">
                 <a:alpha val="12000"/>
               </a:srgbClr>
             </a:outerShdw>
           </a:effectLst>
         </p:spPr>
+        <p:txBody>
+          <a:bodyPr/>
+          <a:lstStyle/>
+          <a:p>
+            <a:endParaRPr lang="it-IT"/>
+          </a:p>
+        </p:txBody>
       </p:sp>
       <p:sp>
         <p:nvSpPr>
@@ -5645,6 +5565,13 @@
             <a:prstDash val="solid"/>
           </a:ln>
         </p:spPr>
+        <p:txBody>
+          <a:bodyPr/>
+          <a:lstStyle/>
+          <a:p>
+            <a:endParaRPr lang="it-IT"/>
+          </a:p>
+        </p:txBody>
       </p:sp>
       <p:sp>
         <p:nvSpPr>
@@ -5667,7 +5594,7 @@
           <a:bodyPr wrap="square" lIns="0" tIns="0" rIns="0" bIns="0" rtlCol="0" anchor="ctr"/>
           <a:lstStyle/>
           <a:p>
-            <a:pPr algn="ctr" indent="0" marL="0">
+            <a:pPr marL="0" indent="0" algn="ctr">
               <a:buNone/>
             </a:pPr>
             <a:r>
@@ -5706,7 +5633,7 @@
           <a:bodyPr wrap="square" lIns="0" tIns="0" rIns="0" bIns="0" rtlCol="0" anchor="ctr"/>
           <a:lstStyle/>
           <a:p>
-            <a:pPr indent="0" marL="0">
+            <a:pPr marL="0" indent="0">
               <a:buNone/>
             </a:pPr>
             <a:r>
@@ -5745,7 +5672,7 @@
           <a:bodyPr wrap="square" lIns="0" tIns="0" rIns="0" bIns="0" rtlCol="0" anchor="ctr"/>
           <a:lstStyle/>
           <a:p>
-            <a:pPr indent="0" marL="0">
+            <a:pPr marL="0" indent="0">
               <a:buNone/>
             </a:pPr>
             <a:r>
@@ -5784,7 +5711,7 @@
           <a:bodyPr wrap="square" lIns="0" tIns="0" rIns="0" bIns="0" rtlCol="0" anchor="ctr"/>
           <a:lstStyle/>
           <a:p>
-            <a:pPr indent="0" marL="0">
+            <a:pPr marL="0" indent="0">
               <a:buNone/>
             </a:pPr>
             <a:r>
@@ -5801,7 +5728,7 @@
             <a:endParaRPr lang="en-US" sz="1000" dirty="0"/>
           </a:p>
           <a:p>
-            <a:pPr indent="0" marL="0">
+            <a:pPr marL="0" indent="0">
               <a:buNone/>
             </a:pPr>
             <a:r>
@@ -5843,13 +5770,20 @@
             <a:prstDash val="solid"/>
           </a:ln>
           <a:effectLst>
-            <a:outerShdw sx="100000" sy="100000" kx="0" ky="0" algn="bl" rotWithShape="0" blurRad="101600" dist="38100" dir="8100000">
+            <a:outerShdw blurRad="101600" dist="38100" dir="8100000" algn="bl" rotWithShape="0">
               <a:srgbClr val="000000">
                 <a:alpha val="12000"/>
               </a:srgbClr>
             </a:outerShdw>
           </a:effectLst>
         </p:spPr>
+        <p:txBody>
+          <a:bodyPr/>
+          <a:lstStyle/>
+          <a:p>
+            <a:endParaRPr lang="it-IT"/>
+          </a:p>
+        </p:txBody>
       </p:sp>
       <p:sp>
         <p:nvSpPr>
@@ -5875,6 +5809,13 @@
             <a:prstDash val="solid"/>
           </a:ln>
         </p:spPr>
+        <p:txBody>
+          <a:bodyPr/>
+          <a:lstStyle/>
+          <a:p>
+            <a:endParaRPr lang="it-IT"/>
+          </a:p>
+        </p:txBody>
       </p:sp>
       <p:sp>
         <p:nvSpPr>
@@ -5897,7 +5838,7 @@
           <a:bodyPr wrap="square" lIns="0" tIns="0" rIns="0" bIns="0" rtlCol="0" anchor="ctr"/>
           <a:lstStyle/>
           <a:p>
-            <a:pPr algn="ctr" indent="0" marL="0">
+            <a:pPr marL="0" indent="0" algn="ctr">
               <a:buNone/>
             </a:pPr>
             <a:r>
@@ -5936,7 +5877,7 @@
           <a:bodyPr wrap="square" lIns="0" tIns="0" rIns="0" bIns="0" rtlCol="0" anchor="ctr"/>
           <a:lstStyle/>
           <a:p>
-            <a:pPr indent="0" marL="0">
+            <a:pPr marL="0" indent="0">
               <a:buNone/>
             </a:pPr>
             <a:r>
@@ -5975,7 +5916,7 @@
           <a:bodyPr wrap="square" lIns="0" tIns="0" rIns="0" bIns="0" rtlCol="0" anchor="ctr"/>
           <a:lstStyle/>
           <a:p>
-            <a:pPr indent="0" marL="0">
+            <a:pPr marL="0" indent="0">
               <a:buNone/>
             </a:pPr>
             <a:r>
@@ -6014,7 +5955,7 @@
           <a:bodyPr wrap="square" lIns="0" tIns="0" rIns="0" bIns="0" rtlCol="0" anchor="ctr"/>
           <a:lstStyle/>
           <a:p>
-            <a:pPr indent="0" marL="0">
+            <a:pPr marL="0" indent="0">
               <a:buNone/>
             </a:pPr>
             <a:r>
@@ -6031,7 +5972,7 @@
             <a:endParaRPr lang="en-US" sz="1000" dirty="0"/>
           </a:p>
           <a:p>
-            <a:pPr indent="0" marL="0">
+            <a:pPr marL="0" indent="0">
               <a:buNone/>
             </a:pPr>
             <a:r>
@@ -6048,7 +5989,7 @@
             <a:endParaRPr lang="en-US" sz="1000" dirty="0"/>
           </a:p>
           <a:p>
-            <a:pPr indent="0" marL="0">
+            <a:pPr marL="0" indent="0">
               <a:buNone/>
             </a:pPr>
             <a:r>
@@ -6090,13 +6031,20 @@
             <a:prstDash val="solid"/>
           </a:ln>
           <a:effectLst>
-            <a:outerShdw sx="100000" sy="100000" kx="0" ky="0" algn="bl" rotWithShape="0" blurRad="101600" dist="38100" dir="8100000">
+            <a:outerShdw blurRad="101600" dist="38100" dir="8100000" algn="bl" rotWithShape="0">
               <a:srgbClr val="000000">
                 <a:alpha val="12000"/>
               </a:srgbClr>
             </a:outerShdw>
           </a:effectLst>
         </p:spPr>
+        <p:txBody>
+          <a:bodyPr/>
+          <a:lstStyle/>
+          <a:p>
+            <a:endParaRPr lang="it-IT"/>
+          </a:p>
+        </p:txBody>
       </p:sp>
       <p:sp>
         <p:nvSpPr>
@@ -6122,6 +6070,13 @@
             <a:prstDash val="solid"/>
           </a:ln>
         </p:spPr>
+        <p:txBody>
+          <a:bodyPr/>
+          <a:lstStyle/>
+          <a:p>
+            <a:endParaRPr lang="it-IT"/>
+          </a:p>
+        </p:txBody>
       </p:sp>
       <p:sp>
         <p:nvSpPr>
@@ -6144,7 +6099,7 @@
           <a:bodyPr wrap="square" lIns="0" tIns="0" rIns="0" bIns="0" rtlCol="0" anchor="ctr"/>
           <a:lstStyle/>
           <a:p>
-            <a:pPr algn="ctr" indent="0" marL="0">
+            <a:pPr marL="0" indent="0" algn="ctr">
               <a:buNone/>
             </a:pPr>
             <a:r>
@@ -6183,7 +6138,7 @@
           <a:bodyPr wrap="square" lIns="0" tIns="0" rIns="0" bIns="0" rtlCol="0" anchor="ctr"/>
           <a:lstStyle/>
           <a:p>
-            <a:pPr indent="0" marL="0">
+            <a:pPr marL="0" indent="0">
               <a:buNone/>
             </a:pPr>
             <a:r>
@@ -6222,7 +6177,7 @@
           <a:bodyPr wrap="square" lIns="0" tIns="0" rIns="0" bIns="0" rtlCol="0" anchor="ctr"/>
           <a:lstStyle/>
           <a:p>
-            <a:pPr indent="0" marL="0">
+            <a:pPr marL="0" indent="0">
               <a:buNone/>
             </a:pPr>
             <a:r>
@@ -6261,7 +6216,7 @@
           <a:bodyPr wrap="square" lIns="0" tIns="0" rIns="0" bIns="0" rtlCol="0" anchor="ctr"/>
           <a:lstStyle/>
           <a:p>
-            <a:pPr indent="0" marL="0">
+            <a:pPr marL="0" indent="0">
               <a:buNone/>
             </a:pPr>
             <a:r>
@@ -6278,7 +6233,7 @@
             <a:endParaRPr lang="en-US" sz="1000" dirty="0"/>
           </a:p>
           <a:p>
-            <a:pPr indent="0" marL="0">
+            <a:pPr marL="0" indent="0">
               <a:buNone/>
             </a:pPr>
             <a:r>
@@ -6295,7 +6250,7 @@
             <a:endParaRPr lang="en-US" sz="1000" dirty="0"/>
           </a:p>
           <a:p>
-            <a:pPr indent="0" marL="0">
+            <a:pPr marL="0" indent="0">
               <a:buNone/>
             </a:pPr>
             <a:r>
@@ -6329,6 +6284,7 @@
         <a:solidFill>
           <a:srgbClr val="FFFFFF"/>
         </a:solidFill>
+        <a:effectLst/>
       </p:bgPr>
     </p:bg>
     <p:spTree>
@@ -6371,6 +6327,13 @@
             <a:prstDash val="solid"/>
           </a:ln>
         </p:spPr>
+        <p:txBody>
+          <a:bodyPr/>
+          <a:lstStyle/>
+          <a:p>
+            <a:endParaRPr lang="it-IT"/>
+          </a:p>
+        </p:txBody>
       </p:sp>
       <p:sp>
         <p:nvSpPr>
@@ -6393,7 +6356,7 @@
           <a:bodyPr wrap="square" lIns="0" tIns="0" rIns="0" bIns="0" rtlCol="0" anchor="ctr"/>
           <a:lstStyle/>
           <a:p>
-            <a:pPr algn="ctr" indent="0" marL="0">
+            <a:pPr marL="0" indent="0" algn="ctr">
               <a:buNone/>
             </a:pPr>
             <a:r>
@@ -6432,7 +6395,7 @@
           <a:bodyPr wrap="square" lIns="0" tIns="0" rIns="0" bIns="0" rtlCol="0" anchor="ctr"/>
           <a:lstStyle/>
           <a:p>
-            <a:pPr indent="0" marL="0">
+            <a:pPr marL="0" indent="0">
               <a:buNone/>
             </a:pPr>
             <a:r>
@@ -6474,6 +6437,13 @@
             <a:prstDash val="solid"/>
           </a:ln>
         </p:spPr>
+        <p:txBody>
+          <a:bodyPr/>
+          <a:lstStyle/>
+          <a:p>
+            <a:endParaRPr lang="it-IT"/>
+          </a:p>
+        </p:txBody>
       </p:sp>
       <p:sp>
         <p:nvSpPr>
@@ -6496,7 +6466,7 @@
           <a:bodyPr wrap="square" rtlCol="0" anchor="ctr"/>
           <a:lstStyle/>
           <a:p>
-            <a:pPr algn="r" indent="0" marL="0">
+            <a:pPr marL="0" indent="0" algn="r">
               <a:buNone/>
             </a:pPr>
             <a:r>
@@ -6538,13 +6508,20 @@
             <a:prstDash val="solid"/>
           </a:ln>
           <a:effectLst>
-            <a:outerShdw sx="100000" sy="100000" kx="0" ky="0" algn="bl" rotWithShape="0" blurRad="101600" dist="38100" dir="8100000">
+            <a:outerShdw blurRad="101600" dist="38100" dir="8100000" algn="bl" rotWithShape="0">
               <a:srgbClr val="000000">
                 <a:alpha val="12000"/>
               </a:srgbClr>
             </a:outerShdw>
           </a:effectLst>
         </p:spPr>
+        <p:txBody>
+          <a:bodyPr/>
+          <a:lstStyle/>
+          <a:p>
+            <a:endParaRPr lang="it-IT"/>
+          </a:p>
+        </p:txBody>
       </p:sp>
       <p:sp>
         <p:nvSpPr>
@@ -6567,7 +6544,7 @@
           <a:bodyPr wrap="square" lIns="0" tIns="0" rIns="0" bIns="0" rtlCol="0" anchor="ctr"/>
           <a:lstStyle/>
           <a:p>
-            <a:pPr indent="0" marL="0">
+            <a:pPr marL="0" indent="0">
               <a:buNone/>
             </a:pPr>
             <a:r>
@@ -6606,7 +6583,7 @@
           <a:bodyPr wrap="square" lIns="0" tIns="0" rIns="0" bIns="0" rtlCol="0" anchor="ctr"/>
           <a:lstStyle/>
           <a:p>
-            <a:pPr indent="0" marL="0">
+            <a:pPr marL="0" indent="0">
               <a:buNone/>
             </a:pPr>
             <a:r>
@@ -6620,9 +6597,6 @@
               </a:rPr>
               <a:t>candidateId: </a:t>
             </a:r>
-            <a:pPr indent="0" marL="0">
-              <a:buNone/>
-            </a:pPr>
             <a:r>
               <a:rPr lang="en-US" sz="1100" b="1" dirty="0">
                 <a:solidFill>
@@ -6634,9 +6608,6 @@
               </a:rPr>
               <a:t>cand-001</a:t>
             </a:r>
-            <a:pPr indent="0" marL="0">
-              <a:buNone/>
-            </a:pPr>
             <a:r>
               <a:rPr lang="en-US" sz="1100" dirty="0">
                 <a:solidFill>
@@ -6651,7 +6622,7 @@
             <a:endParaRPr lang="en-US" sz="1100" dirty="0"/>
           </a:p>
           <a:p>
-            <a:pPr indent="0" marL="0">
+            <a:pPr marL="0" indent="0">
               <a:buNone/>
             </a:pPr>
             <a:r>
@@ -6665,9 +6636,6 @@
               </a:rPr>
               <a:t>jobId: </a:t>
             </a:r>
-            <a:pPr indent="0" marL="0">
-              <a:buNone/>
-            </a:pPr>
             <a:r>
               <a:rPr lang="en-US" sz="1100" b="1" dirty="0">
                 <a:solidFill>
@@ -6679,9 +6647,6 @@
               </a:rPr>
               <a:t>job-001</a:t>
             </a:r>
-            <a:pPr indent="0" marL="0">
-              <a:buNone/>
-            </a:pPr>
             <a:r>
               <a:rPr lang="en-US" sz="1100" dirty="0">
                 <a:solidFill>
@@ -6696,7 +6661,7 @@
             <a:endParaRPr lang="en-US" sz="1100" dirty="0"/>
           </a:p>
           <a:p>
-            <a:pPr indent="0" marL="0">
+            <a:pPr marL="0" indent="0">
               <a:buNone/>
             </a:pPr>
             <a:r>
@@ -6710,9 +6675,6 @@
               </a:rPr>
               <a:t>source: </a:t>
             </a:r>
-            <a:pPr indent="0" marL="0">
-              <a:buNone/>
-            </a:pPr>
             <a:r>
               <a:rPr lang="en-US" sz="1100" b="1" dirty="0">
                 <a:solidFill>
@@ -6752,13 +6714,20 @@
             <a:prstDash val="solid"/>
           </a:ln>
           <a:effectLst>
-            <a:outerShdw sx="100000" sy="100000" kx="0" ky="0" algn="bl" rotWithShape="0" blurRad="101600" dist="38100" dir="8100000">
+            <a:outerShdw blurRad="101600" dist="38100" dir="8100000" algn="bl" rotWithShape="0">
               <a:srgbClr val="000000">
                 <a:alpha val="12000"/>
               </a:srgbClr>
             </a:outerShdw>
           </a:effectLst>
         </p:spPr>
+        <p:txBody>
+          <a:bodyPr/>
+          <a:lstStyle/>
+          <a:p>
+            <a:endParaRPr lang="it-IT"/>
+          </a:p>
+        </p:txBody>
       </p:sp>
       <p:sp>
         <p:nvSpPr>
@@ -6781,7 +6750,7 @@
           <a:bodyPr wrap="square" lIns="0" tIns="0" rIns="0" bIns="0" rtlCol="0" anchor="ctr"/>
           <a:lstStyle/>
           <a:p>
-            <a:pPr indent="0" marL="0">
+            <a:pPr marL="0" indent="0">
               <a:buNone/>
             </a:pPr>
             <a:r>
@@ -6820,7 +6789,7 @@
           <a:bodyPr wrap="square" lIns="0" tIns="0" rIns="0" bIns="0" rtlCol="0" anchor="ctr"/>
           <a:lstStyle/>
           <a:p>
-            <a:pPr indent="0" marL="0">
+            <a:pPr marL="0" indent="0">
               <a:buNone/>
             </a:pPr>
             <a:r>
@@ -6859,7 +6828,7 @@
           <a:bodyPr wrap="square" lIns="0" tIns="0" rIns="0" bIns="0" rtlCol="0" anchor="ctr"/>
           <a:lstStyle/>
           <a:p>
-            <a:pPr indent="0" marL="0">
+            <a:pPr marL="0" indent="0">
               <a:buNone/>
             </a:pPr>
             <a:r>
@@ -6901,13 +6870,20 @@
             <a:prstDash val="solid"/>
           </a:ln>
           <a:effectLst>
-            <a:outerShdw sx="100000" sy="100000" kx="0" ky="0" algn="bl" rotWithShape="0" blurRad="101600" dist="38100" dir="8100000">
+            <a:outerShdw blurRad="101600" dist="38100" dir="8100000" algn="bl" rotWithShape="0">
               <a:srgbClr val="000000">
                 <a:alpha val="12000"/>
               </a:srgbClr>
             </a:outerShdw>
           </a:effectLst>
         </p:spPr>
+        <p:txBody>
+          <a:bodyPr/>
+          <a:lstStyle/>
+          <a:p>
+            <a:endParaRPr lang="it-IT"/>
+          </a:p>
+        </p:txBody>
       </p:sp>
       <p:sp>
         <p:nvSpPr>
@@ -6933,6 +6909,13 @@
             <a:prstDash val="solid"/>
           </a:ln>
         </p:spPr>
+        <p:txBody>
+          <a:bodyPr/>
+          <a:lstStyle/>
+          <a:p>
+            <a:endParaRPr lang="it-IT"/>
+          </a:p>
+        </p:txBody>
       </p:sp>
       <p:sp>
         <p:nvSpPr>
@@ -6955,7 +6938,7 @@
           <a:bodyPr wrap="square" lIns="0" tIns="0" rIns="0" bIns="0" rtlCol="0" anchor="ctr"/>
           <a:lstStyle/>
           <a:p>
-            <a:pPr algn="ctr" indent="0" marL="0">
+            <a:pPr marL="0" indent="0" algn="ctr">
               <a:buNone/>
             </a:pPr>
             <a:r>
@@ -6994,7 +6977,7 @@
           <a:bodyPr wrap="square" lIns="0" tIns="0" rIns="0" bIns="0" rtlCol="0" anchor="ctr"/>
           <a:lstStyle/>
           <a:p>
-            <a:pPr algn="ctr" indent="0" marL="0">
+            <a:pPr marL="0" indent="0" algn="ctr">
               <a:buNone/>
             </a:pPr>
             <a:r>
@@ -7033,7 +7016,7 @@
           <a:bodyPr wrap="square" lIns="0" tIns="0" rIns="0" bIns="0" rtlCol="0" anchor="ctr"/>
           <a:lstStyle/>
           <a:p>
-            <a:pPr algn="ctr" indent="0" marL="0">
+            <a:pPr marL="0" indent="0" algn="ctr">
               <a:buNone/>
             </a:pPr>
             <a:r>
@@ -7072,7 +7055,7 @@
           <a:bodyPr wrap="square" lIns="0" tIns="0" rIns="0" bIns="0" rtlCol="0" anchor="ctr"/>
           <a:lstStyle/>
           <a:p>
-            <a:pPr algn="ctr" indent="0" marL="0">
+            <a:pPr marL="0" indent="0" algn="ctr">
               <a:buNone/>
             </a:pPr>
             <a:r>
@@ -7089,7 +7072,7 @@
             <a:endParaRPr lang="en-US" sz="1000" dirty="0"/>
           </a:p>
           <a:p>
-            <a:pPr algn="ctr" indent="0" marL="0">
+            <a:pPr marL="0" indent="0" algn="ctr">
               <a:buNone/>
             </a:pPr>
             <a:r>
@@ -7128,7 +7111,7 @@
           <a:bodyPr wrap="square" lIns="0" tIns="0" rIns="0" bIns="0" rtlCol="0" anchor="ctr"/>
           <a:lstStyle/>
           <a:p>
-            <a:pPr indent="0" marL="0">
+            <a:pPr marL="0" indent="0">
               <a:buNone/>
             </a:pPr>
             <a:r>
@@ -7167,7 +7150,7 @@
           <a:bodyPr wrap="square" lIns="0" tIns="0" rIns="0" bIns="0" rtlCol="0" anchor="ctr"/>
           <a:lstStyle/>
           <a:p>
-            <a:pPr indent="0" marL="0">
+            <a:pPr marL="0" indent="0">
               <a:buNone/>
             </a:pPr>
             <a:r>
@@ -7201,6 +7184,7 @@
         <a:solidFill>
           <a:srgbClr val="FFFFFF"/>
         </a:solidFill>
+        <a:effectLst/>
       </p:bgPr>
     </p:bg>
     <p:spTree>
@@ -7243,6 +7227,13 @@
             <a:prstDash val="solid"/>
           </a:ln>
         </p:spPr>
+        <p:txBody>
+          <a:bodyPr/>
+          <a:lstStyle/>
+          <a:p>
+            <a:endParaRPr lang="it-IT"/>
+          </a:p>
+        </p:txBody>
       </p:sp>
       <p:sp>
         <p:nvSpPr>
@@ -7265,7 +7256,7 @@
           <a:bodyPr wrap="square" lIns="0" tIns="0" rIns="0" bIns="0" rtlCol="0" anchor="ctr"/>
           <a:lstStyle/>
           <a:p>
-            <a:pPr algn="ctr" indent="0" marL="0">
+            <a:pPr marL="0" indent="0" algn="ctr">
               <a:buNone/>
             </a:pPr>
             <a:r>
@@ -7304,7 +7295,7 @@
           <a:bodyPr wrap="square" lIns="0" tIns="0" rIns="0" bIns="0" rtlCol="0" anchor="ctr"/>
           <a:lstStyle/>
           <a:p>
-            <a:pPr indent="0" marL="0">
+            <a:pPr marL="0" indent="0">
               <a:buNone/>
             </a:pPr>
             <a:r>
@@ -7346,6 +7337,13 @@
             <a:prstDash val="solid"/>
           </a:ln>
         </p:spPr>
+        <p:txBody>
+          <a:bodyPr/>
+          <a:lstStyle/>
+          <a:p>
+            <a:endParaRPr lang="it-IT"/>
+          </a:p>
+        </p:txBody>
       </p:sp>
       <p:sp>
         <p:nvSpPr>
@@ -7368,7 +7366,7 @@
           <a:bodyPr wrap="square" rtlCol="0" anchor="ctr"/>
           <a:lstStyle/>
           <a:p>
-            <a:pPr algn="r" indent="0" marL="0">
+            <a:pPr marL="0" indent="0" algn="r">
               <a:buNone/>
             </a:pPr>
             <a:r>
@@ -7410,13 +7408,20 @@
             <a:prstDash val="solid"/>
           </a:ln>
           <a:effectLst>
-            <a:outerShdw sx="100000" sy="100000" kx="0" ky="0" algn="bl" rotWithShape="0" blurRad="101600" dist="38100" dir="8100000">
+            <a:outerShdw blurRad="101600" dist="38100" dir="8100000" algn="bl" rotWithShape="0">
               <a:srgbClr val="000000">
                 <a:alpha val="12000"/>
               </a:srgbClr>
             </a:outerShdw>
           </a:effectLst>
         </p:spPr>
+        <p:txBody>
+          <a:bodyPr/>
+          <a:lstStyle/>
+          <a:p>
+            <a:endParaRPr lang="it-IT"/>
+          </a:p>
+        </p:txBody>
       </p:sp>
       <p:sp>
         <p:nvSpPr>
@@ -7439,7 +7444,7 @@
           <a:bodyPr wrap="square" lIns="0" tIns="0" rIns="0" bIns="0" rtlCol="0" anchor="ctr"/>
           <a:lstStyle/>
           <a:p>
-            <a:pPr indent="0" marL="0">
+            <a:pPr marL="0" indent="0">
               <a:buNone/>
             </a:pPr>
             <a:r>
@@ -7478,7 +7483,7 @@
           <a:bodyPr wrap="square" lIns="0" tIns="0" rIns="0" bIns="0" rtlCol="0" anchor="ctr"/>
           <a:lstStyle/>
           <a:p>
-            <a:pPr indent="0" marL="0">
+            <a:pPr marL="0" indent="0">
               <a:buNone/>
             </a:pPr>
             <a:r>
@@ -7492,9 +7497,6 @@
               </a:rPr>
               <a:t>candidateId: </a:t>
             </a:r>
-            <a:pPr indent="0" marL="0">
-              <a:buNone/>
-            </a:pPr>
             <a:r>
               <a:rPr lang="en-US" sz="1100" b="1" dirty="0">
                 <a:solidFill>
@@ -7506,9 +7508,6 @@
               </a:rPr>
               <a:t>cand-001</a:t>
             </a:r>
-            <a:pPr indent="0" marL="0">
-              <a:buNone/>
-            </a:pPr>
             <a:r>
               <a:rPr lang="en-US" sz="1100" dirty="0">
                 <a:solidFill>
@@ -7523,7 +7522,7 @@
             <a:endParaRPr lang="en-US" sz="1100" dirty="0"/>
           </a:p>
           <a:p>
-            <a:pPr indent="0" marL="0">
+            <a:pPr marL="0" indent="0">
               <a:buNone/>
             </a:pPr>
             <a:r>
@@ -7537,9 +7536,6 @@
               </a:rPr>
               <a:t>jobId: </a:t>
             </a:r>
-            <a:pPr indent="0" marL="0">
-              <a:buNone/>
-            </a:pPr>
             <a:r>
               <a:rPr lang="en-US" sz="1100" b="1" dirty="0">
                 <a:solidFill>
@@ -7551,9 +7547,6 @@
               </a:rPr>
               <a:t>job-003</a:t>
             </a:r>
-            <a:pPr indent="0" marL="0">
-              <a:buNone/>
-            </a:pPr>
             <a:r>
               <a:rPr lang="en-US" sz="1100" dirty="0">
                 <a:solidFill>
@@ -7568,7 +7561,7 @@
             <a:endParaRPr lang="en-US" sz="1100" dirty="0"/>
           </a:p>
           <a:p>
-            <a:pPr indent="0" marL="0">
+            <a:pPr marL="0" indent="0">
               <a:buNone/>
             </a:pPr>
             <a:r>
@@ -7582,9 +7575,6 @@
               </a:rPr>
               <a:t>source: </a:t>
             </a:r>
-            <a:pPr indent="0" marL="0">
-              <a:buNone/>
-            </a:pPr>
             <a:r>
               <a:rPr lang="en-US" sz="1100" b="1" dirty="0">
                 <a:solidFill>
@@ -7624,13 +7614,20 @@
             <a:prstDash val="solid"/>
           </a:ln>
           <a:effectLst>
-            <a:outerShdw sx="100000" sy="100000" kx="0" ky="0" algn="bl" rotWithShape="0" blurRad="101600" dist="38100" dir="8100000">
+            <a:outerShdw blurRad="101600" dist="38100" dir="8100000" algn="bl" rotWithShape="0">
               <a:srgbClr val="000000">
                 <a:alpha val="12000"/>
               </a:srgbClr>
             </a:outerShdw>
           </a:effectLst>
         </p:spPr>
+        <p:txBody>
+          <a:bodyPr/>
+          <a:lstStyle/>
+          <a:p>
+            <a:endParaRPr lang="it-IT"/>
+          </a:p>
+        </p:txBody>
       </p:sp>
       <p:sp>
         <p:nvSpPr>
@@ -7656,6 +7653,13 @@
             <a:prstDash val="solid"/>
           </a:ln>
         </p:spPr>
+        <p:txBody>
+          <a:bodyPr/>
+          <a:lstStyle/>
+          <a:p>
+            <a:endParaRPr lang="it-IT"/>
+          </a:p>
+        </p:txBody>
       </p:sp>
       <p:sp>
         <p:nvSpPr>
@@ -7678,7 +7682,7 @@
           <a:bodyPr wrap="square" lIns="0" tIns="0" rIns="0" bIns="0" rtlCol="0" anchor="ctr"/>
           <a:lstStyle/>
           <a:p>
-            <a:pPr algn="ctr" indent="0" marL="0">
+            <a:pPr marL="0" indent="0" algn="ctr">
               <a:buNone/>
             </a:pPr>
             <a:r>
@@ -7717,7 +7721,7 @@
           <a:bodyPr wrap="square" lIns="0" tIns="0" rIns="0" bIns="0" rtlCol="0" anchor="ctr"/>
           <a:lstStyle/>
           <a:p>
-            <a:pPr indent="0" marL="0">
+            <a:pPr marL="0" indent="0">
               <a:buNone/>
             </a:pPr>
             <a:r>
@@ -7756,7 +7760,7 @@
           <a:bodyPr wrap="square" lIns="0" tIns="0" rIns="0" bIns="0" rtlCol="0" anchor="ctr"/>
           <a:lstStyle/>
           <a:p>
-            <a:pPr indent="0" marL="0">
+            <a:pPr marL="0" indent="0">
               <a:buNone/>
             </a:pPr>
             <a:r>
@@ -7798,13 +7802,20 @@
             <a:prstDash val="solid"/>
           </a:ln>
           <a:effectLst>
-            <a:outerShdw sx="100000" sy="100000" kx="0" ky="0" algn="bl" rotWithShape="0" blurRad="101600" dist="38100" dir="8100000">
+            <a:outerShdw blurRad="101600" dist="38100" dir="8100000" algn="bl" rotWithShape="0">
               <a:srgbClr val="000000">
                 <a:alpha val="12000"/>
               </a:srgbClr>
             </a:outerShdw>
           </a:effectLst>
         </p:spPr>
+        <p:txBody>
+          <a:bodyPr/>
+          <a:lstStyle/>
+          <a:p>
+            <a:endParaRPr lang="it-IT"/>
+          </a:p>
+        </p:txBody>
       </p:sp>
       <p:sp>
         <p:nvSpPr>
@@ -7830,6 +7841,13 @@
             <a:prstDash val="solid"/>
           </a:ln>
         </p:spPr>
+        <p:txBody>
+          <a:bodyPr/>
+          <a:lstStyle/>
+          <a:p>
+            <a:endParaRPr lang="it-IT"/>
+          </a:p>
+        </p:txBody>
       </p:sp>
       <p:sp>
         <p:nvSpPr>
@@ -7852,7 +7870,7 @@
           <a:bodyPr wrap="square" lIns="0" tIns="0" rIns="0" bIns="0" rtlCol="0" anchor="ctr"/>
           <a:lstStyle/>
           <a:p>
-            <a:pPr algn="ctr" indent="0" marL="0">
+            <a:pPr marL="0" indent="0" algn="ctr">
               <a:buNone/>
             </a:pPr>
             <a:r>
@@ -7891,7 +7909,7 @@
           <a:bodyPr wrap="square" lIns="0" tIns="0" rIns="0" bIns="0" rtlCol="0" anchor="ctr"/>
           <a:lstStyle/>
           <a:p>
-            <a:pPr indent="0" marL="0">
+            <a:pPr marL="0" indent="0">
               <a:buNone/>
             </a:pPr>
             <a:r>
@@ -7930,7 +7948,7 @@
           <a:bodyPr wrap="square" lIns="0" tIns="0" rIns="0" bIns="0" rtlCol="0" anchor="ctr"/>
           <a:lstStyle/>
           <a:p>
-            <a:pPr indent="0" marL="0">
+            <a:pPr marL="0" indent="0">
               <a:buNone/>
             </a:pPr>
             <a:r>
@@ -7972,13 +7990,20 @@
             <a:prstDash val="solid"/>
           </a:ln>
           <a:effectLst>
-            <a:outerShdw sx="100000" sy="100000" kx="0" ky="0" algn="bl" rotWithShape="0" blurRad="101600" dist="38100" dir="8100000">
+            <a:outerShdw blurRad="101600" dist="38100" dir="8100000" algn="bl" rotWithShape="0">
               <a:srgbClr val="000000">
                 <a:alpha val="12000"/>
               </a:srgbClr>
             </a:outerShdw>
           </a:effectLst>
         </p:spPr>
+        <p:txBody>
+          <a:bodyPr/>
+          <a:lstStyle/>
+          <a:p>
+            <a:endParaRPr lang="it-IT"/>
+          </a:p>
+        </p:txBody>
       </p:sp>
       <p:sp>
         <p:nvSpPr>
@@ -8004,6 +8029,13 @@
             <a:prstDash val="solid"/>
           </a:ln>
         </p:spPr>
+        <p:txBody>
+          <a:bodyPr/>
+          <a:lstStyle/>
+          <a:p>
+            <a:endParaRPr lang="it-IT"/>
+          </a:p>
+        </p:txBody>
       </p:sp>
       <p:sp>
         <p:nvSpPr>
@@ -8026,7 +8058,7 @@
           <a:bodyPr wrap="square" lIns="0" tIns="0" rIns="0" bIns="0" rtlCol="0" anchor="ctr"/>
           <a:lstStyle/>
           <a:p>
-            <a:pPr algn="ctr" indent="0" marL="0">
+            <a:pPr marL="0" indent="0" algn="ctr">
               <a:buNone/>
             </a:pPr>
             <a:r>
@@ -8065,7 +8097,7 @@
           <a:bodyPr wrap="square" lIns="0" tIns="0" rIns="0" bIns="0" rtlCol="0" anchor="ctr"/>
           <a:lstStyle/>
           <a:p>
-            <a:pPr algn="ctr" indent="0" marL="0">
+            <a:pPr marL="0" indent="0" algn="ctr">
               <a:buNone/>
             </a:pPr>
             <a:r>
@@ -8104,7 +8136,7 @@
           <a:bodyPr wrap="square" lIns="0" tIns="0" rIns="0" bIns="0" rtlCol="0" anchor="ctr"/>
           <a:lstStyle/>
           <a:p>
-            <a:pPr algn="ctr" indent="0" marL="0">
+            <a:pPr marL="0" indent="0" algn="ctr">
               <a:buNone/>
             </a:pPr>
             <a:r>
@@ -8143,7 +8175,7 @@
           <a:bodyPr wrap="square" lIns="0" tIns="0" rIns="0" bIns="0" rtlCol="0" anchor="ctr"/>
           <a:lstStyle/>
           <a:p>
-            <a:pPr indent="0" marL="0">
+            <a:pPr marL="0" indent="0">
               <a:buNone/>
             </a:pPr>
             <a:r>
@@ -8253,6 +8285,7 @@
         <a:solidFill>
           <a:srgbClr val="1D2D44"/>
         </a:solidFill>
+        <a:effectLst/>
       </p:bgPr>
     </p:bg>
     <p:spTree>
@@ -8293,6 +8326,13 @@
             <a:prstDash val="solid"/>
           </a:ln>
         </p:spPr>
+        <p:txBody>
+          <a:bodyPr/>
+          <a:lstStyle/>
+          <a:p>
+            <a:endParaRPr lang="it-IT"/>
+          </a:p>
+        </p:txBody>
       </p:sp>
       <p:sp>
         <p:nvSpPr>
@@ -8315,7 +8355,7 @@
           <a:bodyPr wrap="square" lIns="0" tIns="0" rIns="0" bIns="0" rtlCol="0" anchor="ctr"/>
           <a:lstStyle/>
           <a:p>
-            <a:pPr indent="0" marL="0">
+            <a:pPr marL="0" indent="0">
               <a:buNone/>
             </a:pPr>
             <a:r>
@@ -8354,7 +8394,7 @@
           <a:bodyPr wrap="square" lIns="0" tIns="0" rIns="0" bIns="0" rtlCol="0" anchor="ctr"/>
           <a:lstStyle/>
           <a:p>
-            <a:pPr indent="0" marL="0">
+            <a:pPr marL="0" indent="0">
               <a:buNone/>
             </a:pPr>
             <a:r>
@@ -8371,7 +8411,7 @@
             <a:endParaRPr lang="en-US" sz="4000" dirty="0"/>
           </a:p>
           <a:p>
-            <a:pPr indent="0" marL="0">
+            <a:pPr marL="0" indent="0">
               <a:buNone/>
             </a:pPr>
             <a:r>
@@ -8410,7 +8450,7 @@
           <a:bodyPr wrap="square" lIns="0" tIns="0" rIns="0" bIns="0" rtlCol="0" anchor="ctr"/>
           <a:lstStyle/>
           <a:p>
-            <a:pPr indent="0" marL="0">
+            <a:pPr marL="0" indent="0">
               <a:buNone/>
             </a:pPr>
             <a:r>
@@ -8444,6 +8484,7 @@
         <a:solidFill>
           <a:srgbClr val="FFFFFF"/>
         </a:solidFill>
+        <a:effectLst/>
       </p:bgPr>
     </p:bg>
     <p:spTree>
@@ -8486,6 +8527,13 @@
             <a:prstDash val="solid"/>
           </a:ln>
         </p:spPr>
+        <p:txBody>
+          <a:bodyPr/>
+          <a:lstStyle/>
+          <a:p>
+            <a:endParaRPr lang="it-IT"/>
+          </a:p>
+        </p:txBody>
       </p:sp>
       <p:sp>
         <p:nvSpPr>
@@ -8508,7 +8556,7 @@
           <a:bodyPr wrap="square" lIns="0" tIns="0" rIns="0" bIns="0" rtlCol="0" anchor="ctr"/>
           <a:lstStyle/>
           <a:p>
-            <a:pPr algn="ctr" indent="0" marL="0">
+            <a:pPr marL="0" indent="0" algn="ctr">
               <a:buNone/>
             </a:pPr>
             <a:r>
@@ -8547,7 +8595,7 @@
           <a:bodyPr wrap="square" lIns="0" tIns="0" rIns="0" bIns="0" rtlCol="0" anchor="ctr"/>
           <a:lstStyle/>
           <a:p>
-            <a:pPr indent="0" marL="0">
+            <a:pPr marL="0" indent="0">
               <a:buNone/>
             </a:pPr>
             <a:r>
@@ -8589,6 +8637,13 @@
             <a:prstDash val="solid"/>
           </a:ln>
         </p:spPr>
+        <p:txBody>
+          <a:bodyPr/>
+          <a:lstStyle/>
+          <a:p>
+            <a:endParaRPr lang="it-IT"/>
+          </a:p>
+        </p:txBody>
       </p:sp>
       <p:sp>
         <p:nvSpPr>
@@ -8611,7 +8666,7 @@
           <a:bodyPr wrap="square" rtlCol="0" anchor="ctr"/>
           <a:lstStyle/>
           <a:p>
-            <a:pPr algn="r" indent="0" marL="0">
+            <a:pPr marL="0" indent="0" algn="r">
               <a:buNone/>
             </a:pPr>
             <a:r>
@@ -8653,13 +8708,20 @@
             <a:prstDash val="solid"/>
           </a:ln>
           <a:effectLst>
-            <a:outerShdw sx="100000" sy="100000" kx="0" ky="0" algn="bl" rotWithShape="0" blurRad="101600" dist="38100" dir="8100000">
+            <a:outerShdw blurRad="101600" dist="38100" dir="8100000" algn="bl" rotWithShape="0">
               <a:srgbClr val="000000">
                 <a:alpha val="12000"/>
               </a:srgbClr>
             </a:outerShdw>
           </a:effectLst>
         </p:spPr>
+        <p:txBody>
+          <a:bodyPr/>
+          <a:lstStyle/>
+          <a:p>
+            <a:endParaRPr lang="it-IT"/>
+          </a:p>
+        </p:txBody>
       </p:sp>
       <p:sp>
         <p:nvSpPr>
@@ -8682,7 +8744,7 @@
           <a:bodyPr wrap="square" lIns="0" tIns="0" rIns="0" bIns="0" rtlCol="0" anchor="t"/>
           <a:lstStyle/>
           <a:p>
-            <a:pPr indent="0" marL="0">
+            <a:pPr marL="0" indent="0">
               <a:buNone/>
             </a:pPr>
             <a:r>
@@ -8699,7 +8761,7 @@
             <a:endParaRPr lang="en-US" sz="1050" dirty="0"/>
           </a:p>
           <a:p>
-            <a:pPr indent="0" marL="0">
+            <a:pPr marL="0" indent="0">
               <a:buNone/>
             </a:pPr>
             <a:r>
@@ -8716,7 +8778,7 @@
             <a:endParaRPr lang="en-US" sz="1050" dirty="0"/>
           </a:p>
           <a:p>
-            <a:pPr indent="0" marL="0">
+            <a:pPr marL="0" indent="0">
               <a:buNone/>
             </a:pPr>
             <a:r>
@@ -8733,7 +8795,7 @@
             <a:endParaRPr lang="en-US" sz="1050" dirty="0"/>
           </a:p>
           <a:p>
-            <a:pPr indent="0" marL="0">
+            <a:pPr marL="0" indent="0">
               <a:buNone/>
             </a:pPr>
             <a:r>
@@ -8750,7 +8812,7 @@
             <a:endParaRPr lang="en-US" sz="1050" dirty="0"/>
           </a:p>
           <a:p>
-            <a:pPr indent="0" marL="0">
+            <a:pPr marL="0" indent="0">
               <a:buNone/>
             </a:pPr>
             <a:r>
@@ -8767,7 +8829,7 @@
             <a:endParaRPr lang="en-US" sz="1050" dirty="0"/>
           </a:p>
           <a:p>
-            <a:pPr indent="0" marL="0">
+            <a:pPr marL="0" indent="0">
               <a:buNone/>
             </a:pPr>
             <a:r>
@@ -8784,7 +8846,7 @@
             <a:endParaRPr lang="en-US" sz="1050" dirty="0"/>
           </a:p>
           <a:p>
-            <a:pPr indent="0" marL="0">
+            <a:pPr marL="0" indent="0">
               <a:buNone/>
             </a:pPr>
             <a:r>
@@ -8801,7 +8863,7 @@
             <a:endParaRPr lang="en-US" sz="1050" dirty="0"/>
           </a:p>
           <a:p>
-            <a:pPr indent="0" marL="0">
+            <a:pPr marL="0" indent="0">
               <a:buNone/>
             </a:pPr>
             <a:r>
@@ -8818,7 +8880,7 @@
             <a:endParaRPr lang="en-US" sz="1050" dirty="0"/>
           </a:p>
           <a:p>
-            <a:pPr indent="0" marL="0">
+            <a:pPr marL="0" indent="0">
               <a:buNone/>
             </a:pPr>
             <a:r>
@@ -8835,7 +8897,7 @@
             <a:endParaRPr lang="en-US" sz="1050" dirty="0"/>
           </a:p>
           <a:p>
-            <a:pPr indent="0" marL="0">
+            <a:pPr marL="0" indent="0">
               <a:buNone/>
             </a:pPr>
             <a:r>
@@ -8852,7 +8914,7 @@
             <a:endParaRPr lang="en-US" sz="1050" dirty="0"/>
           </a:p>
           <a:p>
-            <a:pPr indent="0" marL="0">
+            <a:pPr marL="0" indent="0">
               <a:buNone/>
             </a:pPr>
             <a:r>
@@ -8869,7 +8931,7 @@
             <a:endParaRPr lang="en-US" sz="1050" dirty="0"/>
           </a:p>
           <a:p>
-            <a:pPr indent="0" marL="0">
+            <a:pPr marL="0" indent="0">
               <a:buNone/>
             </a:pPr>
             <a:r>
@@ -8886,7 +8948,7 @@
             <a:endParaRPr lang="en-US" sz="1050" dirty="0"/>
           </a:p>
           <a:p>
-            <a:pPr indent="0" marL="0">
+            <a:pPr marL="0" indent="0">
               <a:buNone/>
             </a:pPr>
             <a:r>
@@ -8903,7 +8965,7 @@
             <a:endParaRPr lang="en-US" sz="1050" dirty="0"/>
           </a:p>
           <a:p>
-            <a:pPr indent="0" marL="0">
+            <a:pPr marL="0" indent="0">
               <a:buNone/>
             </a:pPr>
             <a:r>
@@ -8920,7 +8982,7 @@
             <a:endParaRPr lang="en-US" sz="1050" dirty="0"/>
           </a:p>
           <a:p>
-            <a:pPr indent="0" marL="0">
+            <a:pPr marL="0" indent="0">
               <a:buNone/>
             </a:pPr>
             <a:r>
@@ -8960,6 +9022,13 @@
             <a:prstDash val="dash"/>
           </a:ln>
         </p:spPr>
+        <p:txBody>
+          <a:bodyPr/>
+          <a:lstStyle/>
+          <a:p>
+            <a:endParaRPr lang="it-IT"/>
+          </a:p>
+        </p:txBody>
       </p:sp>
       <p:sp>
         <p:nvSpPr>
@@ -8982,7 +9051,7 @@
           <a:bodyPr wrap="square" lIns="0" tIns="0" rIns="0" bIns="0" rtlCol="0" anchor="ctr"/>
           <a:lstStyle/>
           <a:p>
-            <a:pPr indent="0" marL="0">
+            <a:pPr marL="0" indent="0">
               <a:buNone/>
             </a:pPr>
             <a:r>
@@ -9022,6 +9091,13 @@
             <a:prstDash val="dash"/>
           </a:ln>
         </p:spPr>
+        <p:txBody>
+          <a:bodyPr/>
+          <a:lstStyle/>
+          <a:p>
+            <a:endParaRPr lang="it-IT"/>
+          </a:p>
+        </p:txBody>
       </p:sp>
       <p:sp>
         <p:nvSpPr>
@@ -9044,7 +9120,7 @@
           <a:bodyPr wrap="square" lIns="0" tIns="0" rIns="0" bIns="0" rtlCol="0" anchor="ctr"/>
           <a:lstStyle/>
           <a:p>
-            <a:pPr indent="0" marL="0">
+            <a:pPr marL="0" indent="0">
               <a:buNone/>
             </a:pPr>
             <a:r>
@@ -9084,6 +9160,13 @@
             <a:prstDash val="dash"/>
           </a:ln>
         </p:spPr>
+        <p:txBody>
+          <a:bodyPr/>
+          <a:lstStyle/>
+          <a:p>
+            <a:endParaRPr lang="it-IT"/>
+          </a:p>
+        </p:txBody>
       </p:sp>
       <p:sp>
         <p:nvSpPr>
@@ -9106,7 +9189,7 @@
           <a:bodyPr wrap="square" lIns="0" tIns="0" rIns="0" bIns="0" rtlCol="0" anchor="ctr"/>
           <a:lstStyle/>
           <a:p>
-            <a:pPr indent="0" marL="0">
+            <a:pPr marL="0" indent="0">
               <a:buNone/>
             </a:pPr>
             <a:r>
@@ -9146,6 +9229,13 @@
             <a:prstDash val="dash"/>
           </a:ln>
         </p:spPr>
+        <p:txBody>
+          <a:bodyPr/>
+          <a:lstStyle/>
+          <a:p>
+            <a:endParaRPr lang="it-IT"/>
+          </a:p>
+        </p:txBody>
       </p:sp>
       <p:sp>
         <p:nvSpPr>
@@ -9168,7 +9258,7 @@
           <a:bodyPr wrap="square" lIns="0" tIns="0" rIns="0" bIns="0" rtlCol="0" anchor="ctr"/>
           <a:lstStyle/>
           <a:p>
-            <a:pPr indent="0" marL="0">
+            <a:pPr marL="0" indent="0">
               <a:buNone/>
             </a:pPr>
             <a:r>
@@ -9185,7 +9275,7 @@
             <a:endParaRPr lang="en-US" sz="1000" dirty="0"/>
           </a:p>
           <a:p>
-            <a:pPr indent="0" marL="0">
+            <a:pPr marL="0" indent="0">
               <a:buNone/>
             </a:pPr>
             <a:r>
@@ -9225,6 +9315,13 @@
             <a:prstDash val="dash"/>
           </a:ln>
         </p:spPr>
+        <p:txBody>
+          <a:bodyPr/>
+          <a:lstStyle/>
+          <a:p>
+            <a:endParaRPr lang="it-IT"/>
+          </a:p>
+        </p:txBody>
       </p:sp>
       <p:sp>
         <p:nvSpPr>
@@ -9247,7 +9344,7 @@
           <a:bodyPr wrap="square" lIns="0" tIns="0" rIns="0" bIns="0" rtlCol="0" anchor="ctr"/>
           <a:lstStyle/>
           <a:p>
-            <a:pPr indent="0" marL="0">
+            <a:pPr marL="0" indent="0">
               <a:buNone/>
             </a:pPr>
             <a:r>
@@ -9287,6 +9384,13 @@
             <a:prstDash val="dash"/>
           </a:ln>
         </p:spPr>
+        <p:txBody>
+          <a:bodyPr/>
+          <a:lstStyle/>
+          <a:p>
+            <a:endParaRPr lang="it-IT"/>
+          </a:p>
+        </p:txBody>
       </p:sp>
       <p:sp>
         <p:nvSpPr>
@@ -9309,7 +9413,7 @@
           <a:bodyPr wrap="square" lIns="0" tIns="0" rIns="0" bIns="0" rtlCol="0" anchor="ctr"/>
           <a:lstStyle/>
           <a:p>
-            <a:pPr indent="0" marL="0">
+            <a:pPr marL="0" indent="0">
               <a:buNone/>
             </a:pPr>
             <a:r>
@@ -9326,7 +9430,7 @@
             <a:endParaRPr lang="en-US" sz="1000" dirty="0"/>
           </a:p>
           <a:p>
-            <a:pPr indent="0" marL="0">
+            <a:pPr marL="0" indent="0">
               <a:buNone/>
             </a:pPr>
             <a:r>
@@ -9365,7 +9469,7 @@
           <a:bodyPr wrap="square" lIns="0" tIns="0" rIns="0" bIns="0" rtlCol="0" anchor="ctr"/>
           <a:lstStyle/>
           <a:p>
-            <a:pPr indent="0" marL="0">
+            <a:pPr marL="0" indent="0">
               <a:buNone/>
             </a:pPr>
             <a:r>
@@ -9399,6 +9503,7 @@
         <a:solidFill>
           <a:srgbClr val="FFFFFF"/>
         </a:solidFill>
+        <a:effectLst/>
       </p:bgPr>
     </p:bg>
     <p:spTree>
@@ -9441,6 +9546,13 @@
             <a:prstDash val="solid"/>
           </a:ln>
         </p:spPr>
+        <p:txBody>
+          <a:bodyPr/>
+          <a:lstStyle/>
+          <a:p>
+            <a:endParaRPr lang="it-IT"/>
+          </a:p>
+        </p:txBody>
       </p:sp>
       <p:sp>
         <p:nvSpPr>
@@ -9463,7 +9575,7 @@
           <a:bodyPr wrap="square" lIns="0" tIns="0" rIns="0" bIns="0" rtlCol="0" anchor="ctr"/>
           <a:lstStyle/>
           <a:p>
-            <a:pPr algn="ctr" indent="0" marL="0">
+            <a:pPr marL="0" indent="0" algn="ctr">
               <a:buNone/>
             </a:pPr>
             <a:r>
@@ -9502,7 +9614,7 @@
           <a:bodyPr wrap="square" lIns="0" tIns="0" rIns="0" bIns="0" rtlCol="0" anchor="ctr"/>
           <a:lstStyle/>
           <a:p>
-            <a:pPr indent="0" marL="0">
+            <a:pPr marL="0" indent="0">
               <a:buNone/>
             </a:pPr>
             <a:r>
@@ -9544,6 +9656,13 @@
             <a:prstDash val="solid"/>
           </a:ln>
         </p:spPr>
+        <p:txBody>
+          <a:bodyPr/>
+          <a:lstStyle/>
+          <a:p>
+            <a:endParaRPr lang="it-IT"/>
+          </a:p>
+        </p:txBody>
       </p:sp>
       <p:sp>
         <p:nvSpPr>
@@ -9566,7 +9685,7 @@
           <a:bodyPr wrap="square" rtlCol="0" anchor="ctr"/>
           <a:lstStyle/>
           <a:p>
-            <a:pPr algn="r" indent="0" marL="0">
+            <a:pPr marL="0" indent="0" algn="r">
               <a:buNone/>
             </a:pPr>
             <a:r>
@@ -9608,6 +9727,13 @@
             <a:prstDash val="solid"/>
           </a:ln>
         </p:spPr>
+        <p:txBody>
+          <a:bodyPr/>
+          <a:lstStyle/>
+          <a:p>
+            <a:endParaRPr lang="it-IT"/>
+          </a:p>
+        </p:txBody>
       </p:sp>
       <p:sp>
         <p:nvSpPr>
@@ -9630,7 +9756,7 @@
           <a:bodyPr wrap="square" lIns="0" tIns="0" rIns="0" bIns="0" rtlCol="0" anchor="ctr"/>
           <a:lstStyle/>
           <a:p>
-            <a:pPr algn="ctr" indent="0" marL="0">
+            <a:pPr marL="0" indent="0" algn="ctr">
               <a:buNone/>
             </a:pPr>
             <a:r>
@@ -9672,6 +9798,13 @@
             <a:prstDash val="solid"/>
           </a:ln>
         </p:spPr>
+        <p:txBody>
+          <a:bodyPr/>
+          <a:lstStyle/>
+          <a:p>
+            <a:endParaRPr lang="it-IT"/>
+          </a:p>
+        </p:txBody>
       </p:sp>
       <p:sp>
         <p:nvSpPr>
@@ -9694,7 +9827,7 @@
           <a:bodyPr wrap="square" lIns="0" tIns="0" rIns="0" bIns="0" rtlCol="0" anchor="ctr"/>
           <a:lstStyle/>
           <a:p>
-            <a:pPr indent="0" marL="0">
+            <a:pPr marL="0" indent="0">
               <a:buNone/>
             </a:pPr>
             <a:r>
@@ -9734,6 +9867,13 @@
             <a:prstDash val="solid"/>
           </a:ln>
         </p:spPr>
+        <p:txBody>
+          <a:bodyPr/>
+          <a:lstStyle/>
+          <a:p>
+            <a:endParaRPr lang="it-IT"/>
+          </a:p>
+        </p:txBody>
       </p:sp>
       <p:sp>
         <p:nvSpPr>
@@ -9759,6 +9899,13 @@
             <a:prstDash val="solid"/>
           </a:ln>
         </p:spPr>
+        <p:txBody>
+          <a:bodyPr/>
+          <a:lstStyle/>
+          <a:p>
+            <a:endParaRPr lang="it-IT"/>
+          </a:p>
+        </p:txBody>
       </p:sp>
       <p:sp>
         <p:nvSpPr>
@@ -9781,7 +9928,7 @@
           <a:bodyPr wrap="square" lIns="0" tIns="0" rIns="0" bIns="0" rtlCol="0" anchor="ctr"/>
           <a:lstStyle/>
           <a:p>
-            <a:pPr algn="ctr" indent="0" marL="0">
+            <a:pPr marL="0" indent="0" algn="ctr">
               <a:buNone/>
             </a:pPr>
             <a:r>
@@ -9823,6 +9970,13 @@
             <a:prstDash val="solid"/>
           </a:ln>
         </p:spPr>
+        <p:txBody>
+          <a:bodyPr/>
+          <a:lstStyle/>
+          <a:p>
+            <a:endParaRPr lang="it-IT"/>
+          </a:p>
+        </p:txBody>
       </p:sp>
       <p:sp>
         <p:nvSpPr>
@@ -9845,7 +9999,7 @@
           <a:bodyPr wrap="square" lIns="0" tIns="0" rIns="0" bIns="0" rtlCol="0" anchor="ctr"/>
           <a:lstStyle/>
           <a:p>
-            <a:pPr indent="0" marL="0">
+            <a:pPr marL="0" indent="0">
               <a:buNone/>
             </a:pPr>
             <a:r>
@@ -9885,6 +10039,13 @@
             <a:prstDash val="solid"/>
           </a:ln>
         </p:spPr>
+        <p:txBody>
+          <a:bodyPr/>
+          <a:lstStyle/>
+          <a:p>
+            <a:endParaRPr lang="it-IT"/>
+          </a:p>
+        </p:txBody>
       </p:sp>
       <p:sp>
         <p:nvSpPr>
@@ -9910,6 +10071,13 @@
             <a:prstDash val="solid"/>
           </a:ln>
         </p:spPr>
+        <p:txBody>
+          <a:bodyPr/>
+          <a:lstStyle/>
+          <a:p>
+            <a:endParaRPr lang="it-IT"/>
+          </a:p>
+        </p:txBody>
       </p:sp>
       <p:sp>
         <p:nvSpPr>
@@ -9932,7 +10100,7 @@
           <a:bodyPr wrap="square" lIns="0" tIns="0" rIns="0" bIns="0" rtlCol="0" anchor="ctr"/>
           <a:lstStyle/>
           <a:p>
-            <a:pPr algn="ctr" indent="0" marL="0">
+            <a:pPr marL="0" indent="0" algn="ctr">
               <a:buNone/>
             </a:pPr>
             <a:r>
@@ -9974,6 +10142,13 @@
             <a:prstDash val="solid"/>
           </a:ln>
         </p:spPr>
+        <p:txBody>
+          <a:bodyPr/>
+          <a:lstStyle/>
+          <a:p>
+            <a:endParaRPr lang="it-IT"/>
+          </a:p>
+        </p:txBody>
       </p:sp>
       <p:sp>
         <p:nvSpPr>
@@ -9996,7 +10171,7 @@
           <a:bodyPr wrap="square" lIns="0" tIns="0" rIns="0" bIns="0" rtlCol="0" anchor="ctr"/>
           <a:lstStyle/>
           <a:p>
-            <a:pPr indent="0" marL="0">
+            <a:pPr marL="0" indent="0">
               <a:buNone/>
             </a:pPr>
             <a:r>
@@ -10036,6 +10211,13 @@
             <a:prstDash val="solid"/>
           </a:ln>
         </p:spPr>
+        <p:txBody>
+          <a:bodyPr/>
+          <a:lstStyle/>
+          <a:p>
+            <a:endParaRPr lang="it-IT"/>
+          </a:p>
+        </p:txBody>
       </p:sp>
       <p:sp>
         <p:nvSpPr>
@@ -10061,6 +10243,13 @@
             <a:prstDash val="solid"/>
           </a:ln>
         </p:spPr>
+        <p:txBody>
+          <a:bodyPr/>
+          <a:lstStyle/>
+          <a:p>
+            <a:endParaRPr lang="it-IT"/>
+          </a:p>
+        </p:txBody>
       </p:sp>
       <p:sp>
         <p:nvSpPr>
@@ -10083,7 +10272,7 @@
           <a:bodyPr wrap="square" lIns="0" tIns="0" rIns="0" bIns="0" rtlCol="0" anchor="ctr"/>
           <a:lstStyle/>
           <a:p>
-            <a:pPr algn="ctr" indent="0" marL="0">
+            <a:pPr marL="0" indent="0" algn="ctr">
               <a:buNone/>
             </a:pPr>
             <a:r>
@@ -10125,6 +10314,13 @@
             <a:prstDash val="solid"/>
           </a:ln>
         </p:spPr>
+        <p:txBody>
+          <a:bodyPr/>
+          <a:lstStyle/>
+          <a:p>
+            <a:endParaRPr lang="it-IT"/>
+          </a:p>
+        </p:txBody>
       </p:sp>
       <p:sp>
         <p:nvSpPr>
@@ -10147,7 +10343,7 @@
           <a:bodyPr wrap="square" lIns="0" tIns="0" rIns="0" bIns="0" rtlCol="0" anchor="ctr"/>
           <a:lstStyle/>
           <a:p>
-            <a:pPr indent="0" marL="0">
+            <a:pPr marL="0" indent="0">
               <a:buNone/>
             </a:pPr>
             <a:r>
@@ -10187,6 +10383,13 @@
             <a:prstDash val="solid"/>
           </a:ln>
         </p:spPr>
+        <p:txBody>
+          <a:bodyPr/>
+          <a:lstStyle/>
+          <a:p>
+            <a:endParaRPr lang="it-IT"/>
+          </a:p>
+        </p:txBody>
       </p:sp>
       <p:sp>
         <p:nvSpPr>
@@ -10212,6 +10415,13 @@
             <a:prstDash val="solid"/>
           </a:ln>
         </p:spPr>
+        <p:txBody>
+          <a:bodyPr/>
+          <a:lstStyle/>
+          <a:p>
+            <a:endParaRPr lang="it-IT"/>
+          </a:p>
+        </p:txBody>
       </p:sp>
       <p:sp>
         <p:nvSpPr>
@@ -10234,7 +10444,7 @@
           <a:bodyPr wrap="square" lIns="0" tIns="0" rIns="0" bIns="0" rtlCol="0" anchor="ctr"/>
           <a:lstStyle/>
           <a:p>
-            <a:pPr algn="ctr" indent="0" marL="0">
+            <a:pPr marL="0" indent="0" algn="ctr">
               <a:buNone/>
             </a:pPr>
             <a:r>
@@ -10276,6 +10486,13 @@
             <a:prstDash val="solid"/>
           </a:ln>
         </p:spPr>
+        <p:txBody>
+          <a:bodyPr/>
+          <a:lstStyle/>
+          <a:p>
+            <a:endParaRPr lang="it-IT"/>
+          </a:p>
+        </p:txBody>
       </p:sp>
       <p:sp>
         <p:nvSpPr>
@@ -10298,7 +10515,7 @@
           <a:bodyPr wrap="square" lIns="0" tIns="0" rIns="0" bIns="0" rtlCol="0" anchor="ctr"/>
           <a:lstStyle/>
           <a:p>
-            <a:pPr indent="0" marL="0">
+            <a:pPr marL="0" indent="0">
               <a:buNone/>
             </a:pPr>
             <a:r>
@@ -10338,6 +10555,13 @@
             <a:prstDash val="solid"/>
           </a:ln>
         </p:spPr>
+        <p:txBody>
+          <a:bodyPr/>
+          <a:lstStyle/>
+          <a:p>
+            <a:endParaRPr lang="it-IT"/>
+          </a:p>
+        </p:txBody>
       </p:sp>
       <p:sp>
         <p:nvSpPr>
@@ -10363,6 +10587,13 @@
             <a:prstDash val="solid"/>
           </a:ln>
         </p:spPr>
+        <p:txBody>
+          <a:bodyPr/>
+          <a:lstStyle/>
+          <a:p>
+            <a:endParaRPr lang="it-IT"/>
+          </a:p>
+        </p:txBody>
       </p:sp>
       <p:sp>
         <p:nvSpPr>
@@ -10385,7 +10616,7 @@
           <a:bodyPr wrap="square" lIns="0" tIns="0" rIns="0" bIns="0" rtlCol="0" anchor="ctr"/>
           <a:lstStyle/>
           <a:p>
-            <a:pPr algn="ctr" indent="0" marL="0">
+            <a:pPr marL="0" indent="0" algn="ctr">
               <a:buNone/>
             </a:pPr>
             <a:r>
@@ -10427,6 +10658,13 @@
             <a:prstDash val="solid"/>
           </a:ln>
         </p:spPr>
+        <p:txBody>
+          <a:bodyPr/>
+          <a:lstStyle/>
+          <a:p>
+            <a:endParaRPr lang="it-IT"/>
+          </a:p>
+        </p:txBody>
       </p:sp>
       <p:sp>
         <p:nvSpPr>
@@ -10449,7 +10687,7 @@
           <a:bodyPr wrap="square" lIns="0" tIns="0" rIns="0" bIns="0" rtlCol="0" anchor="ctr"/>
           <a:lstStyle/>
           <a:p>
-            <a:pPr indent="0" marL="0">
+            <a:pPr marL="0" indent="0">
               <a:buNone/>
             </a:pPr>
             <a:r>
@@ -10489,6 +10727,13 @@
             <a:prstDash val="solid"/>
           </a:ln>
         </p:spPr>
+        <p:txBody>
+          <a:bodyPr/>
+          <a:lstStyle/>
+          <a:p>
+            <a:endParaRPr lang="it-IT"/>
+          </a:p>
+        </p:txBody>
       </p:sp>
       <p:sp>
         <p:nvSpPr>
@@ -10514,6 +10759,13 @@
             <a:prstDash val="solid"/>
           </a:ln>
         </p:spPr>
+        <p:txBody>
+          <a:bodyPr/>
+          <a:lstStyle/>
+          <a:p>
+            <a:endParaRPr lang="it-IT"/>
+          </a:p>
+        </p:txBody>
       </p:sp>
       <p:sp>
         <p:nvSpPr>
@@ -10536,7 +10788,7 @@
           <a:bodyPr wrap="square" lIns="0" tIns="0" rIns="0" bIns="0" rtlCol="0" anchor="ctr"/>
           <a:lstStyle/>
           <a:p>
-            <a:pPr algn="ctr" indent="0" marL="0">
+            <a:pPr marL="0" indent="0" algn="ctr">
               <a:buNone/>
             </a:pPr>
             <a:r>
@@ -10578,6 +10830,13 @@
             <a:prstDash val="solid"/>
           </a:ln>
         </p:spPr>
+        <p:txBody>
+          <a:bodyPr/>
+          <a:lstStyle/>
+          <a:p>
+            <a:endParaRPr lang="it-IT"/>
+          </a:p>
+        </p:txBody>
       </p:sp>
       <p:sp>
         <p:nvSpPr>
@@ -10600,7 +10859,7 @@
           <a:bodyPr wrap="square" lIns="0" tIns="0" rIns="0" bIns="0" rtlCol="0" anchor="ctr"/>
           <a:lstStyle/>
           <a:p>
-            <a:pPr indent="0" marL="0">
+            <a:pPr marL="0" indent="0">
               <a:buNone/>
             </a:pPr>
             <a:r>
@@ -10640,6 +10899,13 @@
             <a:prstDash val="solid"/>
           </a:ln>
         </p:spPr>
+        <p:txBody>
+          <a:bodyPr/>
+          <a:lstStyle/>
+          <a:p>
+            <a:endParaRPr lang="it-IT"/>
+          </a:p>
+        </p:txBody>
       </p:sp>
       <p:sp>
         <p:nvSpPr>
@@ -10665,6 +10931,13 @@
             <a:prstDash val="solid"/>
           </a:ln>
         </p:spPr>
+        <p:txBody>
+          <a:bodyPr/>
+          <a:lstStyle/>
+          <a:p>
+            <a:endParaRPr lang="it-IT"/>
+          </a:p>
+        </p:txBody>
       </p:sp>
       <p:sp>
         <p:nvSpPr>
@@ -10687,7 +10960,7 @@
           <a:bodyPr wrap="square" lIns="0" tIns="0" rIns="0" bIns="0" rtlCol="0" anchor="ctr"/>
           <a:lstStyle/>
           <a:p>
-            <a:pPr algn="ctr" indent="0" marL="0">
+            <a:pPr marL="0" indent="0" algn="ctr">
               <a:buNone/>
             </a:pPr>
             <a:r>
@@ -10729,6 +11002,13 @@
             <a:prstDash val="solid"/>
           </a:ln>
         </p:spPr>
+        <p:txBody>
+          <a:bodyPr/>
+          <a:lstStyle/>
+          <a:p>
+            <a:endParaRPr lang="it-IT"/>
+          </a:p>
+        </p:txBody>
       </p:sp>
       <p:sp>
         <p:nvSpPr>
@@ -10751,7 +11031,7 @@
           <a:bodyPr wrap="square" lIns="0" tIns="0" rIns="0" bIns="0" rtlCol="0" anchor="ctr"/>
           <a:lstStyle/>
           <a:p>
-            <a:pPr indent="0" marL="0">
+            <a:pPr marL="0" indent="0">
               <a:buNone/>
             </a:pPr>
             <a:r>
@@ -10791,6 +11071,13 @@
             <a:prstDash val="solid"/>
           </a:ln>
         </p:spPr>
+        <p:txBody>
+          <a:bodyPr/>
+          <a:lstStyle/>
+          <a:p>
+            <a:endParaRPr lang="it-IT"/>
+          </a:p>
+        </p:txBody>
       </p:sp>
       <p:sp>
         <p:nvSpPr>
@@ -10816,6 +11103,13 @@
             <a:prstDash val="solid"/>
           </a:ln>
         </p:spPr>
+        <p:txBody>
+          <a:bodyPr/>
+          <a:lstStyle/>
+          <a:p>
+            <a:endParaRPr lang="it-IT"/>
+          </a:p>
+        </p:txBody>
       </p:sp>
       <p:sp>
         <p:nvSpPr>
@@ -10838,7 +11132,7 @@
           <a:bodyPr wrap="square" lIns="0" tIns="0" rIns="0" bIns="0" rtlCol="0" anchor="ctr"/>
           <a:lstStyle/>
           <a:p>
-            <a:pPr algn="ctr" indent="0" marL="0">
+            <a:pPr marL="0" indent="0" algn="ctr">
               <a:buNone/>
             </a:pPr>
             <a:r>
@@ -10880,6 +11174,13 @@
             <a:prstDash val="solid"/>
           </a:ln>
         </p:spPr>
+        <p:txBody>
+          <a:bodyPr/>
+          <a:lstStyle/>
+          <a:p>
+            <a:endParaRPr lang="it-IT"/>
+          </a:p>
+        </p:txBody>
       </p:sp>
       <p:sp>
         <p:nvSpPr>
@@ -10902,7 +11203,7 @@
           <a:bodyPr wrap="square" lIns="0" tIns="0" rIns="0" bIns="0" rtlCol="0" anchor="ctr"/>
           <a:lstStyle/>
           <a:p>
-            <a:pPr indent="0" marL="0">
+            <a:pPr marL="0" indent="0">
               <a:buNone/>
             </a:pPr>
             <a:r>
@@ -10936,6 +11237,7 @@
         <a:solidFill>
           <a:srgbClr val="1D2D44"/>
         </a:solidFill>
+        <a:effectLst/>
       </p:bgPr>
     </p:bg>
     <p:spTree>
@@ -10976,6 +11278,13 @@
             <a:prstDash val="solid"/>
           </a:ln>
         </p:spPr>
+        <p:txBody>
+          <a:bodyPr/>
+          <a:lstStyle/>
+          <a:p>
+            <a:endParaRPr lang="it-IT"/>
+          </a:p>
+        </p:txBody>
       </p:sp>
       <p:sp>
         <p:nvSpPr>
@@ -10998,7 +11307,7 @@
           <a:bodyPr wrap="square" lIns="0" tIns="0" rIns="0" bIns="0" rtlCol="0" anchor="ctr"/>
           <a:lstStyle/>
           <a:p>
-            <a:pPr indent="0" marL="0">
+            <a:pPr marL="0" indent="0">
               <a:buNone/>
             </a:pPr>
             <a:r>
@@ -11037,7 +11346,7 @@
           <a:bodyPr wrap="square" lIns="0" tIns="0" rIns="0" bIns="0" rtlCol="0" anchor="t"/>
           <a:lstStyle/>
           <a:p>
-            <a:pPr indent="0" marL="0">
+            <a:pPr marL="0" indent="0">
               <a:lnSpc>
                 <a:spcPct val="150000"/>
               </a:lnSpc>
@@ -11057,7 +11366,7 @@
             <a:endParaRPr lang="en-US" sz="1300" dirty="0"/>
           </a:p>
           <a:p>
-            <a:pPr indent="0" marL="0">
+            <a:pPr marL="0" indent="0">
               <a:lnSpc>
                 <a:spcPct val="150000"/>
               </a:lnSpc>
@@ -11077,7 +11386,7 @@
             <a:endParaRPr lang="en-US" sz="1300" dirty="0"/>
           </a:p>
           <a:p>
-            <a:pPr indent="0" marL="0">
+            <a:pPr marL="0" indent="0">
               <a:lnSpc>
                 <a:spcPct val="150000"/>
               </a:lnSpc>
@@ -11097,7 +11406,7 @@
             <a:endParaRPr lang="en-US" sz="1300" dirty="0"/>
           </a:p>
           <a:p>
-            <a:pPr indent="0" marL="0">
+            <a:pPr marL="0" indent="0">
               <a:lnSpc>
                 <a:spcPct val="150000"/>
               </a:lnSpc>
@@ -11117,7 +11426,7 @@
             <a:endParaRPr lang="en-US" sz="1300" dirty="0"/>
           </a:p>
           <a:p>
-            <a:pPr indent="0" marL="0">
+            <a:pPr marL="0" indent="0">
               <a:lnSpc>
                 <a:spcPct val="150000"/>
               </a:lnSpc>
@@ -11137,7 +11446,7 @@
             <a:endParaRPr lang="en-US" sz="1300" dirty="0"/>
           </a:p>
           <a:p>
-            <a:pPr indent="0" marL="0">
+            <a:pPr marL="0" indent="0">
               <a:lnSpc>
                 <a:spcPct val="150000"/>
               </a:lnSpc>
@@ -11174,6 +11483,7 @@
         <a:solidFill>
           <a:srgbClr val="1D2D44"/>
         </a:solidFill>
+        <a:effectLst/>
       </p:bgPr>
     </p:bg>
     <p:spTree>
@@ -11214,6 +11524,13 @@
             <a:prstDash val="solid"/>
           </a:ln>
         </p:spPr>
+        <p:txBody>
+          <a:bodyPr/>
+          <a:lstStyle/>
+          <a:p>
+            <a:endParaRPr lang="it-IT"/>
+          </a:p>
+        </p:txBody>
       </p:sp>
       <p:sp>
         <p:nvSpPr>
@@ -11236,7 +11553,7 @@
           <a:bodyPr wrap="square" lIns="0" tIns="0" rIns="0" bIns="0" rtlCol="0" anchor="ctr"/>
           <a:lstStyle/>
           <a:p>
-            <a:pPr indent="0" marL="0">
+            <a:pPr marL="0" indent="0">
               <a:buNone/>
             </a:pPr>
             <a:r>
@@ -11278,13 +11595,20 @@
             <a:prstDash val="solid"/>
           </a:ln>
           <a:effectLst>
-            <a:outerShdw sx="100000" sy="100000" kx="0" ky="0" algn="bl" rotWithShape="0" blurRad="101600" dist="38100" dir="8100000">
+            <a:outerShdw blurRad="101600" dist="38100" dir="8100000" algn="bl" rotWithShape="0">
               <a:srgbClr val="000000">
                 <a:alpha val="12000"/>
               </a:srgbClr>
             </a:outerShdw>
           </a:effectLst>
         </p:spPr>
+        <p:txBody>
+          <a:bodyPr/>
+          <a:lstStyle/>
+          <a:p>
+            <a:endParaRPr lang="it-IT"/>
+          </a:p>
+        </p:txBody>
       </p:sp>
       <p:sp>
         <p:nvSpPr>
@@ -11310,6 +11634,13 @@
             <a:prstDash val="solid"/>
           </a:ln>
         </p:spPr>
+        <p:txBody>
+          <a:bodyPr/>
+          <a:lstStyle/>
+          <a:p>
+            <a:endParaRPr lang="it-IT"/>
+          </a:p>
+        </p:txBody>
       </p:sp>
       <p:sp>
         <p:nvSpPr>
@@ -11332,7 +11663,7 @@
           <a:bodyPr wrap="square" lIns="0" tIns="0" rIns="0" bIns="0" rtlCol="0" anchor="ctr"/>
           <a:lstStyle/>
           <a:p>
-            <a:pPr algn="ctr" indent="0" marL="0">
+            <a:pPr marL="0" indent="0" algn="ctr">
               <a:buNone/>
             </a:pPr>
             <a:r>
@@ -11486,13 +11817,20 @@
             <a:prstDash val="solid"/>
           </a:ln>
           <a:effectLst>
-            <a:outerShdw sx="100000" sy="100000" kx="0" ky="0" algn="bl" rotWithShape="0" blurRad="101600" dist="38100" dir="8100000">
+            <a:outerShdw blurRad="101600" dist="38100" dir="8100000" algn="bl" rotWithShape="0">
               <a:srgbClr val="000000">
                 <a:alpha val="12000"/>
               </a:srgbClr>
             </a:outerShdw>
           </a:effectLst>
         </p:spPr>
+        <p:txBody>
+          <a:bodyPr/>
+          <a:lstStyle/>
+          <a:p>
+            <a:endParaRPr lang="it-IT"/>
+          </a:p>
+        </p:txBody>
       </p:sp>
       <p:sp>
         <p:nvSpPr>
@@ -11518,6 +11856,13 @@
             <a:prstDash val="solid"/>
           </a:ln>
         </p:spPr>
+        <p:txBody>
+          <a:bodyPr/>
+          <a:lstStyle/>
+          <a:p>
+            <a:endParaRPr lang="it-IT"/>
+          </a:p>
+        </p:txBody>
       </p:sp>
       <p:sp>
         <p:nvSpPr>
@@ -11540,7 +11885,7 @@
           <a:bodyPr wrap="square" lIns="0" tIns="0" rIns="0" bIns="0" rtlCol="0" anchor="ctr"/>
           <a:lstStyle/>
           <a:p>
-            <a:pPr algn="ctr" indent="0" marL="0">
+            <a:pPr marL="0" indent="0" algn="ctr">
               <a:buNone/>
             </a:pPr>
             <a:r>
@@ -11676,13 +12021,20 @@
             <a:prstDash val="solid"/>
           </a:ln>
           <a:effectLst>
-            <a:outerShdw sx="100000" sy="100000" kx="0" ky="0" algn="bl" rotWithShape="0" blurRad="101600" dist="38100" dir="8100000">
+            <a:outerShdw blurRad="101600" dist="38100" dir="8100000" algn="bl" rotWithShape="0">
               <a:srgbClr val="000000">
                 <a:alpha val="12000"/>
               </a:srgbClr>
             </a:outerShdw>
           </a:effectLst>
         </p:spPr>
+        <p:txBody>
+          <a:bodyPr/>
+          <a:lstStyle/>
+          <a:p>
+            <a:endParaRPr lang="it-IT"/>
+          </a:p>
+        </p:txBody>
       </p:sp>
       <p:sp>
         <p:nvSpPr>
@@ -11708,6 +12060,13 @@
             <a:prstDash val="solid"/>
           </a:ln>
         </p:spPr>
+        <p:txBody>
+          <a:bodyPr/>
+          <a:lstStyle/>
+          <a:p>
+            <a:endParaRPr lang="it-IT"/>
+          </a:p>
+        </p:txBody>
       </p:sp>
       <p:sp>
         <p:nvSpPr>
@@ -11730,7 +12089,7 @@
           <a:bodyPr wrap="square" lIns="0" tIns="0" rIns="0" bIns="0" rtlCol="0" anchor="ctr"/>
           <a:lstStyle/>
           <a:p>
-            <a:pPr algn="ctr" indent="0" marL="0">
+            <a:pPr marL="0" indent="0" algn="ctr">
               <a:buNone/>
             </a:pPr>
             <a:r>
@@ -11863,7 +12222,7 @@
           <a:bodyPr wrap="square" lIns="0" tIns="0" rIns="0" bIns="0" rtlCol="0" anchor="ctr"/>
           <a:lstStyle/>
           <a:p>
-            <a:pPr algn="ctr" indent="0" marL="0">
+            <a:pPr marL="0" indent="0" algn="ctr">
               <a:buNone/>
             </a:pPr>
             <a:r>
@@ -11897,6 +12256,7 @@
         <a:solidFill>
           <a:srgbClr val="FFFFFF"/>
         </a:solidFill>
+        <a:effectLst/>
       </p:bgPr>
     </p:bg>
     <p:spTree>
@@ -11939,6 +12299,13 @@
             <a:prstDash val="solid"/>
           </a:ln>
         </p:spPr>
+        <p:txBody>
+          <a:bodyPr/>
+          <a:lstStyle/>
+          <a:p>
+            <a:endParaRPr lang="it-IT"/>
+          </a:p>
+        </p:txBody>
       </p:sp>
       <p:sp>
         <p:nvSpPr>
@@ -11961,7 +12328,7 @@
           <a:bodyPr wrap="square" lIns="0" tIns="0" rIns="0" bIns="0" rtlCol="0" anchor="ctr"/>
           <a:lstStyle/>
           <a:p>
-            <a:pPr algn="ctr" indent="0" marL="0">
+            <a:pPr marL="0" indent="0" algn="ctr">
               <a:buNone/>
             </a:pPr>
             <a:r>
@@ -12000,7 +12367,7 @@
           <a:bodyPr wrap="square" lIns="0" tIns="0" rIns="0" bIns="0" rtlCol="0" anchor="ctr"/>
           <a:lstStyle/>
           <a:p>
-            <a:pPr indent="0" marL="0">
+            <a:pPr marL="0" indent="0">
               <a:buNone/>
             </a:pPr>
             <a:r>
@@ -12042,6 +12409,13 @@
             <a:prstDash val="solid"/>
           </a:ln>
         </p:spPr>
+        <p:txBody>
+          <a:bodyPr/>
+          <a:lstStyle/>
+          <a:p>
+            <a:endParaRPr lang="it-IT"/>
+          </a:p>
+        </p:txBody>
       </p:sp>
       <p:sp>
         <p:nvSpPr>
@@ -12064,7 +12438,7 @@
           <a:bodyPr wrap="square" rtlCol="0" anchor="ctr"/>
           <a:lstStyle/>
           <a:p>
-            <a:pPr algn="r" indent="0" marL="0">
+            <a:pPr marL="0" indent="0" algn="r">
               <a:buNone/>
             </a:pPr>
             <a:r>
@@ -12106,13 +12480,20 @@
             <a:prstDash val="solid"/>
           </a:ln>
           <a:effectLst>
-            <a:outerShdw sx="100000" sy="100000" kx="0" ky="0" algn="bl" rotWithShape="0" blurRad="101600" dist="38100" dir="8100000">
+            <a:outerShdw blurRad="101600" dist="38100" dir="8100000" algn="bl" rotWithShape="0">
               <a:srgbClr val="000000">
                 <a:alpha val="12000"/>
               </a:srgbClr>
             </a:outerShdw>
           </a:effectLst>
         </p:spPr>
+        <p:txBody>
+          <a:bodyPr/>
+          <a:lstStyle/>
+          <a:p>
+            <a:endParaRPr lang="it-IT"/>
+          </a:p>
+        </p:txBody>
       </p:sp>
       <p:sp>
         <p:nvSpPr>
@@ -12138,6 +12519,13 @@
             <a:prstDash val="solid"/>
           </a:ln>
         </p:spPr>
+        <p:txBody>
+          <a:bodyPr/>
+          <a:lstStyle/>
+          <a:p>
+            <a:endParaRPr lang="it-IT"/>
+          </a:p>
+        </p:txBody>
       </p:sp>
       <p:sp>
         <p:nvSpPr>
@@ -12160,7 +12548,7 @@
           <a:bodyPr wrap="square" lIns="0" tIns="0" rIns="0" bIns="0" rtlCol="0" anchor="ctr"/>
           <a:lstStyle/>
           <a:p>
-            <a:pPr indent="0" marL="0">
+            <a:pPr marL="0" indent="0">
               <a:buNone/>
             </a:pPr>
             <a:r>
@@ -12199,7 +12587,7 @@
           <a:bodyPr wrap="square" lIns="0" tIns="0" rIns="0" bIns="0" rtlCol="0" anchor="ctr"/>
           <a:lstStyle/>
           <a:p>
-            <a:pPr indent="0" marL="0">
+            <a:pPr marL="0" indent="0">
               <a:buNone/>
             </a:pPr>
             <a:r>
@@ -12241,13 +12629,20 @@
             <a:prstDash val="solid"/>
           </a:ln>
           <a:effectLst>
-            <a:outerShdw sx="100000" sy="100000" kx="0" ky="0" algn="bl" rotWithShape="0" blurRad="101600" dist="38100" dir="8100000">
+            <a:outerShdw blurRad="101600" dist="38100" dir="8100000" algn="bl" rotWithShape="0">
               <a:srgbClr val="000000">
                 <a:alpha val="12000"/>
               </a:srgbClr>
             </a:outerShdw>
           </a:effectLst>
         </p:spPr>
+        <p:txBody>
+          <a:bodyPr/>
+          <a:lstStyle/>
+          <a:p>
+            <a:endParaRPr lang="it-IT"/>
+          </a:p>
+        </p:txBody>
       </p:sp>
       <p:sp>
         <p:nvSpPr>
@@ -12273,6 +12668,13 @@
             <a:prstDash val="solid"/>
           </a:ln>
         </p:spPr>
+        <p:txBody>
+          <a:bodyPr/>
+          <a:lstStyle/>
+          <a:p>
+            <a:endParaRPr lang="it-IT"/>
+          </a:p>
+        </p:txBody>
       </p:sp>
       <p:sp>
         <p:nvSpPr>
@@ -12295,7 +12697,7 @@
           <a:bodyPr wrap="square" lIns="0" tIns="0" rIns="0" bIns="0" rtlCol="0" anchor="ctr"/>
           <a:lstStyle/>
           <a:p>
-            <a:pPr indent="0" marL="0">
+            <a:pPr marL="0" indent="0">
               <a:buNone/>
             </a:pPr>
             <a:r>
@@ -12334,7 +12736,7 @@
           <a:bodyPr wrap="square" lIns="0" tIns="0" rIns="0" bIns="0" rtlCol="0" anchor="ctr"/>
           <a:lstStyle/>
           <a:p>
-            <a:pPr indent="0" marL="0">
+            <a:pPr marL="0" indent="0">
               <a:buNone/>
             </a:pPr>
             <a:r>
@@ -12376,13 +12778,20 @@
             <a:prstDash val="solid"/>
           </a:ln>
           <a:effectLst>
-            <a:outerShdw sx="100000" sy="100000" kx="0" ky="0" algn="bl" rotWithShape="0" blurRad="101600" dist="38100" dir="8100000">
+            <a:outerShdw blurRad="101600" dist="38100" dir="8100000" algn="bl" rotWithShape="0">
               <a:srgbClr val="000000">
                 <a:alpha val="12000"/>
               </a:srgbClr>
             </a:outerShdw>
           </a:effectLst>
         </p:spPr>
+        <p:txBody>
+          <a:bodyPr/>
+          <a:lstStyle/>
+          <a:p>
+            <a:endParaRPr lang="it-IT"/>
+          </a:p>
+        </p:txBody>
       </p:sp>
       <p:sp>
         <p:nvSpPr>
@@ -12408,6 +12817,13 @@
             <a:prstDash val="solid"/>
           </a:ln>
         </p:spPr>
+        <p:txBody>
+          <a:bodyPr/>
+          <a:lstStyle/>
+          <a:p>
+            <a:endParaRPr lang="it-IT"/>
+          </a:p>
+        </p:txBody>
       </p:sp>
       <p:sp>
         <p:nvSpPr>
@@ -12430,7 +12846,7 @@
           <a:bodyPr wrap="square" lIns="0" tIns="0" rIns="0" bIns="0" rtlCol="0" anchor="ctr"/>
           <a:lstStyle/>
           <a:p>
-            <a:pPr indent="0" marL="0">
+            <a:pPr marL="0" indent="0">
               <a:buNone/>
             </a:pPr>
             <a:r>
@@ -12469,7 +12885,7 @@
           <a:bodyPr wrap="square" lIns="0" tIns="0" rIns="0" bIns="0" rtlCol="0" anchor="ctr"/>
           <a:lstStyle/>
           <a:p>
-            <a:pPr indent="0" marL="0">
+            <a:pPr marL="0" indent="0">
               <a:buNone/>
             </a:pPr>
             <a:r>
@@ -12511,13 +12927,20 @@
             <a:prstDash val="solid"/>
           </a:ln>
           <a:effectLst>
-            <a:outerShdw sx="100000" sy="100000" kx="0" ky="0" algn="bl" rotWithShape="0" blurRad="101600" dist="38100" dir="8100000">
+            <a:outerShdw blurRad="101600" dist="38100" dir="8100000" algn="bl" rotWithShape="0">
               <a:srgbClr val="000000">
                 <a:alpha val="12000"/>
               </a:srgbClr>
             </a:outerShdw>
           </a:effectLst>
         </p:spPr>
+        <p:txBody>
+          <a:bodyPr/>
+          <a:lstStyle/>
+          <a:p>
+            <a:endParaRPr lang="it-IT"/>
+          </a:p>
+        </p:txBody>
       </p:sp>
       <p:sp>
         <p:nvSpPr>
@@ -12543,6 +12966,13 @@
             <a:prstDash val="solid"/>
           </a:ln>
         </p:spPr>
+        <p:txBody>
+          <a:bodyPr/>
+          <a:lstStyle/>
+          <a:p>
+            <a:endParaRPr lang="it-IT"/>
+          </a:p>
+        </p:txBody>
       </p:sp>
       <p:sp>
         <p:nvSpPr>
@@ -12565,7 +12995,7 @@
           <a:bodyPr wrap="square" lIns="0" tIns="0" rIns="0" bIns="0" rtlCol="0" anchor="ctr"/>
           <a:lstStyle/>
           <a:p>
-            <a:pPr indent="0" marL="0">
+            <a:pPr marL="0" indent="0">
               <a:buNone/>
             </a:pPr>
             <a:r>
@@ -12604,7 +13034,7 @@
           <a:bodyPr wrap="square" lIns="0" tIns="0" rIns="0" bIns="0" rtlCol="0" anchor="ctr"/>
           <a:lstStyle/>
           <a:p>
-            <a:pPr indent="0" marL="0">
+            <a:pPr marL="0" indent="0">
               <a:buNone/>
             </a:pPr>
             <a:r>
@@ -12638,6 +13068,7 @@
         <a:solidFill>
           <a:srgbClr val="FFFFFF"/>
         </a:solidFill>
+        <a:effectLst/>
       </p:bgPr>
     </p:bg>
     <p:spTree>
@@ -12680,6 +13111,13 @@
             <a:prstDash val="solid"/>
           </a:ln>
         </p:spPr>
+        <p:txBody>
+          <a:bodyPr/>
+          <a:lstStyle/>
+          <a:p>
+            <a:endParaRPr lang="it-IT"/>
+          </a:p>
+        </p:txBody>
       </p:sp>
       <p:sp>
         <p:nvSpPr>
@@ -12702,7 +13140,7 @@
           <a:bodyPr wrap="square" lIns="0" tIns="0" rIns="0" bIns="0" rtlCol="0" anchor="ctr"/>
           <a:lstStyle/>
           <a:p>
-            <a:pPr algn="ctr" indent="0" marL="0">
+            <a:pPr marL="0" indent="0" algn="ctr">
               <a:buNone/>
             </a:pPr>
             <a:r>
@@ -12741,7 +13179,7 @@
           <a:bodyPr wrap="square" lIns="0" tIns="0" rIns="0" bIns="0" rtlCol="0" anchor="ctr"/>
           <a:lstStyle/>
           <a:p>
-            <a:pPr indent="0" marL="0">
+            <a:pPr marL="0" indent="0">
               <a:buNone/>
             </a:pPr>
             <a:r>
@@ -12783,6 +13221,13 @@
             <a:prstDash val="solid"/>
           </a:ln>
         </p:spPr>
+        <p:txBody>
+          <a:bodyPr/>
+          <a:lstStyle/>
+          <a:p>
+            <a:endParaRPr lang="it-IT"/>
+          </a:p>
+        </p:txBody>
       </p:sp>
       <p:sp>
         <p:nvSpPr>
@@ -12805,7 +13250,7 @@
           <a:bodyPr wrap="square" rtlCol="0" anchor="ctr"/>
           <a:lstStyle/>
           <a:p>
-            <a:pPr algn="r" indent="0" marL="0">
+            <a:pPr marL="0" indent="0" algn="r">
               <a:buNone/>
             </a:pPr>
             <a:r>
@@ -12847,6 +13292,13 @@
             <a:prstDash val="solid"/>
           </a:ln>
         </p:spPr>
+        <p:txBody>
+          <a:bodyPr/>
+          <a:lstStyle/>
+          <a:p>
+            <a:endParaRPr lang="it-IT"/>
+          </a:p>
+        </p:txBody>
       </p:sp>
       <p:sp>
         <p:nvSpPr>
@@ -12869,7 +13321,7 @@
           <a:bodyPr wrap="square" lIns="0" tIns="0" rIns="0" bIns="0" rtlCol="0" anchor="ctr"/>
           <a:lstStyle/>
           <a:p>
-            <a:pPr algn="ctr" indent="0" marL="0">
+            <a:pPr marL="0" indent="0" algn="ctr">
               <a:buNone/>
             </a:pPr>
             <a:r>
@@ -12908,7 +13360,7 @@
           <a:bodyPr wrap="square" lIns="0" tIns="0" rIns="0" bIns="0" rtlCol="0" anchor="ctr"/>
           <a:lstStyle/>
           <a:p>
-            <a:pPr indent="0" marL="0">
+            <a:pPr marL="0" indent="0">
               <a:buNone/>
             </a:pPr>
             <a:r>
@@ -12947,7 +13399,7 @@
           <a:bodyPr wrap="square" lIns="0" tIns="0" rIns="0" bIns="0" rtlCol="0" anchor="ctr"/>
           <a:lstStyle/>
           <a:p>
-            <a:pPr indent="0" marL="0">
+            <a:pPr marL="0" indent="0">
               <a:buNone/>
             </a:pPr>
             <a:r>
@@ -12987,6 +13439,13 @@
             <a:prstDash val="solid"/>
           </a:ln>
         </p:spPr>
+        <p:txBody>
+          <a:bodyPr/>
+          <a:lstStyle/>
+          <a:p>
+            <a:endParaRPr lang="it-IT"/>
+          </a:p>
+        </p:txBody>
       </p:sp>
       <p:sp>
         <p:nvSpPr>
@@ -13012,6 +13471,13 @@
             <a:prstDash val="solid"/>
           </a:ln>
         </p:spPr>
+        <p:txBody>
+          <a:bodyPr/>
+          <a:lstStyle/>
+          <a:p>
+            <a:endParaRPr lang="it-IT"/>
+          </a:p>
+        </p:txBody>
       </p:sp>
       <p:sp>
         <p:nvSpPr>
@@ -13034,7 +13500,7 @@
           <a:bodyPr wrap="square" lIns="0" tIns="0" rIns="0" bIns="0" rtlCol="0" anchor="ctr"/>
           <a:lstStyle/>
           <a:p>
-            <a:pPr algn="ctr" indent="0" marL="0">
+            <a:pPr marL="0" indent="0" algn="ctr">
               <a:buNone/>
             </a:pPr>
             <a:r>
@@ -13073,7 +13539,7 @@
           <a:bodyPr wrap="square" lIns="0" tIns="0" rIns="0" bIns="0" rtlCol="0" anchor="ctr"/>
           <a:lstStyle/>
           <a:p>
-            <a:pPr indent="0" marL="0">
+            <a:pPr marL="0" indent="0">
               <a:buNone/>
             </a:pPr>
             <a:r>
@@ -13112,7 +13578,7 @@
           <a:bodyPr wrap="square" lIns="0" tIns="0" rIns="0" bIns="0" rtlCol="0" anchor="ctr"/>
           <a:lstStyle/>
           <a:p>
-            <a:pPr indent="0" marL="0">
+            <a:pPr marL="0" indent="0">
               <a:buNone/>
             </a:pPr>
             <a:r>
@@ -13152,6 +13618,13 @@
             <a:prstDash val="solid"/>
           </a:ln>
         </p:spPr>
+        <p:txBody>
+          <a:bodyPr/>
+          <a:lstStyle/>
+          <a:p>
+            <a:endParaRPr lang="it-IT"/>
+          </a:p>
+        </p:txBody>
       </p:sp>
       <p:sp>
         <p:nvSpPr>
@@ -13177,6 +13650,13 @@
             <a:prstDash val="solid"/>
           </a:ln>
         </p:spPr>
+        <p:txBody>
+          <a:bodyPr/>
+          <a:lstStyle/>
+          <a:p>
+            <a:endParaRPr lang="it-IT"/>
+          </a:p>
+        </p:txBody>
       </p:sp>
       <p:sp>
         <p:nvSpPr>
@@ -13199,7 +13679,7 @@
           <a:bodyPr wrap="square" lIns="0" tIns="0" rIns="0" bIns="0" rtlCol="0" anchor="ctr"/>
           <a:lstStyle/>
           <a:p>
-            <a:pPr algn="ctr" indent="0" marL="0">
+            <a:pPr marL="0" indent="0" algn="ctr">
               <a:buNone/>
             </a:pPr>
             <a:r>
@@ -13238,7 +13718,7 @@
           <a:bodyPr wrap="square" lIns="0" tIns="0" rIns="0" bIns="0" rtlCol="0" anchor="ctr"/>
           <a:lstStyle/>
           <a:p>
-            <a:pPr indent="0" marL="0">
+            <a:pPr marL="0" indent="0">
               <a:buNone/>
             </a:pPr>
             <a:r>
@@ -13277,7 +13757,7 @@
           <a:bodyPr wrap="square" lIns="0" tIns="0" rIns="0" bIns="0" rtlCol="0" anchor="ctr"/>
           <a:lstStyle/>
           <a:p>
-            <a:pPr indent="0" marL="0">
+            <a:pPr marL="0" indent="0">
               <a:buNone/>
             </a:pPr>
             <a:r>
@@ -13317,6 +13797,13 @@
             <a:prstDash val="solid"/>
           </a:ln>
         </p:spPr>
+        <p:txBody>
+          <a:bodyPr/>
+          <a:lstStyle/>
+          <a:p>
+            <a:endParaRPr lang="it-IT"/>
+          </a:p>
+        </p:txBody>
       </p:sp>
       <p:sp>
         <p:nvSpPr>
@@ -13342,6 +13829,13 @@
             <a:prstDash val="solid"/>
           </a:ln>
         </p:spPr>
+        <p:txBody>
+          <a:bodyPr/>
+          <a:lstStyle/>
+          <a:p>
+            <a:endParaRPr lang="it-IT"/>
+          </a:p>
+        </p:txBody>
       </p:sp>
       <p:sp>
         <p:nvSpPr>
@@ -13364,7 +13858,7 @@
           <a:bodyPr wrap="square" lIns="0" tIns="0" rIns="0" bIns="0" rtlCol="0" anchor="ctr"/>
           <a:lstStyle/>
           <a:p>
-            <a:pPr algn="ctr" indent="0" marL="0">
+            <a:pPr marL="0" indent="0" algn="ctr">
               <a:buNone/>
             </a:pPr>
             <a:r>
@@ -13403,7 +13897,7 @@
           <a:bodyPr wrap="square" lIns="0" tIns="0" rIns="0" bIns="0" rtlCol="0" anchor="ctr"/>
           <a:lstStyle/>
           <a:p>
-            <a:pPr indent="0" marL="0">
+            <a:pPr marL="0" indent="0">
               <a:buNone/>
             </a:pPr>
             <a:r>
@@ -13442,7 +13936,7 @@
           <a:bodyPr wrap="square" lIns="0" tIns="0" rIns="0" bIns="0" rtlCol="0" anchor="ctr"/>
           <a:lstStyle/>
           <a:p>
-            <a:pPr indent="0" marL="0">
+            <a:pPr marL="0" indent="0">
               <a:buNone/>
             </a:pPr>
             <a:r>
@@ -13476,6 +13970,7 @@
         <a:solidFill>
           <a:srgbClr val="1D2D44"/>
         </a:solidFill>
+        <a:effectLst/>
       </p:bgPr>
     </p:bg>
     <p:spTree>
@@ -13516,6 +14011,13 @@
             <a:prstDash val="solid"/>
           </a:ln>
         </p:spPr>
+        <p:txBody>
+          <a:bodyPr/>
+          <a:lstStyle/>
+          <a:p>
+            <a:endParaRPr lang="it-IT"/>
+          </a:p>
+        </p:txBody>
       </p:sp>
       <p:sp>
         <p:nvSpPr>
@@ -13538,7 +14040,7 @@
           <a:bodyPr wrap="square" lIns="0" tIns="0" rIns="0" bIns="0" rtlCol="0" anchor="ctr"/>
           <a:lstStyle/>
           <a:p>
-            <a:pPr indent="0" marL="0">
+            <a:pPr marL="0" indent="0">
               <a:buNone/>
             </a:pPr>
             <a:r>
@@ -13577,7 +14079,7 @@
           <a:bodyPr wrap="square" lIns="0" tIns="0" rIns="0" bIns="0" rtlCol="0" anchor="ctr"/>
           <a:lstStyle/>
           <a:p>
-            <a:pPr indent="0" marL="0">
+            <a:pPr marL="0" indent="0">
               <a:buNone/>
             </a:pPr>
             <a:r>
@@ -13594,7 +14096,7 @@
             <a:endParaRPr lang="en-US" sz="3600" dirty="0"/>
           </a:p>
           <a:p>
-            <a:pPr indent="0" marL="0">
+            <a:pPr marL="0" indent="0">
               <a:buNone/>
             </a:pPr>
             <a:r>
@@ -13636,6 +14138,13 @@
             <a:prstDash val="solid"/>
           </a:ln>
         </p:spPr>
+        <p:txBody>
+          <a:bodyPr/>
+          <a:lstStyle/>
+          <a:p>
+            <a:endParaRPr lang="it-IT"/>
+          </a:p>
+        </p:txBody>
       </p:sp>
       <p:sp>
         <p:nvSpPr>
@@ -13658,7 +14167,7 @@
           <a:bodyPr wrap="square" lIns="0" tIns="0" rIns="0" bIns="0" rtlCol="0" anchor="ctr"/>
           <a:lstStyle/>
           <a:p>
-            <a:pPr algn="ctr" indent="0" marL="0">
+            <a:pPr marL="0" indent="0" algn="ctr">
               <a:buNone/>
             </a:pPr>
             <a:r>
@@ -13697,7 +14206,7 @@
           <a:bodyPr wrap="square" lIns="0" tIns="0" rIns="0" bIns="0" rtlCol="0" anchor="ctr"/>
           <a:lstStyle/>
           <a:p>
-            <a:pPr indent="0" marL="0">
+            <a:pPr marL="0" indent="0">
               <a:buNone/>
             </a:pPr>
             <a:r>
@@ -13739,6 +14248,13 @@
             <a:prstDash val="solid"/>
           </a:ln>
         </p:spPr>
+        <p:txBody>
+          <a:bodyPr/>
+          <a:lstStyle/>
+          <a:p>
+            <a:endParaRPr lang="it-IT"/>
+          </a:p>
+        </p:txBody>
       </p:sp>
       <p:sp>
         <p:nvSpPr>
@@ -13761,7 +14277,7 @@
           <a:bodyPr wrap="square" lIns="0" tIns="0" rIns="0" bIns="0" rtlCol="0" anchor="ctr"/>
           <a:lstStyle/>
           <a:p>
-            <a:pPr algn="ctr" indent="0" marL="0">
+            <a:pPr marL="0" indent="0" algn="ctr">
               <a:buNone/>
             </a:pPr>
             <a:r>
@@ -13800,7 +14316,7 @@
           <a:bodyPr wrap="square" lIns="0" tIns="0" rIns="0" bIns="0" rtlCol="0" anchor="ctr"/>
           <a:lstStyle/>
           <a:p>
-            <a:pPr indent="0" marL="0">
+            <a:pPr marL="0" indent="0">
               <a:buNone/>
             </a:pPr>
             <a:r>
@@ -13842,6 +14358,13 @@
             <a:prstDash val="solid"/>
           </a:ln>
         </p:spPr>
+        <p:txBody>
+          <a:bodyPr/>
+          <a:lstStyle/>
+          <a:p>
+            <a:endParaRPr lang="it-IT"/>
+          </a:p>
+        </p:txBody>
       </p:sp>
       <p:sp>
         <p:nvSpPr>
@@ -13864,7 +14387,7 @@
           <a:bodyPr wrap="square" lIns="0" tIns="0" rIns="0" bIns="0" rtlCol="0" anchor="ctr"/>
           <a:lstStyle/>
           <a:p>
-            <a:pPr algn="ctr" indent="0" marL="0">
+            <a:pPr marL="0" indent="0" algn="ctr">
               <a:buNone/>
             </a:pPr>
             <a:r>
@@ -13903,7 +14426,7 @@
           <a:bodyPr wrap="square" lIns="0" tIns="0" rIns="0" bIns="0" rtlCol="0" anchor="ctr"/>
           <a:lstStyle/>
           <a:p>
-            <a:pPr indent="0" marL="0">
+            <a:pPr marL="0" indent="0">
               <a:buNone/>
             </a:pPr>
             <a:r>
@@ -13945,6 +14468,13 @@
             <a:prstDash val="solid"/>
           </a:ln>
         </p:spPr>
+        <p:txBody>
+          <a:bodyPr/>
+          <a:lstStyle/>
+          <a:p>
+            <a:endParaRPr lang="it-IT"/>
+          </a:p>
+        </p:txBody>
       </p:sp>
       <p:sp>
         <p:nvSpPr>
@@ -13967,7 +14497,7 @@
           <a:bodyPr wrap="square" lIns="0" tIns="0" rIns="0" bIns="0" rtlCol="0" anchor="ctr"/>
           <a:lstStyle/>
           <a:p>
-            <a:pPr algn="ctr" indent="0" marL="0">
+            <a:pPr marL="0" indent="0" algn="ctr">
               <a:buNone/>
             </a:pPr>
             <a:r>
@@ -14006,7 +14536,7 @@
           <a:bodyPr wrap="square" lIns="0" tIns="0" rIns="0" bIns="0" rtlCol="0" anchor="ctr"/>
           <a:lstStyle/>
           <a:p>
-            <a:pPr indent="0" marL="0">
+            <a:pPr marL="0" indent="0">
               <a:buNone/>
             </a:pPr>
             <a:r>
@@ -14046,6 +14576,13 @@
             <a:prstDash val="solid"/>
           </a:ln>
         </p:spPr>
+        <p:txBody>
+          <a:bodyPr/>
+          <a:lstStyle/>
+          <a:p>
+            <a:endParaRPr lang="it-IT"/>
+          </a:p>
+        </p:txBody>
       </p:sp>
       <p:sp>
         <p:nvSpPr>
@@ -14068,7 +14605,7 @@
           <a:bodyPr wrap="square" lIns="0" tIns="0" rIns="0" bIns="0" rtlCol="0" anchor="ctr"/>
           <a:lstStyle/>
           <a:p>
-            <a:pPr indent="0" marL="0">
+            <a:pPr marL="0" indent="0">
               <a:buNone/>
             </a:pPr>
             <a:r>
@@ -14102,6 +14639,7 @@
         <a:solidFill>
           <a:srgbClr val="1D2D44"/>
         </a:solidFill>
+        <a:effectLst/>
       </p:bgPr>
     </p:bg>
     <p:spTree>
@@ -14142,6 +14680,13 @@
             <a:prstDash val="solid"/>
           </a:ln>
         </p:spPr>
+        <p:txBody>
+          <a:bodyPr/>
+          <a:lstStyle/>
+          <a:p>
+            <a:endParaRPr lang="it-IT"/>
+          </a:p>
+        </p:txBody>
       </p:sp>
       <p:sp>
         <p:nvSpPr>
@@ -14164,7 +14709,7 @@
           <a:bodyPr wrap="square" lIns="0" tIns="0" rIns="0" bIns="0" rtlCol="0" anchor="ctr"/>
           <a:lstStyle/>
           <a:p>
-            <a:pPr indent="0" marL="0">
+            <a:pPr marL="0" indent="0">
               <a:buNone/>
             </a:pPr>
             <a:r>
@@ -14203,7 +14748,7 @@
           <a:bodyPr wrap="square" lIns="0" tIns="0" rIns="0" bIns="0" rtlCol="0" anchor="ctr"/>
           <a:lstStyle/>
           <a:p>
-            <a:pPr indent="0" marL="0">
+            <a:pPr marL="0" indent="0">
               <a:buNone/>
             </a:pPr>
             <a:r>
@@ -14220,7 +14765,7 @@
             <a:endParaRPr lang="en-US" sz="4000" dirty="0"/>
           </a:p>
           <a:p>
-            <a:pPr indent="0" marL="0">
+            <a:pPr marL="0" indent="0">
               <a:buNone/>
             </a:pPr>
             <a:r>
@@ -14259,7 +14804,7 @@
           <a:bodyPr wrap="square" lIns="0" tIns="0" rIns="0" bIns="0" rtlCol="0" anchor="ctr"/>
           <a:lstStyle/>
           <a:p>
-            <a:pPr indent="0" marL="0">
+            <a:pPr marL="0" indent="0">
               <a:buNone/>
             </a:pPr>
             <a:r>
@@ -14293,6 +14838,7 @@
         <a:solidFill>
           <a:srgbClr val="FFFFFF"/>
         </a:solidFill>
+        <a:effectLst/>
       </p:bgPr>
     </p:bg>
     <p:spTree>
@@ -14335,6 +14881,13 @@
             <a:prstDash val="solid"/>
           </a:ln>
         </p:spPr>
+        <p:txBody>
+          <a:bodyPr/>
+          <a:lstStyle/>
+          <a:p>
+            <a:endParaRPr lang="it-IT"/>
+          </a:p>
+        </p:txBody>
       </p:sp>
       <p:sp>
         <p:nvSpPr>
@@ -14357,7 +14910,7 @@
           <a:bodyPr wrap="square" lIns="0" tIns="0" rIns="0" bIns="0" rtlCol="0" anchor="ctr"/>
           <a:lstStyle/>
           <a:p>
-            <a:pPr algn="ctr" indent="0" marL="0">
+            <a:pPr marL="0" indent="0" algn="ctr">
               <a:buNone/>
             </a:pPr>
             <a:r>
@@ -14396,7 +14949,7 @@
           <a:bodyPr wrap="square" lIns="0" tIns="0" rIns="0" bIns="0" rtlCol="0" anchor="ctr"/>
           <a:lstStyle/>
           <a:p>
-            <a:pPr indent="0" marL="0">
+            <a:pPr marL="0" indent="0">
               <a:buNone/>
             </a:pPr>
             <a:r>
@@ -14438,6 +14991,13 @@
             <a:prstDash val="solid"/>
           </a:ln>
         </p:spPr>
+        <p:txBody>
+          <a:bodyPr/>
+          <a:lstStyle/>
+          <a:p>
+            <a:endParaRPr lang="it-IT"/>
+          </a:p>
+        </p:txBody>
       </p:sp>
       <p:sp>
         <p:nvSpPr>
@@ -14460,7 +15020,7 @@
           <a:bodyPr wrap="square" rtlCol="0" anchor="ctr"/>
           <a:lstStyle/>
           <a:p>
-            <a:pPr algn="r" indent="0" marL="0">
+            <a:pPr marL="0" indent="0" algn="r">
               <a:buNone/>
             </a:pPr>
             <a:r>
@@ -14502,13 +15062,20 @@
             <a:prstDash val="solid"/>
           </a:ln>
           <a:effectLst>
-            <a:outerShdw sx="100000" sy="100000" kx="0" ky="0" algn="bl" rotWithShape="0" blurRad="101600" dist="38100" dir="8100000">
+            <a:outerShdw blurRad="101600" dist="38100" dir="8100000" algn="bl" rotWithShape="0">
               <a:srgbClr val="000000">
                 <a:alpha val="12000"/>
               </a:srgbClr>
             </a:outerShdw>
           </a:effectLst>
         </p:spPr>
+        <p:txBody>
+          <a:bodyPr/>
+          <a:lstStyle/>
+          <a:p>
+            <a:endParaRPr lang="it-IT"/>
+          </a:p>
+        </p:txBody>
       </p:sp>
       <p:sp>
         <p:nvSpPr>
@@ -14531,7 +15098,7 @@
           <a:bodyPr wrap="square" lIns="0" tIns="0" rIns="0" bIns="0" rtlCol="0" anchor="ctr"/>
           <a:lstStyle/>
           <a:p>
-            <a:pPr indent="0" marL="0">
+            <a:pPr marL="0" indent="0">
               <a:buNone/>
             </a:pPr>
             <a:r>
@@ -14685,13 +15252,20 @@
             <a:prstDash val="solid"/>
           </a:ln>
           <a:effectLst>
-            <a:outerShdw sx="100000" sy="100000" kx="0" ky="0" algn="bl" rotWithShape="0" blurRad="101600" dist="38100" dir="8100000">
+            <a:outerShdw blurRad="101600" dist="38100" dir="8100000" algn="bl" rotWithShape="0">
               <a:srgbClr val="000000">
                 <a:alpha val="12000"/>
               </a:srgbClr>
             </a:outerShdw>
           </a:effectLst>
         </p:spPr>
+        <p:txBody>
+          <a:bodyPr/>
+          <a:lstStyle/>
+          <a:p>
+            <a:endParaRPr lang="it-IT"/>
+          </a:p>
+        </p:txBody>
       </p:sp>
       <p:sp>
         <p:nvSpPr>
@@ -14714,7 +15288,7 @@
           <a:bodyPr wrap="square" lIns="0" tIns="0" rIns="0" bIns="0" rtlCol="0" anchor="ctr"/>
           <a:lstStyle/>
           <a:p>
-            <a:pPr indent="0" marL="0">
+            <a:pPr marL="0" indent="0">
               <a:buNone/>
             </a:pPr>
             <a:r>
@@ -14756,6 +15330,13 @@
             <a:prstDash val="solid"/>
           </a:ln>
         </p:spPr>
+        <p:txBody>
+          <a:bodyPr/>
+          <a:lstStyle/>
+          <a:p>
+            <a:endParaRPr lang="it-IT"/>
+          </a:p>
+        </p:txBody>
       </p:sp>
       <p:sp>
         <p:nvSpPr>
@@ -14778,7 +15359,7 @@
           <a:bodyPr wrap="square" lIns="0" tIns="0" rIns="0" bIns="0" rtlCol="0" anchor="ctr"/>
           <a:lstStyle/>
           <a:p>
-            <a:pPr algn="ctr" indent="0" marL="0">
+            <a:pPr marL="0" indent="0" algn="ctr">
               <a:buNone/>
             </a:pPr>
             <a:r>
@@ -14817,7 +15398,7 @@
           <a:bodyPr wrap="square" lIns="0" tIns="0" rIns="0" bIns="0" rtlCol="0" anchor="ctr"/>
           <a:lstStyle/>
           <a:p>
-            <a:pPr indent="0" marL="0">
+            <a:pPr marL="0" indent="0">
               <a:buNone/>
             </a:pPr>
             <a:r>
@@ -14831,9 +15412,6 @@
               </a:rPr>
               <a:t>CANDIDATE  </a:t>
             </a:r>
-            <a:pPr indent="0" marL="0">
-              <a:buNone/>
-            </a:pPr>
             <a:r>
               <a:rPr lang="en-US" sz="1200" dirty="0">
                 <a:solidFill>
@@ -14871,6 +15449,13 @@
             <a:prstDash val="solid"/>
           </a:ln>
         </p:spPr>
+        <p:txBody>
+          <a:bodyPr/>
+          <a:lstStyle/>
+          <a:p>
+            <a:endParaRPr lang="it-IT"/>
+          </a:p>
+        </p:txBody>
       </p:sp>
       <p:sp>
         <p:nvSpPr>
@@ -14896,6 +15481,13 @@
             <a:prstDash val="solid"/>
           </a:ln>
         </p:spPr>
+        <p:txBody>
+          <a:bodyPr/>
+          <a:lstStyle/>
+          <a:p>
+            <a:endParaRPr lang="it-IT"/>
+          </a:p>
+        </p:txBody>
       </p:sp>
       <p:sp>
         <p:nvSpPr>
@@ -14918,7 +15510,7 @@
           <a:bodyPr wrap="square" lIns="0" tIns="0" rIns="0" bIns="0" rtlCol="0" anchor="ctr"/>
           <a:lstStyle/>
           <a:p>
-            <a:pPr algn="ctr" indent="0" marL="0">
+            <a:pPr marL="0" indent="0" algn="ctr">
               <a:buNone/>
             </a:pPr>
             <a:r>
@@ -14957,7 +15549,7 @@
           <a:bodyPr wrap="square" lIns="0" tIns="0" rIns="0" bIns="0" rtlCol="0" anchor="ctr"/>
           <a:lstStyle/>
           <a:p>
-            <a:pPr indent="0" marL="0">
+            <a:pPr marL="0" indent="0">
               <a:buNone/>
             </a:pPr>
             <a:r>
@@ -14971,9 +15563,6 @@
               </a:rPr>
               <a:t>DaaS  </a:t>
             </a:r>
-            <a:pPr indent="0" marL="0">
-              <a:buNone/>
-            </a:pPr>
             <a:r>
               <a:rPr lang="en-US" sz="1200" dirty="0">
                 <a:solidFill>
@@ -15011,6 +15600,13 @@
             <a:prstDash val="solid"/>
           </a:ln>
         </p:spPr>
+        <p:txBody>
+          <a:bodyPr/>
+          <a:lstStyle/>
+          <a:p>
+            <a:endParaRPr lang="it-IT"/>
+          </a:p>
+        </p:txBody>
       </p:sp>
       <p:sp>
         <p:nvSpPr>
@@ -15036,6 +15632,13 @@
             <a:prstDash val="solid"/>
           </a:ln>
         </p:spPr>
+        <p:txBody>
+          <a:bodyPr/>
+          <a:lstStyle/>
+          <a:p>
+            <a:endParaRPr lang="it-IT"/>
+          </a:p>
+        </p:txBody>
       </p:sp>
       <p:sp>
         <p:nvSpPr>
@@ -15058,7 +15661,7 @@
           <a:bodyPr wrap="square" lIns="0" tIns="0" rIns="0" bIns="0" rtlCol="0" anchor="ctr"/>
           <a:lstStyle/>
           <a:p>
-            <a:pPr algn="ctr" indent="0" marL="0">
+            <a:pPr marL="0" indent="0" algn="ctr">
               <a:buNone/>
             </a:pPr>
             <a:r>
@@ -15097,7 +15700,7 @@
           <a:bodyPr wrap="square" lIns="0" tIns="0" rIns="0" bIns="0" rtlCol="0" anchor="ctr"/>
           <a:lstStyle/>
           <a:p>
-            <a:pPr indent="0" marL="0">
+            <a:pPr marL="0" indent="0">
               <a:buNone/>
             </a:pPr>
             <a:r>
@@ -15111,9 +15714,6 @@
               </a:rPr>
               <a:t>EaaS  </a:t>
             </a:r>
-            <a:pPr indent="0" marL="0">
-              <a:buNone/>
-            </a:pPr>
             <a:r>
               <a:rPr lang="en-US" sz="1200" dirty="0">
                 <a:solidFill>
@@ -15151,6 +15751,13 @@
             <a:prstDash val="solid"/>
           </a:ln>
         </p:spPr>
+        <p:txBody>
+          <a:bodyPr/>
+          <a:lstStyle/>
+          <a:p>
+            <a:endParaRPr lang="it-IT"/>
+          </a:p>
+        </p:txBody>
       </p:sp>
       <p:sp>
         <p:nvSpPr>
@@ -15176,6 +15783,13 @@
             <a:prstDash val="solid"/>
           </a:ln>
         </p:spPr>
+        <p:txBody>
+          <a:bodyPr/>
+          <a:lstStyle/>
+          <a:p>
+            <a:endParaRPr lang="it-IT"/>
+          </a:p>
+        </p:txBody>
       </p:sp>
       <p:sp>
         <p:nvSpPr>
@@ -15198,7 +15812,7 @@
           <a:bodyPr wrap="square" lIns="0" tIns="0" rIns="0" bIns="0" rtlCol="0" anchor="ctr"/>
           <a:lstStyle/>
           <a:p>
-            <a:pPr algn="ctr" indent="0" marL="0">
+            <a:pPr marL="0" indent="0" algn="ctr">
               <a:buNone/>
             </a:pPr>
             <a:r>
@@ -15237,7 +15851,7 @@
           <a:bodyPr wrap="square" lIns="0" tIns="0" rIns="0" bIns="0" rtlCol="0" anchor="ctr"/>
           <a:lstStyle/>
           <a:p>
-            <a:pPr indent="0" marL="0">
+            <a:pPr marL="0" indent="0">
               <a:buNone/>
             </a:pPr>
             <a:r>
@@ -15251,9 +15865,6 @@
               </a:rPr>
               <a:t>AUDIT  </a:t>
             </a:r>
-            <a:pPr indent="0" marL="0">
-              <a:buNone/>
-            </a:pPr>
             <a:r>
               <a:rPr lang="en-US" sz="1200" dirty="0">
                 <a:solidFill>
@@ -15285,6 +15896,7 @@
         <a:solidFill>
           <a:srgbClr val="FFFFFF"/>
         </a:solidFill>
+        <a:effectLst/>
       </p:bgPr>
     </p:bg>
     <p:spTree>
@@ -15327,6 +15939,13 @@
             <a:prstDash val="solid"/>
           </a:ln>
         </p:spPr>
+        <p:txBody>
+          <a:bodyPr/>
+          <a:lstStyle/>
+          <a:p>
+            <a:endParaRPr lang="it-IT"/>
+          </a:p>
+        </p:txBody>
       </p:sp>
       <p:sp>
         <p:nvSpPr>
@@ -15349,7 +15968,7 @@
           <a:bodyPr wrap="square" lIns="0" tIns="0" rIns="0" bIns="0" rtlCol="0" anchor="ctr"/>
           <a:lstStyle/>
           <a:p>
-            <a:pPr algn="ctr" indent="0" marL="0">
+            <a:pPr marL="0" indent="0" algn="ctr">
               <a:buNone/>
             </a:pPr>
             <a:r>
@@ -15388,7 +16007,7 @@
           <a:bodyPr wrap="square" lIns="0" tIns="0" rIns="0" bIns="0" rtlCol="0" anchor="ctr"/>
           <a:lstStyle/>
           <a:p>
-            <a:pPr indent="0" marL="0">
+            <a:pPr marL="0" indent="0">
               <a:buNone/>
             </a:pPr>
             <a:r>
@@ -15430,6 +16049,13 @@
             <a:prstDash val="solid"/>
           </a:ln>
         </p:spPr>
+        <p:txBody>
+          <a:bodyPr/>
+          <a:lstStyle/>
+          <a:p>
+            <a:endParaRPr lang="it-IT"/>
+          </a:p>
+        </p:txBody>
       </p:sp>
       <p:sp>
         <p:nvSpPr>
@@ -15452,7 +16078,7 @@
           <a:bodyPr wrap="square" rtlCol="0" anchor="ctr"/>
           <a:lstStyle/>
           <a:p>
-            <a:pPr algn="r" indent="0" marL="0">
+            <a:pPr marL="0" indent="0" algn="r">
               <a:buNone/>
             </a:pPr>
             <a:r>
@@ -15494,13 +16120,20 @@
             <a:prstDash val="solid"/>
           </a:ln>
           <a:effectLst>
-            <a:outerShdw sx="100000" sy="100000" kx="0" ky="0" algn="bl" rotWithShape="0" blurRad="101600" dist="38100" dir="8100000">
+            <a:outerShdw blurRad="101600" dist="38100" dir="8100000" algn="bl" rotWithShape="0">
               <a:srgbClr val="000000">
                 <a:alpha val="12000"/>
               </a:srgbClr>
             </a:outerShdw>
           </a:effectLst>
         </p:spPr>
+        <p:txBody>
+          <a:bodyPr/>
+          <a:lstStyle/>
+          <a:p>
+            <a:endParaRPr lang="it-IT"/>
+          </a:p>
+        </p:txBody>
       </p:sp>
       <p:sp>
         <p:nvSpPr>
@@ -15526,6 +16159,13 @@
             <a:prstDash val="solid"/>
           </a:ln>
         </p:spPr>
+        <p:txBody>
+          <a:bodyPr/>
+          <a:lstStyle/>
+          <a:p>
+            <a:endParaRPr lang="it-IT"/>
+          </a:p>
+        </p:txBody>
       </p:sp>
       <p:sp>
         <p:nvSpPr>
@@ -15548,7 +16188,7 @@
           <a:bodyPr wrap="square" lIns="0" tIns="0" rIns="0" bIns="0" rtlCol="0" anchor="ctr"/>
           <a:lstStyle/>
           <a:p>
-            <a:pPr algn="ctr" indent="0" marL="0">
+            <a:pPr marL="0" indent="0" algn="ctr">
               <a:buNone/>
             </a:pPr>
             <a:r>
@@ -15587,7 +16227,7 @@
           <a:bodyPr wrap="square" lIns="0" tIns="0" rIns="0" bIns="0" rtlCol="0" anchor="ctr"/>
           <a:lstStyle/>
           <a:p>
-            <a:pPr indent="0" marL="0">
+            <a:pPr marL="0" indent="0">
               <a:buNone/>
             </a:pPr>
             <a:r>
@@ -15604,7 +16244,7 @@
             <a:endParaRPr lang="en-US" sz="1100" dirty="0"/>
           </a:p>
           <a:p>
-            <a:pPr indent="0" marL="0">
+            <a:pPr marL="0" indent="0">
               <a:buNone/>
             </a:pPr>
             <a:r>
@@ -15644,6 +16284,13 @@
             <a:prstDash val="solid"/>
           </a:ln>
         </p:spPr>
+        <p:txBody>
+          <a:bodyPr/>
+          <a:lstStyle/>
+          <a:p>
+            <a:endParaRPr lang="it-IT"/>
+          </a:p>
+        </p:txBody>
       </p:sp>
       <p:sp>
         <p:nvSpPr>
@@ -15666,7 +16313,7 @@
           <a:bodyPr wrap="square" lIns="0" tIns="0" rIns="0" bIns="0" rtlCol="0" anchor="t"/>
           <a:lstStyle/>
           <a:p>
-            <a:pPr indent="0" marL="0">
+            <a:pPr marL="0" indent="0">
               <a:buNone/>
             </a:pPr>
             <a:r>
@@ -15708,13 +16355,20 @@
             <a:prstDash val="solid"/>
           </a:ln>
           <a:effectLst>
-            <a:outerShdw sx="100000" sy="100000" kx="0" ky="0" algn="bl" rotWithShape="0" blurRad="101600" dist="38100" dir="8100000">
+            <a:outerShdw blurRad="101600" dist="38100" dir="8100000" algn="bl" rotWithShape="0">
               <a:srgbClr val="000000">
                 <a:alpha val="12000"/>
               </a:srgbClr>
             </a:outerShdw>
           </a:effectLst>
         </p:spPr>
+        <p:txBody>
+          <a:bodyPr/>
+          <a:lstStyle/>
+          <a:p>
+            <a:endParaRPr lang="it-IT"/>
+          </a:p>
+        </p:txBody>
       </p:sp>
       <p:sp>
         <p:nvSpPr>
@@ -15740,6 +16394,13 @@
             <a:prstDash val="solid"/>
           </a:ln>
         </p:spPr>
+        <p:txBody>
+          <a:bodyPr/>
+          <a:lstStyle/>
+          <a:p>
+            <a:endParaRPr lang="it-IT"/>
+          </a:p>
+        </p:txBody>
       </p:sp>
       <p:sp>
         <p:nvSpPr>
@@ -15762,7 +16423,7 @@
           <a:bodyPr wrap="square" lIns="0" tIns="0" rIns="0" bIns="0" rtlCol="0" anchor="ctr"/>
           <a:lstStyle/>
           <a:p>
-            <a:pPr algn="ctr" indent="0" marL="0">
+            <a:pPr marL="0" indent="0" algn="ctr">
               <a:buNone/>
             </a:pPr>
             <a:r>
@@ -15801,7 +16462,7 @@
           <a:bodyPr wrap="square" lIns="0" tIns="0" rIns="0" bIns="0" rtlCol="0" anchor="ctr"/>
           <a:lstStyle/>
           <a:p>
-            <a:pPr indent="0" marL="0">
+            <a:pPr marL="0" indent="0">
               <a:buNone/>
             </a:pPr>
             <a:r>
@@ -15818,7 +16479,7 @@
             <a:endParaRPr lang="en-US" sz="1100" dirty="0"/>
           </a:p>
           <a:p>
-            <a:pPr indent="0" marL="0">
+            <a:pPr marL="0" indent="0">
               <a:buNone/>
             </a:pPr>
             <a:r>
@@ -15835,7 +16496,7 @@
             <a:endParaRPr lang="en-US" sz="1100" dirty="0"/>
           </a:p>
           <a:p>
-            <a:pPr indent="0" marL="0">
+            <a:pPr marL="0" indent="0">
               <a:buNone/>
             </a:pPr>
             <a:r>
@@ -15875,6 +16536,13 @@
             <a:prstDash val="solid"/>
           </a:ln>
         </p:spPr>
+        <p:txBody>
+          <a:bodyPr/>
+          <a:lstStyle/>
+          <a:p>
+            <a:endParaRPr lang="it-IT"/>
+          </a:p>
+        </p:txBody>
       </p:sp>
       <p:sp>
         <p:nvSpPr>
@@ -15897,7 +16565,7 @@
           <a:bodyPr wrap="square" lIns="0" tIns="0" rIns="0" bIns="0" rtlCol="0" anchor="t"/>
           <a:lstStyle/>
           <a:p>
-            <a:pPr indent="0" marL="0">
+            <a:pPr marL="0" indent="0">
               <a:buNone/>
             </a:pPr>
             <a:r>
@@ -15939,13 +16607,20 @@
             <a:prstDash val="solid"/>
           </a:ln>
           <a:effectLst>
-            <a:outerShdw sx="100000" sy="100000" kx="0" ky="0" algn="bl" rotWithShape="0" blurRad="101600" dist="38100" dir="8100000">
+            <a:outerShdw blurRad="101600" dist="38100" dir="8100000" algn="bl" rotWithShape="0">
               <a:srgbClr val="000000">
                 <a:alpha val="12000"/>
               </a:srgbClr>
             </a:outerShdw>
           </a:effectLst>
         </p:spPr>
+        <p:txBody>
+          <a:bodyPr/>
+          <a:lstStyle/>
+          <a:p>
+            <a:endParaRPr lang="it-IT"/>
+          </a:p>
+        </p:txBody>
       </p:sp>
       <p:sp>
         <p:nvSpPr>
@@ -15971,6 +16646,13 @@
             <a:prstDash val="solid"/>
           </a:ln>
         </p:spPr>
+        <p:txBody>
+          <a:bodyPr/>
+          <a:lstStyle/>
+          <a:p>
+            <a:endParaRPr lang="it-IT"/>
+          </a:p>
+        </p:txBody>
       </p:sp>
       <p:sp>
         <p:nvSpPr>
@@ -15993,7 +16675,7 @@
           <a:bodyPr wrap="square" lIns="0" tIns="0" rIns="0" bIns="0" rtlCol="0" anchor="ctr"/>
           <a:lstStyle/>
           <a:p>
-            <a:pPr algn="ctr" indent="0" marL="0">
+            <a:pPr marL="0" indent="0" algn="ctr">
               <a:buNone/>
             </a:pPr>
             <a:r>
@@ -16032,7 +16714,7 @@
           <a:bodyPr wrap="square" lIns="0" tIns="0" rIns="0" bIns="0" rtlCol="0" anchor="ctr"/>
           <a:lstStyle/>
           <a:p>
-            <a:pPr indent="0" marL="0">
+            <a:pPr marL="0" indent="0">
               <a:buNone/>
             </a:pPr>
             <a:r>
@@ -16049,7 +16731,7 @@
             <a:endParaRPr lang="en-US" sz="1100" dirty="0"/>
           </a:p>
           <a:p>
-            <a:pPr indent="0" marL="0">
+            <a:pPr marL="0" indent="0">
               <a:buNone/>
             </a:pPr>
             <a:r>
@@ -16066,7 +16748,7 @@
             <a:endParaRPr lang="en-US" sz="1100" dirty="0"/>
           </a:p>
           <a:p>
-            <a:pPr indent="0" marL="0">
+            <a:pPr marL="0" indent="0">
               <a:buNone/>
             </a:pPr>
             <a:r>
@@ -16106,6 +16788,13 @@
             <a:prstDash val="solid"/>
           </a:ln>
         </p:spPr>
+        <p:txBody>
+          <a:bodyPr/>
+          <a:lstStyle/>
+          <a:p>
+            <a:endParaRPr lang="it-IT"/>
+          </a:p>
+        </p:txBody>
       </p:sp>
       <p:sp>
         <p:nvSpPr>
@@ -16128,7 +16817,7 @@
           <a:bodyPr wrap="square" lIns="0" tIns="0" rIns="0" bIns="0" rtlCol="0" anchor="t"/>
           <a:lstStyle/>
           <a:p>
-            <a:pPr indent="0" marL="0">
+            <a:pPr marL="0" indent="0">
               <a:buNone/>
             </a:pPr>
             <a:r>
@@ -16168,6 +16857,13 @@
             <a:prstDash val="solid"/>
           </a:ln>
         </p:spPr>
+        <p:txBody>
+          <a:bodyPr/>
+          <a:lstStyle/>
+          <a:p>
+            <a:endParaRPr lang="it-IT"/>
+          </a:p>
+        </p:txBody>
       </p:sp>
       <p:sp>
         <p:nvSpPr>
@@ -16190,7 +16886,7 @@
           <a:bodyPr wrap="square" lIns="0" tIns="0" rIns="0" bIns="0" rtlCol="0" anchor="ctr"/>
           <a:lstStyle/>
           <a:p>
-            <a:pPr algn="ctr" indent="0" marL="0">
+            <a:pPr marL="0" indent="0" algn="ctr">
               <a:buNone/>
             </a:pPr>
             <a:r>
@@ -16207,7 +16903,7 @@
             <a:endParaRPr lang="en-US" sz="800" dirty="0"/>
           </a:p>
           <a:p>
-            <a:pPr algn="ctr" indent="0" marL="0">
+            <a:pPr marL="0" indent="0" algn="ctr">
               <a:buNone/>
             </a:pPr>
             <a:r>
@@ -16247,6 +16943,13 @@
             <a:prstDash val="solid"/>
           </a:ln>
         </p:spPr>
+        <p:txBody>
+          <a:bodyPr/>
+          <a:lstStyle/>
+          <a:p>
+            <a:endParaRPr lang="it-IT"/>
+          </a:p>
+        </p:txBody>
       </p:sp>
       <p:sp>
         <p:nvSpPr>
@@ -16269,7 +16972,7 @@
           <a:bodyPr wrap="square" lIns="0" tIns="0" rIns="0" bIns="0" rtlCol="0" anchor="ctr"/>
           <a:lstStyle/>
           <a:p>
-            <a:pPr algn="ctr" indent="0" marL="0">
+            <a:pPr marL="0" indent="0" algn="ctr">
               <a:buNone/>
             </a:pPr>
             <a:r>
@@ -16286,7 +16989,7 @@
             <a:endParaRPr lang="en-US" sz="800" dirty="0"/>
           </a:p>
           <a:p>
-            <a:pPr algn="ctr" indent="0" marL="0">
+            <a:pPr marL="0" indent="0" algn="ctr">
               <a:buNone/>
             </a:pPr>
             <a:r>
@@ -16325,7 +17028,7 @@
           <a:bodyPr wrap="square" lIns="0" tIns="0" rIns="0" bIns="0" rtlCol="0" anchor="ctr"/>
           <a:lstStyle/>
           <a:p>
-            <a:pPr indent="0" marL="0">
+            <a:pPr marL="0" indent="0">
               <a:buNone/>
             </a:pPr>
             <a:r>
@@ -16359,6 +17062,7 @@
         <a:solidFill>
           <a:srgbClr val="FFFFFF"/>
         </a:solidFill>
+        <a:effectLst/>
       </p:bgPr>
     </p:bg>
     <p:spTree>
@@ -16401,6 +17105,13 @@
             <a:prstDash val="solid"/>
           </a:ln>
         </p:spPr>
+        <p:txBody>
+          <a:bodyPr/>
+          <a:lstStyle/>
+          <a:p>
+            <a:endParaRPr lang="it-IT"/>
+          </a:p>
+        </p:txBody>
       </p:sp>
       <p:sp>
         <p:nvSpPr>
@@ -16423,7 +17134,7 @@
           <a:bodyPr wrap="square" lIns="0" tIns="0" rIns="0" bIns="0" rtlCol="0" anchor="ctr"/>
           <a:lstStyle/>
           <a:p>
-            <a:pPr algn="ctr" indent="0" marL="0">
+            <a:pPr marL="0" indent="0" algn="ctr">
               <a:buNone/>
             </a:pPr>
             <a:r>
@@ -16462,7 +17173,7 @@
           <a:bodyPr wrap="square" lIns="0" tIns="0" rIns="0" bIns="0" rtlCol="0" anchor="ctr"/>
           <a:lstStyle/>
           <a:p>
-            <a:pPr indent="0" marL="0">
+            <a:pPr marL="0" indent="0">
               <a:buNone/>
             </a:pPr>
             <a:r>
@@ -16504,6 +17215,13 @@
             <a:prstDash val="solid"/>
           </a:ln>
         </p:spPr>
+        <p:txBody>
+          <a:bodyPr/>
+          <a:lstStyle/>
+          <a:p>
+            <a:endParaRPr lang="it-IT"/>
+          </a:p>
+        </p:txBody>
       </p:sp>
       <p:sp>
         <p:nvSpPr>
@@ -16526,7 +17244,7 @@
           <a:bodyPr wrap="square" rtlCol="0" anchor="ctr"/>
           <a:lstStyle/>
           <a:p>
-            <a:pPr algn="r" indent="0" marL="0">
+            <a:pPr marL="0" indent="0" algn="r">
               <a:buNone/>
             </a:pPr>
             <a:r>
@@ -16568,13 +17286,20 @@
             <a:prstDash val="solid"/>
           </a:ln>
           <a:effectLst>
-            <a:outerShdw sx="100000" sy="100000" kx="0" ky="0" algn="bl" rotWithShape="0" blurRad="101600" dist="38100" dir="8100000">
+            <a:outerShdw blurRad="101600" dist="38100" dir="8100000" algn="bl" rotWithShape="0">
               <a:srgbClr val="000000">
                 <a:alpha val="12000"/>
               </a:srgbClr>
             </a:outerShdw>
           </a:effectLst>
         </p:spPr>
+        <p:txBody>
+          <a:bodyPr/>
+          <a:lstStyle/>
+          <a:p>
+            <a:endParaRPr lang="it-IT"/>
+          </a:p>
+        </p:txBody>
       </p:sp>
       <p:sp>
         <p:nvSpPr>
@@ -16597,7 +17322,7 @@
           <a:bodyPr wrap="square" lIns="0" tIns="0" rIns="0" bIns="0" rtlCol="0" anchor="ctr"/>
           <a:lstStyle/>
           <a:p>
-            <a:pPr algn="ctr" indent="0" marL="0">
+            <a:pPr marL="0" indent="0" algn="ctr">
               <a:buNone/>
             </a:pPr>
             <a:r>
@@ -16636,7 +17361,7 @@
           <a:bodyPr wrap="square" lIns="0" tIns="0" rIns="0" bIns="0" rtlCol="0" anchor="ctr"/>
           <a:lstStyle/>
           <a:p>
-            <a:pPr algn="ctr" indent="0" marL="0">
+            <a:pPr marL="0" indent="0" algn="ctr">
               <a:buNone/>
             </a:pPr>
             <a:r>
@@ -16678,13 +17403,20 @@
             <a:prstDash val="solid"/>
           </a:ln>
           <a:effectLst>
-            <a:outerShdw sx="100000" sy="100000" kx="0" ky="0" algn="bl" rotWithShape="0" blurRad="101600" dist="38100" dir="8100000">
+            <a:outerShdw blurRad="101600" dist="38100" dir="8100000" algn="bl" rotWithShape="0">
               <a:srgbClr val="000000">
                 <a:alpha val="12000"/>
               </a:srgbClr>
             </a:outerShdw>
           </a:effectLst>
         </p:spPr>
+        <p:txBody>
+          <a:bodyPr/>
+          <a:lstStyle/>
+          <a:p>
+            <a:endParaRPr lang="it-IT"/>
+          </a:p>
+        </p:txBody>
       </p:sp>
       <p:sp>
         <p:nvSpPr>
@@ -16707,7 +17439,7 @@
           <a:bodyPr wrap="square" lIns="0" tIns="0" rIns="0" bIns="0" rtlCol="0" anchor="ctr"/>
           <a:lstStyle/>
           <a:p>
-            <a:pPr algn="ctr" indent="0" marL="0">
+            <a:pPr marL="0" indent="0" algn="ctr">
               <a:buNone/>
             </a:pPr>
             <a:r>
@@ -16746,7 +17478,7 @@
           <a:bodyPr wrap="square" lIns="0" tIns="0" rIns="0" bIns="0" rtlCol="0" anchor="ctr"/>
           <a:lstStyle/>
           <a:p>
-            <a:pPr algn="ctr" indent="0" marL="0">
+            <a:pPr marL="0" indent="0" algn="ctr">
               <a:buNone/>
             </a:pPr>
             <a:r>
@@ -16788,13 +17520,20 @@
             <a:prstDash val="solid"/>
           </a:ln>
           <a:effectLst>
-            <a:outerShdw sx="100000" sy="100000" kx="0" ky="0" algn="bl" rotWithShape="0" blurRad="101600" dist="38100" dir="8100000">
+            <a:outerShdw blurRad="101600" dist="38100" dir="8100000" algn="bl" rotWithShape="0">
               <a:srgbClr val="000000">
                 <a:alpha val="12000"/>
               </a:srgbClr>
             </a:outerShdw>
           </a:effectLst>
         </p:spPr>
+        <p:txBody>
+          <a:bodyPr/>
+          <a:lstStyle/>
+          <a:p>
+            <a:endParaRPr lang="it-IT"/>
+          </a:p>
+        </p:txBody>
       </p:sp>
       <p:sp>
         <p:nvSpPr>
@@ -16817,7 +17556,7 @@
           <a:bodyPr wrap="square" lIns="0" tIns="0" rIns="0" bIns="0" rtlCol="0" anchor="ctr"/>
           <a:lstStyle/>
           <a:p>
-            <a:pPr algn="ctr" indent="0" marL="0">
+            <a:pPr marL="0" indent="0" algn="ctr">
               <a:buNone/>
             </a:pPr>
             <a:r>
@@ -16856,7 +17595,7 @@
           <a:bodyPr wrap="square" lIns="0" tIns="0" rIns="0" bIns="0" rtlCol="0" anchor="ctr"/>
           <a:lstStyle/>
           <a:p>
-            <a:pPr algn="ctr" indent="0" marL="0">
+            <a:pPr marL="0" indent="0" algn="ctr">
               <a:buNone/>
             </a:pPr>
             <a:r>
@@ -16898,13 +17637,20 @@
             <a:prstDash val="solid"/>
           </a:ln>
           <a:effectLst>
-            <a:outerShdw sx="100000" sy="100000" kx="0" ky="0" algn="bl" rotWithShape="0" blurRad="101600" dist="38100" dir="8100000">
+            <a:outerShdw blurRad="101600" dist="38100" dir="8100000" algn="bl" rotWithShape="0">
               <a:srgbClr val="000000">
                 <a:alpha val="12000"/>
               </a:srgbClr>
             </a:outerShdw>
           </a:effectLst>
         </p:spPr>
+        <p:txBody>
+          <a:bodyPr/>
+          <a:lstStyle/>
+          <a:p>
+            <a:endParaRPr lang="it-IT"/>
+          </a:p>
+        </p:txBody>
       </p:sp>
       <p:sp>
         <p:nvSpPr>
@@ -16927,7 +17673,7 @@
           <a:bodyPr wrap="square" lIns="0" tIns="0" rIns="0" bIns="0" rtlCol="0" anchor="ctr"/>
           <a:lstStyle/>
           <a:p>
-            <a:pPr algn="ctr" indent="0" marL="0">
+            <a:pPr marL="0" indent="0" algn="ctr">
               <a:buNone/>
             </a:pPr>
             <a:r>
@@ -16966,7 +17712,7 @@
           <a:bodyPr wrap="square" lIns="0" tIns="0" rIns="0" bIns="0" rtlCol="0" anchor="ctr"/>
           <a:lstStyle/>
           <a:p>
-            <a:pPr algn="ctr" indent="0" marL="0">
+            <a:pPr marL="0" indent="0" algn="ctr">
               <a:buNone/>
             </a:pPr>
             <a:r>
@@ -17008,13 +17754,20 @@
             <a:prstDash val="solid"/>
           </a:ln>
           <a:effectLst>
-            <a:outerShdw sx="100000" sy="100000" kx="0" ky="0" algn="bl" rotWithShape="0" blurRad="101600" dist="38100" dir="8100000">
+            <a:outerShdw blurRad="101600" dist="38100" dir="8100000" algn="bl" rotWithShape="0">
               <a:srgbClr val="000000">
                 <a:alpha val="12000"/>
               </a:srgbClr>
             </a:outerShdw>
           </a:effectLst>
         </p:spPr>
+        <p:txBody>
+          <a:bodyPr/>
+          <a:lstStyle/>
+          <a:p>
+            <a:endParaRPr lang="it-IT"/>
+          </a:p>
+        </p:txBody>
       </p:sp>
       <p:sp>
         <p:nvSpPr>
@@ -17037,7 +17790,7 @@
           <a:bodyPr wrap="square" lIns="0" tIns="0" rIns="0" bIns="0" rtlCol="0" anchor="ctr"/>
           <a:lstStyle/>
           <a:p>
-            <a:pPr algn="ctr" indent="0" marL="0">
+            <a:pPr marL="0" indent="0" algn="ctr">
               <a:buNone/>
             </a:pPr>
             <a:r>
@@ -17076,7 +17829,7 @@
           <a:bodyPr wrap="square" lIns="0" tIns="0" rIns="0" bIns="0" rtlCol="0" anchor="ctr"/>
           <a:lstStyle/>
           <a:p>
-            <a:pPr algn="ctr" indent="0" marL="0">
+            <a:pPr marL="0" indent="0" algn="ctr">
               <a:buNone/>
             </a:pPr>
             <a:r>
@@ -17118,13 +17871,20 @@
             <a:prstDash val="solid"/>
           </a:ln>
           <a:effectLst>
-            <a:outerShdw sx="100000" sy="100000" kx="0" ky="0" algn="bl" rotWithShape="0" blurRad="101600" dist="38100" dir="8100000">
+            <a:outerShdw blurRad="101600" dist="38100" dir="8100000" algn="bl" rotWithShape="0">
               <a:srgbClr val="000000">
                 <a:alpha val="12000"/>
               </a:srgbClr>
             </a:outerShdw>
           </a:effectLst>
         </p:spPr>
+        <p:txBody>
+          <a:bodyPr/>
+          <a:lstStyle/>
+          <a:p>
+            <a:endParaRPr lang="it-IT"/>
+          </a:p>
+        </p:txBody>
       </p:sp>
       <p:sp>
         <p:nvSpPr>
@@ -17147,7 +17907,7 @@
           <a:bodyPr wrap="square" lIns="0" tIns="0" rIns="0" bIns="0" rtlCol="0" anchor="ctr"/>
           <a:lstStyle/>
           <a:p>
-            <a:pPr algn="ctr" indent="0" marL="0">
+            <a:pPr marL="0" indent="0" algn="ctr">
               <a:buNone/>
             </a:pPr>
             <a:r>
@@ -17186,7 +17946,7 @@
           <a:bodyPr wrap="square" lIns="0" tIns="0" rIns="0" bIns="0" rtlCol="0" anchor="ctr"/>
           <a:lstStyle/>
           <a:p>
-            <a:pPr algn="ctr" indent="0" marL="0">
+            <a:pPr marL="0" indent="0" algn="ctr">
               <a:buNone/>
             </a:pPr>
             <a:r>
@@ -17228,13 +17988,20 @@
             <a:prstDash val="solid"/>
           </a:ln>
           <a:effectLst>
-            <a:outerShdw sx="100000" sy="100000" kx="0" ky="0" algn="bl" rotWithShape="0" blurRad="101600" dist="38100" dir="8100000">
+            <a:outerShdw blurRad="101600" dist="38100" dir="8100000" algn="bl" rotWithShape="0">
               <a:srgbClr val="000000">
                 <a:alpha val="12000"/>
               </a:srgbClr>
             </a:outerShdw>
           </a:effectLst>
         </p:spPr>
+        <p:txBody>
+          <a:bodyPr/>
+          <a:lstStyle/>
+          <a:p>
+            <a:endParaRPr lang="it-IT"/>
+          </a:p>
+        </p:txBody>
       </p:sp>
       <p:sp>
         <p:nvSpPr>
@@ -17257,7 +18024,7 @@
           <a:bodyPr wrap="square" lIns="0" tIns="0" rIns="0" bIns="0" rtlCol="0" anchor="ctr"/>
           <a:lstStyle/>
           <a:p>
-            <a:pPr indent="0" marL="0">
+            <a:pPr marL="0" indent="0">
               <a:buNone/>
             </a:pPr>
             <a:r>
@@ -17296,7 +18063,7 @@
           <a:bodyPr wrap="square" lIns="0" tIns="0" rIns="0" bIns="0" rtlCol="0" anchor="ctr"/>
           <a:lstStyle/>
           <a:p>
-            <a:pPr indent="0" marL="0">
+            <a:pPr marL="0" indent="0">
               <a:buNone/>
             </a:pPr>
             <a:r>
@@ -17335,7 +18102,7 @@
           <a:bodyPr wrap="square" lIns="0" tIns="0" rIns="0" bIns="0" rtlCol="0" anchor="ctr"/>
           <a:lstStyle/>
           <a:p>
-            <a:pPr indent="0" marL="0">
+            <a:pPr marL="0" indent="0">
               <a:buNone/>
             </a:pPr>
             <a:r>
@@ -17377,6 +18144,13 @@
             <a:prstDash val="solid"/>
           </a:ln>
         </p:spPr>
+        <p:txBody>
+          <a:bodyPr/>
+          <a:lstStyle/>
+          <a:p>
+            <a:endParaRPr lang="it-IT"/>
+          </a:p>
+        </p:txBody>
       </p:sp>
       <p:sp>
         <p:nvSpPr>
@@ -17399,7 +18173,7 @@
           <a:bodyPr wrap="square" lIns="0" tIns="0" rIns="0" bIns="0" rtlCol="0" anchor="ctr"/>
           <a:lstStyle/>
           <a:p>
-            <a:pPr indent="0" marL="0">
+            <a:pPr marL="0" indent="0">
               <a:buNone/>
             </a:pPr>
             <a:r>
@@ -17438,7 +18212,7 @@
           <a:bodyPr wrap="square" lIns="0" tIns="0" rIns="0" bIns="0" rtlCol="0" anchor="ctr"/>
           <a:lstStyle/>
           <a:p>
-            <a:pPr indent="0" marL="0">
+            <a:pPr marL="0" indent="0">
               <a:buNone/>
             </a:pPr>
             <a:r>
@@ -17480,6 +18254,13 @@
             <a:prstDash val="solid"/>
           </a:ln>
         </p:spPr>
+        <p:txBody>
+          <a:bodyPr/>
+          <a:lstStyle/>
+          <a:p>
+            <a:endParaRPr lang="it-IT"/>
+          </a:p>
+        </p:txBody>
       </p:sp>
       <p:sp>
         <p:nvSpPr>
@@ -17502,7 +18283,7 @@
           <a:bodyPr wrap="square" lIns="0" tIns="0" rIns="0" bIns="0" rtlCol="0" anchor="ctr"/>
           <a:lstStyle/>
           <a:p>
-            <a:pPr indent="0" marL="0">
+            <a:pPr marL="0" indent="0">
               <a:buNone/>
             </a:pPr>
             <a:r>
@@ -17541,7 +18322,7 @@
           <a:bodyPr wrap="square" lIns="0" tIns="0" rIns="0" bIns="0" rtlCol="0" anchor="ctr"/>
           <a:lstStyle/>
           <a:p>
-            <a:pPr indent="0" marL="0">
+            <a:pPr marL="0" indent="0">
               <a:buNone/>
             </a:pPr>
             <a:r>
@@ -17583,6 +18364,13 @@
             <a:prstDash val="solid"/>
           </a:ln>
         </p:spPr>
+        <p:txBody>
+          <a:bodyPr/>
+          <a:lstStyle/>
+          <a:p>
+            <a:endParaRPr lang="it-IT"/>
+          </a:p>
+        </p:txBody>
       </p:sp>
       <p:sp>
         <p:nvSpPr>
@@ -17605,7 +18393,7 @@
           <a:bodyPr wrap="square" lIns="0" tIns="0" rIns="0" bIns="0" rtlCol="0" anchor="ctr"/>
           <a:lstStyle/>
           <a:p>
-            <a:pPr indent="0" marL="0">
+            <a:pPr marL="0" indent="0">
               <a:buNone/>
             </a:pPr>
             <a:r>
@@ -17644,7 +18432,7 @@
           <a:bodyPr wrap="square" lIns="0" tIns="0" rIns="0" bIns="0" rtlCol="0" anchor="ctr"/>
           <a:lstStyle/>
           <a:p>
-            <a:pPr indent="0" marL="0">
+            <a:pPr marL="0" indent="0">
               <a:buNone/>
             </a:pPr>
             <a:r>
@@ -17686,6 +18474,13 @@
             <a:prstDash val="solid"/>
           </a:ln>
         </p:spPr>
+        <p:txBody>
+          <a:bodyPr/>
+          <a:lstStyle/>
+          <a:p>
+            <a:endParaRPr lang="it-IT"/>
+          </a:p>
+        </p:txBody>
       </p:sp>
       <p:sp>
         <p:nvSpPr>
@@ -17708,7 +18503,7 @@
           <a:bodyPr wrap="square" lIns="0" tIns="0" rIns="0" bIns="0" rtlCol="0" anchor="ctr"/>
           <a:lstStyle/>
           <a:p>
-            <a:pPr indent="0" marL="0">
+            <a:pPr marL="0" indent="0">
               <a:buNone/>
             </a:pPr>
             <a:r>
@@ -17747,7 +18542,7 @@
           <a:bodyPr wrap="square" lIns="0" tIns="0" rIns="0" bIns="0" rtlCol="0" anchor="ctr"/>
           <a:lstStyle/>
           <a:p>
-            <a:pPr indent="0" marL="0">
+            <a:pPr marL="0" indent="0">
               <a:buNone/>
             </a:pPr>
             <a:r>
@@ -17789,6 +18584,13 @@
             <a:prstDash val="solid"/>
           </a:ln>
         </p:spPr>
+        <p:txBody>
+          <a:bodyPr/>
+          <a:lstStyle/>
+          <a:p>
+            <a:endParaRPr lang="it-IT"/>
+          </a:p>
+        </p:txBody>
       </p:sp>
       <p:sp>
         <p:nvSpPr>
@@ -17811,7 +18613,7 @@
           <a:bodyPr wrap="square" lIns="0" tIns="0" rIns="0" bIns="0" rtlCol="0" anchor="ctr"/>
           <a:lstStyle/>
           <a:p>
-            <a:pPr indent="0" marL="0">
+            <a:pPr marL="0" indent="0">
               <a:buNone/>
             </a:pPr>
             <a:r>
@@ -17850,7 +18652,7 @@
           <a:bodyPr wrap="square" lIns="0" tIns="0" rIns="0" bIns="0" rtlCol="0" anchor="ctr"/>
           <a:lstStyle/>
           <a:p>
-            <a:pPr indent="0" marL="0">
+            <a:pPr marL="0" indent="0">
               <a:buNone/>
             </a:pPr>
             <a:r>
@@ -17892,6 +18694,13 @@
             <a:prstDash val="solid"/>
           </a:ln>
         </p:spPr>
+        <p:txBody>
+          <a:bodyPr/>
+          <a:lstStyle/>
+          <a:p>
+            <a:endParaRPr lang="it-IT"/>
+          </a:p>
+        </p:txBody>
       </p:sp>
       <p:sp>
         <p:nvSpPr>
@@ -17914,7 +18723,7 @@
           <a:bodyPr wrap="square" lIns="0" tIns="0" rIns="0" bIns="0" rtlCol="0" anchor="ctr"/>
           <a:lstStyle/>
           <a:p>
-            <a:pPr indent="0" marL="0">
+            <a:pPr marL="0" indent="0">
               <a:buNone/>
             </a:pPr>
             <a:r>
@@ -17953,7 +18762,7 @@
           <a:bodyPr wrap="square" lIns="0" tIns="0" rIns="0" bIns="0" rtlCol="0" anchor="ctr"/>
           <a:lstStyle/>
           <a:p>
-            <a:pPr indent="0" marL="0">
+            <a:pPr marL="0" indent="0">
               <a:buNone/>
             </a:pPr>
             <a:r>
@@ -17987,6 +18796,7 @@
         <a:solidFill>
           <a:srgbClr val="FFFFFF"/>
         </a:solidFill>
+        <a:effectLst/>
       </p:bgPr>
     </p:bg>
     <p:spTree>
@@ -18029,6 +18839,13 @@
             <a:prstDash val="solid"/>
           </a:ln>
         </p:spPr>
+        <p:txBody>
+          <a:bodyPr/>
+          <a:lstStyle/>
+          <a:p>
+            <a:endParaRPr lang="it-IT"/>
+          </a:p>
+        </p:txBody>
       </p:sp>
       <p:sp>
         <p:nvSpPr>
@@ -18051,7 +18868,7 @@
           <a:bodyPr wrap="square" lIns="0" tIns="0" rIns="0" bIns="0" rtlCol="0" anchor="ctr"/>
           <a:lstStyle/>
           <a:p>
-            <a:pPr algn="ctr" indent="0" marL="0">
+            <a:pPr marL="0" indent="0" algn="ctr">
               <a:buNone/>
             </a:pPr>
             <a:r>
@@ -18090,7 +18907,7 @@
           <a:bodyPr wrap="square" lIns="0" tIns="0" rIns="0" bIns="0" rtlCol="0" anchor="ctr"/>
           <a:lstStyle/>
           <a:p>
-            <a:pPr indent="0" marL="0">
+            <a:pPr marL="0" indent="0">
               <a:buNone/>
             </a:pPr>
             <a:r>
@@ -18132,6 +18949,13 @@
             <a:prstDash val="solid"/>
           </a:ln>
         </p:spPr>
+        <p:txBody>
+          <a:bodyPr/>
+          <a:lstStyle/>
+          <a:p>
+            <a:endParaRPr lang="it-IT"/>
+          </a:p>
+        </p:txBody>
       </p:sp>
       <p:sp>
         <p:nvSpPr>
@@ -18154,7 +18978,7 @@
           <a:bodyPr wrap="square" rtlCol="0" anchor="ctr"/>
           <a:lstStyle/>
           <a:p>
-            <a:pPr algn="r" indent="0" marL="0">
+            <a:pPr marL="0" indent="0" algn="r">
               <a:buNone/>
             </a:pPr>
             <a:r>
@@ -18193,7 +19017,7 @@
           <a:bodyPr wrap="square" lIns="0" tIns="0" rIns="0" bIns="0" rtlCol="0" anchor="ctr"/>
           <a:lstStyle/>
           <a:p>
-            <a:pPr indent="0" marL="0">
+            <a:pPr marL="0" indent="0">
               <a:buNone/>
             </a:pPr>
             <a:r>
@@ -18235,6 +19059,13 @@
             <a:prstDash val="solid"/>
           </a:ln>
         </p:spPr>
+        <p:txBody>
+          <a:bodyPr/>
+          <a:lstStyle/>
+          <a:p>
+            <a:endParaRPr lang="it-IT"/>
+          </a:p>
+        </p:txBody>
       </p:sp>
       <p:sp>
         <p:nvSpPr>
@@ -18257,7 +19088,7 @@
           <a:bodyPr wrap="square" lIns="0" tIns="0" rIns="0" bIns="0" rtlCol="0" anchor="ctr"/>
           <a:lstStyle/>
           <a:p>
-            <a:pPr algn="ctr" indent="0" marL="0">
+            <a:pPr marL="0" indent="0" algn="ctr">
               <a:buNone/>
             </a:pPr>
             <a:r>
@@ -18299,6 +19130,13 @@
             <a:prstDash val="solid"/>
           </a:ln>
         </p:spPr>
+        <p:txBody>
+          <a:bodyPr/>
+          <a:lstStyle/>
+          <a:p>
+            <a:endParaRPr lang="it-IT"/>
+          </a:p>
+        </p:txBody>
       </p:sp>
       <p:sp>
         <p:nvSpPr>
@@ -18321,7 +19159,7 @@
           <a:bodyPr wrap="square" lIns="0" tIns="0" rIns="0" bIns="0" rtlCol="0" anchor="ctr"/>
           <a:lstStyle/>
           <a:p>
-            <a:pPr algn="ctr" indent="0" marL="0">
+            <a:pPr marL="0" indent="0" algn="ctr">
               <a:buNone/>
             </a:pPr>
             <a:r>
@@ -18363,6 +19201,13 @@
             <a:prstDash val="solid"/>
           </a:ln>
         </p:spPr>
+        <p:txBody>
+          <a:bodyPr/>
+          <a:lstStyle/>
+          <a:p>
+            <a:endParaRPr lang="it-IT"/>
+          </a:p>
+        </p:txBody>
       </p:sp>
       <p:sp>
         <p:nvSpPr>
@@ -18385,7 +19230,7 @@
           <a:bodyPr wrap="square" lIns="0" tIns="0" rIns="0" bIns="0" rtlCol="0" anchor="ctr"/>
           <a:lstStyle/>
           <a:p>
-            <a:pPr algn="ctr" indent="0" marL="0">
+            <a:pPr marL="0" indent="0" algn="ctr">
               <a:buNone/>
             </a:pPr>
             <a:r>
@@ -18427,6 +19272,13 @@
             <a:prstDash val="solid"/>
           </a:ln>
         </p:spPr>
+        <p:txBody>
+          <a:bodyPr/>
+          <a:lstStyle/>
+          <a:p>
+            <a:endParaRPr lang="it-IT"/>
+          </a:p>
+        </p:txBody>
       </p:sp>
       <p:sp>
         <p:nvSpPr>
@@ -18449,7 +19301,7 @@
           <a:bodyPr wrap="square" lIns="0" tIns="0" rIns="0" bIns="0" rtlCol="0" anchor="ctr"/>
           <a:lstStyle/>
           <a:p>
-            <a:pPr algn="ctr" indent="0" marL="0">
+            <a:pPr marL="0" indent="0" algn="ctr">
               <a:buNone/>
             </a:pPr>
             <a:r>
@@ -18491,6 +19343,13 @@
             <a:prstDash val="solid"/>
           </a:ln>
         </p:spPr>
+        <p:txBody>
+          <a:bodyPr/>
+          <a:lstStyle/>
+          <a:p>
+            <a:endParaRPr lang="it-IT"/>
+          </a:p>
+        </p:txBody>
       </p:sp>
       <p:sp>
         <p:nvSpPr>
@@ -18513,7 +19372,7 @@
           <a:bodyPr wrap="square" lIns="0" tIns="0" rIns="0" bIns="0" rtlCol="0" anchor="ctr"/>
           <a:lstStyle/>
           <a:p>
-            <a:pPr indent="0" marL="0">
+            <a:pPr marL="0" indent="0">
               <a:buNone/>
             </a:pPr>
             <a:r>
@@ -18555,6 +19414,13 @@
             <a:prstDash val="solid"/>
           </a:ln>
         </p:spPr>
+        <p:txBody>
+          <a:bodyPr/>
+          <a:lstStyle/>
+          <a:p>
+            <a:endParaRPr lang="it-IT"/>
+          </a:p>
+        </p:txBody>
       </p:sp>
       <p:sp>
         <p:nvSpPr>
@@ -18577,7 +19443,7 @@
           <a:bodyPr wrap="square" lIns="0" tIns="0" rIns="0" bIns="0" rtlCol="0" anchor="ctr"/>
           <a:lstStyle/>
           <a:p>
-            <a:pPr indent="0" marL="0">
+            <a:pPr marL="0" indent="0">
               <a:buNone/>
             </a:pPr>
             <a:r>
@@ -18619,6 +19485,13 @@
             <a:prstDash val="solid"/>
           </a:ln>
         </p:spPr>
+        <p:txBody>
+          <a:bodyPr/>
+          <a:lstStyle/>
+          <a:p>
+            <a:endParaRPr lang="it-IT"/>
+          </a:p>
+        </p:txBody>
       </p:sp>
       <p:sp>
         <p:nvSpPr>
@@ -18641,7 +19514,7 @@
           <a:bodyPr wrap="square" lIns="0" tIns="0" rIns="0" bIns="0" rtlCol="0" anchor="ctr"/>
           <a:lstStyle/>
           <a:p>
-            <a:pPr indent="0" marL="0">
+            <a:pPr marL="0" indent="0">
               <a:buNone/>
             </a:pPr>
             <a:r>
@@ -18683,6 +19556,13 @@
             <a:prstDash val="solid"/>
           </a:ln>
         </p:spPr>
+        <p:txBody>
+          <a:bodyPr/>
+          <a:lstStyle/>
+          <a:p>
+            <a:endParaRPr lang="it-IT"/>
+          </a:p>
+        </p:txBody>
       </p:sp>
       <p:sp>
         <p:nvSpPr>
@@ -18705,7 +19585,7 @@
           <a:bodyPr wrap="square" lIns="0" tIns="0" rIns="0" bIns="0" rtlCol="0" anchor="ctr"/>
           <a:lstStyle/>
           <a:p>
-            <a:pPr indent="0" marL="0">
+            <a:pPr marL="0" indent="0">
               <a:buNone/>
             </a:pPr>
             <a:r>
@@ -18747,6 +19627,13 @@
             <a:prstDash val="solid"/>
           </a:ln>
         </p:spPr>
+        <p:txBody>
+          <a:bodyPr/>
+          <a:lstStyle/>
+          <a:p>
+            <a:endParaRPr lang="it-IT"/>
+          </a:p>
+        </p:txBody>
       </p:sp>
       <p:sp>
         <p:nvSpPr>
@@ -18769,7 +19656,7 @@
           <a:bodyPr wrap="square" lIns="0" tIns="0" rIns="0" bIns="0" rtlCol="0" anchor="ctr"/>
           <a:lstStyle/>
           <a:p>
-            <a:pPr indent="0" marL="0">
+            <a:pPr marL="0" indent="0">
               <a:buNone/>
             </a:pPr>
             <a:r>
@@ -18811,6 +19698,13 @@
             <a:prstDash val="solid"/>
           </a:ln>
         </p:spPr>
+        <p:txBody>
+          <a:bodyPr/>
+          <a:lstStyle/>
+          <a:p>
+            <a:endParaRPr lang="it-IT"/>
+          </a:p>
+        </p:txBody>
       </p:sp>
       <p:sp>
         <p:nvSpPr>
@@ -18833,7 +19727,7 @@
           <a:bodyPr wrap="square" lIns="0" tIns="0" rIns="0" bIns="0" rtlCol="0" anchor="ctr"/>
           <a:lstStyle/>
           <a:p>
-            <a:pPr indent="0" marL="0">
+            <a:pPr marL="0" indent="0">
               <a:buNone/>
             </a:pPr>
             <a:r>
@@ -18875,6 +19769,13 @@
             <a:prstDash val="solid"/>
           </a:ln>
         </p:spPr>
+        <p:txBody>
+          <a:bodyPr/>
+          <a:lstStyle/>
+          <a:p>
+            <a:endParaRPr lang="it-IT"/>
+          </a:p>
+        </p:txBody>
       </p:sp>
       <p:sp>
         <p:nvSpPr>
@@ -18897,7 +19798,7 @@
           <a:bodyPr wrap="square" lIns="0" tIns="0" rIns="0" bIns="0" rtlCol="0" anchor="ctr"/>
           <a:lstStyle/>
           <a:p>
-            <a:pPr indent="0" marL="0">
+            <a:pPr marL="0" indent="0">
               <a:buNone/>
             </a:pPr>
             <a:r>
@@ -18939,6 +19840,13 @@
             <a:prstDash val="solid"/>
           </a:ln>
         </p:spPr>
+        <p:txBody>
+          <a:bodyPr/>
+          <a:lstStyle/>
+          <a:p>
+            <a:endParaRPr lang="it-IT"/>
+          </a:p>
+        </p:txBody>
       </p:sp>
       <p:sp>
         <p:nvSpPr>
@@ -18961,7 +19869,7 @@
           <a:bodyPr wrap="square" lIns="0" tIns="0" rIns="0" bIns="0" rtlCol="0" anchor="ctr"/>
           <a:lstStyle/>
           <a:p>
-            <a:pPr indent="0" marL="0">
+            <a:pPr marL="0" indent="0">
               <a:buNone/>
             </a:pPr>
             <a:r>
@@ -19003,6 +19911,13 @@
             <a:prstDash val="solid"/>
           </a:ln>
         </p:spPr>
+        <p:txBody>
+          <a:bodyPr/>
+          <a:lstStyle/>
+          <a:p>
+            <a:endParaRPr lang="it-IT"/>
+          </a:p>
+        </p:txBody>
       </p:sp>
       <p:sp>
         <p:nvSpPr>
@@ -19025,7 +19940,7 @@
           <a:bodyPr wrap="square" lIns="0" tIns="0" rIns="0" bIns="0" rtlCol="0" anchor="ctr"/>
           <a:lstStyle/>
           <a:p>
-            <a:pPr indent="0" marL="0">
+            <a:pPr marL="0" indent="0">
               <a:buNone/>
             </a:pPr>
             <a:r>
@@ -19067,6 +19982,13 @@
             <a:prstDash val="solid"/>
           </a:ln>
         </p:spPr>
+        <p:txBody>
+          <a:bodyPr/>
+          <a:lstStyle/>
+          <a:p>
+            <a:endParaRPr lang="it-IT"/>
+          </a:p>
+        </p:txBody>
       </p:sp>
       <p:sp>
         <p:nvSpPr>
@@ -19089,7 +20011,7 @@
           <a:bodyPr wrap="square" lIns="0" tIns="0" rIns="0" bIns="0" rtlCol="0" anchor="ctr"/>
           <a:lstStyle/>
           <a:p>
-            <a:pPr indent="0" marL="0">
+            <a:pPr marL="0" indent="0">
               <a:buNone/>
             </a:pPr>
             <a:r>
@@ -19131,6 +20053,13 @@
             <a:prstDash val="solid"/>
           </a:ln>
         </p:spPr>
+        <p:txBody>
+          <a:bodyPr/>
+          <a:lstStyle/>
+          <a:p>
+            <a:endParaRPr lang="it-IT"/>
+          </a:p>
+        </p:txBody>
       </p:sp>
       <p:sp>
         <p:nvSpPr>
@@ -19153,7 +20082,7 @@
           <a:bodyPr wrap="square" lIns="0" tIns="0" rIns="0" bIns="0" rtlCol="0" anchor="ctr"/>
           <a:lstStyle/>
           <a:p>
-            <a:pPr indent="0" marL="0">
+            <a:pPr marL="0" indent="0">
               <a:buNone/>
             </a:pPr>
             <a:r>
@@ -19195,6 +20124,13 @@
             <a:prstDash val="solid"/>
           </a:ln>
         </p:spPr>
+        <p:txBody>
+          <a:bodyPr/>
+          <a:lstStyle/>
+          <a:p>
+            <a:endParaRPr lang="it-IT"/>
+          </a:p>
+        </p:txBody>
       </p:sp>
       <p:sp>
         <p:nvSpPr>
@@ -19217,7 +20153,7 @@
           <a:bodyPr wrap="square" lIns="0" tIns="0" rIns="0" bIns="0" rtlCol="0" anchor="ctr"/>
           <a:lstStyle/>
           <a:p>
-            <a:pPr indent="0" marL="0">
+            <a:pPr marL="0" indent="0">
               <a:buNone/>
             </a:pPr>
             <a:r>
@@ -19259,6 +20195,13 @@
             <a:prstDash val="solid"/>
           </a:ln>
         </p:spPr>
+        <p:txBody>
+          <a:bodyPr/>
+          <a:lstStyle/>
+          <a:p>
+            <a:endParaRPr lang="it-IT"/>
+          </a:p>
+        </p:txBody>
       </p:sp>
       <p:sp>
         <p:nvSpPr>
@@ -19281,7 +20224,7 @@
           <a:bodyPr wrap="square" lIns="0" tIns="0" rIns="0" bIns="0" rtlCol="0" anchor="ctr"/>
           <a:lstStyle/>
           <a:p>
-            <a:pPr indent="0" marL="0">
+            <a:pPr marL="0" indent="0">
               <a:buNone/>
             </a:pPr>
             <a:r>
@@ -19323,6 +20266,13 @@
             <a:prstDash val="solid"/>
           </a:ln>
         </p:spPr>
+        <p:txBody>
+          <a:bodyPr/>
+          <a:lstStyle/>
+          <a:p>
+            <a:endParaRPr lang="it-IT"/>
+          </a:p>
+        </p:txBody>
       </p:sp>
       <p:sp>
         <p:nvSpPr>
@@ -19345,7 +20295,7 @@
           <a:bodyPr wrap="square" lIns="0" tIns="0" rIns="0" bIns="0" rtlCol="0" anchor="ctr"/>
           <a:lstStyle/>
           <a:p>
-            <a:pPr indent="0" marL="0">
+            <a:pPr marL="0" indent="0">
               <a:buNone/>
             </a:pPr>
             <a:r>
@@ -19387,6 +20337,13 @@
             <a:prstDash val="solid"/>
           </a:ln>
         </p:spPr>
+        <p:txBody>
+          <a:bodyPr/>
+          <a:lstStyle/>
+          <a:p>
+            <a:endParaRPr lang="it-IT"/>
+          </a:p>
+        </p:txBody>
       </p:sp>
       <p:sp>
         <p:nvSpPr>
@@ -19409,7 +20366,7 @@
           <a:bodyPr wrap="square" lIns="0" tIns="0" rIns="0" bIns="0" rtlCol="0" anchor="ctr"/>
           <a:lstStyle/>
           <a:p>
-            <a:pPr indent="0" marL="0">
+            <a:pPr marL="0" indent="0">
               <a:buNone/>
             </a:pPr>
             <a:r>
@@ -19451,6 +20408,13 @@
             <a:prstDash val="solid"/>
           </a:ln>
         </p:spPr>
+        <p:txBody>
+          <a:bodyPr/>
+          <a:lstStyle/>
+          <a:p>
+            <a:endParaRPr lang="it-IT"/>
+          </a:p>
+        </p:txBody>
       </p:sp>
       <p:sp>
         <p:nvSpPr>
@@ -19473,7 +20437,7 @@
           <a:bodyPr wrap="square" lIns="0" tIns="0" rIns="0" bIns="0" rtlCol="0" anchor="ctr"/>
           <a:lstStyle/>
           <a:p>
-            <a:pPr indent="0" marL="0">
+            <a:pPr marL="0" indent="0">
               <a:buNone/>
             </a:pPr>
             <a:r>
@@ -19515,6 +20479,13 @@
             <a:prstDash val="solid"/>
           </a:ln>
         </p:spPr>
+        <p:txBody>
+          <a:bodyPr/>
+          <a:lstStyle/>
+          <a:p>
+            <a:endParaRPr lang="it-IT"/>
+          </a:p>
+        </p:txBody>
       </p:sp>
       <p:sp>
         <p:nvSpPr>
@@ -19537,7 +20508,7 @@
           <a:bodyPr wrap="square" lIns="0" tIns="0" rIns="0" bIns="0" rtlCol="0" anchor="ctr"/>
           <a:lstStyle/>
           <a:p>
-            <a:pPr indent="0" marL="0">
+            <a:pPr marL="0" indent="0">
               <a:buNone/>
             </a:pPr>
             <a:r>
@@ -19579,6 +20550,13 @@
             <a:prstDash val="solid"/>
           </a:ln>
         </p:spPr>
+        <p:txBody>
+          <a:bodyPr/>
+          <a:lstStyle/>
+          <a:p>
+            <a:endParaRPr lang="it-IT"/>
+          </a:p>
+        </p:txBody>
       </p:sp>
       <p:sp>
         <p:nvSpPr>
@@ -19601,7 +20579,7 @@
           <a:bodyPr wrap="square" lIns="0" tIns="0" rIns="0" bIns="0" rtlCol="0" anchor="ctr"/>
           <a:lstStyle/>
           <a:p>
-            <a:pPr indent="0" marL="0">
+            <a:pPr marL="0" indent="0">
               <a:buNone/>
             </a:pPr>
             <a:r>
@@ -19643,6 +20621,13 @@
             <a:prstDash val="solid"/>
           </a:ln>
         </p:spPr>
+        <p:txBody>
+          <a:bodyPr/>
+          <a:lstStyle/>
+          <a:p>
+            <a:endParaRPr lang="it-IT"/>
+          </a:p>
+        </p:txBody>
       </p:sp>
       <p:sp>
         <p:nvSpPr>
@@ -19665,7 +20650,7 @@
           <a:bodyPr wrap="square" lIns="0" tIns="0" rIns="0" bIns="0" rtlCol="0" anchor="ctr"/>
           <a:lstStyle/>
           <a:p>
-            <a:pPr indent="0" marL="0">
+            <a:pPr marL="0" indent="0">
               <a:buNone/>
             </a:pPr>
             <a:r>
@@ -19707,6 +20692,13 @@
             <a:prstDash val="solid"/>
           </a:ln>
         </p:spPr>
+        <p:txBody>
+          <a:bodyPr/>
+          <a:lstStyle/>
+          <a:p>
+            <a:endParaRPr lang="it-IT"/>
+          </a:p>
+        </p:txBody>
       </p:sp>
       <p:sp>
         <p:nvSpPr>
@@ -19729,7 +20721,7 @@
           <a:bodyPr wrap="square" lIns="0" tIns="0" rIns="0" bIns="0" rtlCol="0" anchor="ctr"/>
           <a:lstStyle/>
           <a:p>
-            <a:pPr indent="0" marL="0">
+            <a:pPr marL="0" indent="0">
               <a:buNone/>
             </a:pPr>
             <a:r>
@@ -19773,6 +20765,13 @@
             <a:prstDash val="solid"/>
           </a:ln>
         </p:spPr>
+        <p:txBody>
+          <a:bodyPr/>
+          <a:lstStyle/>
+          <a:p>
+            <a:endParaRPr lang="it-IT"/>
+          </a:p>
+        </p:txBody>
       </p:sp>
       <p:sp>
         <p:nvSpPr>
@@ -19795,7 +20794,7 @@
           <a:bodyPr wrap="square" lIns="0" tIns="0" rIns="0" bIns="0" rtlCol="0" anchor="ctr"/>
           <a:lstStyle/>
           <a:p>
-            <a:pPr algn="ctr" indent="0" marL="0">
+            <a:pPr marL="0" indent="0" algn="ctr">
               <a:buNone/>
             </a:pPr>
             <a:r>
@@ -19829,6 +20828,7 @@
         <a:solidFill>
           <a:srgbClr val="FFFFFF"/>
         </a:solidFill>
+        <a:effectLst/>
       </p:bgPr>
     </p:bg>
     <p:spTree>
@@ -19871,6 +20871,13 @@
             <a:prstDash val="solid"/>
           </a:ln>
         </p:spPr>
+        <p:txBody>
+          <a:bodyPr/>
+          <a:lstStyle/>
+          <a:p>
+            <a:endParaRPr lang="it-IT"/>
+          </a:p>
+        </p:txBody>
       </p:sp>
       <p:sp>
         <p:nvSpPr>
@@ -19893,7 +20900,7 @@
           <a:bodyPr wrap="square" lIns="0" tIns="0" rIns="0" bIns="0" rtlCol="0" anchor="ctr"/>
           <a:lstStyle/>
           <a:p>
-            <a:pPr algn="ctr" indent="0" marL="0">
+            <a:pPr marL="0" indent="0" algn="ctr">
               <a:buNone/>
             </a:pPr>
             <a:r>
@@ -19932,7 +20939,7 @@
           <a:bodyPr wrap="square" lIns="0" tIns="0" rIns="0" bIns="0" rtlCol="0" anchor="ctr"/>
           <a:lstStyle/>
           <a:p>
-            <a:pPr indent="0" marL="0">
+            <a:pPr marL="0" indent="0">
               <a:buNone/>
             </a:pPr>
             <a:r>
@@ -19974,6 +20981,13 @@
             <a:prstDash val="solid"/>
           </a:ln>
         </p:spPr>
+        <p:txBody>
+          <a:bodyPr/>
+          <a:lstStyle/>
+          <a:p>
+            <a:endParaRPr lang="it-IT"/>
+          </a:p>
+        </p:txBody>
       </p:sp>
       <p:sp>
         <p:nvSpPr>
@@ -19996,7 +21010,7 @@
           <a:bodyPr wrap="square" rtlCol="0" anchor="ctr"/>
           <a:lstStyle/>
           <a:p>
-            <a:pPr algn="r" indent="0" marL="0">
+            <a:pPr marL="0" indent="0" algn="r">
               <a:buNone/>
             </a:pPr>
             <a:r>
@@ -20035,7 +21049,7 @@
           <a:bodyPr wrap="square" lIns="0" tIns="0" rIns="0" bIns="0" rtlCol="0" anchor="ctr"/>
           <a:lstStyle/>
           <a:p>
-            <a:pPr indent="0" marL="0">
+            <a:pPr marL="0" indent="0">
               <a:buNone/>
             </a:pPr>
             <a:r>
@@ -20077,13 +21091,20 @@
             <a:prstDash val="solid"/>
           </a:ln>
           <a:effectLst>
-            <a:outerShdw sx="100000" sy="100000" kx="0" ky="0" algn="bl" rotWithShape="0" blurRad="101600" dist="38100" dir="8100000">
+            <a:outerShdw blurRad="101600" dist="38100" dir="8100000" algn="bl" rotWithShape="0">
               <a:srgbClr val="000000">
                 <a:alpha val="12000"/>
               </a:srgbClr>
             </a:outerShdw>
           </a:effectLst>
         </p:spPr>
+        <p:txBody>
+          <a:bodyPr/>
+          <a:lstStyle/>
+          <a:p>
+            <a:endParaRPr lang="it-IT"/>
+          </a:p>
+        </p:txBody>
       </p:sp>
       <p:sp>
         <p:nvSpPr>
@@ -20106,7 +21127,7 @@
           <a:bodyPr wrap="square" lIns="0" tIns="0" rIns="0" bIns="0" rtlCol="0" anchor="t"/>
           <a:lstStyle/>
           <a:p>
-            <a:pPr indent="0" marL="0">
+            <a:pPr marL="0" indent="0">
               <a:buNone/>
             </a:pPr>
             <a:r>
@@ -20123,7 +21144,7 @@
             <a:endParaRPr lang="en-US" sz="1000" dirty="0"/>
           </a:p>
           <a:p>
-            <a:pPr indent="0" marL="0">
+            <a:pPr marL="0" indent="0">
               <a:buNone/>
             </a:pPr>
             <a:r>
@@ -20140,7 +21161,7 @@
             <a:endParaRPr lang="en-US" sz="1000" dirty="0"/>
           </a:p>
           <a:p>
-            <a:pPr indent="0" marL="0">
+            <a:pPr marL="0" indent="0">
               <a:buNone/>
             </a:pPr>
             <a:r>
@@ -20157,7 +21178,7 @@
             <a:endParaRPr lang="en-US" sz="1000" dirty="0"/>
           </a:p>
           <a:p>
-            <a:pPr indent="0" marL="0">
+            <a:pPr marL="0" indent="0">
               <a:buNone/>
             </a:pPr>
             <a:r>
@@ -20174,7 +21195,7 @@
             <a:endParaRPr lang="en-US" sz="1000" dirty="0"/>
           </a:p>
           <a:p>
-            <a:pPr indent="0" marL="0">
+            <a:pPr marL="0" indent="0">
               <a:buNone/>
             </a:pPr>
             <a:r>
@@ -20191,7 +21212,7 @@
             <a:endParaRPr lang="en-US" sz="1000" dirty="0"/>
           </a:p>
           <a:p>
-            <a:pPr indent="0" marL="0">
+            <a:pPr marL="0" indent="0">
               <a:buNone/>
             </a:pPr>
             <a:r>
@@ -20230,7 +21251,7 @@
           <a:bodyPr wrap="square" lIns="0" tIns="0" rIns="0" bIns="0" rtlCol="0" anchor="ctr"/>
           <a:lstStyle/>
           <a:p>
-            <a:pPr indent="0" marL="0">
+            <a:pPr marL="0" indent="0">
               <a:buNone/>
             </a:pPr>
             <a:r>
@@ -20272,13 +21293,20 @@
             <a:prstDash val="solid"/>
           </a:ln>
           <a:effectLst>
-            <a:outerShdw sx="100000" sy="100000" kx="0" ky="0" algn="bl" rotWithShape="0" blurRad="101600" dist="38100" dir="8100000">
+            <a:outerShdw blurRad="101600" dist="38100" dir="8100000" algn="bl" rotWithShape="0">
               <a:srgbClr val="000000">
                 <a:alpha val="12000"/>
               </a:srgbClr>
             </a:outerShdw>
           </a:effectLst>
         </p:spPr>
+        <p:txBody>
+          <a:bodyPr/>
+          <a:lstStyle/>
+          <a:p>
+            <a:endParaRPr lang="it-IT"/>
+          </a:p>
+        </p:txBody>
       </p:sp>
       <p:sp>
         <p:nvSpPr>
@@ -20301,7 +21329,7 @@
           <a:bodyPr wrap="square" lIns="0" tIns="0" rIns="0" bIns="0" rtlCol="0" anchor="t"/>
           <a:lstStyle/>
           <a:p>
-            <a:pPr indent="0" marL="0">
+            <a:pPr marL="0" indent="0">
               <a:buNone/>
             </a:pPr>
             <a:r>
@@ -20318,7 +21346,7 @@
             <a:endParaRPr lang="en-US" sz="950" dirty="0"/>
           </a:p>
           <a:p>
-            <a:pPr indent="0" marL="0">
+            <a:pPr marL="0" indent="0">
               <a:buNone/>
             </a:pPr>
             <a:r>
@@ -20335,7 +21363,7 @@
             <a:endParaRPr lang="en-US" sz="950" dirty="0"/>
           </a:p>
           <a:p>
-            <a:pPr indent="0" marL="0">
+            <a:pPr marL="0" indent="0">
               <a:buNone/>
             </a:pPr>
             <a:r>
@@ -20352,7 +21380,7 @@
             <a:endParaRPr lang="en-US" sz="950" dirty="0"/>
           </a:p>
           <a:p>
-            <a:pPr indent="0" marL="0">
+            <a:pPr marL="0" indent="0">
               <a:buNone/>
             </a:pPr>
             <a:r>
@@ -20369,7 +21397,7 @@
             <a:endParaRPr lang="en-US" sz="950" dirty="0"/>
           </a:p>
           <a:p>
-            <a:pPr indent="0" marL="0">
+            <a:pPr marL="0" indent="0">
               <a:buNone/>
             </a:pPr>
             <a:r>
@@ -20386,7 +21414,7 @@
             <a:endParaRPr lang="en-US" sz="950" dirty="0"/>
           </a:p>
           <a:p>
-            <a:pPr indent="0" marL="0">
+            <a:pPr marL="0" indent="0">
               <a:buNone/>
             </a:pPr>
             <a:r>
@@ -20403,7 +21431,7 @@
             <a:endParaRPr lang="en-US" sz="950" dirty="0"/>
           </a:p>
           <a:p>
-            <a:pPr indent="0" marL="0">
+            <a:pPr marL="0" indent="0">
               <a:buNone/>
             </a:pPr>
             <a:r>
@@ -20420,7 +21448,7 @@
             <a:endParaRPr lang="en-US" sz="950" dirty="0"/>
           </a:p>
           <a:p>
-            <a:pPr indent="0" marL="0">
+            <a:pPr marL="0" indent="0">
               <a:buNone/>
             </a:pPr>
             <a:r>
@@ -20437,7 +21465,7 @@
             <a:endParaRPr lang="en-US" sz="950" dirty="0"/>
           </a:p>
           <a:p>
-            <a:pPr indent="0" marL="0">
+            <a:pPr marL="0" indent="0">
               <a:buNone/>
             </a:pPr>
             <a:r>
@@ -20471,6 +21499,7 @@
         <a:solidFill>
           <a:srgbClr val="FFFFFF"/>
         </a:solidFill>
+        <a:effectLst/>
       </p:bgPr>
     </p:bg>
     <p:spTree>
@@ -20513,6 +21542,13 @@
             <a:prstDash val="solid"/>
           </a:ln>
         </p:spPr>
+        <p:txBody>
+          <a:bodyPr/>
+          <a:lstStyle/>
+          <a:p>
+            <a:endParaRPr lang="it-IT"/>
+          </a:p>
+        </p:txBody>
       </p:sp>
       <p:sp>
         <p:nvSpPr>
@@ -20535,7 +21571,7 @@
           <a:bodyPr wrap="square" lIns="0" tIns="0" rIns="0" bIns="0" rtlCol="0" anchor="ctr"/>
           <a:lstStyle/>
           <a:p>
-            <a:pPr algn="ctr" indent="0" marL="0">
+            <a:pPr marL="0" indent="0" algn="ctr">
               <a:buNone/>
             </a:pPr>
             <a:r>
@@ -20574,7 +21610,7 @@
           <a:bodyPr wrap="square" lIns="0" tIns="0" rIns="0" bIns="0" rtlCol="0" anchor="ctr"/>
           <a:lstStyle/>
           <a:p>
-            <a:pPr indent="0" marL="0">
+            <a:pPr marL="0" indent="0">
               <a:buNone/>
             </a:pPr>
             <a:r>
@@ -20616,6 +21652,13 @@
             <a:prstDash val="solid"/>
           </a:ln>
         </p:spPr>
+        <p:txBody>
+          <a:bodyPr/>
+          <a:lstStyle/>
+          <a:p>
+            <a:endParaRPr lang="it-IT"/>
+          </a:p>
+        </p:txBody>
       </p:sp>
       <p:sp>
         <p:nvSpPr>
@@ -20638,7 +21681,7 @@
           <a:bodyPr wrap="square" rtlCol="0" anchor="ctr"/>
           <a:lstStyle/>
           <a:p>
-            <a:pPr algn="r" indent="0" marL="0">
+            <a:pPr marL="0" indent="0" algn="r">
               <a:buNone/>
             </a:pPr>
             <a:r>
@@ -20680,6 +21723,13 @@
             <a:prstDash val="solid"/>
           </a:ln>
         </p:spPr>
+        <p:txBody>
+          <a:bodyPr/>
+          <a:lstStyle/>
+          <a:p>
+            <a:endParaRPr lang="it-IT"/>
+          </a:p>
+        </p:txBody>
       </p:sp>
       <p:sp>
         <p:nvSpPr>
@@ -20707,6 +21757,13 @@
             <a:prstDash val="solid"/>
           </a:ln>
         </p:spPr>
+        <p:txBody>
+          <a:bodyPr/>
+          <a:lstStyle/>
+          <a:p>
+            <a:endParaRPr lang="it-IT"/>
+          </a:p>
+        </p:txBody>
       </p:sp>
       <p:sp>
         <p:nvSpPr>
@@ -20729,7 +21786,7 @@
           <a:bodyPr wrap="square" lIns="0" tIns="0" rIns="0" bIns="0" rtlCol="0" anchor="ctr"/>
           <a:lstStyle/>
           <a:p>
-            <a:pPr algn="ctr" indent="0" marL="0">
+            <a:pPr marL="0" indent="0" algn="ctr">
               <a:buNone/>
             </a:pPr>
             <a:r>
@@ -20768,7 +21825,7 @@
           <a:bodyPr wrap="square" lIns="0" tIns="0" rIns="0" bIns="0" rtlCol="0" anchor="ctr"/>
           <a:lstStyle/>
           <a:p>
-            <a:pPr indent="0" marL="0">
+            <a:pPr marL="0" indent="0">
               <a:buNone/>
             </a:pPr>
             <a:r>
@@ -20807,7 +21864,7 @@
           <a:bodyPr wrap="square" lIns="0" tIns="0" rIns="0" bIns="0" rtlCol="0" anchor="ctr"/>
           <a:lstStyle/>
           <a:p>
-            <a:pPr indent="0" marL="0">
+            <a:pPr marL="0" indent="0">
               <a:buNone/>
             </a:pPr>
             <a:r>
@@ -20849,6 +21906,13 @@
             <a:prstDash val="solid"/>
           </a:ln>
         </p:spPr>
+        <p:txBody>
+          <a:bodyPr/>
+          <a:lstStyle/>
+          <a:p>
+            <a:endParaRPr lang="it-IT"/>
+          </a:p>
+        </p:txBody>
       </p:sp>
       <p:sp>
         <p:nvSpPr>
@@ -20876,6 +21940,13 @@
             <a:prstDash val="solid"/>
           </a:ln>
         </p:spPr>
+        <p:txBody>
+          <a:bodyPr/>
+          <a:lstStyle/>
+          <a:p>
+            <a:endParaRPr lang="it-IT"/>
+          </a:p>
+        </p:txBody>
       </p:sp>
       <p:sp>
         <p:nvSpPr>
@@ -20898,7 +21969,7 @@
           <a:bodyPr wrap="square" lIns="0" tIns="0" rIns="0" bIns="0" rtlCol="0" anchor="ctr"/>
           <a:lstStyle/>
           <a:p>
-            <a:pPr algn="ctr" indent="0" marL="0">
+            <a:pPr marL="0" indent="0" algn="ctr">
               <a:buNone/>
             </a:pPr>
             <a:r>
@@ -20937,7 +22008,7 @@
           <a:bodyPr wrap="square" lIns="0" tIns="0" rIns="0" bIns="0" rtlCol="0" anchor="ctr"/>
           <a:lstStyle/>
           <a:p>
-            <a:pPr indent="0" marL="0">
+            <a:pPr marL="0" indent="0">
               <a:buNone/>
             </a:pPr>
             <a:r>
@@ -20976,7 +22047,7 @@
           <a:bodyPr wrap="square" lIns="0" tIns="0" rIns="0" bIns="0" rtlCol="0" anchor="ctr"/>
           <a:lstStyle/>
           <a:p>
-            <a:pPr indent="0" marL="0">
+            <a:pPr marL="0" indent="0">
               <a:buNone/>
             </a:pPr>
             <a:r>
@@ -21018,6 +22089,13 @@
             <a:prstDash val="solid"/>
           </a:ln>
         </p:spPr>
+        <p:txBody>
+          <a:bodyPr/>
+          <a:lstStyle/>
+          <a:p>
+            <a:endParaRPr lang="it-IT"/>
+          </a:p>
+        </p:txBody>
       </p:sp>
       <p:sp>
         <p:nvSpPr>
@@ -21045,6 +22123,13 @@
             <a:prstDash val="solid"/>
           </a:ln>
         </p:spPr>
+        <p:txBody>
+          <a:bodyPr/>
+          <a:lstStyle/>
+          <a:p>
+            <a:endParaRPr lang="it-IT"/>
+          </a:p>
+        </p:txBody>
       </p:sp>
       <p:sp>
         <p:nvSpPr>
@@ -21067,7 +22152,7 @@
           <a:bodyPr wrap="square" lIns="0" tIns="0" rIns="0" bIns="0" rtlCol="0" anchor="ctr"/>
           <a:lstStyle/>
           <a:p>
-            <a:pPr algn="ctr" indent="0" marL="0">
+            <a:pPr marL="0" indent="0" algn="ctr">
               <a:buNone/>
             </a:pPr>
             <a:r>
@@ -21106,7 +22191,7 @@
           <a:bodyPr wrap="square" lIns="0" tIns="0" rIns="0" bIns="0" rtlCol="0" anchor="ctr"/>
           <a:lstStyle/>
           <a:p>
-            <a:pPr indent="0" marL="0">
+            <a:pPr marL="0" indent="0">
               <a:buNone/>
             </a:pPr>
             <a:r>
@@ -21145,7 +22230,7 @@
           <a:bodyPr wrap="square" lIns="0" tIns="0" rIns="0" bIns="0" rtlCol="0" anchor="ctr"/>
           <a:lstStyle/>
           <a:p>
-            <a:pPr indent="0" marL="0">
+            <a:pPr marL="0" indent="0">
               <a:buNone/>
             </a:pPr>
             <a:r>
@@ -21187,6 +22272,13 @@
             <a:prstDash val="solid"/>
           </a:ln>
         </p:spPr>
+        <p:txBody>
+          <a:bodyPr/>
+          <a:lstStyle/>
+          <a:p>
+            <a:endParaRPr lang="it-IT"/>
+          </a:p>
+        </p:txBody>
       </p:sp>
       <p:sp>
         <p:nvSpPr>
@@ -21214,6 +22306,13 @@
             <a:prstDash val="solid"/>
           </a:ln>
         </p:spPr>
+        <p:txBody>
+          <a:bodyPr/>
+          <a:lstStyle/>
+          <a:p>
+            <a:endParaRPr lang="it-IT"/>
+          </a:p>
+        </p:txBody>
       </p:sp>
       <p:sp>
         <p:nvSpPr>
@@ -21236,7 +22335,7 @@
           <a:bodyPr wrap="square" lIns="0" tIns="0" rIns="0" bIns="0" rtlCol="0" anchor="ctr"/>
           <a:lstStyle/>
           <a:p>
-            <a:pPr algn="ctr" indent="0" marL="0">
+            <a:pPr marL="0" indent="0" algn="ctr">
               <a:buNone/>
             </a:pPr>
             <a:r>
@@ -21275,7 +22374,7 @@
           <a:bodyPr wrap="square" lIns="0" tIns="0" rIns="0" bIns="0" rtlCol="0" anchor="ctr"/>
           <a:lstStyle/>
           <a:p>
-            <a:pPr indent="0" marL="0">
+            <a:pPr marL="0" indent="0">
               <a:buNone/>
             </a:pPr>
             <a:r>
@@ -21314,7 +22413,7 @@
           <a:bodyPr wrap="square" lIns="0" tIns="0" rIns="0" bIns="0" rtlCol="0" anchor="ctr"/>
           <a:lstStyle/>
           <a:p>
-            <a:pPr indent="0" marL="0">
+            <a:pPr marL="0" indent="0">
               <a:buNone/>
             </a:pPr>
             <a:r>
@@ -21356,6 +22455,13 @@
             <a:prstDash val="solid"/>
           </a:ln>
         </p:spPr>
+        <p:txBody>
+          <a:bodyPr/>
+          <a:lstStyle/>
+          <a:p>
+            <a:endParaRPr lang="it-IT"/>
+          </a:p>
+        </p:txBody>
       </p:sp>
       <p:sp>
         <p:nvSpPr>
@@ -21383,6 +22489,13 @@
             <a:prstDash val="solid"/>
           </a:ln>
         </p:spPr>
+        <p:txBody>
+          <a:bodyPr/>
+          <a:lstStyle/>
+          <a:p>
+            <a:endParaRPr lang="it-IT"/>
+          </a:p>
+        </p:txBody>
       </p:sp>
       <p:sp>
         <p:nvSpPr>
@@ -21405,7 +22518,7 @@
           <a:bodyPr wrap="square" lIns="0" tIns="0" rIns="0" bIns="0" rtlCol="0" anchor="ctr"/>
           <a:lstStyle/>
           <a:p>
-            <a:pPr algn="ctr" indent="0" marL="0">
+            <a:pPr marL="0" indent="0" algn="ctr">
               <a:buNone/>
             </a:pPr>
             <a:r>
@@ -21444,7 +22557,7 @@
           <a:bodyPr wrap="square" lIns="0" tIns="0" rIns="0" bIns="0" rtlCol="0" anchor="ctr"/>
           <a:lstStyle/>
           <a:p>
-            <a:pPr indent="0" marL="0">
+            <a:pPr marL="0" indent="0">
               <a:buNone/>
             </a:pPr>
             <a:r>
@@ -21483,7 +22596,7 @@
           <a:bodyPr wrap="square" lIns="0" tIns="0" rIns="0" bIns="0" rtlCol="0" anchor="ctr"/>
           <a:lstStyle/>
           <a:p>
-            <a:pPr indent="0" marL="0">
+            <a:pPr marL="0" indent="0">
               <a:buNone/>
             </a:pPr>
             <a:r>
@@ -21525,6 +22638,13 @@
             <a:prstDash val="solid"/>
           </a:ln>
         </p:spPr>
+        <p:txBody>
+          <a:bodyPr/>
+          <a:lstStyle/>
+          <a:p>
+            <a:endParaRPr lang="it-IT"/>
+          </a:p>
+        </p:txBody>
       </p:sp>
       <p:sp>
         <p:nvSpPr>
@@ -21552,6 +22672,13 @@
             <a:prstDash val="solid"/>
           </a:ln>
         </p:spPr>
+        <p:txBody>
+          <a:bodyPr/>
+          <a:lstStyle/>
+          <a:p>
+            <a:endParaRPr lang="it-IT"/>
+          </a:p>
+        </p:txBody>
       </p:sp>
       <p:sp>
         <p:nvSpPr>
@@ -21574,7 +22701,7 @@
           <a:bodyPr wrap="square" lIns="0" tIns="0" rIns="0" bIns="0" rtlCol="0" anchor="ctr"/>
           <a:lstStyle/>
           <a:p>
-            <a:pPr algn="ctr" indent="0" marL="0">
+            <a:pPr marL="0" indent="0" algn="ctr">
               <a:buNone/>
             </a:pPr>
             <a:r>
@@ -21613,7 +22740,7 @@
           <a:bodyPr wrap="square" lIns="0" tIns="0" rIns="0" bIns="0" rtlCol="0" anchor="ctr"/>
           <a:lstStyle/>
           <a:p>
-            <a:pPr indent="0" marL="0">
+            <a:pPr marL="0" indent="0">
               <a:buNone/>
             </a:pPr>
             <a:r>
@@ -21652,7 +22779,7 @@
           <a:bodyPr wrap="square" lIns="0" tIns="0" rIns="0" bIns="0" rtlCol="0" anchor="ctr"/>
           <a:lstStyle/>
           <a:p>
-            <a:pPr indent="0" marL="0">
+            <a:pPr marL="0" indent="0">
               <a:buNone/>
             </a:pPr>
             <a:r>
@@ -21694,6 +22821,13 @@
             <a:prstDash val="solid"/>
           </a:ln>
         </p:spPr>
+        <p:txBody>
+          <a:bodyPr/>
+          <a:lstStyle/>
+          <a:p>
+            <a:endParaRPr lang="it-IT"/>
+          </a:p>
+        </p:txBody>
       </p:sp>
       <p:sp>
         <p:nvSpPr>
@@ -21721,6 +22855,13 @@
             <a:prstDash val="solid"/>
           </a:ln>
         </p:spPr>
+        <p:txBody>
+          <a:bodyPr/>
+          <a:lstStyle/>
+          <a:p>
+            <a:endParaRPr lang="it-IT"/>
+          </a:p>
+        </p:txBody>
       </p:sp>
       <p:sp>
         <p:nvSpPr>
@@ -21743,7 +22884,7 @@
           <a:bodyPr wrap="square" lIns="0" tIns="0" rIns="0" bIns="0" rtlCol="0" anchor="ctr"/>
           <a:lstStyle/>
           <a:p>
-            <a:pPr algn="ctr" indent="0" marL="0">
+            <a:pPr marL="0" indent="0" algn="ctr">
               <a:buNone/>
             </a:pPr>
             <a:r>
@@ -21782,7 +22923,7 @@
           <a:bodyPr wrap="square" lIns="0" tIns="0" rIns="0" bIns="0" rtlCol="0" anchor="ctr"/>
           <a:lstStyle/>
           <a:p>
-            <a:pPr indent="0" marL="0">
+            <a:pPr marL="0" indent="0">
               <a:buNone/>
             </a:pPr>
             <a:r>
@@ -21821,7 +22962,7 @@
           <a:bodyPr wrap="square" lIns="0" tIns="0" rIns="0" bIns="0" rtlCol="0" anchor="ctr"/>
           <a:lstStyle/>
           <a:p>
-            <a:pPr indent="0" marL="0">
+            <a:pPr marL="0" indent="0">
               <a:buNone/>
             </a:pPr>
             <a:r>
@@ -21841,7 +22982,7 @@
       </p:sp>
       <p:sp>
         <p:nvSpPr>
-          <p:cNvPr id="42" name="Shape 40"/>
+          <p:cNvPr id="43" name="Text 41"/>
           <p:cNvSpPr/>
           <p:nvPr/>
         </p:nvSpPr>
@@ -21850,44 +22991,17 @@
             <a:off x="4343400" y="4160520"/>
             <a:ext cx="457200" cy="228600"/>
           </a:xfrm>
-          <a:prstGeom prst="roundRect">
-            <a:avLst>
-              <a:gd name="adj" fmla="val 16000"/>
-            </a:avLst>
-          </a:prstGeom>
-          <a:solidFill>
-            <a:srgbClr val="B32424"/>
-          </a:solidFill>
-          <a:ln w="12700">
-            <a:solidFill>
-              <a:srgbClr val="B32424"/>
-            </a:solidFill>
-            <a:prstDash val="solid"/>
-          </a:ln>
-        </p:spPr>
-      </p:sp>
-      <p:sp>
-        <p:nvSpPr>
-          <p:cNvPr id="43" name="Text 41"/>
-          <p:cNvSpPr/>
-          <p:nvPr/>
-        </p:nvSpPr>
-        <p:spPr>
-          <a:xfrm>
-            <a:off x="4343400" y="4160520"/>
-            <a:ext cx="457200" cy="228600"/>
-          </a:xfrm>
-          <a:prstGeom prst="rect">
-            <a:avLst/>
-          </a:prstGeom>
-          <a:noFill/>
-          <a:ln/>
-        </p:spPr>
-        <p:txBody>
-          <a:bodyPr wrap="square" lIns="0" tIns="0" rIns="0" bIns="0" rtlCol="0" anchor="ctr"/>
-          <a:lstStyle/>
-          <a:p>
-            <a:pPr algn="ctr" indent="0" marL="0">
+          <a:prstGeom prst="rect">
+            <a:avLst/>
+          </a:prstGeom>
+          <a:noFill/>
+          <a:ln/>
+        </p:spPr>
+        <p:txBody>
+          <a:bodyPr wrap="square" lIns="0" tIns="0" rIns="0" bIns="0" rtlCol="0" anchor="ctr"/>
+          <a:lstStyle/>
+          <a:p>
+            <a:pPr marL="0" indent="0" algn="ctr">
               <a:buNone/>
             </a:pPr>
             <a:r>
@@ -21929,6 +23043,13 @@
             <a:prstDash val="solid"/>
           </a:ln>
         </p:spPr>
+        <p:txBody>
+          <a:bodyPr/>
+          <a:lstStyle/>
+          <a:p>
+            <a:endParaRPr lang="it-IT"/>
+          </a:p>
+        </p:txBody>
       </p:sp>
       <p:sp>
         <p:nvSpPr>
@@ -21956,6 +23077,13 @@
             <a:prstDash val="solid"/>
           </a:ln>
         </p:spPr>
+        <p:txBody>
+          <a:bodyPr/>
+          <a:lstStyle/>
+          <a:p>
+            <a:endParaRPr lang="it-IT"/>
+          </a:p>
+        </p:txBody>
       </p:sp>
       <p:sp>
         <p:nvSpPr>
@@ -21978,7 +23106,7 @@
           <a:bodyPr wrap="square" lIns="0" tIns="0" rIns="0" bIns="0" rtlCol="0" anchor="ctr"/>
           <a:lstStyle/>
           <a:p>
-            <a:pPr algn="ctr" indent="0" marL="0">
+            <a:pPr marL="0" indent="0" algn="ctr">
               <a:buNone/>
             </a:pPr>
             <a:r>
@@ -22017,7 +23145,7 @@
           <a:bodyPr wrap="square" lIns="0" tIns="0" rIns="0" bIns="0" rtlCol="0" anchor="ctr"/>
           <a:lstStyle/>
           <a:p>
-            <a:pPr indent="0" marL="0">
+            <a:pPr marL="0" indent="0">
               <a:buNone/>
             </a:pPr>
             <a:r>
@@ -22056,7 +23184,7 @@
           <a:bodyPr wrap="square" lIns="0" tIns="0" rIns="0" bIns="0" rtlCol="0" anchor="ctr"/>
           <a:lstStyle/>
           <a:p>
-            <a:pPr indent="0" marL="0">
+            <a:pPr marL="0" indent="0">
               <a:buNone/>
             </a:pPr>
             <a:r>
@@ -22375,4 +23503,319 @@
     </a:ext>
   </a:extLst>
 </a:theme>
+</file>
+
+<file path=ppt/theme/theme2.xml><?xml version="1.0" encoding="utf-8"?>
+<a:theme xmlns:a="http://schemas.openxmlformats.org/drawingml/2006/main" name="Tema di Office">
+  <a:themeElements>
+    <a:clrScheme name="Office">
+      <a:dk1>
+        <a:sysClr val="windowText" lastClr="000000"/>
+      </a:dk1>
+      <a:lt1>
+        <a:sysClr val="window" lastClr="FFFFFF"/>
+      </a:lt1>
+      <a:dk2>
+        <a:srgbClr val="0E2841"/>
+      </a:dk2>
+      <a:lt2>
+        <a:srgbClr val="E8E8E8"/>
+      </a:lt2>
+      <a:accent1>
+        <a:srgbClr val="156082"/>
+      </a:accent1>
+      <a:accent2>
+        <a:srgbClr val="E97132"/>
+      </a:accent2>
+      <a:accent3>
+        <a:srgbClr val="196B24"/>
+      </a:accent3>
+      <a:accent4>
+        <a:srgbClr val="0F9ED5"/>
+      </a:accent4>
+      <a:accent5>
+        <a:srgbClr val="A02B93"/>
+      </a:accent5>
+      <a:accent6>
+        <a:srgbClr val="4EA72E"/>
+      </a:accent6>
+      <a:hlink>
+        <a:srgbClr val="467886"/>
+      </a:hlink>
+      <a:folHlink>
+        <a:srgbClr val="96607D"/>
+      </a:folHlink>
+    </a:clrScheme>
+    <a:fontScheme name="Office">
+      <a:majorFont>
+        <a:latin typeface="Aptos Display" panose="02110004020202020204"/>
+        <a:ea typeface=""/>
+        <a:cs typeface=""/>
+        <a:font script="Jpan" typeface="游ゴシック Light"/>
+        <a:font script="Hang" typeface="맑은 고딕"/>
+        <a:font script="Hans" typeface="等线 Light"/>
+        <a:font script="Hant" typeface="新細明體"/>
+        <a:font script="Arab" typeface="Times New Roman"/>
+        <a:font script="Hebr" typeface="Times New Roman"/>
+        <a:font script="Thai" typeface="Angsana New"/>
+        <a:font script="Ethi" typeface="Nyala"/>
+        <a:font script="Beng" typeface="Vrinda"/>
+        <a:font script="Gujr" typeface="Shruti"/>
+        <a:font script="Khmr" typeface="MoolBoran"/>
+        <a:font script="Knda" typeface="Tunga"/>
+        <a:font script="Guru" typeface="Raavi"/>
+        <a:font script="Cans" typeface="Euphemia"/>
+        <a:font script="Cher" typeface="Plantagenet Cherokee"/>
+        <a:font script="Yiii" typeface="Microsoft Yi Baiti"/>
+        <a:font script="Tibt" typeface="Microsoft Himalaya"/>
+        <a:font script="Thaa" typeface="MV Boli"/>
+        <a:font script="Deva" typeface="Mangal"/>
+        <a:font script="Telu" typeface="Gautami"/>
+        <a:font script="Taml" typeface="Latha"/>
+        <a:font script="Syrc" typeface="Estrangelo Edessa"/>
+        <a:font script="Orya" typeface="Kalinga"/>
+        <a:font script="Mlym" typeface="Kartika"/>
+        <a:font script="Laoo" typeface="DokChampa"/>
+        <a:font script="Sinh" typeface="Iskoola Pota"/>
+        <a:font script="Mong" typeface="Mongolian Baiti"/>
+        <a:font script="Viet" typeface="Times New Roman"/>
+        <a:font script="Uigh" typeface="Microsoft Uighur"/>
+        <a:font script="Geor" typeface="Sylfaen"/>
+        <a:font script="Armn" typeface="Arial"/>
+        <a:font script="Bugi" typeface="Leelawadee UI"/>
+        <a:font script="Bopo" typeface="Microsoft JhengHei"/>
+        <a:font script="Java" typeface="Javanese Text"/>
+        <a:font script="Lisu" typeface="Segoe UI"/>
+        <a:font script="Mymr" typeface="Myanmar Text"/>
+        <a:font script="Nkoo" typeface="Ebrima"/>
+        <a:font script="Olck" typeface="Nirmala UI"/>
+        <a:font script="Osma" typeface="Ebrima"/>
+        <a:font script="Phag" typeface="Phagspa"/>
+        <a:font script="Syrn" typeface="Estrangelo Edessa"/>
+        <a:font script="Syrj" typeface="Estrangelo Edessa"/>
+        <a:font script="Syre" typeface="Estrangelo Edessa"/>
+        <a:font script="Sora" typeface="Nirmala UI"/>
+        <a:font script="Tale" typeface="Microsoft Tai Le"/>
+        <a:font script="Talu" typeface="Microsoft New Tai Lue"/>
+        <a:font script="Tfng" typeface="Ebrima"/>
+      </a:majorFont>
+      <a:minorFont>
+        <a:latin typeface="Aptos" panose="02110004020202020204"/>
+        <a:ea typeface=""/>
+        <a:cs typeface=""/>
+        <a:font script="Jpan" typeface="游ゴシック"/>
+        <a:font script="Hang" typeface="맑은 고딕"/>
+        <a:font script="Hans" typeface="等线"/>
+        <a:font script="Hant" typeface="新細明體"/>
+        <a:font script="Arab" typeface="Arial"/>
+        <a:font script="Hebr" typeface="Arial"/>
+        <a:font script="Thai" typeface="Cordia New"/>
+        <a:font script="Ethi" typeface="Nyala"/>
+        <a:font script="Beng" typeface="Vrinda"/>
+        <a:font script="Gujr" typeface="Shruti"/>
+        <a:font script="Khmr" typeface="DaunPenh"/>
+        <a:font script="Knda" typeface="Tunga"/>
+        <a:font script="Guru" typeface="Raavi"/>
+        <a:font script="Cans" typeface="Euphemia"/>
+        <a:font script="Cher" typeface="Plantagenet Cherokee"/>
+        <a:font script="Yiii" typeface="Microsoft Yi Baiti"/>
+        <a:font script="Tibt" typeface="Microsoft Himalaya"/>
+        <a:font script="Thaa" typeface="MV Boli"/>
+        <a:font script="Deva" typeface="Mangal"/>
+        <a:font script="Telu" typeface="Gautami"/>
+        <a:font script="Taml" typeface="Latha"/>
+        <a:font script="Syrc" typeface="Estrangelo Edessa"/>
+        <a:font script="Orya" typeface="Kalinga"/>
+        <a:font script="Mlym" typeface="Kartika"/>
+        <a:font script="Laoo" typeface="DokChampa"/>
+        <a:font script="Sinh" typeface="Iskoola Pota"/>
+        <a:font script="Mong" typeface="Mongolian Baiti"/>
+        <a:font script="Viet" typeface="Arial"/>
+        <a:font script="Uigh" typeface="Microsoft Uighur"/>
+        <a:font script="Geor" typeface="Sylfaen"/>
+        <a:font script="Armn" typeface="Arial"/>
+        <a:font script="Bugi" typeface="Leelawadee UI"/>
+        <a:font script="Bopo" typeface="Microsoft JhengHei"/>
+        <a:font script="Java" typeface="Javanese Text"/>
+        <a:font script="Lisu" typeface="Segoe UI"/>
+        <a:font script="Mymr" typeface="Myanmar Text"/>
+        <a:font script="Nkoo" typeface="Ebrima"/>
+        <a:font script="Olck" typeface="Nirmala UI"/>
+        <a:font script="Osma" typeface="Ebrima"/>
+        <a:font script="Phag" typeface="Phagspa"/>
+        <a:font script="Syrn" typeface="Estrangelo Edessa"/>
+        <a:font script="Syrj" typeface="Estrangelo Edessa"/>
+        <a:font script="Syre" typeface="Estrangelo Edessa"/>
+        <a:font script="Sora" typeface="Nirmala UI"/>
+        <a:font script="Tale" typeface="Microsoft Tai Le"/>
+        <a:font script="Talu" typeface="Microsoft New Tai Lue"/>
+        <a:font script="Tfng" typeface="Ebrima"/>
+      </a:minorFont>
+    </a:fontScheme>
+    <a:fmtScheme name="Office">
+      <a:fillStyleLst>
+        <a:solidFill>
+          <a:schemeClr val="phClr"/>
+        </a:solidFill>
+        <a:gradFill rotWithShape="1">
+          <a:gsLst>
+            <a:gs pos="0">
+              <a:schemeClr val="phClr">
+                <a:lumMod val="110000"/>
+                <a:satMod val="105000"/>
+                <a:tint val="67000"/>
+              </a:schemeClr>
+            </a:gs>
+            <a:gs pos="50000">
+              <a:schemeClr val="phClr">
+                <a:lumMod val="105000"/>
+                <a:satMod val="103000"/>
+                <a:tint val="73000"/>
+              </a:schemeClr>
+            </a:gs>
+            <a:gs pos="100000">
+              <a:schemeClr val="phClr">
+                <a:lumMod val="105000"/>
+                <a:satMod val="109000"/>
+                <a:tint val="81000"/>
+              </a:schemeClr>
+            </a:gs>
+          </a:gsLst>
+          <a:lin ang="5400000" scaled="0"/>
+        </a:gradFill>
+        <a:gradFill rotWithShape="1">
+          <a:gsLst>
+            <a:gs pos="0">
+              <a:schemeClr val="phClr">
+                <a:satMod val="103000"/>
+                <a:lumMod val="102000"/>
+                <a:tint val="94000"/>
+              </a:schemeClr>
+            </a:gs>
+            <a:gs pos="50000">
+              <a:schemeClr val="phClr">
+                <a:satMod val="110000"/>
+                <a:lumMod val="100000"/>
+                <a:shade val="100000"/>
+              </a:schemeClr>
+            </a:gs>
+            <a:gs pos="100000">
+              <a:schemeClr val="phClr">
+                <a:lumMod val="99000"/>
+                <a:satMod val="120000"/>
+                <a:shade val="78000"/>
+              </a:schemeClr>
+            </a:gs>
+          </a:gsLst>
+          <a:lin ang="5400000" scaled="0"/>
+        </a:gradFill>
+      </a:fillStyleLst>
+      <a:lnStyleLst>
+        <a:ln w="12700" cap="flat" cmpd="sng" algn="ctr">
+          <a:solidFill>
+            <a:schemeClr val="phClr"/>
+          </a:solidFill>
+          <a:prstDash val="solid"/>
+          <a:miter lim="800000"/>
+        </a:ln>
+        <a:ln w="19050" cap="flat" cmpd="sng" algn="ctr">
+          <a:solidFill>
+            <a:schemeClr val="phClr"/>
+          </a:solidFill>
+          <a:prstDash val="solid"/>
+          <a:miter lim="800000"/>
+        </a:ln>
+        <a:ln w="25400" cap="flat" cmpd="sng" algn="ctr">
+          <a:solidFill>
+            <a:schemeClr val="phClr"/>
+          </a:solidFill>
+          <a:prstDash val="solid"/>
+          <a:miter lim="800000"/>
+        </a:ln>
+      </a:lnStyleLst>
+      <a:effectStyleLst>
+        <a:effectStyle>
+          <a:effectLst/>
+        </a:effectStyle>
+        <a:effectStyle>
+          <a:effectLst/>
+        </a:effectStyle>
+        <a:effectStyle>
+          <a:effectLst>
+            <a:outerShdw blurRad="57150" dist="19050" dir="5400000" algn="ctr" rotWithShape="0">
+              <a:srgbClr val="000000">
+                <a:alpha val="63000"/>
+              </a:srgbClr>
+            </a:outerShdw>
+          </a:effectLst>
+        </a:effectStyle>
+      </a:effectStyleLst>
+      <a:bgFillStyleLst>
+        <a:solidFill>
+          <a:schemeClr val="phClr"/>
+        </a:solidFill>
+        <a:solidFill>
+          <a:schemeClr val="phClr">
+            <a:tint val="95000"/>
+            <a:satMod val="170000"/>
+          </a:schemeClr>
+        </a:solidFill>
+        <a:gradFill rotWithShape="1">
+          <a:gsLst>
+            <a:gs pos="0">
+              <a:schemeClr val="phClr">
+                <a:tint val="93000"/>
+                <a:satMod val="150000"/>
+                <a:shade val="98000"/>
+                <a:lumMod val="102000"/>
+              </a:schemeClr>
+            </a:gs>
+            <a:gs pos="50000">
+              <a:schemeClr val="phClr">
+                <a:tint val="98000"/>
+                <a:satMod val="130000"/>
+                <a:shade val="90000"/>
+                <a:lumMod val="103000"/>
+              </a:schemeClr>
+            </a:gs>
+            <a:gs pos="100000">
+              <a:schemeClr val="phClr">
+                <a:shade val="63000"/>
+                <a:satMod val="120000"/>
+              </a:schemeClr>
+            </a:gs>
+          </a:gsLst>
+          <a:lin ang="5400000" scaled="0"/>
+        </a:gradFill>
+      </a:bgFillStyleLst>
+    </a:fmtScheme>
+  </a:themeElements>
+  <a:objectDefaults>
+    <a:lnDef>
+      <a:spPr/>
+      <a:bodyPr/>
+      <a:lstStyle/>
+      <a:style>
+        <a:lnRef idx="2">
+          <a:schemeClr val="accent1"/>
+        </a:lnRef>
+        <a:fillRef idx="0">
+          <a:schemeClr val="accent1"/>
+        </a:fillRef>
+        <a:effectRef idx="1">
+          <a:schemeClr val="accent1"/>
+        </a:effectRef>
+        <a:fontRef idx="minor">
+          <a:schemeClr val="tx1"/>
+        </a:fontRef>
+      </a:style>
+    </a:lnDef>
+  </a:objectDefaults>
+  <a:extraClrSchemeLst/>
+  <a:extLst>
+    <a:ext uri="{05A4C25C-085E-4340-85A3-A5531E510DB2}">
+      <thm15:themeFamily xmlns:thm15="http://schemas.microsoft.com/office/thememl/2012/main" name="Office Theme" id="{2E142A2C-CD16-42D6-873A-C26D2A0506FA}" vid="{1BDDFF52-6CD6-40A5-AB3C-68EB2F1E4D0A}"/>
+    </a:ext>
+  </a:extLst>
+</a:theme>
 </file>
--- a/slides/SoSE-Employment-DaaS-EaaS.pptx
+++ b/slides/SoSE-Employment-DaaS-EaaS.pptx
@@ -721,6 +721,36 @@
           <a:bodyPr/>
           <a:lstStyle/>
           <a:p>
+            <a:pPr marL="0" marR="0" lvl="0" indent="0" algn="l" defTabSz="914400" rtl="0" eaLnBrk="1" fontAlgn="auto" latinLnBrk="0" hangingPunct="1">
+              <a:lnSpc>
+                <a:spcPct val="100000"/>
+              </a:lnSpc>
+              <a:spcBef>
+                <a:spcPts val="0"/>
+              </a:spcBef>
+              <a:spcAft>
+                <a:spcPts val="0"/>
+              </a:spcAft>
+              <a:buClrTx/>
+              <a:buSzTx/>
+              <a:buFontTx/>
+              <a:buNone/>
+              <a:tabLst/>
+              <a:defRPr/>
+            </a:pPr>
+            <a:r>
+              <a:rPr lang="en-US" dirty="0"/>
+              <a:t>Good morning everyone.</a:t>
+            </a:r>
+            <a:br>
+              <a:rPr lang="en-US" dirty="0"/>
+            </a:br>
+            <a:r>
+              <a:rPr lang="en-US" dirty="0"/>
+              <a:t>In this final part of the presentation, I would like to focus on the governance and reflection aspects of our project, especially the audit trail, the ethical decision process, and the main limitations of the system.</a:t>
+            </a:r>
+          </a:p>
+          <a:p>
             <a:endParaRPr lang="en-US" dirty="0"/>
           </a:p>
         </p:txBody>
@@ -805,6 +835,159 @@
           <a:bodyPr/>
           <a:lstStyle/>
           <a:p>
+            <a:r>
+              <a:rPr lang="en-US" dirty="0"/>
+              <a:t>One of the core ideas behind our EaaS module is accountability.</a:t>
+            </a:r>
+            <a:br>
+              <a:rPr lang="en-US" dirty="0"/>
+            </a:br>
+            <a:r>
+              <a:rPr lang="en-US" dirty="0"/>
+              <a:t>Every ethical evaluation performed by the system is fully tracked through an audit trail.</a:t>
+            </a:r>
+          </a:p>
+          <a:p>
+            <a:r>
+              <a:rPr lang="en-US" dirty="0"/>
+              <a:t>For each evaluation, the system stores a complete audit record containing:</a:t>
+            </a:r>
+          </a:p>
+          <a:p>
+            <a:r>
+              <a:rPr lang="en-US" dirty="0"/>
+              <a:t>a unique identifier, </a:t>
+            </a:r>
+          </a:p>
+          <a:p>
+            <a:r>
+              <a:rPr lang="en-US" dirty="0"/>
+              <a:t>a timestamp, </a:t>
+            </a:r>
+          </a:p>
+          <a:p>
+            <a:r>
+              <a:rPr lang="en-US" dirty="0"/>
+              <a:t>the original request, </a:t>
+            </a:r>
+          </a:p>
+          <a:p>
+            <a:r>
+              <a:rPr lang="en-US" dirty="0"/>
+              <a:t>the candidate and job data used during evaluation, </a:t>
+            </a:r>
+          </a:p>
+          <a:p>
+            <a:r>
+              <a:rPr lang="en-US" dirty="0"/>
+              <a:t>the final risk level, </a:t>
+            </a:r>
+          </a:p>
+          <a:p>
+            <a:r>
+              <a:rPr lang="en-US" dirty="0"/>
+              <a:t>the final decision, </a:t>
+            </a:r>
+          </a:p>
+          <a:p>
+            <a:r>
+              <a:rPr lang="en-US" dirty="0"/>
+              <a:t>and all evaluated policies. </a:t>
+            </a:r>
+          </a:p>
+          <a:p>
+            <a:r>
+              <a:rPr lang="en-US" dirty="0"/>
+              <a:t>This is important because it allows us to reconstruct every decision made by the system.</a:t>
+            </a:r>
+          </a:p>
+          <a:p>
+            <a:r>
+              <a:rPr lang="en-US" dirty="0"/>
+              <a:t>For example, if a recommendation is rejected, we can later verify:</a:t>
+            </a:r>
+          </a:p>
+          <a:p>
+            <a:r>
+              <a:rPr lang="en-US" dirty="0"/>
+              <a:t>who requested the evaluation, </a:t>
+            </a:r>
+          </a:p>
+          <a:p>
+            <a:r>
+              <a:rPr lang="en-US" dirty="0"/>
+              <a:t>which data was analyzed, </a:t>
+            </a:r>
+          </a:p>
+          <a:p>
+            <a:r>
+              <a:rPr lang="en-US" dirty="0"/>
+              <a:t>which ethical policies were triggered, </a:t>
+            </a:r>
+          </a:p>
+          <a:p>
+            <a:r>
+              <a:rPr lang="en-US" dirty="0"/>
+              <a:t>and why the system produced that result. </a:t>
+            </a:r>
+          </a:p>
+          <a:p>
+            <a:r>
+              <a:rPr lang="en-US" dirty="0"/>
+              <a:t>Another important aspect is provenance tracking.</a:t>
+            </a:r>
+          </a:p>
+          <a:p>
+            <a:r>
+              <a:rPr lang="en-US" dirty="0"/>
+              <a:t>The EaaS stores the real data fetched from the DaaS during the evaluation process.</a:t>
+            </a:r>
+            <a:br>
+              <a:rPr lang="en-US" dirty="0"/>
+            </a:br>
+            <a:r>
+              <a:rPr lang="en-US" dirty="0"/>
+              <a:t>This means that even if the dataset changes later, we still preserve the exact snapshot that was used when the decision was made.</a:t>
+            </a:r>
+          </a:p>
+          <a:p>
+            <a:r>
+              <a:rPr lang="en-US" dirty="0"/>
+              <a:t>This improves transparency and reproducibility, which are fundamental concepts in ethical and trustworthy systems.</a:t>
+            </a:r>
+          </a:p>
+          <a:p>
+            <a:r>
+              <a:rPr lang="en-US" dirty="0"/>
+              <a:t>The audit trail is persisted using the JSONL format, meaning one JSON object per line.</a:t>
+            </a:r>
+          </a:p>
+          <a:p>
+            <a:r>
+              <a:rPr lang="en-US" dirty="0"/>
+              <a:t>This creates an append-only history of evaluations.</a:t>
+            </a:r>
+          </a:p>
+          <a:p>
+            <a:r>
+              <a:rPr lang="en-US" dirty="0"/>
+              <a:t>Previous records are never modified or overwritten.</a:t>
+            </a:r>
+            <a:br>
+              <a:rPr lang="en-US" dirty="0"/>
+            </a:br>
+            <a:r>
+              <a:rPr lang="en-US" dirty="0"/>
+              <a:t>New evaluations are simply appended to the log.</a:t>
+            </a:r>
+          </a:p>
+          <a:p>
+            <a:r>
+              <a:rPr lang="en-US" dirty="0"/>
+              <a:t>This approach is commonly used in governance and compliance systems because it preserves historical evidence and improves traceability.</a:t>
+            </a:r>
+          </a:p>
+          <a:p>
             <a:endParaRPr lang="en-US" dirty="0"/>
           </a:p>
         </p:txBody>
@@ -889,6 +1072,18 @@
           <a:bodyPr/>
           <a:lstStyle/>
           <a:p>
+            <a:r>
+              <a:rPr lang="en-US" dirty="0"/>
+              <a:t>Regarding the ethical decision process itself, the EaaS evaluates all active policies and then aggregates the results.</a:t>
+            </a:r>
+          </a:p>
+          <a:p>
+            <a:r>
+              <a:rPr lang="en-US" dirty="0"/>
+              <a:t>If no policy is violated, the recommendation is accepted with a PROCEED decision and a LOW risk level.</a:t>
+            </a:r>
+          </a:p>
+          <a:p>
             <a:endParaRPr lang="en-US" dirty="0"/>
           </a:p>
         </p:txBody>
@@ -973,6 +1168,54 @@
           <a:bodyPr/>
           <a:lstStyle/>
           <a:p>
+            <a:r>
+              <a:rPr lang="en-US" dirty="0"/>
+              <a:t>Instead, if severe violations are detected, the recommendation may be rejected.</a:t>
+            </a:r>
+          </a:p>
+          <a:p>
+            <a:r>
+              <a:rPr lang="en-US" dirty="0"/>
+              <a:t>For example, in our second scenario, the offer contains an explicit age restriction and also comes from an untrusted source.</a:t>
+            </a:r>
+          </a:p>
+          <a:p>
+            <a:r>
+              <a:rPr lang="en-US" dirty="0"/>
+              <a:t>These elements trigger two different policies:</a:t>
+            </a:r>
+          </a:p>
+          <a:p>
+            <a:r>
+              <a:rPr lang="en-US" dirty="0"/>
+              <a:t>the discriminatory proxy policy, </a:t>
+            </a:r>
+          </a:p>
+          <a:p>
+            <a:r>
+              <a:rPr lang="en-US" dirty="0"/>
+              <a:t>and the provenance policy. </a:t>
+            </a:r>
+          </a:p>
+          <a:p>
+            <a:r>
+              <a:rPr lang="en-US" dirty="0"/>
+              <a:t>Because the discriminatory policy produces a CRITICAL severity finding, the final decision becomes REJECT.</a:t>
+            </a:r>
+          </a:p>
+          <a:p>
+            <a:r>
+              <a:rPr lang="en-US" dirty="0"/>
+              <a:t>However, an important clarification is that REJECT does not permanently remove the offer from the system.</a:t>
+            </a:r>
+          </a:p>
+          <a:p>
+            <a:r>
+              <a:rPr lang="en-US" dirty="0"/>
+              <a:t>The EaaS only blocks the automatic recommendation process.</a:t>
+            </a:r>
+          </a:p>
+          <a:p>
             <a:endParaRPr lang="en-US" dirty="0"/>
           </a:p>
         </p:txBody>
@@ -1141,6 +1384,174 @@
           <a:bodyPr/>
           <a:lstStyle/>
           <a:p>
+            <a:r>
+              <a:rPr lang="en-US" dirty="0"/>
+              <a:t>Human review is still required before taking permanent actions.</a:t>
+            </a:r>
+          </a:p>
+          <a:p>
+            <a:r>
+              <a:rPr lang="en-US" dirty="0"/>
+              <a:t>This leads to the critical reflection section of the project.</a:t>
+            </a:r>
+          </a:p>
+          <a:p>
+            <a:r>
+              <a:rPr lang="en-US" dirty="0"/>
+              <a:t>Our system has several important limitations.</a:t>
+            </a:r>
+          </a:p>
+          <a:p>
+            <a:r>
+              <a:rPr lang="en-US" dirty="0"/>
+              <a:t>First, it only detects explicit discriminatory fields such as:</a:t>
+            </a:r>
+          </a:p>
+          <a:p>
+            <a:r>
+              <a:rPr lang="en-US" dirty="0"/>
+              <a:t>age limits, </a:t>
+            </a:r>
+          </a:p>
+          <a:p>
+            <a:r>
+              <a:rPr lang="en-US" dirty="0"/>
+              <a:t>gender preferences, </a:t>
+            </a:r>
+          </a:p>
+          <a:p>
+            <a:r>
+              <a:rPr lang="en-US" dirty="0"/>
+              <a:t>and nationality requirements. </a:t>
+            </a:r>
+          </a:p>
+          <a:p>
+            <a:r>
+              <a:rPr lang="en-US" dirty="0"/>
+              <a:t>It does not detect indirect or subtle proxies such as:</a:t>
+            </a:r>
+          </a:p>
+          <a:p>
+            <a:r>
+              <a:rPr lang="en-US" dirty="0"/>
+              <a:t>postcode, </a:t>
+            </a:r>
+          </a:p>
+          <a:p>
+            <a:r>
+              <a:rPr lang="en-US" dirty="0"/>
+              <a:t>university, </a:t>
+            </a:r>
+          </a:p>
+          <a:p>
+            <a:r>
+              <a:rPr lang="en-US" dirty="0"/>
+              <a:t>names, </a:t>
+            </a:r>
+          </a:p>
+          <a:p>
+            <a:r>
+              <a:rPr lang="en-US" dirty="0"/>
+              <a:t>or employment gaps. </a:t>
+            </a:r>
+          </a:p>
+          <a:p>
+            <a:r>
+              <a:rPr lang="en-US" dirty="0"/>
+              <a:t>These forms of bias are much more difficult to identify and would require advanced statistical or machine learning techniques.</a:t>
+            </a:r>
+          </a:p>
+          <a:p>
+            <a:endParaRPr lang="en-US" dirty="0"/>
+          </a:p>
+          <a:p>
+            <a:endParaRPr lang="en-US" dirty="0"/>
+          </a:p>
+          <a:p>
+            <a:r>
+              <a:rPr lang="en-US" dirty="0"/>
+              <a:t>Another limitation is that the ethical logic is still implemented in Java code.</a:t>
+            </a:r>
+          </a:p>
+          <a:p>
+            <a:r>
+              <a:rPr lang="en-US" dirty="0"/>
+              <a:t>The JSON policy files contain metadata and configuration parameters, but the actual evaluation behavior is hardcoded.</a:t>
+            </a:r>
+          </a:p>
+          <a:p>
+            <a:r>
+              <a:rPr lang="en-US" dirty="0"/>
+              <a:t>As a consequence, modifying the behavior of the policies still requires developer intervention.</a:t>
+            </a:r>
+          </a:p>
+          <a:p>
+            <a:endParaRPr lang="en-US" dirty="0"/>
+          </a:p>
+          <a:p>
+            <a:endParaRPr lang="en-US" dirty="0"/>
+          </a:p>
+          <a:p>
+            <a:r>
+              <a:rPr lang="en-US" dirty="0"/>
+              <a:t>The system also does not compute aggregate fairness metrics over time.</a:t>
+            </a:r>
+          </a:p>
+          <a:p>
+            <a:r>
+              <a:rPr lang="en-US" dirty="0"/>
+              <a:t>Each recommendation is evaluated individually, but the platform cannot detect systemic disparities across demographic groups.</a:t>
+            </a:r>
+          </a:p>
+          <a:p>
+            <a:r>
+              <a:rPr lang="en-US" dirty="0"/>
+              <a:t>For example, it cannot determine whether a specific category of candidates consistently receives fewer recommendations than others.</a:t>
+            </a:r>
+          </a:p>
+          <a:p>
+            <a:endParaRPr lang="en-US" dirty="0"/>
+          </a:p>
+          <a:p>
+            <a:endParaRPr lang="en-US" dirty="0"/>
+          </a:p>
+          <a:p>
+            <a:r>
+              <a:rPr lang="en-US" dirty="0"/>
+              <a:t>Another limitation is that the dataset used in the project is synthetic.</a:t>
+            </a:r>
+          </a:p>
+          <a:p>
+            <a:r>
+              <a:rPr lang="en-US" dirty="0"/>
+              <a:t>In a real production environment, additional concerns would be necessary, including:</a:t>
+            </a:r>
+          </a:p>
+          <a:p>
+            <a:r>
+              <a:rPr lang="en-US" dirty="0"/>
+              <a:t>GDPR consent management, </a:t>
+            </a:r>
+          </a:p>
+          <a:p>
+            <a:r>
+              <a:rPr lang="en-US" dirty="0"/>
+              <a:t>encryption, </a:t>
+            </a:r>
+          </a:p>
+          <a:p>
+            <a:r>
+              <a:rPr lang="en-US" dirty="0"/>
+              <a:t>retention policies, </a:t>
+            </a:r>
+          </a:p>
+          <a:p>
+            <a:r>
+              <a:rPr lang="en-US" dirty="0"/>
+              <a:t>and right-to-explanation procedures.</a:t>
+            </a:r>
+          </a:p>
+          <a:p>
             <a:endParaRPr lang="en-US" dirty="0"/>
           </a:p>
         </p:txBody>
@@ -1308,6 +1719,132 @@
         <p:txBody>
           <a:bodyPr/>
           <a:lstStyle/>
+          <a:p>
+            <a:r>
+              <a:rPr lang="en-US" dirty="0"/>
+              <a:t>Finally, there are several decisions that we intentionally decided not to automate.</a:t>
+            </a:r>
+          </a:p>
+          <a:p>
+            <a:r>
+              <a:rPr lang="en-US" dirty="0"/>
+              <a:t>The platform does not perform final hiring decisions.</a:t>
+            </a:r>
+          </a:p>
+          <a:p>
+            <a:r>
+              <a:rPr lang="en-US" dirty="0"/>
+              <a:t>It only provides recommendations and ethical evaluations.</a:t>
+            </a:r>
+          </a:p>
+          <a:p>
+            <a:r>
+              <a:rPr lang="en-US" dirty="0"/>
+              <a:t>The final responsibility must always remain with human decision makers.</a:t>
+            </a:r>
+          </a:p>
+          <a:p>
+            <a:endParaRPr lang="en-US" dirty="0"/>
+          </a:p>
+          <a:p>
+            <a:r>
+              <a:rPr lang="en-US" dirty="0"/>
+              <a:t>Similarly, the system does not permanently exclude job offers automatically.</a:t>
+            </a:r>
+          </a:p>
+          <a:p>
+            <a:r>
+              <a:rPr lang="en-US" dirty="0"/>
+              <a:t>A REJECT decision only blocks automated recommendation flows until a human review is performed.</a:t>
+            </a:r>
+          </a:p>
+          <a:p>
+            <a:endParaRPr lang="en-US" dirty="0"/>
+          </a:p>
+          <a:p>
+            <a:r>
+              <a:rPr lang="en-US" dirty="0"/>
+              <a:t>The EaaS also cannot interpret complex legal contexts.</a:t>
+            </a:r>
+          </a:p>
+          <a:p>
+            <a:r>
+              <a:rPr lang="en-US" dirty="0"/>
+              <a:t>For instance, a nationality requirement may sometimes be discriminatory, but in other cases it could be legally justified due to national security regulations.</a:t>
+            </a:r>
+          </a:p>
+          <a:p>
+            <a:r>
+              <a:rPr lang="en-US" dirty="0"/>
+              <a:t>The system lacks the contextual understanding required for those situations, so escalation to human review is necessary.</a:t>
+            </a:r>
+          </a:p>
+          <a:p>
+            <a:endParaRPr lang="en-US" dirty="0"/>
+          </a:p>
+          <a:p>
+            <a:r>
+              <a:rPr lang="en-US" dirty="0"/>
+              <a:t>Finally, the platform does not evaluate soft skills or human qualities such as:</a:t>
+            </a:r>
+          </a:p>
+          <a:p>
+            <a:r>
+              <a:rPr lang="en-US" dirty="0"/>
+              <a:t>motivation, </a:t>
+            </a:r>
+          </a:p>
+          <a:p>
+            <a:r>
+              <a:rPr lang="en-US" dirty="0"/>
+              <a:t>communication, </a:t>
+            </a:r>
+          </a:p>
+          <a:p>
+            <a:r>
+              <a:rPr lang="en-US" dirty="0"/>
+              <a:t>leadership, </a:t>
+            </a:r>
+          </a:p>
+          <a:p>
+            <a:r>
+              <a:rPr lang="en-US" dirty="0"/>
+              <a:t>empathy, </a:t>
+            </a:r>
+          </a:p>
+          <a:p>
+            <a:r>
+              <a:rPr lang="en-US" dirty="0"/>
+              <a:t>or cultural fit. </a:t>
+            </a:r>
+          </a:p>
+          <a:p>
+            <a:r>
+              <a:rPr lang="en-US" dirty="0"/>
+              <a:t>Those dimensions remain outside the scope of our RDF model and should not be delegated to automated systems.</a:t>
+            </a:r>
+          </a:p>
+          <a:p>
+            <a:endParaRPr lang="en-US" dirty="0"/>
+          </a:p>
+          <a:p>
+            <a:r>
+              <a:rPr lang="en-US" dirty="0"/>
+              <a:t>So the key message of this project is that ethics should not be treated as a final checkbox added after development.</a:t>
+            </a:r>
+          </a:p>
+          <a:p>
+            <a:r>
+              <a:rPr lang="en-US" dirty="0"/>
+              <a:t>Instead, governance, transparency, auditing, and human oversight should be integrated directly into the architecture of the system itself.</a:t>
+            </a:r>
+          </a:p>
+          <a:p>
+            <a:r>
+              <a:rPr lang="en-US" dirty="0"/>
+              <a:t>Thank you.</a:t>
+            </a:r>
+          </a:p>
           <a:p>
             <a:endParaRPr lang="en-US" dirty="0"/>
           </a:p>
@@ -8223,7 +8760,7 @@
                 <a:ea typeface="Calibri" pitchFamily="34" charset="-122"/>
                 <a:cs typeface="Calibri" pitchFamily="34" charset="-120"/>
               </a:rPr>
-              <a:t>  Federico Ciccio Capricci</a:t>
+              <a:t>  Federico Capricci</a:t>
             </a:r>
             <a:endParaRPr lang="en-US" sz="1200" dirty="0"/>
           </a:p>
@@ -8534,26 +9071,24 @@
                 <a:ea typeface="Consolas" pitchFamily="34" charset="-122"/>
                 <a:cs typeface="Consolas" pitchFamily="34" charset="-120"/>
               </a:rPr>
-              <a:t>  "auditId": "audit-8f43...",</a:t>
-            </a:r>
-            <a:endParaRPr lang="en-US" sz="1050" dirty="0"/>
-          </a:p>
-          <a:p>
-            <a:pPr marL="0" indent="0">
-              <a:buNone/>
-            </a:pPr>
+              <a:t>  </a:t>
+            </a:r>
             <a:r>
               <a:rPr lang="en-US" sz="1050" dirty="0">
                 <a:solidFill>
-                  <a:srgbClr val="86EFAC"/>
+                  <a:srgbClr val="E482F4"/>
                 </a:solidFill>
                 <a:latin typeface="Consolas" pitchFamily="34" charset="0"/>
                 <a:ea typeface="Consolas" pitchFamily="34" charset="-122"/>
                 <a:cs typeface="Consolas" pitchFamily="34" charset="-120"/>
               </a:rPr>
-              <a:t>  "timestamp": "2026-05-19T08:07:50Z",</a:t>
-            </a:r>
-            <a:endParaRPr lang="en-US" sz="1050" dirty="0"/>
+              <a:t>"auditId": "audit-8f43...",</a:t>
+            </a:r>
+            <a:endParaRPr lang="en-US" sz="1050" dirty="0">
+              <a:solidFill>
+                <a:srgbClr val="E482F4"/>
+              </a:solidFill>
+            </a:endParaRPr>
           </a:p>
           <a:p>
             <a:pPr marL="0" indent="0">
@@ -8568,26 +9103,24 @@
                 <a:ea typeface="Consolas" pitchFamily="34" charset="-122"/>
                 <a:cs typeface="Consolas" pitchFamily="34" charset="-120"/>
               </a:rPr>
-              <a:t>  "request": { "candidateId": "cand-001",</a:t>
-            </a:r>
-            <a:endParaRPr lang="en-US" sz="1050" dirty="0"/>
-          </a:p>
-          <a:p>
-            <a:pPr marL="0" indent="0">
-              <a:buNone/>
-            </a:pPr>
+              <a:t>  </a:t>
+            </a:r>
             <a:r>
               <a:rPr lang="en-US" sz="1050" dirty="0">
                 <a:solidFill>
-                  <a:srgbClr val="86EFAC"/>
+                  <a:srgbClr val="E482F4"/>
                 </a:solidFill>
                 <a:latin typeface="Consolas" pitchFamily="34" charset="0"/>
                 <a:ea typeface="Consolas" pitchFamily="34" charset="-122"/>
                 <a:cs typeface="Consolas" pitchFamily="34" charset="-120"/>
               </a:rPr>
-              <a:t>               "jobId": "job-003" ... },</a:t>
-            </a:r>
-            <a:endParaRPr lang="en-US" sz="1050" dirty="0"/>
+              <a:t>"timestamp": "2026-05-19T08:07:50Z",</a:t>
+            </a:r>
+            <a:endParaRPr lang="en-US" sz="1050" dirty="0">
+              <a:solidFill>
+                <a:srgbClr val="E482F4"/>
+              </a:solidFill>
+            </a:endParaRPr>
           </a:p>
           <a:p>
             <a:pPr marL="0" indent="0">
@@ -8602,26 +9135,24 @@
                 <a:ea typeface="Consolas" pitchFamily="34" charset="-122"/>
                 <a:cs typeface="Consolas" pitchFamily="34" charset="-120"/>
               </a:rPr>
-              <a:t>  "evaluatedCandidate": { ... },</a:t>
-            </a:r>
-            <a:endParaRPr lang="en-US" sz="1050" dirty="0"/>
-          </a:p>
-          <a:p>
-            <a:pPr marL="0" indent="0">
-              <a:buNone/>
-            </a:pPr>
+              <a:t>  </a:t>
+            </a:r>
             <a:r>
               <a:rPr lang="en-US" sz="1050" dirty="0">
                 <a:solidFill>
-                  <a:srgbClr val="86EFAC"/>
+                  <a:srgbClr val="00B0F0"/>
                 </a:solidFill>
                 <a:latin typeface="Consolas" pitchFamily="34" charset="0"/>
                 <a:ea typeface="Consolas" pitchFamily="34" charset="-122"/>
                 <a:cs typeface="Consolas" pitchFamily="34" charset="-120"/>
               </a:rPr>
-              <a:t>  "evaluatedJob": { ... },</a:t>
-            </a:r>
-            <a:endParaRPr lang="en-US" sz="1050" dirty="0"/>
+              <a:t>"request": { "candidateId": "cand-001",</a:t>
+            </a:r>
+            <a:endParaRPr lang="en-US" sz="1050" dirty="0">
+              <a:solidFill>
+                <a:srgbClr val="00B0F0"/>
+              </a:solidFill>
+            </a:endParaRPr>
           </a:p>
           <a:p>
             <a:pPr marL="0" indent="0">
@@ -8630,15 +9161,19 @@
             <a:r>
               <a:rPr lang="en-US" sz="1050" dirty="0">
                 <a:solidFill>
-                  <a:srgbClr val="86EFAC"/>
+                  <a:srgbClr val="00B0F0"/>
                 </a:solidFill>
                 <a:latin typeface="Consolas" pitchFamily="34" charset="0"/>
                 <a:ea typeface="Consolas" pitchFamily="34" charset="-122"/>
                 <a:cs typeface="Consolas" pitchFamily="34" charset="-120"/>
               </a:rPr>
-              <a:t>  "riskLevel": "CRITICAL",</a:t>
-            </a:r>
-            <a:endParaRPr lang="en-US" sz="1050" dirty="0"/>
+              <a:t>               "jobId": "job-003" ... },</a:t>
+            </a:r>
+            <a:endParaRPr lang="en-US" sz="1050" dirty="0">
+              <a:solidFill>
+                <a:srgbClr val="00B0F0"/>
+              </a:solidFill>
+            </a:endParaRPr>
           </a:p>
           <a:p>
             <a:pPr marL="0" indent="0">
@@ -8653,26 +9188,24 @@
                 <a:ea typeface="Consolas" pitchFamily="34" charset="-122"/>
                 <a:cs typeface="Consolas" pitchFamily="34" charset="-120"/>
               </a:rPr>
-              <a:t>  "decision": "REJECT",</a:t>
-            </a:r>
-            <a:endParaRPr lang="en-US" sz="1050" dirty="0"/>
-          </a:p>
-          <a:p>
-            <a:pPr marL="0" indent="0">
-              <a:buNone/>
-            </a:pPr>
+              <a:t>  </a:t>
+            </a:r>
             <a:r>
               <a:rPr lang="en-US" sz="1050" dirty="0">
                 <a:solidFill>
-                  <a:srgbClr val="86EFAC"/>
+                  <a:srgbClr val="FFFF00"/>
                 </a:solidFill>
                 <a:latin typeface="Consolas" pitchFamily="34" charset="0"/>
                 <a:ea typeface="Consolas" pitchFamily="34" charset="-122"/>
                 <a:cs typeface="Consolas" pitchFamily="34" charset="-120"/>
               </a:rPr>
-              <a:t>  "findings": [ { ... } ],</a:t>
-            </a:r>
-            <a:endParaRPr lang="en-US" sz="1050" dirty="0"/>
+              <a:t>"evaluatedCandidate": { ... },</a:t>
+            </a:r>
+            <a:endParaRPr lang="en-US" sz="1050" dirty="0">
+              <a:solidFill>
+                <a:srgbClr val="FFFF00"/>
+              </a:solidFill>
+            </a:endParaRPr>
           </a:p>
           <a:p>
             <a:pPr marL="0" indent="0">
@@ -8681,15 +9214,19 @@
             <a:r>
               <a:rPr lang="en-US" sz="1050" dirty="0">
                 <a:solidFill>
-                  <a:srgbClr val="86EFAC"/>
+                  <a:srgbClr val="FFFF00"/>
                 </a:solidFill>
                 <a:latin typeface="Consolas" pitchFamily="34" charset="0"/>
                 <a:ea typeface="Consolas" pitchFamily="34" charset="-122"/>
                 <a:cs typeface="Consolas" pitchFamily="34" charset="-120"/>
               </a:rPr>
-              <a:t>  "appliedPolicies": [</a:t>
-            </a:r>
-            <a:endParaRPr lang="en-US" sz="1050" dirty="0"/>
+              <a:t>  "evaluatedJob": { ... },</a:t>
+            </a:r>
+            <a:endParaRPr lang="en-US" sz="1050" dirty="0">
+              <a:solidFill>
+                <a:srgbClr val="FFFF00"/>
+              </a:solidFill>
+            </a:endParaRPr>
           </a:p>
           <a:p>
             <a:pPr marL="0" indent="0">
@@ -8704,7 +9241,7 @@
                 <a:ea typeface="Consolas" pitchFamily="34" charset="-122"/>
                 <a:cs typeface="Consolas" pitchFamily="34" charset="-120"/>
               </a:rPr>
-              <a:t>    "P-ACC-003", "P-DISCR-001",</a:t>
+              <a:t>  "riskLevel": "CRITICAL",</a:t>
             </a:r>
             <a:endParaRPr lang="en-US" sz="1050" dirty="0"/>
           </a:p>
@@ -8721,26 +9258,24 @@
                 <a:ea typeface="Consolas" pitchFamily="34" charset="-122"/>
                 <a:cs typeface="Consolas" pitchFamily="34" charset="-120"/>
               </a:rPr>
-              <a:t>    "P-PROV-002", "P-TRANS-004"</a:t>
-            </a:r>
-            <a:endParaRPr lang="en-US" sz="1050" dirty="0"/>
-          </a:p>
-          <a:p>
-            <a:pPr marL="0" indent="0">
-              <a:buNone/>
-            </a:pPr>
+              <a:t>  </a:t>
+            </a:r>
             <a:r>
               <a:rPr lang="en-US" sz="1050" dirty="0">
                 <a:solidFill>
-                  <a:srgbClr val="86EFAC"/>
+                  <a:srgbClr val="FF0000"/>
                 </a:solidFill>
                 <a:latin typeface="Consolas" pitchFamily="34" charset="0"/>
                 <a:ea typeface="Consolas" pitchFamily="34" charset="-122"/>
                 <a:cs typeface="Consolas" pitchFamily="34" charset="-120"/>
               </a:rPr>
-              <a:t>  ]</a:t>
-            </a:r>
-            <a:endParaRPr lang="en-US" sz="1050" dirty="0"/>
+              <a:t>"decision": "REJECT",</a:t>
+            </a:r>
+            <a:endParaRPr lang="en-US" sz="1050" dirty="0">
+              <a:solidFill>
+                <a:srgbClr val="FF0000"/>
+              </a:solidFill>
+            </a:endParaRPr>
           </a:p>
           <a:p>
             <a:pPr marL="0" indent="0">
@@ -8755,6 +9290,106 @@
                 <a:ea typeface="Consolas" pitchFamily="34" charset="-122"/>
                 <a:cs typeface="Consolas" pitchFamily="34" charset="-120"/>
               </a:rPr>
+              <a:t>  </a:t>
+            </a:r>
+            <a:r>
+              <a:rPr lang="en-US" sz="1050" dirty="0">
+                <a:solidFill>
+                  <a:srgbClr val="FF0000"/>
+                </a:solidFill>
+                <a:latin typeface="Consolas" pitchFamily="34" charset="0"/>
+                <a:ea typeface="Consolas" pitchFamily="34" charset="-122"/>
+                <a:cs typeface="Consolas" pitchFamily="34" charset="-120"/>
+              </a:rPr>
+              <a:t>"findings": [ { ... } ],</a:t>
+            </a:r>
+            <a:endParaRPr lang="en-US" sz="1050" dirty="0">
+              <a:solidFill>
+                <a:srgbClr val="FF0000"/>
+              </a:solidFill>
+            </a:endParaRPr>
+          </a:p>
+          <a:p>
+            <a:pPr marL="0" indent="0">
+              <a:buNone/>
+            </a:pPr>
+            <a:r>
+              <a:rPr lang="en-US" sz="1050" dirty="0">
+                <a:solidFill>
+                  <a:srgbClr val="86EFAC"/>
+                </a:solidFill>
+                <a:latin typeface="Consolas" pitchFamily="34" charset="0"/>
+                <a:ea typeface="Consolas" pitchFamily="34" charset="-122"/>
+                <a:cs typeface="Consolas" pitchFamily="34" charset="-120"/>
+              </a:rPr>
+              <a:t>  "appliedPolicies": [</a:t>
+            </a:r>
+            <a:endParaRPr lang="en-US" sz="1050" dirty="0"/>
+          </a:p>
+          <a:p>
+            <a:pPr marL="0" indent="0">
+              <a:buNone/>
+            </a:pPr>
+            <a:r>
+              <a:rPr lang="en-US" sz="1050" dirty="0">
+                <a:solidFill>
+                  <a:srgbClr val="86EFAC"/>
+                </a:solidFill>
+                <a:latin typeface="Consolas" pitchFamily="34" charset="0"/>
+                <a:ea typeface="Consolas" pitchFamily="34" charset="-122"/>
+                <a:cs typeface="Consolas" pitchFamily="34" charset="-120"/>
+              </a:rPr>
+              <a:t>    "P-ACC-003", "P-DISCR-001",</a:t>
+            </a:r>
+            <a:endParaRPr lang="en-US" sz="1050" dirty="0"/>
+          </a:p>
+          <a:p>
+            <a:pPr marL="0" indent="0">
+              <a:buNone/>
+            </a:pPr>
+            <a:r>
+              <a:rPr lang="en-US" sz="1050" dirty="0">
+                <a:solidFill>
+                  <a:srgbClr val="86EFAC"/>
+                </a:solidFill>
+                <a:latin typeface="Consolas" pitchFamily="34" charset="0"/>
+                <a:ea typeface="Consolas" pitchFamily="34" charset="-122"/>
+                <a:cs typeface="Consolas" pitchFamily="34" charset="-120"/>
+              </a:rPr>
+              <a:t>    "P-PROV-002", "P-TRANS-004"</a:t>
+            </a:r>
+            <a:endParaRPr lang="en-US" sz="1050" dirty="0"/>
+          </a:p>
+          <a:p>
+            <a:pPr marL="0" indent="0">
+              <a:buNone/>
+            </a:pPr>
+            <a:r>
+              <a:rPr lang="en-US" sz="1050" dirty="0">
+                <a:solidFill>
+                  <a:srgbClr val="86EFAC"/>
+                </a:solidFill>
+                <a:latin typeface="Consolas" pitchFamily="34" charset="0"/>
+                <a:ea typeface="Consolas" pitchFamily="34" charset="-122"/>
+                <a:cs typeface="Consolas" pitchFamily="34" charset="-120"/>
+              </a:rPr>
+              <a:t>  ]</a:t>
+            </a:r>
+            <a:endParaRPr lang="en-US" sz="1050" dirty="0"/>
+          </a:p>
+          <a:p>
+            <a:pPr marL="0" indent="0">
+              <a:buNone/>
+            </a:pPr>
+            <a:r>
+              <a:rPr lang="en-US" sz="1050" dirty="0">
+                <a:solidFill>
+                  <a:srgbClr val="86EFAC"/>
+                </a:solidFill>
+                <a:latin typeface="Consolas" pitchFamily="34" charset="0"/>
+                <a:ea typeface="Consolas" pitchFamily="34" charset="-122"/>
+                <a:cs typeface="Consolas" pitchFamily="34" charset="-120"/>
+              </a:rPr>
               <a:t>}</a:t>
             </a:r>
             <a:endParaRPr lang="en-US" sz="1050" dirty="0"/>
@@ -8769,7 +9404,7 @@
         </p:nvSpPr>
         <p:spPr>
           <a:xfrm>
-            <a:off x="5394960" y="1463040"/>
+            <a:off x="5394960" y="1663931"/>
             <a:ext cx="457200" cy="0"/>
           </a:xfrm>
           <a:prstGeom prst="line">
@@ -8838,7 +9473,7 @@
         </p:nvSpPr>
         <p:spPr>
           <a:xfrm>
-            <a:off x="5394960" y="1874520"/>
+            <a:off x="5394960" y="1828800"/>
             <a:ext cx="457200" cy="0"/>
           </a:xfrm>
           <a:prstGeom prst="line">
@@ -8868,7 +9503,7 @@
         </p:nvSpPr>
         <p:spPr>
           <a:xfrm>
-            <a:off x="5943600" y="1828800"/>
+            <a:off x="5943600" y="1586484"/>
             <a:ext cx="2834640" cy="457200"/>
           </a:xfrm>
           <a:prstGeom prst="rect">
@@ -8907,7 +9542,7 @@
         </p:nvSpPr>
         <p:spPr>
           <a:xfrm>
-            <a:off x="5394960" y="2194560"/>
+            <a:off x="5394960" y="2043684"/>
             <a:ext cx="457200" cy="0"/>
           </a:xfrm>
           <a:prstGeom prst="line">
@@ -8937,7 +9572,7 @@
         </p:nvSpPr>
         <p:spPr>
           <a:xfrm>
-            <a:off x="5943600" y="2148840"/>
+            <a:off x="5943600" y="1828800"/>
             <a:ext cx="2834640" cy="457200"/>
           </a:xfrm>
           <a:prstGeom prst="rect">
@@ -8976,20 +9611,36 @@
         </p:nvSpPr>
         <p:spPr>
           <a:xfrm>
-            <a:off x="5394960" y="2514600"/>
+            <a:off x="5394960" y="2403764"/>
             <a:ext cx="457200" cy="0"/>
           </a:xfrm>
           <a:prstGeom prst="line">
             <a:avLst/>
           </a:prstGeom>
-          <a:noFill/>
-          <a:ln w="12700">
+          <a:ln w="19050" cap="flat" cmpd="sng" algn="ctr">
             <a:solidFill>
-              <a:srgbClr val="2C5FDC"/>
+              <a:schemeClr val="accent4"/>
             </a:solidFill>
             <a:prstDash val="dash"/>
+            <a:round/>
+            <a:headEnd type="none" w="med" len="med"/>
+            <a:tailEnd type="none" w="med" len="med"/>
           </a:ln>
         </p:spPr>
+        <p:style>
+          <a:lnRef idx="0">
+            <a:scrgbClr r="0" g="0" b="0"/>
+          </a:lnRef>
+          <a:fillRef idx="0">
+            <a:scrgbClr r="0" g="0" b="0"/>
+          </a:fillRef>
+          <a:effectRef idx="0">
+            <a:scrgbClr r="0" g="0" b="0"/>
+          </a:effectRef>
+          <a:fontRef idx="minor">
+            <a:schemeClr val="tx1"/>
+          </a:fontRef>
+        </p:style>
         <p:txBody>
           <a:bodyPr/>
           <a:lstStyle/>
@@ -9006,7 +9657,7 @@
         </p:nvSpPr>
         <p:spPr>
           <a:xfrm>
-            <a:off x="5943600" y="2468880"/>
+            <a:off x="5943600" y="2180843"/>
             <a:ext cx="2834640" cy="457200"/>
           </a:xfrm>
           <a:prstGeom prst="rect">
@@ -9025,7 +9676,7 @@
             <a:r>
               <a:rPr lang="en-US" sz="1000" dirty="0">
                 <a:solidFill>
-                  <a:srgbClr val="2C5FDC"/>
+                  <a:srgbClr val="FFC000"/>
                 </a:solidFill>
                 <a:latin typeface="Calibri" pitchFamily="34" charset="0"/>
                 <a:ea typeface="Calibri" pitchFamily="34" charset="-122"/>
@@ -9033,7 +9684,11 @@
               </a:rPr>
               <a:t>Real data fetched from DaaS</a:t>
             </a:r>
-            <a:endParaRPr lang="en-US" sz="1000" dirty="0"/>
+            <a:endParaRPr lang="en-US" sz="1000" dirty="0">
+              <a:solidFill>
+                <a:srgbClr val="FFC000"/>
+              </a:solidFill>
+            </a:endParaRPr>
           </a:p>
           <a:p>
             <a:pPr marL="0" indent="0">
@@ -9042,15 +9697,19 @@
             <a:r>
               <a:rPr lang="en-US" sz="1000" dirty="0">
                 <a:solidFill>
-                  <a:srgbClr val="2C5FDC"/>
-                </a:solidFill>
-                <a:latin typeface="Calibri" pitchFamily="34" charset="0"/>
-                <a:ea typeface="Calibri" pitchFamily="34" charset="-122"/>
-                <a:cs typeface="Calibri" pitchFamily="34" charset="-120"/>
-              </a:rPr>
-              <a:t>→ provenance tracked</a:t>
-            </a:r>
-            <a:endParaRPr lang="en-US" sz="1000" dirty="0"/>
+                  <a:srgbClr val="FFC000"/>
+                </a:solidFill>
+                <a:latin typeface="Calibri" pitchFamily="34" charset="0"/>
+                <a:ea typeface="Calibri" pitchFamily="34" charset="-122"/>
+                <a:cs typeface="Calibri" pitchFamily="34" charset="-120"/>
+              </a:rPr>
+              <a:t>provenance tracked</a:t>
+            </a:r>
+            <a:endParaRPr lang="en-US" sz="1000" dirty="0">
+              <a:solidFill>
+                <a:srgbClr val="FFC000"/>
+              </a:solidFill>
+            </a:endParaRPr>
           </a:p>
         </p:txBody>
       </p:sp>
@@ -9062,7 +9721,7 @@
         </p:nvSpPr>
         <p:spPr>
           <a:xfrm>
-            <a:off x="5394960" y="3291840"/>
+            <a:off x="5386647" y="2876203"/>
             <a:ext cx="457200" cy="0"/>
           </a:xfrm>
           <a:prstGeom prst="line">
@@ -9092,7 +9751,7 @@
         </p:nvSpPr>
         <p:spPr>
           <a:xfrm>
-            <a:off x="5943600" y="3246120"/>
+            <a:off x="5943600" y="2648989"/>
             <a:ext cx="2834640" cy="457200"/>
           </a:xfrm>
           <a:prstGeom prst="rect">
@@ -9131,7 +9790,7 @@
         </p:nvSpPr>
         <p:spPr>
           <a:xfrm>
-            <a:off x="5394960" y="3840480"/>
+            <a:off x="5386647" y="3272443"/>
             <a:ext cx="457200" cy="0"/>
           </a:xfrm>
           <a:prstGeom prst="line">
@@ -9161,7 +9820,7 @@
         </p:nvSpPr>
         <p:spPr>
           <a:xfrm>
-            <a:off x="5669280" y="3886200"/>
+            <a:off x="5943600" y="3056382"/>
             <a:ext cx="2834640" cy="457200"/>
           </a:xfrm>
           <a:prstGeom prst="rect">

--- a/slides/SoSE-Employment-DaaS-EaaS.pptx
+++ b/slides/SoSE-Employment-DaaS-EaaS.pptx
@@ -446,7 +446,7 @@
                 </a:solidFill>
                 <a:latin typeface="Times New Roman"/>
               </a:rPr>
-              <a:t>‹#›</a:t>
+              <a:t>‹N›</a:t>
             </a:fld>
             <a:endParaRPr lang="en-GB" sz="1400" b="0" strike="noStrike" spc="-1">
               <a:solidFill>
@@ -33308,17 +33308,7 @@
                 <a:tab pos="0" algn="l"/>
               </a:tabLst>
             </a:pPr>
-            <a:r>
-              <a:rPr lang="en-US" sz="1000" b="0" i="1" strike="noStrike" spc="-1">
-                <a:solidFill>
-                  <a:srgbClr val="6B7280"/>
-                </a:solidFill>
-                <a:latin typeface="Calibri"/>
-                <a:ea typeface="Calibri"/>
-              </a:rPr>
-              <a:t>subClassOf foaf:Person</a:t>
-            </a:r>
-            <a:endParaRPr lang="en-GB" sz="1000" b="0" strike="noStrike" spc="-1">
+            <a:endParaRPr lang="en-GB" sz="1000" b="0" strike="noStrike" spc="-1" dirty="0">
               <a:solidFill>
                 <a:srgbClr val="000000"/>
               </a:solidFill>
@@ -33492,17 +33482,7 @@
                 <a:tab pos="0" algn="l"/>
               </a:tabLst>
             </a:pPr>
-            <a:r>
-              <a:rPr lang="en-US" sz="1000" b="0" i="1" strike="noStrike" spc="-1">
-                <a:solidFill>
-                  <a:srgbClr val="6B7280"/>
-                </a:solidFill>
-                <a:latin typeface="Calibri"/>
-                <a:ea typeface="Calibri"/>
-              </a:rPr>
-              <a:t>job offer</a:t>
-            </a:r>
-            <a:endParaRPr lang="en-GB" sz="1000" b="0" strike="noStrike" spc="-1">
+            <a:endParaRPr lang="en-GB" sz="1000" b="0" strike="noStrike" spc="-1" dirty="0">
               <a:solidFill>
                 <a:srgbClr val="000000"/>
               </a:solidFill>
@@ -33676,17 +33656,7 @@
                 <a:tab pos="0" algn="l"/>
               </a:tabLst>
             </a:pPr>
-            <a:r>
-              <a:rPr lang="en-US" sz="1000" b="0" i="1" strike="noStrike" spc="-1">
-                <a:solidFill>
-                  <a:srgbClr val="6B7280"/>
-                </a:solidFill>
-                <a:latin typeface="Calibri"/>
-                <a:ea typeface="Calibri"/>
-              </a:rPr>
-              <a:t>subClassOf schema:Organization</a:t>
-            </a:r>
-            <a:endParaRPr lang="en-GB" sz="1000" b="0" strike="noStrike" spc="-1">
+            <a:endParaRPr lang="en-GB" sz="1000" b="0" strike="noStrike" spc="-1" dirty="0">
               <a:solidFill>
                 <a:srgbClr val="000000"/>
               </a:solidFill>
@@ -33860,17 +33830,7 @@
                 <a:tab pos="0" algn="l"/>
               </a:tabLst>
             </a:pPr>
-            <a:r>
-              <a:rPr lang="en-US" sz="1000" b="0" i="1" strike="noStrike" spc="-1">
-                <a:solidFill>
-                  <a:srgbClr val="6B7280"/>
-                </a:solidFill>
-                <a:latin typeface="Calibri"/>
-                <a:ea typeface="Calibri"/>
-              </a:rPr>
-              <a:t>skill / competence</a:t>
-            </a:r>
-            <a:endParaRPr lang="en-GB" sz="1000" b="0" strike="noStrike" spc="-1">
+            <a:endParaRPr lang="en-GB" sz="1000" b="0" strike="noStrike" spc="-1" dirty="0">
               <a:solidFill>
                 <a:srgbClr val="000000"/>
               </a:solidFill>
@@ -34044,17 +34004,7 @@
                 <a:tab pos="0" algn="l"/>
               </a:tabLst>
             </a:pPr>
-            <a:r>
-              <a:rPr lang="en-US" sz="1000" b="0" i="1" strike="noStrike" spc="-1">
-                <a:solidFill>
-                  <a:srgbClr val="6B7280"/>
-                </a:solidFill>
-                <a:latin typeface="Calibri"/>
-                <a:ea typeface="Calibri"/>
-              </a:rPr>
-              <a:t>work sector</a:t>
-            </a:r>
-            <a:endParaRPr lang="en-GB" sz="1000" b="0" strike="noStrike" spc="-1">
+            <a:endParaRPr lang="en-GB" sz="1000" b="0" strike="noStrike" spc="-1" dirty="0">
               <a:solidFill>
                 <a:srgbClr val="000000"/>
               </a:solidFill>
@@ -34228,17 +34178,7 @@
                 <a:tab pos="0" algn="l"/>
               </a:tabLst>
             </a:pPr>
-            <a:r>
-              <a:rPr lang="en-US" sz="1000" b="0" i="1" strike="noStrike" spc="-1">
-                <a:solidFill>
-                  <a:srgbClr val="6B7280"/>
-                </a:solidFill>
-                <a:latin typeface="Calibri"/>
-                <a:ea typeface="Calibri"/>
-              </a:rPr>
-              <a:t>geographic location</a:t>
-            </a:r>
-            <a:endParaRPr lang="en-GB" sz="1000" b="0" strike="noStrike" spc="-1">
+            <a:endParaRPr lang="en-GB" sz="1000" b="0" strike="noStrike" spc="-1" dirty="0">
               <a:solidFill>
                 <a:srgbClr val="000000"/>
               </a:solidFill>
@@ -34448,7 +34388,7 @@
               </a:tabLst>
             </a:pPr>
             <a:r>
-              <a:rPr lang="en-US" sz="2600" b="1" strike="noStrike" spc="-1">
+              <a:rPr lang="en-US" sz="2600" b="1" strike="noStrike" spc="-1" dirty="0">
                 <a:solidFill>
                   <a:srgbClr val="1D2D44"/>
                 </a:solidFill>
@@ -34457,7 +34397,7 @@
               </a:rPr>
               <a:t>SPARQL Queries — Examples</a:t>
             </a:r>
-            <a:endParaRPr lang="en-GB" sz="2600" b="0" strike="noStrike" spc="-1">
+            <a:endParaRPr lang="en-GB" sz="2600" b="0" strike="noStrike" spc="-1" dirty="0">
               <a:solidFill>
                 <a:srgbClr val="000000"/>
               </a:solidFill>
@@ -35080,16 +35020,86 @@
               </a:tabLst>
             </a:pPr>
             <a:r>
-              <a:rPr lang="en-US" sz="950" b="0" strike="noStrike" spc="-1">
+              <a:rPr lang="en-US" sz="950" b="0" strike="noStrike" spc="-1" dirty="0">
                 <a:solidFill>
                   <a:srgbClr val="86EFAC"/>
                 </a:solidFill>
                 <a:latin typeface="Consolas"/>
                 <a:ea typeface="Consolas"/>
               </a:rPr>
-              <a:t>SELECT ?j ?title ?candLoc ?jobLoc ?remote ?reqExp ?yoe</a:t>
-            </a:r>
-            <a:endParaRPr lang="en-GB" sz="950" b="0" strike="noStrike" spc="-1">
+              <a:t>SELECT ?j ?title ?</a:t>
+            </a:r>
+            <a:r>
+              <a:rPr lang="en-US" sz="950" b="0" strike="noStrike" spc="-1" dirty="0" err="1">
+                <a:solidFill>
+                  <a:srgbClr val="86EFAC"/>
+                </a:solidFill>
+                <a:latin typeface="Consolas"/>
+                <a:ea typeface="Consolas"/>
+              </a:rPr>
+              <a:t>candLoc</a:t>
+            </a:r>
+            <a:r>
+              <a:rPr lang="en-US" sz="950" b="0" strike="noStrike" spc="-1" dirty="0">
+                <a:solidFill>
+                  <a:srgbClr val="86EFAC"/>
+                </a:solidFill>
+                <a:latin typeface="Consolas"/>
+                <a:ea typeface="Consolas"/>
+              </a:rPr>
+              <a:t> ?</a:t>
+            </a:r>
+            <a:r>
+              <a:rPr lang="en-US" sz="950" b="0" strike="noStrike" spc="-1" dirty="0" err="1">
+                <a:solidFill>
+                  <a:srgbClr val="86EFAC"/>
+                </a:solidFill>
+                <a:latin typeface="Consolas"/>
+                <a:ea typeface="Consolas"/>
+              </a:rPr>
+              <a:t>jobLoc</a:t>
+            </a:r>
+            <a:r>
+              <a:rPr lang="en-US" sz="950" b="0" strike="noStrike" spc="-1" dirty="0">
+                <a:solidFill>
+                  <a:srgbClr val="86EFAC"/>
+                </a:solidFill>
+                <a:latin typeface="Consolas"/>
+                <a:ea typeface="Consolas"/>
+              </a:rPr>
+              <a:t> ?remote ?</a:t>
+            </a:r>
+            <a:r>
+              <a:rPr lang="en-US" sz="950" b="0" strike="noStrike" spc="-1" dirty="0" err="1">
+                <a:solidFill>
+                  <a:srgbClr val="86EFAC"/>
+                </a:solidFill>
+                <a:latin typeface="Consolas"/>
+                <a:ea typeface="Consolas"/>
+              </a:rPr>
+              <a:t>reqExp</a:t>
+            </a:r>
+            <a:r>
+              <a:rPr lang="en-US" sz="950" b="0" strike="noStrike" spc="-1" dirty="0">
+                <a:solidFill>
+                  <a:srgbClr val="86EFAC"/>
+                </a:solidFill>
+                <a:latin typeface="Consolas"/>
+                <a:ea typeface="Consolas"/>
+              </a:rPr>
+              <a:t> ?</a:t>
+            </a:r>
+            <a:r>
+              <a:rPr lang="en-US" sz="950" b="0" strike="noStrike" spc="-1" dirty="0" err="1">
+                <a:solidFill>
+                  <a:srgbClr val="86EFAC"/>
+                </a:solidFill>
+                <a:latin typeface="Consolas"/>
+                <a:ea typeface="Consolas"/>
+              </a:rPr>
+              <a:t>yoe</a:t>
+            </a:r>
+            <a:endParaRPr lang="en-GB" sz="950" b="0" strike="noStrike" spc="-1" dirty="0">
               <a:solidFill>
                 <a:srgbClr val="000000"/>
               </a:solidFill>
@@ -35106,16 +35116,36 @@
               </a:tabLst>
             </a:pPr>
             <a:r>
-              <a:rPr lang="en-US" sz="950" b="0" strike="noStrike" spc="-1">
+              <a:rPr lang="en-US" sz="950" b="0" strike="noStrike" spc="-1" dirty="0">
                 <a:solidFill>
                   <a:srgbClr val="86EFAC"/>
                 </a:solidFill>
                 <a:latin typeface="Consolas"/>
                 <a:ea typeface="Consolas"/>
               </a:rPr>
-              <a:t>       (COUNT(DISTINCT ?sharedSkill) AS ?shared)</a:t>
-            </a:r>
-            <a:endParaRPr lang="en-GB" sz="950" b="0" strike="noStrike" spc="-1">
+              <a:t>       (COUNT(DISTINCT ?</a:t>
+            </a:r>
+            <a:r>
+              <a:rPr lang="en-US" sz="950" b="0" strike="noStrike" spc="-1" dirty="0" err="1">
+                <a:solidFill>
+                  <a:srgbClr val="86EFAC"/>
+                </a:solidFill>
+                <a:latin typeface="Consolas"/>
+                <a:ea typeface="Consolas"/>
+              </a:rPr>
+              <a:t>sharedSkill</a:t>
+            </a:r>
+            <a:r>
+              <a:rPr lang="en-US" sz="950" b="0" strike="noStrike" spc="-1" dirty="0">
+                <a:solidFill>
+                  <a:srgbClr val="86EFAC"/>
+                </a:solidFill>
+                <a:latin typeface="Consolas"/>
+                <a:ea typeface="Consolas"/>
+              </a:rPr>
+              <a:t>) AS ?shared)</a:t>
+            </a:r>
+            <a:endParaRPr lang="en-GB" sz="950" b="0" strike="noStrike" spc="-1" dirty="0">
               <a:solidFill>
                 <a:srgbClr val="000000"/>
               </a:solidFill>
@@ -35132,7 +35162,7 @@
               </a:tabLst>
             </a:pPr>
             <a:r>
-              <a:rPr lang="en-US" sz="950" b="0" strike="noStrike" spc="-1">
+              <a:rPr lang="en-US" sz="950" b="0" strike="noStrike" spc="-1" dirty="0">
                 <a:solidFill>
                   <a:srgbClr val="86EFAC"/>
                 </a:solidFill>
@@ -35141,7 +35171,7 @@
               </a:rPr>
               <a:t>WHERE {</a:t>
             </a:r>
-            <a:endParaRPr lang="en-GB" sz="950" b="0" strike="noStrike" spc="-1">
+            <a:endParaRPr lang="en-GB" sz="950" b="0" strike="noStrike" spc="-1" dirty="0">
               <a:solidFill>
                 <a:srgbClr val="000000"/>
               </a:solidFill>
@@ -35158,16 +35188,136 @@
               </a:tabLst>
             </a:pPr>
             <a:r>
-              <a:rPr lang="en-US" sz="950" b="0" strike="noStrike" spc="-1">
+              <a:rPr lang="en-US" sz="950" b="0" strike="noStrike" spc="-1" dirty="0">
                 <a:solidFill>
                   <a:srgbClr val="86EFAC"/>
                 </a:solidFill>
                 <a:latin typeface="Consolas"/>
                 <a:ea typeface="Consolas"/>
               </a:rPr>
-              <a:t>  emp:cand-001 emp:hasLocation ?cLoc ; emp:yearsOfExperience ?yoe ; emp:hasSkill ?sharedSkill .</a:t>
-            </a:r>
-            <a:endParaRPr lang="en-GB" sz="950" b="0" strike="noStrike" spc="-1">
+              <a:t>  emp:cand-001 </a:t>
+            </a:r>
+            <a:r>
+              <a:rPr lang="en-US" sz="950" b="0" strike="noStrike" spc="-1" dirty="0" err="1">
+                <a:solidFill>
+                  <a:srgbClr val="86EFAC"/>
+                </a:solidFill>
+                <a:latin typeface="Consolas"/>
+                <a:ea typeface="Consolas"/>
+              </a:rPr>
+              <a:t>emp:hasLocation</a:t>
+            </a:r>
+            <a:r>
+              <a:rPr lang="en-US" sz="950" b="0" strike="noStrike" spc="-1" dirty="0">
+                <a:solidFill>
+                  <a:srgbClr val="86EFAC"/>
+                </a:solidFill>
+                <a:latin typeface="Consolas"/>
+                <a:ea typeface="Consolas"/>
+              </a:rPr>
+              <a:t> ?</a:t>
+            </a:r>
+            <a:r>
+              <a:rPr lang="en-US" sz="950" b="0" strike="noStrike" spc="-1" dirty="0" err="1">
+                <a:solidFill>
+                  <a:srgbClr val="86EFAC"/>
+                </a:solidFill>
+                <a:latin typeface="Consolas"/>
+                <a:ea typeface="Consolas"/>
+              </a:rPr>
+              <a:t>cLoc</a:t>
+            </a:r>
+            <a:r>
+              <a:rPr lang="en-US" sz="950" b="0" strike="noStrike" spc="-1" dirty="0">
+                <a:solidFill>
+                  <a:srgbClr val="86EFAC"/>
+                </a:solidFill>
+                <a:latin typeface="Consolas"/>
+                <a:ea typeface="Consolas"/>
+              </a:rPr>
+              <a:t> ; </a:t>
+            </a:r>
+            <a:r>
+              <a:rPr lang="en-US" sz="950" b="0" strike="noStrike" spc="-1" dirty="0" err="1">
+                <a:solidFill>
+                  <a:srgbClr val="86EFAC"/>
+                </a:solidFill>
+                <a:latin typeface="Consolas"/>
+                <a:ea typeface="Consolas"/>
+              </a:rPr>
+              <a:t>emp:yearsOfExperience</a:t>
+            </a:r>
+            <a:r>
+              <a:rPr lang="en-US" sz="950" b="0" strike="noStrike" spc="-1" dirty="0">
+                <a:solidFill>
+                  <a:srgbClr val="86EFAC"/>
+                </a:solidFill>
+                <a:latin typeface="Consolas"/>
+                <a:ea typeface="Consolas"/>
+              </a:rPr>
+              <a:t> ?</a:t>
+            </a:r>
+            <a:r>
+              <a:rPr lang="en-US" sz="950" b="0" strike="noStrike" spc="-1" dirty="0" err="1">
+                <a:solidFill>
+                  <a:srgbClr val="86EFAC"/>
+                </a:solidFill>
+                <a:latin typeface="Consolas"/>
+                <a:ea typeface="Consolas"/>
+              </a:rPr>
+              <a:t>yoe</a:t>
+            </a:r>
+            <a:r>
+              <a:rPr lang="en-US" sz="950" b="0" strike="noStrike" spc="-1" dirty="0">
+                <a:solidFill>
+                  <a:srgbClr val="86EFAC"/>
+                </a:solidFill>
+                <a:latin typeface="Consolas"/>
+                <a:ea typeface="Consolas"/>
+              </a:rPr>
+              <a:t> ; </a:t>
+            </a:r>
+            <a:r>
+              <a:rPr lang="en-US" sz="950" b="0" strike="noStrike" spc="-1" dirty="0" err="1">
+                <a:solidFill>
+                  <a:srgbClr val="86EFAC"/>
+                </a:solidFill>
+                <a:latin typeface="Consolas"/>
+                <a:ea typeface="Consolas"/>
+              </a:rPr>
+              <a:t>emp:hasSkill</a:t>
+            </a:r>
+            <a:r>
+              <a:rPr lang="en-US" sz="950" b="0" strike="noStrike" spc="-1" dirty="0">
+                <a:solidFill>
+                  <a:srgbClr val="86EFAC"/>
+                </a:solidFill>
+                <a:latin typeface="Consolas"/>
+                <a:ea typeface="Consolas"/>
+              </a:rPr>
+              <a:t> ?</a:t>
+            </a:r>
+            <a:r>
+              <a:rPr lang="en-US" sz="950" b="0" strike="noStrike" spc="-1" dirty="0" err="1">
+                <a:solidFill>
+                  <a:srgbClr val="86EFAC"/>
+                </a:solidFill>
+                <a:latin typeface="Consolas"/>
+                <a:ea typeface="Consolas"/>
+              </a:rPr>
+              <a:t>sharedSkill</a:t>
+            </a:r>
+            <a:r>
+              <a:rPr lang="en-US" sz="950" b="0" strike="noStrike" spc="-1" dirty="0">
+                <a:solidFill>
+                  <a:srgbClr val="86EFAC"/>
+                </a:solidFill>
+                <a:latin typeface="Consolas"/>
+                <a:ea typeface="Consolas"/>
+              </a:rPr>
+              <a:t> .</a:t>
+            </a:r>
+            <a:endParaRPr lang="en-GB" sz="950" b="0" strike="noStrike" spc="-1" dirty="0">
               <a:solidFill>
                 <a:srgbClr val="000000"/>
               </a:solidFill>
@@ -35184,16 +35334,76 @@
               </a:tabLst>
             </a:pPr>
             <a:r>
-              <a:rPr lang="en-US" sz="950" b="0" strike="noStrike" spc="-1">
+              <a:rPr lang="en-US" sz="950" b="0" strike="noStrike" spc="-1" dirty="0">
                 <a:solidFill>
                   <a:srgbClr val="86EFAC"/>
                 </a:solidFill>
                 <a:latin typeface="Consolas"/>
                 <a:ea typeface="Consolas"/>
               </a:rPr>
-              <a:t>  ?cLoc rdfs:label ?candLoc .</a:t>
-            </a:r>
-            <a:endParaRPr lang="en-GB" sz="950" b="0" strike="noStrike" spc="-1">
+              <a:t>  ?</a:t>
+            </a:r>
+            <a:r>
+              <a:rPr lang="en-US" sz="950" b="0" strike="noStrike" spc="-1" dirty="0" err="1">
+                <a:solidFill>
+                  <a:srgbClr val="86EFAC"/>
+                </a:solidFill>
+                <a:latin typeface="Consolas"/>
+                <a:ea typeface="Consolas"/>
+              </a:rPr>
+              <a:t>cLoc</a:t>
+            </a:r>
+            <a:r>
+              <a:rPr lang="en-US" sz="950" b="0" strike="noStrike" spc="-1" dirty="0">
+                <a:solidFill>
+                  <a:srgbClr val="86EFAC"/>
+                </a:solidFill>
+                <a:latin typeface="Consolas"/>
+                <a:ea typeface="Consolas"/>
+              </a:rPr>
+              <a:t> </a:t>
+            </a:r>
+            <a:r>
+              <a:rPr lang="en-US" sz="950" b="0" strike="noStrike" spc="-1" dirty="0" err="1">
+                <a:solidFill>
+                  <a:srgbClr val="86EFAC"/>
+                </a:solidFill>
+                <a:latin typeface="Consolas"/>
+                <a:ea typeface="Consolas"/>
+              </a:rPr>
+              <a:t>rdfs:label</a:t>
+            </a:r>
+            <a:r>
+              <a:rPr lang="en-US" sz="950" b="0" strike="noStrike" spc="-1" dirty="0">
+                <a:solidFill>
+                  <a:srgbClr val="86EFAC"/>
+                </a:solidFill>
+                <a:latin typeface="Consolas"/>
+                <a:ea typeface="Consolas"/>
+              </a:rPr>
+              <a:t> ?</a:t>
+            </a:r>
+            <a:r>
+              <a:rPr lang="en-US" sz="950" b="0" strike="noStrike" spc="-1" dirty="0" err="1">
+                <a:solidFill>
+                  <a:srgbClr val="86EFAC"/>
+                </a:solidFill>
+                <a:latin typeface="Consolas"/>
+                <a:ea typeface="Consolas"/>
+              </a:rPr>
+              <a:t>candLoc</a:t>
+            </a:r>
+            <a:r>
+              <a:rPr lang="en-US" sz="950" b="0" strike="noStrike" spc="-1" dirty="0">
+                <a:solidFill>
+                  <a:srgbClr val="86EFAC"/>
+                </a:solidFill>
+                <a:latin typeface="Consolas"/>
+                <a:ea typeface="Consolas"/>
+              </a:rPr>
+              <a:t> .</a:t>
+            </a:r>
+            <a:endParaRPr lang="en-GB" sz="950" b="0" strike="noStrike" spc="-1" dirty="0">
               <a:solidFill>
                 <a:srgbClr val="000000"/>
               </a:solidFill>
@@ -35210,16 +35420,96 @@
               </a:tabLst>
             </a:pPr>
             <a:r>
-              <a:rPr lang="en-US" sz="950" b="0" strike="noStrike" spc="-1">
+              <a:rPr lang="en-US" sz="950" b="0" strike="noStrike" spc="-1" dirty="0">
                 <a:solidFill>
                   <a:srgbClr val="86EFAC"/>
                 </a:solidFill>
                 <a:latin typeface="Consolas"/>
                 <a:ea typeface="Consolas"/>
               </a:rPr>
-              <a:t>  ?j a emp:JobOffer ; dct:title ?title ; emp:hasSkill ?sharedSkill ;</a:t>
-            </a:r>
-            <a:endParaRPr lang="en-GB" sz="950" b="0" strike="noStrike" spc="-1">
+              <a:t>  ?j a </a:t>
+            </a:r>
+            <a:r>
+              <a:rPr lang="en-US" sz="950" b="0" strike="noStrike" spc="-1" dirty="0" err="1">
+                <a:solidFill>
+                  <a:srgbClr val="86EFAC"/>
+                </a:solidFill>
+                <a:latin typeface="Consolas"/>
+                <a:ea typeface="Consolas"/>
+              </a:rPr>
+              <a:t>emp:JobOffer</a:t>
+            </a:r>
+            <a:r>
+              <a:rPr lang="en-US" sz="950" b="0" strike="noStrike" spc="-1" dirty="0">
+                <a:solidFill>
+                  <a:srgbClr val="86EFAC"/>
+                </a:solidFill>
+                <a:latin typeface="Consolas"/>
+                <a:ea typeface="Consolas"/>
+              </a:rPr>
+              <a:t> ; </a:t>
+            </a:r>
+            <a:r>
+              <a:rPr lang="en-US" sz="950" b="0" strike="noStrike" spc="-1" dirty="0" err="1">
+                <a:solidFill>
+                  <a:srgbClr val="86EFAC"/>
+                </a:solidFill>
+                <a:latin typeface="Consolas"/>
+                <a:ea typeface="Consolas"/>
+              </a:rPr>
+              <a:t>dct:title</a:t>
+            </a:r>
+            <a:r>
+              <a:rPr lang="en-US" sz="950" b="0" strike="noStrike" spc="-1" dirty="0">
+                <a:solidFill>
+                  <a:srgbClr val="86EFAC"/>
+                </a:solidFill>
+                <a:latin typeface="Consolas"/>
+                <a:ea typeface="Consolas"/>
+              </a:rPr>
+              <a:t> ?title ; </a:t>
+            </a:r>
+            <a:r>
+              <a:rPr lang="en-US" sz="950" b="0" strike="noStrike" spc="-1" dirty="0" err="1">
+                <a:solidFill>
+                  <a:srgbClr val="86EFAC"/>
+                </a:solidFill>
+                <a:latin typeface="Consolas"/>
+                <a:ea typeface="Consolas"/>
+              </a:rPr>
+              <a:t>emp:hasSkill</a:t>
+            </a:r>
+            <a:r>
+              <a:rPr lang="en-US" sz="950" b="0" strike="noStrike" spc="-1" dirty="0">
+                <a:solidFill>
+                  <a:srgbClr val="86EFAC"/>
+                </a:solidFill>
+                <a:latin typeface="Consolas"/>
+                <a:ea typeface="Consolas"/>
+              </a:rPr>
+              <a:t> ?</a:t>
+            </a:r>
+            <a:r>
+              <a:rPr lang="en-US" sz="950" b="0" strike="noStrike" spc="-1" dirty="0" err="1">
+                <a:solidFill>
+                  <a:srgbClr val="86EFAC"/>
+                </a:solidFill>
+                <a:latin typeface="Consolas"/>
+                <a:ea typeface="Consolas"/>
+              </a:rPr>
+              <a:t>sharedSkill</a:t>
+            </a:r>
+            <a:r>
+              <a:rPr lang="en-US" sz="950" b="0" strike="noStrike" spc="-1" dirty="0">
+                <a:solidFill>
+                  <a:srgbClr val="86EFAC"/>
+                </a:solidFill>
+                <a:latin typeface="Consolas"/>
+                <a:ea typeface="Consolas"/>
+              </a:rPr>
+              <a:t> ;</a:t>
+            </a:r>
+            <a:endParaRPr lang="en-GB" sz="950" b="0" strike="noStrike" spc="-1" dirty="0">
               <a:solidFill>
                 <a:srgbClr val="000000"/>
               </a:solidFill>
@@ -35236,16 +35526,116 @@
               </a:tabLst>
             </a:pPr>
             <a:r>
-              <a:rPr lang="en-US" sz="950" b="0" strike="noStrike" spc="-1">
+              <a:rPr lang="en-US" sz="950" b="0" strike="noStrike" spc="-1" dirty="0">
                 <a:solidFill>
                   <a:srgbClr val="86EFAC"/>
                 </a:solidFill>
                 <a:latin typeface="Consolas"/>
                 <a:ea typeface="Consolas"/>
               </a:rPr>
-              <a:t>     emp:requiredExperience ?reqExp ; emp:remote ?remote ; emp:hasLocation ?jLoc .</a:t>
-            </a:r>
-            <a:endParaRPr lang="en-GB" sz="950" b="0" strike="noStrike" spc="-1">
+              <a:t>     </a:t>
+            </a:r>
+            <a:r>
+              <a:rPr lang="en-US" sz="950" b="0" strike="noStrike" spc="-1" dirty="0" err="1">
+                <a:solidFill>
+                  <a:srgbClr val="86EFAC"/>
+                </a:solidFill>
+                <a:latin typeface="Consolas"/>
+                <a:ea typeface="Consolas"/>
+              </a:rPr>
+              <a:t>emp:requiredExperience</a:t>
+            </a:r>
+            <a:r>
+              <a:rPr lang="en-US" sz="950" b="0" strike="noStrike" spc="-1" dirty="0">
+                <a:solidFill>
+                  <a:srgbClr val="86EFAC"/>
+                </a:solidFill>
+                <a:latin typeface="Consolas"/>
+                <a:ea typeface="Consolas"/>
+              </a:rPr>
+              <a:t> ?</a:t>
+            </a:r>
+            <a:r>
+              <a:rPr lang="en-US" sz="950" b="0" strike="noStrike" spc="-1" dirty="0" err="1">
+                <a:solidFill>
+                  <a:srgbClr val="86EFAC"/>
+                </a:solidFill>
+                <a:latin typeface="Consolas"/>
+                <a:ea typeface="Consolas"/>
+              </a:rPr>
+              <a:t>reqExp</a:t>
+            </a:r>
+            <a:r>
+              <a:rPr lang="en-US" sz="950" b="0" strike="noStrike" spc="-1" dirty="0">
+                <a:solidFill>
+                  <a:srgbClr val="86EFAC"/>
+                </a:solidFill>
+                <a:latin typeface="Consolas"/>
+                <a:ea typeface="Consolas"/>
+              </a:rPr>
+              <a:t> ; </a:t>
+            </a:r>
+            <a:r>
+              <a:rPr lang="en-US" sz="950" b="0" strike="noStrike" spc="-1" dirty="0" err="1">
+                <a:solidFill>
+                  <a:srgbClr val="86EFAC"/>
+                </a:solidFill>
+                <a:latin typeface="Consolas"/>
+                <a:ea typeface="Consolas"/>
+              </a:rPr>
+              <a:t>emp:remote</a:t>
+            </a:r>
+            <a:r>
+              <a:rPr lang="en-US" sz="950" b="0" strike="noStrike" spc="-1" dirty="0">
+                <a:solidFill>
+                  <a:srgbClr val="86EFAC"/>
+                </a:solidFill>
+                <a:latin typeface="Consolas"/>
+                <a:ea typeface="Consolas"/>
+              </a:rPr>
+              <a:t> ?remote ; </a:t>
+            </a:r>
+            <a:r>
+              <a:rPr lang="en-US" sz="950" b="0" strike="noStrike" spc="-1" dirty="0" err="1">
+                <a:solidFill>
+                  <a:srgbClr val="86EFAC"/>
+                </a:solidFill>
+                <a:latin typeface="Consolas"/>
+                <a:ea typeface="Consolas"/>
+              </a:rPr>
+              <a:t>emp:hasLocation</a:t>
+            </a:r>
+            <a:r>
+              <a:rPr lang="en-US" sz="950" b="0" strike="noStrike" spc="-1" dirty="0">
+                <a:solidFill>
+                  <a:srgbClr val="86EFAC"/>
+                </a:solidFill>
+                <a:latin typeface="Consolas"/>
+                <a:ea typeface="Consolas"/>
+              </a:rPr>
+              <a:t> ?</a:t>
+            </a:r>
+            <a:r>
+              <a:rPr lang="en-US" sz="950" b="0" strike="noStrike" spc="-1" dirty="0" err="1">
+                <a:solidFill>
+                  <a:srgbClr val="86EFAC"/>
+                </a:solidFill>
+                <a:latin typeface="Consolas"/>
+                <a:ea typeface="Consolas"/>
+              </a:rPr>
+              <a:t>jLoc</a:t>
+            </a:r>
+            <a:r>
+              <a:rPr lang="en-US" sz="950" b="0" strike="noStrike" spc="-1" dirty="0">
+                <a:solidFill>
+                  <a:srgbClr val="86EFAC"/>
+                </a:solidFill>
+                <a:latin typeface="Consolas"/>
+                <a:ea typeface="Consolas"/>
+              </a:rPr>
+              <a:t> .</a:t>
+            </a:r>
+            <a:endParaRPr lang="en-GB" sz="950" b="0" strike="noStrike" spc="-1" dirty="0">
               <a:solidFill>
                 <a:srgbClr val="000000"/>
               </a:solidFill>
@@ -35262,16 +35652,66 @@
               </a:tabLst>
             </a:pPr>
             <a:r>
-              <a:rPr lang="en-US" sz="950" b="0" strike="noStrike" spc="-1">
+              <a:rPr lang="en-US" sz="950" b="0" strike="noStrike" spc="-1" dirty="0">
                 <a:solidFill>
                   <a:srgbClr val="86EFAC"/>
                 </a:solidFill>
                 <a:latin typeface="Consolas"/>
                 <a:ea typeface="Consolas"/>
               </a:rPr>
-              <a:t>  ?jLoc rdfs:label ?jobLoc</a:t>
-            </a:r>
-            <a:endParaRPr lang="en-GB" sz="950" b="0" strike="noStrike" spc="-1">
+              <a:t>  ?</a:t>
+            </a:r>
+            <a:r>
+              <a:rPr lang="en-US" sz="950" b="0" strike="noStrike" spc="-1" dirty="0" err="1">
+                <a:solidFill>
+                  <a:srgbClr val="86EFAC"/>
+                </a:solidFill>
+                <a:latin typeface="Consolas"/>
+                <a:ea typeface="Consolas"/>
+              </a:rPr>
+              <a:t>jLoc</a:t>
+            </a:r>
+            <a:r>
+              <a:rPr lang="en-US" sz="950" b="0" strike="noStrike" spc="-1" dirty="0">
+                <a:solidFill>
+                  <a:srgbClr val="86EFAC"/>
+                </a:solidFill>
+                <a:latin typeface="Consolas"/>
+                <a:ea typeface="Consolas"/>
+              </a:rPr>
+              <a:t> </a:t>
+            </a:r>
+            <a:r>
+              <a:rPr lang="en-US" sz="950" b="0" strike="noStrike" spc="-1" dirty="0" err="1">
+                <a:solidFill>
+                  <a:srgbClr val="86EFAC"/>
+                </a:solidFill>
+                <a:latin typeface="Consolas"/>
+                <a:ea typeface="Consolas"/>
+              </a:rPr>
+              <a:t>rdfs:label</a:t>
+            </a:r>
+            <a:r>
+              <a:rPr lang="en-US" sz="950" b="0" strike="noStrike" spc="-1" dirty="0">
+                <a:solidFill>
+                  <a:srgbClr val="86EFAC"/>
+                </a:solidFill>
+                <a:latin typeface="Consolas"/>
+                <a:ea typeface="Consolas"/>
+              </a:rPr>
+              <a:t> ?</a:t>
+            </a:r>
+            <a:r>
+              <a:rPr lang="en-US" sz="950" b="0" strike="noStrike" spc="-1" dirty="0" err="1">
+                <a:solidFill>
+                  <a:srgbClr val="86EFAC"/>
+                </a:solidFill>
+                <a:latin typeface="Consolas"/>
+                <a:ea typeface="Consolas"/>
+              </a:rPr>
+              <a:t>jobLoc</a:t>
+            </a:r>
+            <a:endParaRPr lang="en-GB" sz="950" b="0" strike="noStrike" spc="-1" dirty="0">
               <a:solidFill>
                 <a:srgbClr val="000000"/>
               </a:solidFill>
@@ -35288,7 +35728,7 @@
               </a:tabLst>
             </a:pPr>
             <a:r>
-              <a:rPr lang="en-US" sz="950" b="0" strike="noStrike" spc="-1">
+              <a:rPr lang="en-US" sz="950" b="0" strike="noStrike" spc="-1" dirty="0">
                 <a:solidFill>
                   <a:srgbClr val="86EFAC"/>
                 </a:solidFill>
@@ -35297,7 +35737,7 @@
               </a:rPr>
               <a:t>} GROUP BY ... ORDER BY DESC(?shared)</a:t>
             </a:r>
-            <a:endParaRPr lang="en-GB" sz="950" b="0" strike="noStrike" spc="-1">
+            <a:endParaRPr lang="en-GB" sz="950" b="0" strike="noStrike" spc="-1" dirty="0">
               <a:solidFill>
                 <a:srgbClr val="000000"/>
               </a:solidFill>
